--- a/Day 3/Guerrilla AI - Day 3 - Slides.pptx
+++ b/Day 3/Guerrilla AI - Day 3 - Slides.pptx
@@ -1,33 +1,133 @@
 
 <file path=ppt/presentation.xml><?xml version="1.0" encoding="utf-8"?>
-<p:presentation xmlns:p="http://schemas.openxmlformats.org/presentationml/2006/main">
+<p:presentation xmlns:a="http://schemas.openxmlformats.org/drawingml/2006/main" xmlns:r="http://schemas.openxmlformats.org/officeDocument/2006/relationships" xmlns:p="http://schemas.openxmlformats.org/presentationml/2006/main">
   <p:sldMasterIdLst>
-    <p:sldMasterId xmlns:r="http://schemas.openxmlformats.org/officeDocument/2006/relationships" id="2147483648" r:id="R26291e61605d489e"/>
+    <p:sldMasterId id="2147483648" r:id="rId1"/>
   </p:sldMasterIdLst>
   <p:notesMasterIdLst>
-    <p:notesMasterId xmlns:r="http://schemas.openxmlformats.org/officeDocument/2006/relationships" r:id="Rb44cfaaf98ba4d85"/>
+    <p:notesMasterId r:id="rId10"/>
   </p:notesMasterIdLst>
   <p:sldIdLst>
-    <p:sldId xmlns:r="http://schemas.openxmlformats.org/officeDocument/2006/relationships" id="256" r:id="Rb9fe7484e1dd4fe1"/>
-    <p:sldId xmlns:r="http://schemas.openxmlformats.org/officeDocument/2006/relationships" id="257" r:id="R909faacf03814778"/>
-    <p:sldId xmlns:r="http://schemas.openxmlformats.org/officeDocument/2006/relationships" id="258" r:id="Ra6031c117c9d432d"/>
-    <p:sldId xmlns:r="http://schemas.openxmlformats.org/officeDocument/2006/relationships" id="259" r:id="R1b3ad37786f04c2a"/>
-    <p:sldId xmlns:r="http://schemas.openxmlformats.org/officeDocument/2006/relationships" id="260" r:id="R1498f0dfb0524fa3"/>
-    <p:sldId xmlns:r="http://schemas.openxmlformats.org/officeDocument/2006/relationships" id="261" r:id="R32777d16935b4950"/>
-    <p:sldId xmlns:r="http://schemas.openxmlformats.org/officeDocument/2006/relationships" id="262" r:id="R69d494962de34513"/>
-    <p:sldId xmlns:r="http://schemas.openxmlformats.org/officeDocument/2006/relationships" id="263" r:id="R5b0ee6bbdef542f0"/>
+    <p:sldId id="256" r:id="rId2"/>
+    <p:sldId id="257" r:id="rId3"/>
+    <p:sldId id="259" r:id="rId4"/>
+    <p:sldId id="260" r:id="rId5"/>
+    <p:sldId id="258" r:id="rId6"/>
+    <p:sldId id="261" r:id="rId7"/>
+    <p:sldId id="262" r:id="rId8"/>
+    <p:sldId id="263" r:id="rId9"/>
   </p:sldIdLst>
-  <p:sldSz cx="12191695" cy="6858000"/>
+  <p:sldSz cx="12192000" cy="6858000"/>
   <p:notesSz cx="6858000" cy="9144000"/>
+  <p:defaultTextStyle>
+    <a:defPPr>
+      <a:defRPr lang="en-US"/>
+    </a:defPPr>
+    <a:lvl1pPr marL="0" algn="l" defTabSz="914400" rtl="0" eaLnBrk="1" latinLnBrk="0" hangingPunct="1">
+      <a:defRPr sz="1800" kern="1200">
+        <a:solidFill>
+          <a:schemeClr val="tx1"/>
+        </a:solidFill>
+        <a:latin typeface="+mn-lt"/>
+        <a:ea typeface="+mn-ea"/>
+        <a:cs typeface="+mn-cs"/>
+      </a:defRPr>
+    </a:lvl1pPr>
+    <a:lvl2pPr marL="457200" algn="l" defTabSz="914400" rtl="0" eaLnBrk="1" latinLnBrk="0" hangingPunct="1">
+      <a:defRPr sz="1800" kern="1200">
+        <a:solidFill>
+          <a:schemeClr val="tx1"/>
+        </a:solidFill>
+        <a:latin typeface="+mn-lt"/>
+        <a:ea typeface="+mn-ea"/>
+        <a:cs typeface="+mn-cs"/>
+      </a:defRPr>
+    </a:lvl2pPr>
+    <a:lvl3pPr marL="914400" algn="l" defTabSz="914400" rtl="0" eaLnBrk="1" latinLnBrk="0" hangingPunct="1">
+      <a:defRPr sz="1800" kern="1200">
+        <a:solidFill>
+          <a:schemeClr val="tx1"/>
+        </a:solidFill>
+        <a:latin typeface="+mn-lt"/>
+        <a:ea typeface="+mn-ea"/>
+        <a:cs typeface="+mn-cs"/>
+      </a:defRPr>
+    </a:lvl3pPr>
+    <a:lvl4pPr marL="1371600" algn="l" defTabSz="914400" rtl="0" eaLnBrk="1" latinLnBrk="0" hangingPunct="1">
+      <a:defRPr sz="1800" kern="1200">
+        <a:solidFill>
+          <a:schemeClr val="tx1"/>
+        </a:solidFill>
+        <a:latin typeface="+mn-lt"/>
+        <a:ea typeface="+mn-ea"/>
+        <a:cs typeface="+mn-cs"/>
+      </a:defRPr>
+    </a:lvl4pPr>
+    <a:lvl5pPr marL="1828800" algn="l" defTabSz="914400" rtl="0" eaLnBrk="1" latinLnBrk="0" hangingPunct="1">
+      <a:defRPr sz="1800" kern="1200">
+        <a:solidFill>
+          <a:schemeClr val="tx1"/>
+        </a:solidFill>
+        <a:latin typeface="+mn-lt"/>
+        <a:ea typeface="+mn-ea"/>
+        <a:cs typeface="+mn-cs"/>
+      </a:defRPr>
+    </a:lvl5pPr>
+    <a:lvl6pPr marL="2286000" algn="l" defTabSz="914400" rtl="0" eaLnBrk="1" latinLnBrk="0" hangingPunct="1">
+      <a:defRPr sz="1800" kern="1200">
+        <a:solidFill>
+          <a:schemeClr val="tx1"/>
+        </a:solidFill>
+        <a:latin typeface="+mn-lt"/>
+        <a:ea typeface="+mn-ea"/>
+        <a:cs typeface="+mn-cs"/>
+      </a:defRPr>
+    </a:lvl6pPr>
+    <a:lvl7pPr marL="2743200" algn="l" defTabSz="914400" rtl="0" eaLnBrk="1" latinLnBrk="0" hangingPunct="1">
+      <a:defRPr sz="1800" kern="1200">
+        <a:solidFill>
+          <a:schemeClr val="tx1"/>
+        </a:solidFill>
+        <a:latin typeface="+mn-lt"/>
+        <a:ea typeface="+mn-ea"/>
+        <a:cs typeface="+mn-cs"/>
+      </a:defRPr>
+    </a:lvl7pPr>
+    <a:lvl8pPr marL="3200400" algn="l" defTabSz="914400" rtl="0" eaLnBrk="1" latinLnBrk="0" hangingPunct="1">
+      <a:defRPr sz="1800" kern="1200">
+        <a:solidFill>
+          <a:schemeClr val="tx1"/>
+        </a:solidFill>
+        <a:latin typeface="+mn-lt"/>
+        <a:ea typeface="+mn-ea"/>
+        <a:cs typeface="+mn-cs"/>
+      </a:defRPr>
+    </a:lvl8pPr>
+    <a:lvl9pPr marL="3657600" algn="l" defTabSz="914400" rtl="0" eaLnBrk="1" latinLnBrk="0" hangingPunct="1">
+      <a:defRPr sz="1800" kern="1200">
+        <a:solidFill>
+          <a:schemeClr val="tx1"/>
+        </a:solidFill>
+        <a:latin typeface="+mn-lt"/>
+        <a:ea typeface="+mn-ea"/>
+        <a:cs typeface="+mn-cs"/>
+      </a:defRPr>
+    </a:lvl9pPr>
+  </p:defaultTextStyle>
+  <p:extLst>
+    <p:ext uri="{EFAFB233-063F-42B5-8137-9DF3F51BA10A}">
+      <p15:sldGuideLst xmlns:p15="http://schemas.microsoft.com/office/powerpoint/2012/main"/>
+    </p:ext>
+  </p:extLst>
 </p:presentation>
 </file>
 
 <file path=ppt/notesMasters/notesMaster1.xml><?xml version="1.0" encoding="utf-8"?>
-<p:notesMaster xmlns:p="http://schemas.openxmlformats.org/presentationml/2006/main">
+<p:notesMaster xmlns:a="http://schemas.openxmlformats.org/drawingml/2006/main" xmlns:r="http://schemas.openxmlformats.org/officeDocument/2006/relationships" xmlns:p="http://schemas.openxmlformats.org/presentationml/2006/main">
   <p:cSld>
     <p:bg>
       <p:bgRef idx="1001">
-        <a:schemeClr xmlns:a="http://schemas.openxmlformats.org/drawingml/2006/main" val="bg1"/>
+        <a:schemeClr val="bg1"/>
       </p:bgRef>
     </p:bg>
     <p:spTree>
@@ -37,403 +137,164 @@
         <p:nvPr/>
       </p:nvGrpSpPr>
       <p:grpSpPr>
-        <a:xfrm xmlns:a="http://schemas.openxmlformats.org/drawingml/2006/main"/>
+        <a:xfrm>
+          <a:off x="0" y="0"/>
+          <a:ext cx="0" cy="0"/>
+          <a:chOff x="0" y="0"/>
+          <a:chExt cx="0" cy="0"/>
+        </a:xfrm>
       </p:grpSpPr>
       <p:sp>
         <p:nvSpPr>
           <p:cNvPr id="2" name="Header Placeholder"/>
-          <p:cNvSpPr/>
+          <p:cNvSpPr>
+            <a:spLocks noGrp="1"/>
+          </p:cNvSpPr>
           <p:nvPr>
             <p:ph type="hdr" sz="quarter"/>
           </p:nvPr>
         </p:nvSpPr>
         <p:spPr>
-          <a:prstGeom xmlns:a="http://schemas.openxmlformats.org/drawingml/2006/main" prst="rect">
+          <a:prstGeom prst="rect">
             <a:avLst/>
           </a:prstGeom>
         </p:spPr>
         <p:txBody>
-          <a:bodyPr xmlns:a="http://schemas.openxmlformats.org/drawingml/2006/main"/>
-          <a:lstStyle xmlns:a="http://schemas.openxmlformats.org/drawingml/2006/main"/>
-          <a:p xmlns:a="http://schemas.openxmlformats.org/drawingml/2006/main"/>
+          <a:bodyPr/>
+          <a:lstStyle/>
+          <a:p>
+            <a:endParaRPr/>
+          </a:p>
         </p:txBody>
       </p:sp>
       <p:sp>
         <p:nvSpPr>
           <p:cNvPr id="3" name="Date Placeholder"/>
-          <p:cNvSpPr/>
+          <p:cNvSpPr>
+            <a:spLocks noGrp="1"/>
+          </p:cNvSpPr>
           <p:nvPr>
             <p:ph type="dt" sz="quarter" idx="1"/>
           </p:nvPr>
         </p:nvSpPr>
         <p:spPr>
-          <a:prstGeom xmlns:a="http://schemas.openxmlformats.org/drawingml/2006/main" prst="rect">
+          <a:prstGeom prst="rect">
             <a:avLst/>
           </a:prstGeom>
         </p:spPr>
         <p:txBody>
-          <a:bodyPr xmlns:a="http://schemas.openxmlformats.org/drawingml/2006/main"/>
-          <a:lstStyle xmlns:a="http://schemas.openxmlformats.org/drawingml/2006/main"/>
-          <a:p xmlns:a="http://schemas.openxmlformats.org/drawingml/2006/main"/>
+          <a:bodyPr/>
+          <a:lstStyle/>
+          <a:p>
+            <a:endParaRPr/>
+          </a:p>
         </p:txBody>
       </p:sp>
       <p:sp>
         <p:nvSpPr>
           <p:cNvPr id="4" name="Slide Image Placeholder"/>
-          <p:cNvSpPr/>
+          <p:cNvSpPr>
+            <a:spLocks noGrp="1" noRot="1" noChangeAspect="1"/>
+          </p:cNvSpPr>
           <p:nvPr>
             <p:ph type="sldImg" idx="2"/>
           </p:nvPr>
         </p:nvSpPr>
         <p:spPr>
-          <a:prstGeom xmlns:a="http://schemas.openxmlformats.org/drawingml/2006/main" prst="rect">
+          <a:prstGeom prst="rect">
             <a:avLst/>
           </a:prstGeom>
         </p:spPr>
         <p:txBody>
-          <a:bodyPr xmlns:a="http://schemas.openxmlformats.org/drawingml/2006/main"/>
-          <a:lstStyle xmlns:a="http://schemas.openxmlformats.org/drawingml/2006/main"/>
-          <a:p xmlns:a="http://schemas.openxmlformats.org/drawingml/2006/main"/>
+          <a:bodyPr/>
+          <a:lstStyle/>
+          <a:p>
+            <a:endParaRPr/>
+          </a:p>
         </p:txBody>
       </p:sp>
       <p:sp>
         <p:nvSpPr>
           <p:cNvPr id="5" name="Notes Placeholder"/>
-          <p:cNvSpPr/>
+          <p:cNvSpPr>
+            <a:spLocks noGrp="1"/>
+          </p:cNvSpPr>
           <p:nvPr>
             <p:ph type="body" sz="quarter" idx="3"/>
           </p:nvPr>
         </p:nvSpPr>
         <p:spPr>
-          <a:prstGeom xmlns:a="http://schemas.openxmlformats.org/drawingml/2006/main" prst="rect">
+          <a:prstGeom prst="rect">
             <a:avLst/>
           </a:prstGeom>
         </p:spPr>
         <p:txBody>
-          <a:bodyPr xmlns:a="http://schemas.openxmlformats.org/drawingml/2006/main"/>
-          <a:lstStyle xmlns:a="http://schemas.openxmlformats.org/drawingml/2006/main"/>
-          <a:p xmlns:a="http://schemas.openxmlformats.org/drawingml/2006/main"/>
+          <a:bodyPr/>
+          <a:lstStyle/>
+          <a:p>
+            <a:endParaRPr/>
+          </a:p>
         </p:txBody>
       </p:sp>
       <p:sp>
         <p:nvSpPr>
           <p:cNvPr id="6" name="Footer Placeholder"/>
-          <p:cNvSpPr/>
+          <p:cNvSpPr>
+            <a:spLocks noGrp="1"/>
+          </p:cNvSpPr>
           <p:nvPr>
             <p:ph type="ftr" sz="quarter" idx="4"/>
           </p:nvPr>
         </p:nvSpPr>
         <p:spPr>
-          <a:prstGeom xmlns:a="http://schemas.openxmlformats.org/drawingml/2006/main" prst="rect">
+          <a:prstGeom prst="rect">
             <a:avLst/>
           </a:prstGeom>
         </p:spPr>
         <p:txBody>
-          <a:bodyPr xmlns:a="http://schemas.openxmlformats.org/drawingml/2006/main"/>
-          <a:lstStyle xmlns:a="http://schemas.openxmlformats.org/drawingml/2006/main"/>
-          <a:p xmlns:a="http://schemas.openxmlformats.org/drawingml/2006/main"/>
+          <a:bodyPr/>
+          <a:lstStyle/>
+          <a:p>
+            <a:endParaRPr/>
+          </a:p>
         </p:txBody>
       </p:sp>
       <p:sp>
         <p:nvSpPr>
           <p:cNvPr id="7" name="Slide Number Placeholder"/>
-          <p:cNvSpPr/>
+          <p:cNvSpPr>
+            <a:spLocks noGrp="1"/>
+          </p:cNvSpPr>
           <p:nvPr>
             <p:ph type="sldNum" sz="quarter" idx="5"/>
           </p:nvPr>
         </p:nvSpPr>
         <p:spPr>
-          <a:prstGeom xmlns:a="http://schemas.openxmlformats.org/drawingml/2006/main" prst="rect">
+          <a:prstGeom prst="rect">
             <a:avLst/>
           </a:prstGeom>
         </p:spPr>
         <p:txBody>
-          <a:bodyPr xmlns:a="http://schemas.openxmlformats.org/drawingml/2006/main"/>
-          <a:lstStyle xmlns:a="http://schemas.openxmlformats.org/drawingml/2006/main"/>
-          <a:p xmlns:a="http://schemas.openxmlformats.org/drawingml/2006/main"/>
+          <a:bodyPr/>
+          <a:lstStyle/>
+          <a:p>
+            <a:endParaRPr/>
+          </a:p>
         </p:txBody>
       </p:sp>
     </p:spTree>
   </p:cSld>
   <p:clrMap bg1="lt1" tx1="dk1" bg2="lt2" tx2="dk2" accent1="accent1" accent2="accent2" accent3="accent3" accent4="accent4" accent5="accent5" accent6="accent6" hlink="hlink" folHlink="folHlink"/>
   <p:notesStyle>
-    <a:lvl1pPr xmlns:a="http://schemas.openxmlformats.org/drawingml/2006/main" marL="0" algn="l" defTabSz="914400" rtl="0" eaLnBrk="1" latinLnBrk="0" hangingPunct="1">
+    <a:lvl1pPr marL="0" algn="l" defTabSz="914400" rtl="0" eaLnBrk="1" latinLnBrk="0" hangingPunct="1">
       <a:defRPr sz="1200" kern="1200"/>
     </a:lvl1pPr>
   </p:notesStyle>
 </p:notesMaster>
 </file>
 
-<file path=ppt/notesMasters/theme/theme3.xml><?xml version="1.0" encoding="utf-8"?>
-<a:theme xmlns:a="http://schemas.openxmlformats.org/drawingml/2006/main" name="Office Theme">
-  <a:themeElements>
-    <a:clrScheme name="Office">
-      <a:dk1>
-        <a:sysClr val="windowText" lastClr="000000"/>
-      </a:dk1>
-      <a:lt1>
-        <a:sysClr val="window" lastClr="FFFFFF"/>
-      </a:lt1>
-      <a:dk2>
-        <a:srgbClr val="1F497D"/>
-      </a:dk2>
-      <a:lt2>
-        <a:srgbClr val="EEECE1"/>
-      </a:lt2>
-      <a:accent1>
-        <a:srgbClr val="4F81BD"/>
-      </a:accent1>
-      <a:accent2>
-        <a:srgbClr val="C0504D"/>
-      </a:accent2>
-      <a:accent3>
-        <a:srgbClr val="9BBB59"/>
-      </a:accent3>
-      <a:accent4>
-        <a:srgbClr val="8064A2"/>
-      </a:accent4>
-      <a:accent5>
-        <a:srgbClr val="4BACC6"/>
-      </a:accent5>
-      <a:accent6>
-        <a:srgbClr val="F79646"/>
-      </a:accent6>
-      <a:hlink>
-        <a:srgbClr val="0000FF"/>
-      </a:hlink>
-      <a:folHlink>
-        <a:srgbClr val="800080"/>
-      </a:folHlink>
-    </a:clrScheme>
-    <a:fontScheme name="Office">
-      <a:majorFont>
-        <a:latin typeface="Calibri"/>
-        <a:ea typeface=""/>
-        <a:cs typeface=""/>
-        <a:font script="Jpan" typeface="ＭＳ Ｐゴシック"/>
-        <a:font script="Hang" typeface="맑은 고딕"/>
-        <a:font script="Hans" typeface="宋体"/>
-        <a:font script="Hant" typeface="新細明體"/>
-        <a:font script="Arab" typeface="Times New Roman"/>
-        <a:font script="Hebr" typeface="Times New Roman"/>
-        <a:font script="Thai" typeface="Angsana New"/>
-        <a:font script="Ethi" typeface="Nyala"/>
-        <a:font script="Beng" typeface="Vrinda"/>
-        <a:font script="Gujr" typeface="Shruti"/>
-        <a:font script="Khmr" typeface="MoolBoran"/>
-        <a:font script="Knda" typeface="Tunga"/>
-        <a:font script="Guru" typeface="Raavi"/>
-        <a:font script="Cans" typeface="Euphemia"/>
-        <a:font script="Cher" typeface="Plantagenet Cherokee"/>
-        <a:font script="Yiii" typeface="Microsoft Yi Baiti"/>
-        <a:font script="Tibt" typeface="Microsoft Himalaya"/>
-        <a:font script="Thaa" typeface="MV Boli"/>
-        <a:font script="Deva" typeface="Mangal"/>
-        <a:font script="Telu" typeface="Gautami"/>
-        <a:font script="Taml" typeface="Latha"/>
-        <a:font script="Syrc" typeface="Estrangelo Edessa"/>
-        <a:font script="Orya" typeface="Kalinga"/>
-        <a:font script="Mlym" typeface="Kartika"/>
-        <a:font script="Laoo" typeface="DokChampa"/>
-        <a:font script="Sinh" typeface="Iskoola Pota"/>
-        <a:font script="Mong" typeface="Mongolian Baiti"/>
-        <a:font script="Viet" typeface="Times New Roman"/>
-        <a:font script="Uigh" typeface="Microsoft Uighur"/>
-        <a:font script="Geor" typeface="Sylfaen"/>
-      </a:majorFont>
-      <a:minorFont>
-        <a:latin typeface="Calibri"/>
-        <a:ea typeface=""/>
-        <a:cs typeface=""/>
-        <a:font script="Jpan" typeface="ＭＳ Ｐゴシック"/>
-        <a:font script="Hang" typeface="맑은 고딕"/>
-        <a:font script="Hans" typeface="宋体"/>
-        <a:font script="Hant" typeface="新細明體"/>
-        <a:font script="Arab" typeface="Arial"/>
-        <a:font script="Hebr" typeface="Arial"/>
-        <a:font script="Thai" typeface="Cordia New"/>
-        <a:font script="Ethi" typeface="Nyala"/>
-        <a:font script="Beng" typeface="Vrinda"/>
-        <a:font script="Gujr" typeface="Shruti"/>
-        <a:font script="Khmr" typeface="DaunPenh"/>
-        <a:font script="Knda" typeface="Tunga"/>
-        <a:font script="Guru" typeface="Raavi"/>
-        <a:font script="Cans" typeface="Euphemia"/>
-        <a:font script="Cher" typeface="Plantagenet Cherokee"/>
-        <a:font script="Yiii" typeface="Microsoft Yi Baiti"/>
-        <a:font script="Tibt" typeface="Microsoft Himalaya"/>
-        <a:font script="Thaa" typeface="MV Boli"/>
-        <a:font script="Deva" typeface="Mangal"/>
-        <a:font script="Telu" typeface="Gautami"/>
-        <a:font script="Taml" typeface="Latha"/>
-        <a:font script="Syrc" typeface="Estrangelo Edessa"/>
-        <a:font script="Orya" typeface="Kalinga"/>
-        <a:font script="Mlym" typeface="Kartika"/>
-        <a:font script="Laoo" typeface="DokChampa"/>
-        <a:font script="Sinh" typeface="Iskoola Pota"/>
-        <a:font script="Mong" typeface="Mongolian Baiti"/>
-        <a:font script="Viet" typeface="Arial"/>
-        <a:font script="Uigh" typeface="Microsoft Uighur"/>
-        <a:font script="Geor" typeface="Sylfaen"/>
-      </a:minorFont>
-    </a:fontScheme>
-    <a:fmtScheme name="Office">
-      <a:fillStyleLst>
-        <a:solidFill>
-          <a:schemeClr val="phClr"/>
-        </a:solidFill>
-        <a:gradFill rotWithShape="1">
-          <a:gsLst>
-            <a:gs pos="0">
-              <a:schemeClr val="phClr">
-                <a:tint val="50000"/>
-                <a:satMod val="300000"/>
-              </a:schemeClr>
-            </a:gs>
-            <a:gs pos="35000">
-              <a:schemeClr val="phClr">
-                <a:tint val="37000"/>
-                <a:satMod val="300000"/>
-              </a:schemeClr>
-            </a:gs>
-            <a:gs pos="100000">
-              <a:schemeClr val="phClr">
-                <a:tint val="15000"/>
-                <a:satMod val="350000"/>
-              </a:schemeClr>
-            </a:gs>
-          </a:gsLst>
-          <a:lin ang="16200000" scaled="1"/>
-        </a:gradFill>
-        <a:gradFill rotWithShape="1">
-          <a:gsLst>
-            <a:gs pos="0">
-              <a:schemeClr val="phClr">
-                <a:tint val="100000"/>
-                <a:shade val="100000"/>
-                <a:satMod val="130000"/>
-              </a:schemeClr>
-            </a:gs>
-            <a:gs pos="100000">
-              <a:schemeClr val="phClr">
-                <a:tint val="50000"/>
-                <a:shade val="100000"/>
-                <a:satMod val="350000"/>
-              </a:schemeClr>
-            </a:gs>
-          </a:gsLst>
-          <a:lin ang="16200000" scaled="0"/>
-        </a:gradFill>
-      </a:fillStyleLst>
-      <a:lnStyleLst>
-        <a:ln w="9525">
-          <a:solidFill>
-            <a:schemeClr val="phClr">
-              <a:shade val="95000"/>
-              <a:satMod val="105000"/>
-            </a:schemeClr>
-          </a:solidFill>
-          <a:prstDash val="solid"/>
-        </a:ln>
-        <a:ln w="25400">
-          <a:solidFill>
-            <a:schemeClr val="phClr"/>
-          </a:solidFill>
-          <a:prstDash val="solid"/>
-        </a:ln>
-        <a:ln w="38100">
-          <a:solidFill>
-            <a:schemeClr val="phClr"/>
-          </a:solidFill>
-          <a:prstDash val="solid"/>
-        </a:ln>
-      </a:lnStyleLst>
-      <a:effectStyleLst>
-        <a:effectStyle>
-          <a:effectLst>
-            <a:outerShdw blurRad="40000" dist="20000" dir="5400000" rotWithShape="0">
-              <a:srgbClr val="000000">
-                <a:alpha val="38000"/>
-              </a:srgbClr>
-            </a:outerShdw>
-          </a:effectLst>
-        </a:effectStyle>
-        <a:effectStyle>
-          <a:effectLst>
-            <a:outerShdw blurRad="40000" dist="23000" dir="5400000" rotWithShape="0">
-              <a:srgbClr val="000000">
-                <a:alpha val="35000"/>
-              </a:srgbClr>
-            </a:outerShdw>
-          </a:effectLst>
-        </a:effectStyle>
-        <a:effectStyle>
-          <a:effectLst>
-            <a:outerShdw blurRad="40000" dist="23000" dir="5400000" rotWithShape="0">
-              <a:srgbClr val="000000">
-                <a:alpha val="35000"/>
-              </a:srgbClr>
-            </a:outerShdw>
-          </a:effectLst>
-        </a:effectStyle>
-      </a:effectStyleLst>
-      <a:bgFillStyleLst>
-        <a:solidFill>
-          <a:schemeClr val="phClr"/>
-        </a:solidFill>
-        <a:gradFill rotWithShape="1">
-          <a:gsLst>
-            <a:gs pos="0">
-              <a:schemeClr val="phClr">
-                <a:tint val="40000"/>
-                <a:satMod val="350000"/>
-              </a:schemeClr>
-            </a:gs>
-            <a:gs pos="40000">
-              <a:schemeClr val="phClr">
-                <a:tint val="45000"/>
-                <a:shade val="99000"/>
-                <a:satMod val="350000"/>
-              </a:schemeClr>
-            </a:gs>
-            <a:gs pos="100000">
-              <a:schemeClr val="phClr">
-                <a:shade val="20000"/>
-                <a:satMod val="255000"/>
-              </a:schemeClr>
-            </a:gs>
-          </a:gsLst>
-          <a:path path="circle">
-            <a:fillToRect l="50000" t="-80000" r="50000" b="180000"/>
-          </a:path>
-        </a:gradFill>
-        <a:gradFill rotWithShape="1">
-          <a:gsLst>
-            <a:gs pos="0">
-              <a:schemeClr val="phClr">
-                <a:tint val="80000"/>
-                <a:satMod val="300000"/>
-              </a:schemeClr>
-            </a:gs>
-            <a:gs pos="100000">
-              <a:schemeClr val="phClr">
-                <a:shade val="30000"/>
-                <a:satMod val="200000"/>
-              </a:schemeClr>
-            </a:gs>
-          </a:gsLst>
-          <a:path path="circle">
-            <a:fillToRect l="50000" t="50000" r="50000" b="50000"/>
-          </a:path>
-        </a:gradFill>
-      </a:bgFillStyleLst>
-    </a:fmtScheme>
-  </a:themeElements>
-</a:theme>
-</file>
-
 <file path=ppt/notesSlides/notesSlide1.xml><?xml version="1.0" encoding="utf-8"?>
-<p:notes xmlns:p="http://schemas.openxmlformats.org/presentationml/2006/main">
+<p:notes xmlns:a="http://schemas.openxmlformats.org/drawingml/2006/main" xmlns:r="http://schemas.openxmlformats.org/officeDocument/2006/relationships" xmlns:p="http://schemas.openxmlformats.org/presentationml/2006/main">
   <p:cSld>
     <p:spTree>
       <p:nvGrpSpPr>
@@ -442,16 +303,21 @@
         <p:nvPr/>
       </p:nvGrpSpPr>
       <p:grpSpPr>
-        <a:xfrm xmlns:a="http://schemas.openxmlformats.org/drawingml/2006/main"/>
+        <a:xfrm>
+          <a:off x="0" y="0"/>
+          <a:ext cx="0" cy="0"/>
+          <a:chOff x="0" y="0"/>
+          <a:chExt cx="0" cy="0"/>
+        </a:xfrm>
       </p:grpSpPr>
       <p:sp>
         <p:nvSpPr>
           <p:cNvPr id="2" name="Slide Image Placeholder 1"/>
           <p:cNvSpPr>
-            <a:spLocks xmlns:a="http://schemas.openxmlformats.org/drawingml/2006/main" noGrp="1"/>
-          </p:cNvSpPr>
-          <p:nvPr>
-            <p:ph type="sldImg" idx="0"/>
+            <a:spLocks noGrp="1" noRot="1" noChangeAspect="1"/>
+          </p:cNvSpPr>
+          <p:nvPr>
+            <p:ph type="sldImg"/>
           </p:nvPr>
         </p:nvSpPr>
         <p:spPr/>
@@ -460,7 +326,7 @@
         <p:nvSpPr>
           <p:cNvPr id="3" name="Notes Placeholder 2"/>
           <p:cNvSpPr>
-            <a:spLocks xmlns:a="http://schemas.openxmlformats.org/drawingml/2006/main" noGrp="1"/>
+            <a:spLocks noGrp="1"/>
           </p:cNvSpPr>
           <p:nvPr>
             <p:ph type="body" idx="1"/>
@@ -468,54 +334,50 @@
         </p:nvSpPr>
         <p:spPr/>
         <p:txBody>
-          <a:bodyPr xmlns:a="http://schemas.openxmlformats.org/drawingml/2006/main"/>
-          <a:lstStyle xmlns:a="http://schemas.openxmlformats.org/drawingml/2006/main"/>
-          <a:p xmlns:a="http://schemas.openxmlformats.org/drawingml/2006/main">
+          <a:bodyPr/>
+          <a:lstStyle/>
+          <a:p>
             <a:r>
               <a:t>Welcome to day three. Today we record the cleanup once in Power Query, then use Refresh when the next batch arrives. Watch along. You do not need to rebuild the query during these twenty minutes.</a:t>
             </a:r>
           </a:p>
-          <a:p xmlns:a="http://schemas.openxmlformats.org/drawingml/2006/main">
-            <a:r>
-              <a:t/>
-            </a:r>
-          </a:p>
-          <a:p xmlns:a="http://schemas.openxmlformats.org/drawingml/2006/main">
+          <a:p>
+            <a:endParaRPr/>
+          </a:p>
+          <a:p>
             <a:r>
               <a:t>CHAT CUE (about 0:30; budget 15 seconds total)</a:t>
             </a:r>
           </a:p>
-          <a:p xmlns:a="http://schemas.openxmlformats.org/drawingml/2006/main">
+          <a:p>
             <a:r>
               <a:t>SAY: One word to start: do you repeat the same cleanup each week or month, YES or NO? Watching is welcome too.</a:t>
             </a:r>
           </a:p>
-          <a:p xmlns:a="http://schemas.openxmlformats.org/drawingml/2006/main">
+          <a:p>
             <a:r>
               <a:t>PAUSE: Wait silently for 8 seconds. Do not repeat the request.</a:t>
             </a:r>
           </a:p>
-          <a:p xmlns:a="http://schemas.openxmlformats.org/drawingml/2006/main">
+          <a:p>
             <a:r>
               <a:t>IF SOMEONE REPLIES: Acknowledge an actual answer. 'Keep that export in mind. Today we record the steps for next time.'</a:t>
             </a:r>
           </a:p>
-          <a:p xmlns:a="http://schemas.openxmlformats.org/drawingml/2006/main">
+          <a:p>
             <a:r>
               <a:t>IF CHAT IS QUIET: Say, "I'll use our monthly sales export as the example." Then continue. Never imply that somebody replied.</a:t>
             </a:r>
           </a:p>
-          <a:p xmlns:a="http://schemas.openxmlformats.org/drawingml/2006/main">
+          <a:p>
             <a:r>
               <a:t>FACILITATION: Acknowledge at most two actual replies, without calling on anyone by name. Accept a letter, a word, or a longer question. If a reply arrives later, acknowledge it at the next natural pause.</a:t>
             </a:r>
           </a:p>
-          <a:p xmlns:a="http://schemas.openxmlformats.org/drawingml/2006/main">
-            <a:r>
-              <a:t/>
-            </a:r>
-          </a:p>
-          <a:p xmlns:a="http://schemas.openxmlformats.org/drawingml/2006/main">
+          <a:p>
+            <a:endParaRPr/>
+          </a:p>
+          <a:p>
             <a:r>
               <a:t>Keep the opening to 60 seconds. Participation is optional. The learning continues even with no chat replies.</a:t>
             </a:r>
@@ -526,7 +388,7 @@
         <p:nvSpPr>
           <p:cNvPr id="4" name="Slide Number Placeholder 3"/>
           <p:cNvSpPr>
-            <a:spLocks xmlns:a="http://schemas.openxmlformats.org/drawingml/2006/main" noGrp="1"/>
+            <a:spLocks noGrp="1"/>
           </p:cNvSpPr>
           <p:nvPr>
             <p:ph type="sldNum" idx="5"/>
@@ -534,21 +396,23 @@
         </p:nvSpPr>
         <p:spPr/>
         <p:txBody>
-          <a:bodyPr xmlns:a="http://schemas.openxmlformats.org/drawingml/2006/main"/>
-          <a:lstStyle xmlns:a="http://schemas.openxmlformats.org/drawingml/2006/main"/>
-          <a:p xmlns:a="http://schemas.openxmlformats.org/drawingml/2006/main"/>
+          <a:bodyPr/>
+          <a:lstStyle/>
+          <a:p>
+            <a:endParaRPr/>
+          </a:p>
         </p:txBody>
       </p:sp>
     </p:spTree>
   </p:cSld>
   <p:clrMapOvr>
-    <a:masterClrMapping xmlns:a="http://schemas.openxmlformats.org/drawingml/2006/main"/>
+    <a:masterClrMapping/>
   </p:clrMapOvr>
 </p:notes>
 </file>
 
 <file path=ppt/notesSlides/notesSlide2.xml><?xml version="1.0" encoding="utf-8"?>
-<p:notes xmlns:p="http://schemas.openxmlformats.org/presentationml/2006/main">
+<p:notes xmlns:a="http://schemas.openxmlformats.org/drawingml/2006/main" xmlns:r="http://schemas.openxmlformats.org/officeDocument/2006/relationships" xmlns:p="http://schemas.openxmlformats.org/presentationml/2006/main">
   <p:cSld>
     <p:spTree>
       <p:nvGrpSpPr>
@@ -557,16 +421,21 @@
         <p:nvPr/>
       </p:nvGrpSpPr>
       <p:grpSpPr>
-        <a:xfrm xmlns:a="http://schemas.openxmlformats.org/drawingml/2006/main"/>
+        <a:xfrm>
+          <a:off x="0" y="0"/>
+          <a:ext cx="0" cy="0"/>
+          <a:chOff x="0" y="0"/>
+          <a:chExt cx="0" cy="0"/>
+        </a:xfrm>
       </p:grpSpPr>
       <p:sp>
         <p:nvSpPr>
           <p:cNvPr id="2" name="Slide Image Placeholder 1"/>
           <p:cNvSpPr>
-            <a:spLocks xmlns:a="http://schemas.openxmlformats.org/drawingml/2006/main" noGrp="1"/>
-          </p:cNvSpPr>
-          <p:nvPr>
-            <p:ph type="sldImg" idx="0"/>
+            <a:spLocks noGrp="1" noRot="1" noChangeAspect="1"/>
+          </p:cNvSpPr>
+          <p:nvPr>
+            <p:ph type="sldImg"/>
           </p:nvPr>
         </p:nvSpPr>
         <p:spPr/>
@@ -575,7 +444,7 @@
         <p:nvSpPr>
           <p:cNvPr id="3" name="Notes Placeholder 2"/>
           <p:cNvSpPr>
-            <a:spLocks xmlns:a="http://schemas.openxmlformats.org/drawingml/2006/main" noGrp="1"/>
+            <a:spLocks noGrp="1"/>
           </p:cNvSpPr>
           <p:nvPr>
             <p:ph type="body" idx="1"/>
@@ -583,9 +452,9 @@
         </p:nvSpPr>
         <p:spPr/>
         <p:txBody>
-          <a:bodyPr xmlns:a="http://schemas.openxmlformats.org/drawingml/2006/main"/>
-          <a:lstStyle xmlns:a="http://schemas.openxmlformats.org/drawingml/2006/main"/>
-          <a:p xmlns:a="http://schemas.openxmlformats.org/drawingml/2006/main">
+          <a:bodyPr/>
+          <a:lstStyle/>
+          <a:p>
             <a:r>
               <a:t>Quick recap. Monday: the machine learning already in Excel, and the discovery that dirty data makes smart tools lie, inconsistent labels for four intended regions. Tuesday: Control T and structured references made the workbook machine-readable, and Analyze Data got sharper. The takeaway was that the AI-ready workbook is a craft skill, not a purchase. Today we kill the remaining lies in this dataset, and we do it in a way that never has to be done twice.</a:t>
             </a:r>
@@ -596,7 +465,7 @@
         <p:nvSpPr>
           <p:cNvPr id="4" name="Slide Number Placeholder 3"/>
           <p:cNvSpPr>
-            <a:spLocks xmlns:a="http://schemas.openxmlformats.org/drawingml/2006/main" noGrp="1"/>
+            <a:spLocks noGrp="1"/>
           </p:cNvSpPr>
           <p:nvPr>
             <p:ph type="sldNum" idx="5"/>
@@ -604,21 +473,23 @@
         </p:nvSpPr>
         <p:spPr/>
         <p:txBody>
-          <a:bodyPr xmlns:a="http://schemas.openxmlformats.org/drawingml/2006/main"/>
-          <a:lstStyle xmlns:a="http://schemas.openxmlformats.org/drawingml/2006/main"/>
-          <a:p xmlns:a="http://schemas.openxmlformats.org/drawingml/2006/main"/>
+          <a:bodyPr/>
+          <a:lstStyle/>
+          <a:p>
+            <a:endParaRPr/>
+          </a:p>
         </p:txBody>
       </p:sp>
     </p:spTree>
   </p:cSld>
   <p:clrMapOvr>
-    <a:masterClrMapping xmlns:a="http://schemas.openxmlformats.org/drawingml/2006/main"/>
+    <a:masterClrMapping/>
   </p:clrMapOvr>
 </p:notes>
 </file>
 
 <file path=ppt/notesSlides/notesSlide3.xml><?xml version="1.0" encoding="utf-8"?>
-<p:notes xmlns:p="http://schemas.openxmlformats.org/presentationml/2006/main">
+<p:notes xmlns:a="http://schemas.openxmlformats.org/drawingml/2006/main" xmlns:r="http://schemas.openxmlformats.org/officeDocument/2006/relationships" xmlns:p="http://schemas.openxmlformats.org/presentationml/2006/main">
   <p:cSld>
     <p:spTree>
       <p:nvGrpSpPr>
@@ -627,16 +498,21 @@
         <p:nvPr/>
       </p:nvGrpSpPr>
       <p:grpSpPr>
-        <a:xfrm xmlns:a="http://schemas.openxmlformats.org/drawingml/2006/main"/>
+        <a:xfrm>
+          <a:off x="0" y="0"/>
+          <a:ext cx="0" cy="0"/>
+          <a:chOff x="0" y="0"/>
+          <a:chExt cx="0" cy="0"/>
+        </a:xfrm>
       </p:grpSpPr>
       <p:sp>
         <p:nvSpPr>
           <p:cNvPr id="2" name="Slide Image Placeholder 1"/>
           <p:cNvSpPr>
-            <a:spLocks xmlns:a="http://schemas.openxmlformats.org/drawingml/2006/main" noGrp="1"/>
-          </p:cNvSpPr>
-          <p:nvPr>
-            <p:ph type="sldImg" idx="0"/>
+            <a:spLocks noGrp="1" noRot="1" noChangeAspect="1"/>
+          </p:cNvSpPr>
+          <p:nvPr>
+            <p:ph type="sldImg"/>
           </p:nvPr>
         </p:nvSpPr>
         <p:spPr/>
@@ -645,7 +521,7 @@
         <p:nvSpPr>
           <p:cNvPr id="3" name="Notes Placeholder 2"/>
           <p:cNvSpPr>
-            <a:spLocks xmlns:a="http://schemas.openxmlformats.org/drawingml/2006/main" noGrp="1"/>
+            <a:spLocks noGrp="1"/>
           </p:cNvSpPr>
           <p:nvPr>
             <p:ph type="body" idx="1"/>
@@ -653,11 +529,57 @@
         </p:nvSpPr>
         <p:spPr/>
         <p:txBody>
-          <a:bodyPr xmlns:a="http://schemas.openxmlformats.org/drawingml/2006/main"/>
-          <a:lstStyle xmlns:a="http://schemas.openxmlformats.org/drawingml/2006/main"/>
-          <a:p xmlns:a="http://schemas.openxmlformats.org/drawingml/2006/main">
-            <a:r>
-              <a:t>Today's hook lands two punches. Punch one: when people say they want AI to automate their data prep, the outcome they are describing, automated, repeatable, refreshable cleanup, has been shipping inside Excel for a decade as Power Query, and there is no AI in it at all. It records your steps like a macro recorder that actually works, and replays them on demand. Automation without programming. Punch two: remember Monday, when Analyze Data swore we had seven regions? Clean inputs remove avoidable data errors. They do not guarantee that an AI answer is correct. Garbage in, confident-sounding garbage out, and the confident tone is what makes it dangerous in front of your CFO. And a bonus guerrilla move to keep in your pocket: free chatbots write perfectly good M code, Power Query's language, and the Advanced Editor is where you paste it. Let's clean this thing for the last time.</a:t>
+          <a:bodyPr/>
+          <a:lstStyle/>
+          <a:p>
+            <a:r>
+              <a:t>CHAT CUE (about 6:00; budget 15 seconds total)</a:t>
+            </a:r>
+          </a:p>
+          <a:p>
+            <a:r>
+              <a:t>SAY: Quick choice from the steps on screen: which removes extra spaces, A for Trim or B for Split?</a:t>
+            </a:r>
+          </a:p>
+          <a:p>
+            <a:r>
+              <a:t>PAUSE: Wait silently for 8 seconds. Do not repeat the request.</a:t>
+            </a:r>
+          </a:p>
+          <a:p>
+            <a:r>
+              <a:t>IF SOMEONE REPLIES: A. Trim removes leading and trailing spaces. Split separates the product and category. Point to Trim in the recorded steps.</a:t>
+            </a:r>
+          </a:p>
+          <a:p>
+            <a:r>
+              <a:t>IF CHAT IS QUIET: Say, "I'll choose A, Trim, for the spaces around the region names." Then continue. Never imply that somebody replied.</a:t>
+            </a:r>
+          </a:p>
+          <a:p>
+            <a:r>
+              <a:t>FACILITATION: Acknowledge at most two actual replies, without calling on anyone by name. Accept a letter, a word, or a longer question. If a reply arrives later, acknowledge it at the next natural pause.</a:t>
+            </a:r>
+          </a:p>
+          <a:p>
+            <a:endParaRPr/>
+          </a:p>
+          <a:p>
+            <a:r>
+              <a:t>Use this cue at the indicated demo pause. Keep the Excel window visible when the prompt refers to its result.</a:t>
+            </a:r>
+          </a:p>
+          <a:p>
+            <a:endParaRPr/>
+          </a:p>
+          <a:p>
+            <a:r>
+              <a:t>ORIGINAL TEACHING SCRIPT</a:t>
+            </a:r>
+          </a:p>
+          <a:p>
+            <a:r>
+              <a:t>Main demo. I click in the RawExport table, Data tab, From Table Range, and the Power Query editor opens. Now I just clean, and it records. Step one: filter Order ID, uncheck the blanks and those two TOTAL rows. Gone, and unlike yesterday's manual delete, this is recorded. Step two: select Product dash Category, Split Column by delimiter, space dash space, and we get real Product and Category columns. Step three: Region. Transform, Format, Trim, then Capitalize Each Word. MIDWEST in caps, midwest with the trailing space, all collapse into one clean Midwest. The region-label problem dies right there. Step four: types. Order Date to Date, Units to Whole Number, Unit Price to Currency, and the dollar signs and text numbers all resolve. Watch the Applied Steps pane on the right: that is a program you just wrote by clicking. Close and Load To, new sheet, and I name the output table SalesClean.</a:t>
             </a:r>
           </a:p>
         </p:txBody>
@@ -666,7 +588,7 @@
         <p:nvSpPr>
           <p:cNvPr id="4" name="Slide Number Placeholder 3"/>
           <p:cNvSpPr>
-            <a:spLocks xmlns:a="http://schemas.openxmlformats.org/drawingml/2006/main" noGrp="1"/>
+            <a:spLocks noGrp="1"/>
           </p:cNvSpPr>
           <p:nvPr>
             <p:ph type="sldNum" idx="5"/>
@@ -674,21 +596,23 @@
         </p:nvSpPr>
         <p:spPr/>
         <p:txBody>
-          <a:bodyPr xmlns:a="http://schemas.openxmlformats.org/drawingml/2006/main"/>
-          <a:lstStyle xmlns:a="http://schemas.openxmlformats.org/drawingml/2006/main"/>
-          <a:p xmlns:a="http://schemas.openxmlformats.org/drawingml/2006/main"/>
+          <a:bodyPr/>
+          <a:lstStyle/>
+          <a:p>
+            <a:endParaRPr/>
+          </a:p>
         </p:txBody>
       </p:sp>
     </p:spTree>
   </p:cSld>
   <p:clrMapOvr>
-    <a:masterClrMapping xmlns:a="http://schemas.openxmlformats.org/drawingml/2006/main"/>
+    <a:masterClrMapping/>
   </p:clrMapOvr>
 </p:notes>
 </file>
 
 <file path=ppt/notesSlides/notesSlide4.xml><?xml version="1.0" encoding="utf-8"?>
-<p:notes xmlns:p="http://schemas.openxmlformats.org/presentationml/2006/main">
+<p:notes xmlns:a="http://schemas.openxmlformats.org/drawingml/2006/main" xmlns:r="http://schemas.openxmlformats.org/officeDocument/2006/relationships" xmlns:p="http://schemas.openxmlformats.org/presentationml/2006/main">
   <p:cSld>
     <p:spTree>
       <p:nvGrpSpPr>
@@ -697,16 +621,21 @@
         <p:nvPr/>
       </p:nvGrpSpPr>
       <p:grpSpPr>
-        <a:xfrm xmlns:a="http://schemas.openxmlformats.org/drawingml/2006/main"/>
+        <a:xfrm>
+          <a:off x="0" y="0"/>
+          <a:ext cx="0" cy="0"/>
+          <a:chOff x="0" y="0"/>
+          <a:chExt cx="0" cy="0"/>
+        </a:xfrm>
       </p:grpSpPr>
       <p:sp>
         <p:nvSpPr>
           <p:cNvPr id="2" name="Slide Image Placeholder 1"/>
           <p:cNvSpPr>
-            <a:spLocks xmlns:a="http://schemas.openxmlformats.org/drawingml/2006/main" noGrp="1"/>
-          </p:cNvSpPr>
-          <p:nvPr>
-            <p:ph type="sldImg" idx="0"/>
+            <a:spLocks noGrp="1" noRot="1" noChangeAspect="1"/>
+          </p:cNvSpPr>
+          <p:nvPr>
+            <p:ph type="sldImg"/>
           </p:nvPr>
         </p:nvSpPr>
         <p:spPr/>
@@ -715,7 +644,7 @@
         <p:nvSpPr>
           <p:cNvPr id="3" name="Notes Placeholder 2"/>
           <p:cNvSpPr>
-            <a:spLocks xmlns:a="http://schemas.openxmlformats.org/drawingml/2006/main" noGrp="1"/>
+            <a:spLocks noGrp="1"/>
           </p:cNvSpPr>
           <p:nvPr>
             <p:ph type="body" idx="1"/>
@@ -723,61 +652,57 @@
         </p:nvSpPr>
         <p:spPr/>
         <p:txBody>
-          <a:bodyPr xmlns:a="http://schemas.openxmlformats.org/drawingml/2006/main"/>
-          <a:lstStyle xmlns:a="http://schemas.openxmlformats.org/drawingml/2006/main"/>
-          <a:p xmlns:a="http://schemas.openxmlformats.org/drawingml/2006/main">
-            <a:r>
-              <a:t>CHAT CUE (about 6:00; budget 15 seconds total)</a:t>
-            </a:r>
-          </a:p>
-          <a:p xmlns:a="http://schemas.openxmlformats.org/drawingml/2006/main">
-            <a:r>
-              <a:t>SAY: Quick choice from the steps on screen: which removes extra spaces, A for Trim or B for Split?</a:t>
-            </a:r>
-          </a:p>
-          <a:p xmlns:a="http://schemas.openxmlformats.org/drawingml/2006/main">
+          <a:bodyPr/>
+          <a:lstStyle/>
+          <a:p>
+            <a:r>
+              <a:t>CHAT CUE (about 12:00; budget 15 seconds total)</a:t>
+            </a:r>
+          </a:p>
+          <a:p>
+            <a:r>
+              <a:t>SAY: June has arrived. One word before I click: REDO or REFRESH?</a:t>
+            </a:r>
+          </a:p>
+          <a:p>
             <a:r>
               <a:t>PAUSE: Wait silently for 8 seconds. Do not repeat the request.</a:t>
             </a:r>
           </a:p>
-          <a:p xmlns:a="http://schemas.openxmlformats.org/drawingml/2006/main">
-            <a:r>
-              <a:t>IF SOMEONE REPLIES: A. Trim removes leading and trailing spaces. Split separates the product and category. Point to Trim in the recorded steps.</a:t>
-            </a:r>
-          </a:p>
-          <a:p xmlns:a="http://schemas.openxmlformats.org/drawingml/2006/main">
-            <a:r>
-              <a:t>IF CHAT IS QUIET: Say, "I'll choose A, Trim, for the spaces around the region names." Then continue. Never imply that somebody replied.</a:t>
-            </a:r>
-          </a:p>
-          <a:p xmlns:a="http://schemas.openxmlformats.org/drawingml/2006/main">
+          <a:p>
+            <a:r>
+              <a:t>IF SOMEONE REPLIES: REFRESH. With new rows inside RawExport, refresh SalesClean. Show a new June order in the output so the payoff is visible.</a:t>
+            </a:r>
+          </a:p>
+          <a:p>
+            <a:r>
+              <a:t>IF CHAT IS QUIET: Say, "I'll click REFRESH and check that a June order made it into the result." Then continue. Never imply that somebody replied.</a:t>
+            </a:r>
+          </a:p>
+          <a:p>
             <a:r>
               <a:t>FACILITATION: Acknowledge at most two actual replies, without calling on anyone by name. Accept a letter, a word, or a longer question. If a reply arrives later, acknowledge it at the next natural pause.</a:t>
             </a:r>
           </a:p>
-          <a:p xmlns:a="http://schemas.openxmlformats.org/drawingml/2006/main">
-            <a:r>
-              <a:t/>
-            </a:r>
-          </a:p>
-          <a:p xmlns:a="http://schemas.openxmlformats.org/drawingml/2006/main">
+          <a:p>
+            <a:endParaRPr/>
+          </a:p>
+          <a:p>
             <a:r>
               <a:t>Use this cue at the indicated demo pause. Keep the Excel window visible when the prompt refers to its result.</a:t>
             </a:r>
           </a:p>
-          <a:p xmlns:a="http://schemas.openxmlformats.org/drawingml/2006/main">
-            <a:r>
-              <a:t/>
-            </a:r>
-          </a:p>
-          <a:p xmlns:a="http://schemas.openxmlformats.org/drawingml/2006/main">
+          <a:p>
+            <a:endParaRPr/>
+          </a:p>
+          <a:p>
             <a:r>
               <a:t>ORIGINAL TEACHING SCRIPT</a:t>
             </a:r>
           </a:p>
-          <a:p xmlns:a="http://schemas.openxmlformats.org/drawingml/2006/main">
-            <a:r>
-              <a:t>Main demo. I click in the RawExport table, Data tab, From Table Range, and the Power Query editor opens. Now I just clean, and it records. Step one: filter Order ID, uncheck the blanks and those two TOTAL rows. Gone, and unlike yesterday's manual delete, this is recorded. Step two: select Product dash Category, Split Column by delimiter, space dash space, and we get real Product and Category columns. Step three: Region. Transform, Format, Trim, then Capitalize Each Word. MIDWEST in caps, midwest with the trailing space, all collapse into one clean Midwest. The region-label problem dies right there. Step four: types. Order Date to Date, Units to Whole Number, Unit Price to Currency, and the dollar signs and text numbers all resolve. Watch the Applied Steps pane on the right: that is a program you just wrote by clicking. Close and Load To, new sheet, and I name the output table SalesClean.</a:t>
+          <a:p>
+            <a:r>
+              <a:t>Now the refresh check. It is a new month at Lakeshore and June's orders just landed, same ugly format, of course. I copy the June rows from the june-rows sheet and paste them at the bottom of RawExport. Now I right-click the SalesClean table and hit Refresh. Done. Every recorded step replayed on the new data: junk filtered, product split, regions standardized, types fixed, June included. Nobody re-cleaned anything. That monthly chore you were going to do by hand forever is now one click, and next month it is still one click. This is the single best return on an hour I know of in Excel: build the query once, refresh it for the rest of your tenure.</a:t>
             </a:r>
           </a:p>
         </p:txBody>
@@ -786,7 +711,7 @@
         <p:nvSpPr>
           <p:cNvPr id="4" name="Slide Number Placeholder 3"/>
           <p:cNvSpPr>
-            <a:spLocks xmlns:a="http://schemas.openxmlformats.org/drawingml/2006/main" noGrp="1"/>
+            <a:spLocks noGrp="1"/>
           </p:cNvSpPr>
           <p:nvPr>
             <p:ph type="sldNum" idx="5"/>
@@ -794,21 +719,23 @@
         </p:nvSpPr>
         <p:spPr/>
         <p:txBody>
-          <a:bodyPr xmlns:a="http://schemas.openxmlformats.org/drawingml/2006/main"/>
-          <a:lstStyle xmlns:a="http://schemas.openxmlformats.org/drawingml/2006/main"/>
-          <a:p xmlns:a="http://schemas.openxmlformats.org/drawingml/2006/main"/>
+          <a:bodyPr/>
+          <a:lstStyle/>
+          <a:p>
+            <a:endParaRPr/>
+          </a:p>
         </p:txBody>
       </p:sp>
     </p:spTree>
   </p:cSld>
   <p:clrMapOvr>
-    <a:masterClrMapping xmlns:a="http://schemas.openxmlformats.org/drawingml/2006/main"/>
+    <a:masterClrMapping/>
   </p:clrMapOvr>
 </p:notes>
 </file>
 
 <file path=ppt/notesSlides/notesSlide5.xml><?xml version="1.0" encoding="utf-8"?>
-<p:notes xmlns:p="http://schemas.openxmlformats.org/presentationml/2006/main">
+<p:notes xmlns:a="http://schemas.openxmlformats.org/drawingml/2006/main" xmlns:r="http://schemas.openxmlformats.org/officeDocument/2006/relationships" xmlns:p="http://schemas.openxmlformats.org/presentationml/2006/main">
   <p:cSld>
     <p:spTree>
       <p:nvGrpSpPr>
@@ -817,16 +744,21 @@
         <p:nvPr/>
       </p:nvGrpSpPr>
       <p:grpSpPr>
-        <a:xfrm xmlns:a="http://schemas.openxmlformats.org/drawingml/2006/main"/>
+        <a:xfrm>
+          <a:off x="0" y="0"/>
+          <a:ext cx="0" cy="0"/>
+          <a:chOff x="0" y="0"/>
+          <a:chExt cx="0" cy="0"/>
+        </a:xfrm>
       </p:grpSpPr>
       <p:sp>
         <p:nvSpPr>
           <p:cNvPr id="2" name="Slide Image Placeholder 1"/>
           <p:cNvSpPr>
-            <a:spLocks xmlns:a="http://schemas.openxmlformats.org/drawingml/2006/main" noGrp="1"/>
-          </p:cNvSpPr>
-          <p:nvPr>
-            <p:ph type="sldImg" idx="0"/>
+            <a:spLocks noGrp="1" noRot="1" noChangeAspect="1"/>
+          </p:cNvSpPr>
+          <p:nvPr>
+            <p:ph type="sldImg"/>
           </p:nvPr>
         </p:nvSpPr>
         <p:spPr/>
@@ -835,7 +767,7 @@
         <p:nvSpPr>
           <p:cNvPr id="3" name="Notes Placeholder 2"/>
           <p:cNvSpPr>
-            <a:spLocks xmlns:a="http://schemas.openxmlformats.org/drawingml/2006/main" noGrp="1"/>
+            <a:spLocks noGrp="1"/>
           </p:cNvSpPr>
           <p:nvPr>
             <p:ph type="body" idx="1"/>
@@ -843,61 +775,11 @@
         </p:nvSpPr>
         <p:spPr/>
         <p:txBody>
-          <a:bodyPr xmlns:a="http://schemas.openxmlformats.org/drawingml/2006/main"/>
-          <a:lstStyle xmlns:a="http://schemas.openxmlformats.org/drawingml/2006/main"/>
-          <a:p xmlns:a="http://schemas.openxmlformats.org/drawingml/2006/main">
-            <a:r>
-              <a:t>CHAT CUE (about 12:00; budget 15 seconds total)</a:t>
-            </a:r>
-          </a:p>
-          <a:p xmlns:a="http://schemas.openxmlformats.org/drawingml/2006/main">
-            <a:r>
-              <a:t>SAY: June has arrived. One word before I click: REDO or REFRESH?</a:t>
-            </a:r>
-          </a:p>
-          <a:p xmlns:a="http://schemas.openxmlformats.org/drawingml/2006/main">
-            <a:r>
-              <a:t>PAUSE: Wait silently for 8 seconds. Do not repeat the request.</a:t>
-            </a:r>
-          </a:p>
-          <a:p xmlns:a="http://schemas.openxmlformats.org/drawingml/2006/main">
-            <a:r>
-              <a:t>IF SOMEONE REPLIES: REFRESH. With new rows inside RawExport, refresh SalesClean. Show a new June order in the output so the payoff is visible.</a:t>
-            </a:r>
-          </a:p>
-          <a:p xmlns:a="http://schemas.openxmlformats.org/drawingml/2006/main">
-            <a:r>
-              <a:t>IF CHAT IS QUIET: Say, "I'll click REFRESH and check that a June order made it into the result." Then continue. Never imply that somebody replied.</a:t>
-            </a:r>
-          </a:p>
-          <a:p xmlns:a="http://schemas.openxmlformats.org/drawingml/2006/main">
-            <a:r>
-              <a:t>FACILITATION: Acknowledge at most two actual replies, without calling on anyone by name. Accept a letter, a word, or a longer question. If a reply arrives later, acknowledge it at the next natural pause.</a:t>
-            </a:r>
-          </a:p>
-          <a:p xmlns:a="http://schemas.openxmlformats.org/drawingml/2006/main">
-            <a:r>
-              <a:t/>
-            </a:r>
-          </a:p>
-          <a:p xmlns:a="http://schemas.openxmlformats.org/drawingml/2006/main">
-            <a:r>
-              <a:t>Use this cue at the indicated demo pause. Keep the Excel window visible when the prompt refers to its result.</a:t>
-            </a:r>
-          </a:p>
-          <a:p xmlns:a="http://schemas.openxmlformats.org/drawingml/2006/main">
-            <a:r>
-              <a:t/>
-            </a:r>
-          </a:p>
-          <a:p xmlns:a="http://schemas.openxmlformats.org/drawingml/2006/main">
-            <a:r>
-              <a:t>ORIGINAL TEACHING SCRIPT</a:t>
-            </a:r>
-          </a:p>
-          <a:p xmlns:a="http://schemas.openxmlformats.org/drawingml/2006/main">
-            <a:r>
-              <a:t>Now the refresh check. It is a new month at Lakeshore and June's orders just landed, same ugly format, of course. I copy the June rows from the june-rows sheet and paste them at the bottom of RawExport. Now I right-click the SalesClean table and hit Refresh. Done. Every recorded step replayed on the new data: junk filtered, product split, regions standardized, types fixed, June included. Nobody re-cleaned anything. That monthly chore you were going to do by hand forever is now one click, and next month it is still one click. This is the single best return on an hour I know of in Excel: build the query once, refresh it for the rest of your tenure.</a:t>
+          <a:bodyPr/>
+          <a:lstStyle/>
+          <a:p>
+            <a:r>
+              <a:t>Today's hook lands two punches. Punch one: when people say they want AI to automate their data prep, the outcome they are describing, automated, repeatable, refreshable cleanup, has been shipping inside Excel for a decade as Power Query, and there is no AI in it at all. It records your steps like a macro recorder that actually works, and replays them on demand. Automation without programming. Punch two: remember Monday, when Analyze Data swore we had seven regions? Clean inputs remove avoidable data errors. They do not guarantee that an AI answer is correct. Garbage in, confident-sounding garbage out, and the confident tone is what makes it dangerous in front of your CFO. And a bonus guerrilla move to keep in your pocket: free chatbots write perfectly good M code, Power Query's language, and the Advanced Editor is where you paste it. Let's clean this thing for the last time.</a:t>
             </a:r>
           </a:p>
         </p:txBody>
@@ -906,7 +788,7 @@
         <p:nvSpPr>
           <p:cNvPr id="4" name="Slide Number Placeholder 3"/>
           <p:cNvSpPr>
-            <a:spLocks xmlns:a="http://schemas.openxmlformats.org/drawingml/2006/main" noGrp="1"/>
+            <a:spLocks noGrp="1"/>
           </p:cNvSpPr>
           <p:nvPr>
             <p:ph type="sldNum" idx="5"/>
@@ -914,21 +796,23 @@
         </p:nvSpPr>
         <p:spPr/>
         <p:txBody>
-          <a:bodyPr xmlns:a="http://schemas.openxmlformats.org/drawingml/2006/main"/>
-          <a:lstStyle xmlns:a="http://schemas.openxmlformats.org/drawingml/2006/main"/>
-          <a:p xmlns:a="http://schemas.openxmlformats.org/drawingml/2006/main"/>
+          <a:bodyPr/>
+          <a:lstStyle/>
+          <a:p>
+            <a:endParaRPr/>
+          </a:p>
         </p:txBody>
       </p:sp>
     </p:spTree>
   </p:cSld>
   <p:clrMapOvr>
-    <a:masterClrMapping xmlns:a="http://schemas.openxmlformats.org/drawingml/2006/main"/>
+    <a:masterClrMapping/>
   </p:clrMapOvr>
 </p:notes>
 </file>
 
 <file path=ppt/notesSlides/notesSlide6.xml><?xml version="1.0" encoding="utf-8"?>
-<p:notes xmlns:p="http://schemas.openxmlformats.org/presentationml/2006/main">
+<p:notes xmlns:a="http://schemas.openxmlformats.org/drawingml/2006/main" xmlns:r="http://schemas.openxmlformats.org/officeDocument/2006/relationships" xmlns:p="http://schemas.openxmlformats.org/presentationml/2006/main">
   <p:cSld>
     <p:spTree>
       <p:nvGrpSpPr>
@@ -937,16 +821,21 @@
         <p:nvPr/>
       </p:nvGrpSpPr>
       <p:grpSpPr>
-        <a:xfrm xmlns:a="http://schemas.openxmlformats.org/drawingml/2006/main"/>
+        <a:xfrm>
+          <a:off x="0" y="0"/>
+          <a:ext cx="0" cy="0"/>
+          <a:chOff x="0" y="0"/>
+          <a:chExt cx="0" cy="0"/>
+        </a:xfrm>
       </p:grpSpPr>
       <p:sp>
         <p:nvSpPr>
           <p:cNvPr id="2" name="Slide Image Placeholder 1"/>
           <p:cNvSpPr>
-            <a:spLocks xmlns:a="http://schemas.openxmlformats.org/drawingml/2006/main" noGrp="1"/>
-          </p:cNvSpPr>
-          <p:nvPr>
-            <p:ph type="sldImg" idx="0"/>
+            <a:spLocks noGrp="1" noRot="1" noChangeAspect="1"/>
+          </p:cNvSpPr>
+          <p:nvPr>
+            <p:ph type="sldImg"/>
           </p:nvPr>
         </p:nvSpPr>
         <p:spPr/>
@@ -955,7 +844,7 @@
         <p:nvSpPr>
           <p:cNvPr id="3" name="Notes Placeholder 2"/>
           <p:cNvSpPr>
-            <a:spLocks xmlns:a="http://schemas.openxmlformats.org/drawingml/2006/main" noGrp="1"/>
+            <a:spLocks noGrp="1"/>
           </p:cNvSpPr>
           <p:nvPr>
             <p:ph type="body" idx="1"/>
@@ -963,60 +852,56 @@
         </p:nvSpPr>
         <p:spPr/>
         <p:txBody>
-          <a:bodyPr xmlns:a="http://schemas.openxmlformats.org/drawingml/2006/main"/>
-          <a:lstStyle xmlns:a="http://schemas.openxmlformats.org/drawingml/2006/main"/>
-          <a:p xmlns:a="http://schemas.openxmlformats.org/drawingml/2006/main">
+          <a:bodyPr/>
+          <a:lstStyle/>
+          <a:p>
             <a:r>
               <a:t>CHAT CUE (about 16:30; budget 15 seconds total)</a:t>
             </a:r>
           </a:p>
-          <a:p xmlns:a="http://schemas.openxmlformats.org/drawingml/2006/main">
+          <a:p>
             <a:r>
               <a:t>SAY: Which step would you most like to stop repeating: SPACES, SPLIT, or TYPES? Pick just one word.</a:t>
             </a:r>
           </a:p>
-          <a:p xmlns:a="http://schemas.openxmlformats.org/drawingml/2006/main">
+          <a:p>
             <a:r>
               <a:t>PAUSE: Wait silently for 8 seconds. Do not repeat the request.</a:t>
             </a:r>
           </a:p>
-          <a:p xmlns:a="http://schemas.openxmlformats.org/drawingml/2006/main">
+          <a:p>
             <a:r>
               <a:t>IF SOMEONE REPLIES: Acknowledge an actual choice and connect it to that recorded step. The desk action is to save one small query for a recurring export.</a:t>
             </a:r>
           </a:p>
-          <a:p xmlns:a="http://schemas.openxmlformats.org/drawingml/2006/main">
+          <a:p>
             <a:r>
               <a:t>IF CHAT IS QUIET: Say, "I'll pick SPACES. That is a small first query you can build and refresh." Then continue. Never imply that somebody replied.</a:t>
             </a:r>
           </a:p>
-          <a:p xmlns:a="http://schemas.openxmlformats.org/drawingml/2006/main">
+          <a:p>
             <a:r>
               <a:t>FACILITATION: Acknowledge at most two actual replies, without calling on anyone by name. Accept a letter, a word, or a longer question. If a reply arrives later, acknowledge it at the next natural pause.</a:t>
             </a:r>
           </a:p>
-          <a:p xmlns:a="http://schemas.openxmlformats.org/drawingml/2006/main">
-            <a:r>
-              <a:t/>
-            </a:r>
-          </a:p>
-          <a:p xmlns:a="http://schemas.openxmlformats.org/drawingml/2006/main">
+          <a:p>
+            <a:endParaRPr/>
+          </a:p>
+          <a:p>
             <a:r>
               <a:t>Use this cue before reading the remaining notes.</a:t>
             </a:r>
           </a:p>
-          <a:p xmlns:a="http://schemas.openxmlformats.org/drawingml/2006/main">
-            <a:r>
-              <a:t/>
-            </a:r>
-          </a:p>
-          <a:p xmlns:a="http://schemas.openxmlformats.org/drawingml/2006/main">
+          <a:p>
+            <a:endParaRPr/>
+          </a:p>
+          <a:p>
             <a:r>
               <a:t>TEACHING SCRIPT
 Pick one small next action. You do not need to complete every option. Pick one recurring export and one cleanup step. Record that step in Power Query, then load the result. Next time, refresh it and check that the new rows appear.</a:t>
             </a:r>
           </a:p>
-          <a:p xmlns:a="http://schemas.openxmlformats.org/drawingml/2006/main">
+          <a:p>
             <a:r>
               <a:t>Desk actions. One: pick the export you clean every week or every month, the one you dread, and rebuild the cleanup one time in Power Query, clicking through the same moves you saw today. Two: next cycle, paste the new data in and press Refresh instead of redoing the work, then enjoy the feeling. Three: if you hit a transform you cannot figure out, describe it to a free chatbot in plain English and ask for the M code, then paste that into the Advanced Editor. That last one is pure guerrilla: free AI writing code for a free tool you already had.</a:t>
             </a:r>
@@ -1027,7 +912,7 @@
         <p:nvSpPr>
           <p:cNvPr id="4" name="Slide Number Placeholder 3"/>
           <p:cNvSpPr>
-            <a:spLocks xmlns:a="http://schemas.openxmlformats.org/drawingml/2006/main" noGrp="1"/>
+            <a:spLocks noGrp="1"/>
           </p:cNvSpPr>
           <p:nvPr>
             <p:ph type="sldNum" idx="5"/>
@@ -1035,21 +920,23 @@
         </p:nvSpPr>
         <p:spPr/>
         <p:txBody>
-          <a:bodyPr xmlns:a="http://schemas.openxmlformats.org/drawingml/2006/main"/>
-          <a:lstStyle xmlns:a="http://schemas.openxmlformats.org/drawingml/2006/main"/>
-          <a:p xmlns:a="http://schemas.openxmlformats.org/drawingml/2006/main"/>
+          <a:bodyPr/>
+          <a:lstStyle/>
+          <a:p>
+            <a:endParaRPr/>
+          </a:p>
         </p:txBody>
       </p:sp>
     </p:spTree>
   </p:cSld>
   <p:clrMapOvr>
-    <a:masterClrMapping xmlns:a="http://schemas.openxmlformats.org/drawingml/2006/main"/>
+    <a:masterClrMapping/>
   </p:clrMapOvr>
 </p:notes>
 </file>
 
 <file path=ppt/notesSlides/notesSlide7.xml><?xml version="1.0" encoding="utf-8"?>
-<p:notes xmlns:p="http://schemas.openxmlformats.org/presentationml/2006/main">
+<p:notes xmlns:a="http://schemas.openxmlformats.org/drawingml/2006/main" xmlns:r="http://schemas.openxmlformats.org/officeDocument/2006/relationships" xmlns:p="http://schemas.openxmlformats.org/presentationml/2006/main">
   <p:cSld>
     <p:spTree>
       <p:nvGrpSpPr>
@@ -1058,16 +945,21 @@
         <p:nvPr/>
       </p:nvGrpSpPr>
       <p:grpSpPr>
-        <a:xfrm xmlns:a="http://schemas.openxmlformats.org/drawingml/2006/main"/>
+        <a:xfrm>
+          <a:off x="0" y="0"/>
+          <a:ext cx="0" cy="0"/>
+          <a:chOff x="0" y="0"/>
+          <a:chExt cx="0" cy="0"/>
+        </a:xfrm>
       </p:grpSpPr>
       <p:sp>
         <p:nvSpPr>
           <p:cNvPr id="2" name="Slide Image Placeholder 1"/>
           <p:cNvSpPr>
-            <a:spLocks xmlns:a="http://schemas.openxmlformats.org/drawingml/2006/main" noGrp="1"/>
-          </p:cNvSpPr>
-          <p:nvPr>
-            <p:ph type="sldImg" idx="0"/>
+            <a:spLocks noGrp="1" noRot="1" noChangeAspect="1"/>
+          </p:cNvSpPr>
+          <p:nvPr>
+            <p:ph type="sldImg"/>
           </p:nvPr>
         </p:nvSpPr>
         <p:spPr/>
@@ -1076,7 +968,7 @@
         <p:nvSpPr>
           <p:cNvPr id="3" name="Notes Placeholder 2"/>
           <p:cNvSpPr>
-            <a:spLocks xmlns:a="http://schemas.openxmlformats.org/drawingml/2006/main" noGrp="1"/>
+            <a:spLocks noGrp="1"/>
           </p:cNvSpPr>
           <p:nvPr>
             <p:ph type="body" idx="1"/>
@@ -1084,9 +976,9 @@
         </p:nvSpPr>
         <p:spPr/>
         <p:txBody>
-          <a:bodyPr xmlns:a="http://schemas.openxmlformats.org/drawingml/2006/main"/>
-          <a:lstStyle xmlns:a="http://schemas.openxmlformats.org/drawingml/2006/main"/>
-          <a:p xmlns:a="http://schemas.openxmlformats.org/drawingml/2006/main">
+          <a:bodyPr/>
+          <a:lstStyle/>
+          <a:p>
             <a:r>
               <a:t>Tomorrow might be the biggest surprise of the week for some of you. There is a full Python data science environment, pandas, seaborn, the real thing, sitting behind an Excel formula called PY. No install, no admin rights, no IT ticket. And the clean table we built today is exactly what it wants to eat. Noon Eastern.</a:t>
             </a:r>
@@ -1097,7 +989,7 @@
         <p:nvSpPr>
           <p:cNvPr id="4" name="Slide Number Placeholder 3"/>
           <p:cNvSpPr>
-            <a:spLocks xmlns:a="http://schemas.openxmlformats.org/drawingml/2006/main" noGrp="1"/>
+            <a:spLocks noGrp="1"/>
           </p:cNvSpPr>
           <p:nvPr>
             <p:ph type="sldNum" idx="5"/>
@@ -1105,21 +997,23 @@
         </p:nvSpPr>
         <p:spPr/>
         <p:txBody>
-          <a:bodyPr xmlns:a="http://schemas.openxmlformats.org/drawingml/2006/main"/>
-          <a:lstStyle xmlns:a="http://schemas.openxmlformats.org/drawingml/2006/main"/>
-          <a:p xmlns:a="http://schemas.openxmlformats.org/drawingml/2006/main"/>
+          <a:bodyPr/>
+          <a:lstStyle/>
+          <a:p>
+            <a:endParaRPr/>
+          </a:p>
         </p:txBody>
       </p:sp>
     </p:spTree>
   </p:cSld>
   <p:clrMapOvr>
-    <a:masterClrMapping xmlns:a="http://schemas.openxmlformats.org/drawingml/2006/main"/>
+    <a:masterClrMapping/>
   </p:clrMapOvr>
 </p:notes>
 </file>
 
 <file path=ppt/notesSlides/notesSlide8.xml><?xml version="1.0" encoding="utf-8"?>
-<p:notes xmlns:p="http://schemas.openxmlformats.org/presentationml/2006/main">
+<p:notes xmlns:a="http://schemas.openxmlformats.org/drawingml/2006/main" xmlns:r="http://schemas.openxmlformats.org/officeDocument/2006/relationships" xmlns:p="http://schemas.openxmlformats.org/presentationml/2006/main">
   <p:cSld>
     <p:spTree>
       <p:nvGrpSpPr>
@@ -1128,16 +1022,21 @@
         <p:nvPr/>
       </p:nvGrpSpPr>
       <p:grpSpPr>
-        <a:xfrm xmlns:a="http://schemas.openxmlformats.org/drawingml/2006/main"/>
+        <a:xfrm>
+          <a:off x="0" y="0"/>
+          <a:ext cx="0" cy="0"/>
+          <a:chOff x="0" y="0"/>
+          <a:chExt cx="0" cy="0"/>
+        </a:xfrm>
       </p:grpSpPr>
       <p:sp>
         <p:nvSpPr>
           <p:cNvPr id="2" name="Slide Image Placeholder 1"/>
           <p:cNvSpPr>
-            <a:spLocks xmlns:a="http://schemas.openxmlformats.org/drawingml/2006/main" noGrp="1"/>
-          </p:cNvSpPr>
-          <p:nvPr>
-            <p:ph type="sldImg" idx="0"/>
+            <a:spLocks noGrp="1" noRot="1" noChangeAspect="1"/>
+          </p:cNvSpPr>
+          <p:nvPr>
+            <p:ph type="sldImg"/>
           </p:nvPr>
         </p:nvSpPr>
         <p:spPr/>
@@ -1146,7 +1045,7 @@
         <p:nvSpPr>
           <p:cNvPr id="3" name="Notes Placeholder 2"/>
           <p:cNvSpPr>
-            <a:spLocks xmlns:a="http://schemas.openxmlformats.org/drawingml/2006/main" noGrp="1"/>
+            <a:spLocks noGrp="1"/>
           </p:cNvSpPr>
           <p:nvPr>
             <p:ph type="body" idx="1"/>
@@ -1154,59 +1053,55 @@
         </p:nvSpPr>
         <p:spPr/>
         <p:txBody>
-          <a:bodyPr xmlns:a="http://schemas.openxmlformats.org/drawingml/2006/main"/>
-          <a:lstStyle xmlns:a="http://schemas.openxmlformats.org/drawingml/2006/main"/>
-          <a:p xmlns:a="http://schemas.openxmlformats.org/drawingml/2006/main">
+          <a:bodyPr/>
+          <a:lstStyle/>
+          <a:p>
             <a:r>
               <a:t>CHAT CUE (about 18:30; budget 15 seconds total)</a:t>
             </a:r>
           </a:p>
-          <a:p xmlns:a="http://schemas.openxmlformats.org/drawingml/2006/main">
+          <a:p>
             <a:r>
               <a:t>SAY: If you want a step again, type FILTER, SPLIT, or REFRESH. A full question works too.</a:t>
             </a:r>
           </a:p>
-          <a:p xmlns:a="http://schemas.openxmlformats.org/drawingml/2006/main">
+          <a:p>
             <a:r>
               <a:t>PAUSE: Wait silently for 8 seconds. Do not repeat the request.</a:t>
             </a:r>
           </a:p>
-          <a:p xmlns:a="http://schemas.openxmlformats.org/drawingml/2006/main">
+          <a:p>
             <a:r>
               <a:t>IF SOMEONE REPLIES: Answer one actual request. FILTER: remove blank and TOTAL rows. SPLIT: use the space-dash-space delimiter. REFRESH: put new rows inside RawExport, then refresh SalesClean.</a:t>
             </a:r>
           </a:p>
-          <a:p xmlns:a="http://schemas.openxmlformats.org/drawingml/2006/main">
+          <a:p>
             <a:r>
               <a:t>IF CHAT IS QUIET: Say, "One useful reminder: new rows need to be inside the source table before you refresh." Then continue. Never imply that somebody replied.</a:t>
             </a:r>
           </a:p>
-          <a:p xmlns:a="http://schemas.openxmlformats.org/drawingml/2006/main">
+          <a:p>
             <a:r>
               <a:t>FACILITATION: Acknowledge at most two actual replies, without calling on anyone by name. Accept a letter, a word, or a longer question. If a reply arrives later, acknowledge it at the next natural pause.</a:t>
             </a:r>
           </a:p>
-          <a:p xmlns:a="http://schemas.openxmlformats.org/drawingml/2006/main">
-            <a:r>
-              <a:t/>
-            </a:r>
-          </a:p>
-          <a:p xmlns:a="http://schemas.openxmlformats.org/drawingml/2006/main">
+          <a:p>
+            <a:endParaRPr/>
+          </a:p>
+          <a:p>
             <a:r>
               <a:t>Use this cue before reading the remaining notes.</a:t>
             </a:r>
           </a:p>
-          <a:p xmlns:a="http://schemas.openxmlformats.org/drawingml/2006/main">
-            <a:r>
-              <a:t/>
-            </a:r>
-          </a:p>
-          <a:p xmlns:a="http://schemas.openxmlformats.org/drawingml/2006/main">
+          <a:p>
+            <a:endParaRPr/>
+          </a:p>
+          <a:p>
             <a:r>
               <a:t>ORIGINAL TEACHING SCRIPT</a:t>
             </a:r>
           </a:p>
-          <a:p xmlns:a="http://schemas.openxmlformats.org/drawingml/2006/main">
+          <a:p>
             <a:r>
               <a:t>That is day 3, and the region-label problem is officially dead. Recap: Power Query is recorded, repeatable cleanup, the Refresh click replays it on every new month, and clean inputs are what keep every AI tool this week honest. Replay in the membership vault, questions in chat or by email. Thanks, everyone. Tomorrow we write Python without leaving Excel.</a:t>
             </a:r>
@@ -1217,7 +1112,7 @@
         <p:nvSpPr>
           <p:cNvPr id="4" name="Slide Number Placeholder 3"/>
           <p:cNvSpPr>
-            <a:spLocks xmlns:a="http://schemas.openxmlformats.org/drawingml/2006/main" noGrp="1"/>
+            <a:spLocks noGrp="1"/>
           </p:cNvSpPr>
           <p:nvPr>
             <p:ph type="sldNum" idx="5"/>
@@ -1225,21 +1120,23 @@
         </p:nvSpPr>
         <p:spPr/>
         <p:txBody>
-          <a:bodyPr xmlns:a="http://schemas.openxmlformats.org/drawingml/2006/main"/>
-          <a:lstStyle xmlns:a="http://schemas.openxmlformats.org/drawingml/2006/main"/>
-          <a:p xmlns:a="http://schemas.openxmlformats.org/drawingml/2006/main"/>
+          <a:bodyPr/>
+          <a:lstStyle/>
+          <a:p>
+            <a:endParaRPr/>
+          </a:p>
         </p:txBody>
       </p:sp>
     </p:spTree>
   </p:cSld>
   <p:clrMapOvr>
-    <a:masterClrMapping xmlns:a="http://schemas.openxmlformats.org/drawingml/2006/main"/>
+    <a:masterClrMapping/>
   </p:clrMapOvr>
 </p:notes>
 </file>
 
 <file path=ppt/slideLayouts/slideLayout1.xml><?xml version="1.0" encoding="utf-8"?>
-<p:sldLayout xmlns:p="http://schemas.openxmlformats.org/presentationml/2006/main" type="title" preserve="1">
+<p:sldLayout xmlns:a="http://schemas.openxmlformats.org/drawingml/2006/main" xmlns:r="http://schemas.openxmlformats.org/officeDocument/2006/relationships" xmlns:p="http://schemas.openxmlformats.org/presentationml/2006/main" type="title" preserve="1">
   <p:cSld name="Title Slide">
     <p:spTree>
       <p:nvGrpSpPr>
@@ -1248,66 +1145,70 @@
         <p:nvPr/>
       </p:nvGrpSpPr>
       <p:grpSpPr>
-        <a:xfrm xmlns:a="http://schemas.openxmlformats.org/drawingml/2006/main"/>
+        <a:xfrm>
+          <a:off x="0" y="0"/>
+          <a:ext cx="0" cy="0"/>
+          <a:chOff x="0" y="0"/>
+          <a:chExt cx="0" cy="0"/>
+        </a:xfrm>
       </p:grpSpPr>
       <p:sp>
         <p:nvSpPr>
           <p:cNvPr id="2" name="Title 1">
-            <a:extLst xmlns:a="http://schemas.openxmlformats.org/drawingml/2006/main">
+            <a:extLst>
               <a:ext uri="{FF2B5EF4-FFF2-40B4-BE49-F238E27FC236}">
                 <a16:creationId xmlns:a16="http://schemas.microsoft.com/office/drawing/2014/main" id="{C10AC117-8D08-4155-B847-9EEEB596EAE7}"/>
               </a:ext>
             </a:extLst>
           </p:cNvPr>
           <p:cNvSpPr>
-            <a:spLocks xmlns:a="http://schemas.openxmlformats.org/drawingml/2006/main" noGrp="1"/>
-          </p:cNvSpPr>
-          <p:nvPr>
-            <p:ph type="ctrTitle" idx="0"/>
+            <a:spLocks noGrp="1"/>
+          </p:cNvSpPr>
+          <p:nvPr>
+            <p:ph type="ctrTitle"/>
           </p:nvPr>
         </p:nvSpPr>
         <p:spPr>
-          <a:xfrm xmlns:a="http://schemas.openxmlformats.org/drawingml/2006/main">
+          <a:xfrm>
             <a:off x="685800" y="2130425"/>
             <a:ext cx="7772400" cy="1470025"/>
           </a:xfrm>
         </p:spPr>
         <p:txBody>
-          <a:bodyPr xmlns:a="http://schemas.openxmlformats.org/drawingml/2006/main"/>
-          <a:lstStyle xmlns:a="http://schemas.openxmlformats.org/drawingml/2006/main"/>
-          <a:p xmlns:a="http://schemas.openxmlformats.org/drawingml/2006/main">
+          <a:bodyPr/>
+          <a:lstStyle/>
+          <a:p>
             <a:r>
               <a:t>Click to edit Master title style</a:t>
             </a:r>
-            <a:endParaRPr/>
           </a:p>
         </p:txBody>
       </p:sp>
       <p:sp>
         <p:nvSpPr>
           <p:cNvPr id="3" name="Subtitle 2">
-            <a:extLst xmlns:a="http://schemas.openxmlformats.org/drawingml/2006/main">
+            <a:extLst>
               <a:ext uri="{FF2B5EF4-FFF2-40B4-BE49-F238E27FC236}">
                 <a16:creationId xmlns:a16="http://schemas.microsoft.com/office/drawing/2014/main" id="{835D75C2-CAEF-4FFF-9AE3-11298FE19BD0}"/>
               </a:ext>
             </a:extLst>
           </p:cNvPr>
           <p:cNvSpPr>
-            <a:spLocks xmlns:a="http://schemas.openxmlformats.org/drawingml/2006/main" noGrp="1"/>
+            <a:spLocks noGrp="1"/>
           </p:cNvSpPr>
           <p:nvPr>
             <p:ph type="subTitle" idx="1"/>
           </p:nvPr>
         </p:nvSpPr>
         <p:spPr>
-          <a:xfrm xmlns:a="http://schemas.openxmlformats.org/drawingml/2006/main">
+          <a:xfrm>
             <a:off x="1371600" y="3886200"/>
             <a:ext cx="6400800" cy="1752600"/>
           </a:xfrm>
         </p:spPr>
         <p:txBody>
-          <a:bodyPr xmlns:a="http://schemas.openxmlformats.org/drawingml/2006/main"/>
-          <a:lstStyle xmlns:a="http://schemas.openxmlformats.org/drawingml/2006/main">
+          <a:bodyPr/>
+          <a:lstStyle>
             <a:lvl1pPr marL="0" indent="0" algn="ctr">
               <a:buNone/>
               <a:defRPr>
@@ -1399,25 +1300,24 @@
               </a:defRPr>
             </a:lvl9pPr>
           </a:lstStyle>
-          <a:p xmlns:a="http://schemas.openxmlformats.org/drawingml/2006/main">
+          <a:p>
             <a:r>
               <a:t>Click to edit Master subtitle style</a:t>
             </a:r>
-            <a:endParaRPr/>
           </a:p>
         </p:txBody>
       </p:sp>
       <p:sp>
         <p:nvSpPr>
           <p:cNvPr id="4" name="Date Placeholder 3">
-            <a:extLst xmlns:a="http://schemas.openxmlformats.org/drawingml/2006/main">
+            <a:extLst>
               <a:ext uri="{FF2B5EF4-FFF2-40B4-BE49-F238E27FC236}">
                 <a16:creationId xmlns:a16="http://schemas.microsoft.com/office/drawing/2014/main" id="{F2F18624-4EC4-4DD5-A951-9107D6F9F0AC}"/>
               </a:ext>
             </a:extLst>
           </p:cNvPr>
           <p:cNvSpPr>
-            <a:spLocks xmlns:a="http://schemas.openxmlformats.org/drawingml/2006/main" noGrp="1"/>
+            <a:spLocks noGrp="1"/>
           </p:cNvSpPr>
           <p:nvPr>
             <p:ph type="dt" idx="10"/>
@@ -1425,11 +1325,11 @@
         </p:nvSpPr>
         <p:spPr/>
         <p:txBody>
-          <a:bodyPr xmlns:a="http://schemas.openxmlformats.org/drawingml/2006/main"/>
-          <a:lstStyle xmlns:a="http://schemas.openxmlformats.org/drawingml/2006/main"/>
-          <a:p xmlns:a="http://schemas.openxmlformats.org/drawingml/2006/main">
+          <a:bodyPr/>
+          <a:lstStyle/>
+          <a:p>
             <a:fld id="{5BCAD085-E8A6-8845-BD4E-CB4CCA059FC4}" type="datetimeFigureOut">
-              <a:t>1/27/13</a:t>
+              <a:t>9/30/2026</a:t>
             </a:fld>
             <a:endParaRPr/>
           </a:p>
@@ -1438,14 +1338,14 @@
       <p:sp>
         <p:nvSpPr>
           <p:cNvPr id="5" name="Footer Placeholder 4">
-            <a:extLst xmlns:a="http://schemas.openxmlformats.org/drawingml/2006/main">
+            <a:extLst>
               <a:ext uri="{FF2B5EF4-FFF2-40B4-BE49-F238E27FC236}">
                 <a16:creationId xmlns:a16="http://schemas.microsoft.com/office/drawing/2014/main" id="{B55017C1-E372-45A3-B587-E519CEB46D7A}"/>
               </a:ext>
             </a:extLst>
           </p:cNvPr>
           <p:cNvSpPr>
-            <a:spLocks xmlns:a="http://schemas.openxmlformats.org/drawingml/2006/main" noGrp="1"/>
+            <a:spLocks noGrp="1"/>
           </p:cNvSpPr>
           <p:nvPr>
             <p:ph type="ftr" idx="11"/>
@@ -1453,9 +1353,9 @@
         </p:nvSpPr>
         <p:spPr/>
         <p:txBody>
-          <a:bodyPr xmlns:a="http://schemas.openxmlformats.org/drawingml/2006/main"/>
-          <a:lstStyle xmlns:a="http://schemas.openxmlformats.org/drawingml/2006/main"/>
-          <a:p xmlns:a="http://schemas.openxmlformats.org/drawingml/2006/main">
+          <a:bodyPr/>
+          <a:lstStyle/>
+          <a:p>
             <a:endParaRPr/>
           </a:p>
         </p:txBody>
@@ -1463,14 +1363,14 @@
       <p:sp>
         <p:nvSpPr>
           <p:cNvPr id="6" name="Slide Number Placeholder 5">
-            <a:extLst xmlns:a="http://schemas.openxmlformats.org/drawingml/2006/main">
+            <a:extLst>
               <a:ext uri="{FF2B5EF4-FFF2-40B4-BE49-F238E27FC236}">
                 <a16:creationId xmlns:a16="http://schemas.microsoft.com/office/drawing/2014/main" id="{9C988A03-A9F7-4328-BC5F-B4251B610708}"/>
               </a:ext>
             </a:extLst>
           </p:cNvPr>
           <p:cNvSpPr>
-            <a:spLocks xmlns:a="http://schemas.openxmlformats.org/drawingml/2006/main" noGrp="1"/>
+            <a:spLocks noGrp="1"/>
           </p:cNvSpPr>
           <p:nvPr>
             <p:ph type="sldNum" idx="12"/>
@@ -1478,9 +1378,9 @@
         </p:nvSpPr>
         <p:spPr/>
         <p:txBody>
-          <a:bodyPr xmlns:a="http://schemas.openxmlformats.org/drawingml/2006/main"/>
-          <a:lstStyle xmlns:a="http://schemas.openxmlformats.org/drawingml/2006/main"/>
-          <a:p xmlns:a="http://schemas.openxmlformats.org/drawingml/2006/main">
+          <a:bodyPr/>
+          <a:lstStyle/>
+          <a:p>
             <a:fld id="{C1FF6DA9-008F-8B48-92A6-B652298478BF}" type="slidenum">
               <a:t>‹#›</a:t>
             </a:fld>
@@ -1490,11 +1390,14 @@
       </p:sp>
     </p:spTree>
   </p:cSld>
+  <p:clrMapOvr>
+    <a:masterClrMapping/>
+  </p:clrMapOvr>
 </p:sldLayout>
 </file>
 
 <file path=ppt/slideLayouts/slideLayout10.xml><?xml version="1.0" encoding="utf-8"?>
-<p:sldLayout xmlns:p="http://schemas.openxmlformats.org/presentationml/2006/main" type="vertTx" preserve="1">
+<p:sldLayout xmlns:a="http://schemas.openxmlformats.org/drawingml/2006/main" xmlns:r="http://schemas.openxmlformats.org/officeDocument/2006/relationships" xmlns:p="http://schemas.openxmlformats.org/presentationml/2006/main" type="vertTx" preserve="1">
   <p:cSld name="Title and Vertical Text">
     <p:spTree>
       <p:nvGrpSpPr>
@@ -1503,47 +1406,51 @@
         <p:nvPr/>
       </p:nvGrpSpPr>
       <p:grpSpPr>
-        <a:xfrm xmlns:a="http://schemas.openxmlformats.org/drawingml/2006/main"/>
+        <a:xfrm>
+          <a:off x="0" y="0"/>
+          <a:ext cx="0" cy="0"/>
+          <a:chOff x="0" y="0"/>
+          <a:chExt cx="0" cy="0"/>
+        </a:xfrm>
       </p:grpSpPr>
       <p:sp>
         <p:nvSpPr>
           <p:cNvPr id="2" name="Title 1">
-            <a:extLst xmlns:a="http://schemas.openxmlformats.org/drawingml/2006/main">
+            <a:extLst>
               <a:ext uri="{FF2B5EF4-FFF2-40B4-BE49-F238E27FC236}">
                 <a16:creationId xmlns:a16="http://schemas.microsoft.com/office/drawing/2014/main" id="{70BD97CC-1B72-415F-9B2F-B2D9CB9D89BD}"/>
               </a:ext>
             </a:extLst>
           </p:cNvPr>
           <p:cNvSpPr>
-            <a:spLocks xmlns:a="http://schemas.openxmlformats.org/drawingml/2006/main" noGrp="1"/>
-          </p:cNvSpPr>
-          <p:nvPr>
-            <p:ph type="title" idx="0"/>
+            <a:spLocks noGrp="1"/>
+          </p:cNvSpPr>
+          <p:nvPr>
+            <p:ph type="title"/>
           </p:nvPr>
         </p:nvSpPr>
         <p:spPr/>
         <p:txBody>
-          <a:bodyPr xmlns:a="http://schemas.openxmlformats.org/drawingml/2006/main"/>
-          <a:lstStyle xmlns:a="http://schemas.openxmlformats.org/drawingml/2006/main"/>
-          <a:p xmlns:a="http://schemas.openxmlformats.org/drawingml/2006/main">
+          <a:bodyPr/>
+          <a:lstStyle/>
+          <a:p>
             <a:r>
               <a:t>Click to edit Master title style</a:t>
             </a:r>
-            <a:endParaRPr/>
           </a:p>
         </p:txBody>
       </p:sp>
       <p:sp>
         <p:nvSpPr>
           <p:cNvPr id="3" name="Vertical Text Placeholder 2">
-            <a:extLst xmlns:a="http://schemas.openxmlformats.org/drawingml/2006/main">
+            <a:extLst>
               <a:ext uri="{FF2B5EF4-FFF2-40B4-BE49-F238E27FC236}">
                 <a16:creationId xmlns:a16="http://schemas.microsoft.com/office/drawing/2014/main" id="{27BA4F75-A3A3-443D-8C09-4BE680471767}"/>
               </a:ext>
             </a:extLst>
           </p:cNvPr>
           <p:cNvSpPr>
-            <a:spLocks xmlns:a="http://schemas.openxmlformats.org/drawingml/2006/main" noGrp="1"/>
+            <a:spLocks noGrp="1"/>
           </p:cNvSpPr>
           <p:nvPr>
             <p:ph type="body" idx="1"/>
@@ -1551,9 +1458,9 @@
         </p:nvSpPr>
         <p:spPr/>
         <p:txBody>
-          <a:bodyPr xmlns:a="http://schemas.openxmlformats.org/drawingml/2006/main" vert="eaVert"/>
-          <a:lstStyle xmlns:a="http://schemas.openxmlformats.org/drawingml/2006/main"/>
-          <a:p xmlns:a="http://schemas.openxmlformats.org/drawingml/2006/main">
+          <a:bodyPr vert="eaVert"/>
+          <a:lstStyle/>
+          <a:p>
             <a:pPr lvl="0">
               <a:buNone/>
             </a:pPr>
@@ -1561,7 +1468,7 @@
               <a:t>Click to edit Master text styles</a:t>
             </a:r>
           </a:p>
-          <a:p xmlns:a="http://schemas.openxmlformats.org/drawingml/2006/main">
+          <a:p>
             <a:pPr lvl="1">
               <a:buNone/>
             </a:pPr>
@@ -1569,7 +1476,7 @@
               <a:t>Second level</a:t>
             </a:r>
           </a:p>
-          <a:p xmlns:a="http://schemas.openxmlformats.org/drawingml/2006/main">
+          <a:p>
             <a:pPr lvl="2">
               <a:buNone/>
             </a:pPr>
@@ -1577,7 +1484,7 @@
               <a:t>Third level</a:t>
             </a:r>
           </a:p>
-          <a:p xmlns:a="http://schemas.openxmlformats.org/drawingml/2006/main">
+          <a:p>
             <a:pPr lvl="3">
               <a:buNone/>
             </a:pPr>
@@ -1585,28 +1492,27 @@
               <a:t>Fourth level</a:t>
             </a:r>
           </a:p>
-          <a:p xmlns:a="http://schemas.openxmlformats.org/drawingml/2006/main">
+          <a:p>
             <a:pPr lvl="4">
               <a:buNone/>
             </a:pPr>
             <a:r>
               <a:t>Fifth level</a:t>
             </a:r>
-            <a:endParaRPr/>
           </a:p>
         </p:txBody>
       </p:sp>
       <p:sp>
         <p:nvSpPr>
           <p:cNvPr id="4" name="Date Placeholder 3">
-            <a:extLst xmlns:a="http://schemas.openxmlformats.org/drawingml/2006/main">
+            <a:extLst>
               <a:ext uri="{FF2B5EF4-FFF2-40B4-BE49-F238E27FC236}">
                 <a16:creationId xmlns:a16="http://schemas.microsoft.com/office/drawing/2014/main" id="{1083FD7B-5E62-47AA-B0A3-862DC306BCA6}"/>
               </a:ext>
             </a:extLst>
           </p:cNvPr>
           <p:cNvSpPr>
-            <a:spLocks xmlns:a="http://schemas.openxmlformats.org/drawingml/2006/main" noGrp="1"/>
+            <a:spLocks noGrp="1"/>
           </p:cNvSpPr>
           <p:nvPr>
             <p:ph type="dt" idx="10"/>
@@ -1614,11 +1520,11 @@
         </p:nvSpPr>
         <p:spPr/>
         <p:txBody>
-          <a:bodyPr xmlns:a="http://schemas.openxmlformats.org/drawingml/2006/main"/>
-          <a:lstStyle xmlns:a="http://schemas.openxmlformats.org/drawingml/2006/main"/>
-          <a:p xmlns:a="http://schemas.openxmlformats.org/drawingml/2006/main">
+          <a:bodyPr/>
+          <a:lstStyle/>
+          <a:p>
             <a:fld id="{5BCAD085-E8A6-8845-BD4E-CB4CCA059FC4}" type="datetimeFigureOut">
-              <a:t>1/27/13</a:t>
+              <a:t>9/30/2026</a:t>
             </a:fld>
             <a:endParaRPr/>
           </a:p>
@@ -1627,14 +1533,14 @@
       <p:sp>
         <p:nvSpPr>
           <p:cNvPr id="5" name="Footer Placeholder 4">
-            <a:extLst xmlns:a="http://schemas.openxmlformats.org/drawingml/2006/main">
+            <a:extLst>
               <a:ext uri="{FF2B5EF4-FFF2-40B4-BE49-F238E27FC236}">
                 <a16:creationId xmlns:a16="http://schemas.microsoft.com/office/drawing/2014/main" id="{92AC57A5-E60E-4696-B3CA-CF3BB6649CAA}"/>
               </a:ext>
             </a:extLst>
           </p:cNvPr>
           <p:cNvSpPr>
-            <a:spLocks xmlns:a="http://schemas.openxmlformats.org/drawingml/2006/main" noGrp="1"/>
+            <a:spLocks noGrp="1"/>
           </p:cNvSpPr>
           <p:nvPr>
             <p:ph type="ftr" idx="11"/>
@@ -1642,9 +1548,9 @@
         </p:nvSpPr>
         <p:spPr/>
         <p:txBody>
-          <a:bodyPr xmlns:a="http://schemas.openxmlformats.org/drawingml/2006/main"/>
-          <a:lstStyle xmlns:a="http://schemas.openxmlformats.org/drawingml/2006/main"/>
-          <a:p xmlns:a="http://schemas.openxmlformats.org/drawingml/2006/main">
+          <a:bodyPr/>
+          <a:lstStyle/>
+          <a:p>
             <a:endParaRPr/>
           </a:p>
         </p:txBody>
@@ -1652,14 +1558,14 @@
       <p:sp>
         <p:nvSpPr>
           <p:cNvPr id="6" name="Slide Number Placeholder 5">
-            <a:extLst xmlns:a="http://schemas.openxmlformats.org/drawingml/2006/main">
+            <a:extLst>
               <a:ext uri="{FF2B5EF4-FFF2-40B4-BE49-F238E27FC236}">
                 <a16:creationId xmlns:a16="http://schemas.microsoft.com/office/drawing/2014/main" id="{AD7161CD-1F82-4728-9CF6-1A18E5E16148}"/>
               </a:ext>
             </a:extLst>
           </p:cNvPr>
           <p:cNvSpPr>
-            <a:spLocks xmlns:a="http://schemas.openxmlformats.org/drawingml/2006/main" noGrp="1"/>
+            <a:spLocks noGrp="1"/>
           </p:cNvSpPr>
           <p:nvPr>
             <p:ph type="sldNum" idx="12"/>
@@ -1667,9 +1573,9 @@
         </p:nvSpPr>
         <p:spPr/>
         <p:txBody>
-          <a:bodyPr xmlns:a="http://schemas.openxmlformats.org/drawingml/2006/main"/>
-          <a:lstStyle xmlns:a="http://schemas.openxmlformats.org/drawingml/2006/main"/>
-          <a:p xmlns:a="http://schemas.openxmlformats.org/drawingml/2006/main">
+          <a:bodyPr/>
+          <a:lstStyle/>
+          <a:p>
             <a:fld id="{C1FF6DA9-008F-8B48-92A6-B652298478BF}" type="slidenum">
               <a:t>‹#›</a:t>
             </a:fld>
@@ -1679,11 +1585,14 @@
       </p:sp>
     </p:spTree>
   </p:cSld>
+  <p:clrMapOvr>
+    <a:masterClrMapping/>
+  </p:clrMapOvr>
 </p:sldLayout>
 </file>
 
 <file path=ppt/slideLayouts/slideLayout11.xml><?xml version="1.0" encoding="utf-8"?>
-<p:sldLayout xmlns:p="http://schemas.openxmlformats.org/presentationml/2006/main" type="vertTitleAndTx" preserve="1">
+<p:sldLayout xmlns:a="http://schemas.openxmlformats.org/drawingml/2006/main" xmlns:r="http://schemas.openxmlformats.org/officeDocument/2006/relationships" xmlns:p="http://schemas.openxmlformats.org/presentationml/2006/main" type="vertTitleAndTx" preserve="1">
   <p:cSld name="Vertical Title and Text">
     <p:spTree>
       <p:nvGrpSpPr>
@@ -1692,67 +1601,71 @@
         <p:nvPr/>
       </p:nvGrpSpPr>
       <p:grpSpPr>
-        <a:xfrm xmlns:a="http://schemas.openxmlformats.org/drawingml/2006/main"/>
+        <a:xfrm>
+          <a:off x="0" y="0"/>
+          <a:ext cx="0" cy="0"/>
+          <a:chOff x="0" y="0"/>
+          <a:chExt cx="0" cy="0"/>
+        </a:xfrm>
       </p:grpSpPr>
       <p:sp>
         <p:nvSpPr>
           <p:cNvPr id="2" name="Vertical Title 1">
-            <a:extLst xmlns:a="http://schemas.openxmlformats.org/drawingml/2006/main">
+            <a:extLst>
               <a:ext uri="{FF2B5EF4-FFF2-40B4-BE49-F238E27FC236}">
                 <a16:creationId xmlns:a16="http://schemas.microsoft.com/office/drawing/2014/main" id="{46CBE873-DC51-45EF-9C3B-DF87E3545BA1}"/>
               </a:ext>
             </a:extLst>
           </p:cNvPr>
           <p:cNvSpPr>
-            <a:spLocks xmlns:a="http://schemas.openxmlformats.org/drawingml/2006/main" noGrp="1"/>
-          </p:cNvSpPr>
-          <p:nvPr>
-            <p:ph type="title" idx="0"/>
+            <a:spLocks noGrp="1"/>
+          </p:cNvSpPr>
+          <p:nvPr>
+            <p:ph type="title"/>
           </p:nvPr>
         </p:nvSpPr>
         <p:spPr>
-          <a:xfrm xmlns:a="http://schemas.openxmlformats.org/drawingml/2006/main">
+          <a:xfrm>
             <a:off x="6629400" y="274638"/>
             <a:ext cx="2057400" cy="5851525"/>
           </a:xfrm>
         </p:spPr>
         <p:txBody>
-          <a:bodyPr xmlns:a="http://schemas.openxmlformats.org/drawingml/2006/main" vert="eaVert"/>
-          <a:lstStyle xmlns:a="http://schemas.openxmlformats.org/drawingml/2006/main"/>
-          <a:p xmlns:a="http://schemas.openxmlformats.org/drawingml/2006/main">
+          <a:bodyPr vert="eaVert"/>
+          <a:lstStyle/>
+          <a:p>
             <a:r>
               <a:t>Click to edit Master title style</a:t>
             </a:r>
-            <a:endParaRPr/>
           </a:p>
         </p:txBody>
       </p:sp>
       <p:sp>
         <p:nvSpPr>
           <p:cNvPr id="3" name="Vertical Text Placeholder 2">
-            <a:extLst xmlns:a="http://schemas.openxmlformats.org/drawingml/2006/main">
+            <a:extLst>
               <a:ext uri="{FF2B5EF4-FFF2-40B4-BE49-F238E27FC236}">
                 <a16:creationId xmlns:a16="http://schemas.microsoft.com/office/drawing/2014/main" id="{2DD36565-9138-4FDD-9594-A99426347639}"/>
               </a:ext>
             </a:extLst>
           </p:cNvPr>
           <p:cNvSpPr>
-            <a:spLocks xmlns:a="http://schemas.openxmlformats.org/drawingml/2006/main" noGrp="1"/>
+            <a:spLocks noGrp="1"/>
           </p:cNvSpPr>
           <p:nvPr>
             <p:ph type="body" idx="1"/>
           </p:nvPr>
         </p:nvSpPr>
         <p:spPr>
-          <a:xfrm xmlns:a="http://schemas.openxmlformats.org/drawingml/2006/main">
+          <a:xfrm>
             <a:off x="457200" y="274638"/>
             <a:ext cx="6019800" cy="5851525"/>
           </a:xfrm>
         </p:spPr>
         <p:txBody>
-          <a:bodyPr xmlns:a="http://schemas.openxmlformats.org/drawingml/2006/main" vert="eaVert"/>
-          <a:lstStyle xmlns:a="http://schemas.openxmlformats.org/drawingml/2006/main"/>
-          <a:p xmlns:a="http://schemas.openxmlformats.org/drawingml/2006/main">
+          <a:bodyPr vert="eaVert"/>
+          <a:lstStyle/>
+          <a:p>
             <a:pPr lvl="0">
               <a:buNone/>
             </a:pPr>
@@ -1760,7 +1673,7 @@
               <a:t>Click to edit Master text styles</a:t>
             </a:r>
           </a:p>
-          <a:p xmlns:a="http://schemas.openxmlformats.org/drawingml/2006/main">
+          <a:p>
             <a:pPr lvl="1">
               <a:buNone/>
             </a:pPr>
@@ -1768,7 +1681,7 @@
               <a:t>Second level</a:t>
             </a:r>
           </a:p>
-          <a:p xmlns:a="http://schemas.openxmlformats.org/drawingml/2006/main">
+          <a:p>
             <a:pPr lvl="2">
               <a:buNone/>
             </a:pPr>
@@ -1776,7 +1689,7 @@
               <a:t>Third level</a:t>
             </a:r>
           </a:p>
-          <a:p xmlns:a="http://schemas.openxmlformats.org/drawingml/2006/main">
+          <a:p>
             <a:pPr lvl="3">
               <a:buNone/>
             </a:pPr>
@@ -1784,28 +1697,27 @@
               <a:t>Fourth level</a:t>
             </a:r>
           </a:p>
-          <a:p xmlns:a="http://schemas.openxmlformats.org/drawingml/2006/main">
+          <a:p>
             <a:pPr lvl="4">
               <a:buNone/>
             </a:pPr>
             <a:r>
               <a:t>Fifth level</a:t>
             </a:r>
-            <a:endParaRPr/>
           </a:p>
         </p:txBody>
       </p:sp>
       <p:sp>
         <p:nvSpPr>
           <p:cNvPr id="4" name="Date Placeholder 3">
-            <a:extLst xmlns:a="http://schemas.openxmlformats.org/drawingml/2006/main">
+            <a:extLst>
               <a:ext uri="{FF2B5EF4-FFF2-40B4-BE49-F238E27FC236}">
                 <a16:creationId xmlns:a16="http://schemas.microsoft.com/office/drawing/2014/main" id="{5C7E0914-88A5-4B03-B38E-9B245016752F}"/>
               </a:ext>
             </a:extLst>
           </p:cNvPr>
           <p:cNvSpPr>
-            <a:spLocks xmlns:a="http://schemas.openxmlformats.org/drawingml/2006/main" noGrp="1"/>
+            <a:spLocks noGrp="1"/>
           </p:cNvSpPr>
           <p:nvPr>
             <p:ph type="dt" idx="10"/>
@@ -1813,11 +1725,11 @@
         </p:nvSpPr>
         <p:spPr/>
         <p:txBody>
-          <a:bodyPr xmlns:a="http://schemas.openxmlformats.org/drawingml/2006/main"/>
-          <a:lstStyle xmlns:a="http://schemas.openxmlformats.org/drawingml/2006/main"/>
-          <a:p xmlns:a="http://schemas.openxmlformats.org/drawingml/2006/main">
+          <a:bodyPr/>
+          <a:lstStyle/>
+          <a:p>
             <a:fld id="{5BCAD085-E8A6-8845-BD4E-CB4CCA059FC4}" type="datetimeFigureOut">
-              <a:t>1/27/13</a:t>
+              <a:t>9/30/2026</a:t>
             </a:fld>
             <a:endParaRPr/>
           </a:p>
@@ -1826,14 +1738,14 @@
       <p:sp>
         <p:nvSpPr>
           <p:cNvPr id="5" name="Footer Placeholder 4">
-            <a:extLst xmlns:a="http://schemas.openxmlformats.org/drawingml/2006/main">
+            <a:extLst>
               <a:ext uri="{FF2B5EF4-FFF2-40B4-BE49-F238E27FC236}">
                 <a16:creationId xmlns:a16="http://schemas.microsoft.com/office/drawing/2014/main" id="{5167CD24-4CEA-40EF-A527-B9718E21AA68}"/>
               </a:ext>
             </a:extLst>
           </p:cNvPr>
           <p:cNvSpPr>
-            <a:spLocks xmlns:a="http://schemas.openxmlformats.org/drawingml/2006/main" noGrp="1"/>
+            <a:spLocks noGrp="1"/>
           </p:cNvSpPr>
           <p:nvPr>
             <p:ph type="ftr" idx="11"/>
@@ -1841,9 +1753,9 @@
         </p:nvSpPr>
         <p:spPr/>
         <p:txBody>
-          <a:bodyPr xmlns:a="http://schemas.openxmlformats.org/drawingml/2006/main"/>
-          <a:lstStyle xmlns:a="http://schemas.openxmlformats.org/drawingml/2006/main"/>
-          <a:p xmlns:a="http://schemas.openxmlformats.org/drawingml/2006/main">
+          <a:bodyPr/>
+          <a:lstStyle/>
+          <a:p>
             <a:endParaRPr/>
           </a:p>
         </p:txBody>
@@ -1851,14 +1763,14 @@
       <p:sp>
         <p:nvSpPr>
           <p:cNvPr id="6" name="Slide Number Placeholder 5">
-            <a:extLst xmlns:a="http://schemas.openxmlformats.org/drawingml/2006/main">
+            <a:extLst>
               <a:ext uri="{FF2B5EF4-FFF2-40B4-BE49-F238E27FC236}">
                 <a16:creationId xmlns:a16="http://schemas.microsoft.com/office/drawing/2014/main" id="{746E67A8-71B4-4597-83FE-6CD4469172B7}"/>
               </a:ext>
             </a:extLst>
           </p:cNvPr>
           <p:cNvSpPr>
-            <a:spLocks xmlns:a="http://schemas.openxmlformats.org/drawingml/2006/main" noGrp="1"/>
+            <a:spLocks noGrp="1"/>
           </p:cNvSpPr>
           <p:nvPr>
             <p:ph type="sldNum" idx="12"/>
@@ -1866,9 +1778,9 @@
         </p:nvSpPr>
         <p:spPr/>
         <p:txBody>
-          <a:bodyPr xmlns:a="http://schemas.openxmlformats.org/drawingml/2006/main"/>
-          <a:lstStyle xmlns:a="http://schemas.openxmlformats.org/drawingml/2006/main"/>
-          <a:p xmlns:a="http://schemas.openxmlformats.org/drawingml/2006/main">
+          <a:bodyPr/>
+          <a:lstStyle/>
+          <a:p>
             <a:fld id="{C1FF6DA9-008F-8B48-92A6-B652298478BF}" type="slidenum">
               <a:t>‹#›</a:t>
             </a:fld>
@@ -1878,11 +1790,14 @@
       </p:sp>
     </p:spTree>
   </p:cSld>
+  <p:clrMapOvr>
+    <a:masterClrMapping/>
+  </p:clrMapOvr>
 </p:sldLayout>
 </file>
 
 <file path=ppt/slideLayouts/slideLayout2.xml><?xml version="1.0" encoding="utf-8"?>
-<p:sldLayout xmlns:p="http://schemas.openxmlformats.org/presentationml/2006/main" type="obj" preserve="1">
+<p:sldLayout xmlns:a="http://schemas.openxmlformats.org/drawingml/2006/main" xmlns:r="http://schemas.openxmlformats.org/officeDocument/2006/relationships" xmlns:p="http://schemas.openxmlformats.org/presentationml/2006/main" type="obj" preserve="1">
   <p:cSld name="Title and Content">
     <p:spTree>
       <p:nvGrpSpPr>
@@ -1891,47 +1806,51 @@
         <p:nvPr/>
       </p:nvGrpSpPr>
       <p:grpSpPr>
-        <a:xfrm xmlns:a="http://schemas.openxmlformats.org/drawingml/2006/main"/>
+        <a:xfrm>
+          <a:off x="0" y="0"/>
+          <a:ext cx="0" cy="0"/>
+          <a:chOff x="0" y="0"/>
+          <a:chExt cx="0" cy="0"/>
+        </a:xfrm>
       </p:grpSpPr>
       <p:sp>
         <p:nvSpPr>
           <p:cNvPr id="2" name="Title 1">
-            <a:extLst xmlns:a="http://schemas.openxmlformats.org/drawingml/2006/main">
+            <a:extLst>
               <a:ext uri="{FF2B5EF4-FFF2-40B4-BE49-F238E27FC236}">
                 <a16:creationId xmlns:a16="http://schemas.microsoft.com/office/drawing/2014/main" id="{552FD0E0-8456-4C69-B8BE-DA474090FB5C}"/>
               </a:ext>
             </a:extLst>
           </p:cNvPr>
           <p:cNvSpPr>
-            <a:spLocks xmlns:a="http://schemas.openxmlformats.org/drawingml/2006/main" noGrp="1"/>
-          </p:cNvSpPr>
-          <p:nvPr>
-            <p:ph type="title" idx="0"/>
+            <a:spLocks noGrp="1"/>
+          </p:cNvSpPr>
+          <p:nvPr>
+            <p:ph type="title"/>
           </p:nvPr>
         </p:nvSpPr>
         <p:spPr/>
         <p:txBody>
-          <a:bodyPr xmlns:a="http://schemas.openxmlformats.org/drawingml/2006/main"/>
-          <a:lstStyle xmlns:a="http://schemas.openxmlformats.org/drawingml/2006/main"/>
-          <a:p xmlns:a="http://schemas.openxmlformats.org/drawingml/2006/main">
+          <a:bodyPr/>
+          <a:lstStyle/>
+          <a:p>
             <a:r>
               <a:t>Click to edit Master title style</a:t>
             </a:r>
-            <a:endParaRPr/>
           </a:p>
         </p:txBody>
       </p:sp>
       <p:sp>
         <p:nvSpPr>
           <p:cNvPr id="3" name="Content Placeholder 2">
-            <a:extLst xmlns:a="http://schemas.openxmlformats.org/drawingml/2006/main">
+            <a:extLst>
               <a:ext uri="{FF2B5EF4-FFF2-40B4-BE49-F238E27FC236}">
                 <a16:creationId xmlns:a16="http://schemas.microsoft.com/office/drawing/2014/main" id="{4B473754-89DA-433C-8AC0-0DCC58D360F3}"/>
               </a:ext>
             </a:extLst>
           </p:cNvPr>
           <p:cNvSpPr>
-            <a:spLocks xmlns:a="http://schemas.openxmlformats.org/drawingml/2006/main" noGrp="1"/>
+            <a:spLocks noGrp="1"/>
           </p:cNvSpPr>
           <p:nvPr>
             <p:ph idx="1"/>
@@ -1939,9 +1858,9 @@
         </p:nvSpPr>
         <p:spPr/>
         <p:txBody>
-          <a:bodyPr xmlns:a="http://schemas.openxmlformats.org/drawingml/2006/main"/>
-          <a:lstStyle xmlns:a="http://schemas.openxmlformats.org/drawingml/2006/main"/>
-          <a:p xmlns:a="http://schemas.openxmlformats.org/drawingml/2006/main">
+          <a:bodyPr/>
+          <a:lstStyle/>
+          <a:p>
             <a:pPr lvl="0">
               <a:buNone/>
             </a:pPr>
@@ -1949,7 +1868,7 @@
               <a:t>Click to edit Master text styles</a:t>
             </a:r>
           </a:p>
-          <a:p xmlns:a="http://schemas.openxmlformats.org/drawingml/2006/main">
+          <a:p>
             <a:pPr lvl="1">
               <a:buNone/>
             </a:pPr>
@@ -1957,7 +1876,7 @@
               <a:t>Second level</a:t>
             </a:r>
           </a:p>
-          <a:p xmlns:a="http://schemas.openxmlformats.org/drawingml/2006/main">
+          <a:p>
             <a:pPr lvl="2">
               <a:buNone/>
             </a:pPr>
@@ -1965,7 +1884,7 @@
               <a:t>Third level</a:t>
             </a:r>
           </a:p>
-          <a:p xmlns:a="http://schemas.openxmlformats.org/drawingml/2006/main">
+          <a:p>
             <a:pPr lvl="3">
               <a:buNone/>
             </a:pPr>
@@ -1973,28 +1892,27 @@
               <a:t>Fourth level</a:t>
             </a:r>
           </a:p>
-          <a:p xmlns:a="http://schemas.openxmlformats.org/drawingml/2006/main">
+          <a:p>
             <a:pPr lvl="4">
               <a:buNone/>
             </a:pPr>
             <a:r>
               <a:t>Fifth level</a:t>
             </a:r>
-            <a:endParaRPr/>
           </a:p>
         </p:txBody>
       </p:sp>
       <p:sp>
         <p:nvSpPr>
           <p:cNvPr id="4" name="Date Placeholder 3">
-            <a:extLst xmlns:a="http://schemas.openxmlformats.org/drawingml/2006/main">
+            <a:extLst>
               <a:ext uri="{FF2B5EF4-FFF2-40B4-BE49-F238E27FC236}">
                 <a16:creationId xmlns:a16="http://schemas.microsoft.com/office/drawing/2014/main" id="{AF7FAFEE-0386-416E-94EF-B47DC0F307BD}"/>
               </a:ext>
             </a:extLst>
           </p:cNvPr>
           <p:cNvSpPr>
-            <a:spLocks xmlns:a="http://schemas.openxmlformats.org/drawingml/2006/main" noGrp="1"/>
+            <a:spLocks noGrp="1"/>
           </p:cNvSpPr>
           <p:nvPr>
             <p:ph type="dt" idx="10"/>
@@ -2002,11 +1920,11 @@
         </p:nvSpPr>
         <p:spPr/>
         <p:txBody>
-          <a:bodyPr xmlns:a="http://schemas.openxmlformats.org/drawingml/2006/main"/>
-          <a:lstStyle xmlns:a="http://schemas.openxmlformats.org/drawingml/2006/main"/>
-          <a:p xmlns:a="http://schemas.openxmlformats.org/drawingml/2006/main">
+          <a:bodyPr/>
+          <a:lstStyle/>
+          <a:p>
             <a:fld id="{5BCAD085-E8A6-8845-BD4E-CB4CCA059FC4}" type="datetimeFigureOut">
-              <a:t>1/27/13</a:t>
+              <a:t>9/30/2026</a:t>
             </a:fld>
             <a:endParaRPr/>
           </a:p>
@@ -2015,14 +1933,14 @@
       <p:sp>
         <p:nvSpPr>
           <p:cNvPr id="5" name="Footer Placeholder 4">
-            <a:extLst xmlns:a="http://schemas.openxmlformats.org/drawingml/2006/main">
+            <a:extLst>
               <a:ext uri="{FF2B5EF4-FFF2-40B4-BE49-F238E27FC236}">
                 <a16:creationId xmlns:a16="http://schemas.microsoft.com/office/drawing/2014/main" id="{8BB320DE-706F-4B74-B372-AFC8701A3160}"/>
               </a:ext>
             </a:extLst>
           </p:cNvPr>
           <p:cNvSpPr>
-            <a:spLocks xmlns:a="http://schemas.openxmlformats.org/drawingml/2006/main" noGrp="1"/>
+            <a:spLocks noGrp="1"/>
           </p:cNvSpPr>
           <p:nvPr>
             <p:ph type="ftr" idx="11"/>
@@ -2030,9 +1948,9 @@
         </p:nvSpPr>
         <p:spPr/>
         <p:txBody>
-          <a:bodyPr xmlns:a="http://schemas.openxmlformats.org/drawingml/2006/main"/>
-          <a:lstStyle xmlns:a="http://schemas.openxmlformats.org/drawingml/2006/main"/>
-          <a:p xmlns:a="http://schemas.openxmlformats.org/drawingml/2006/main">
+          <a:bodyPr/>
+          <a:lstStyle/>
+          <a:p>
             <a:endParaRPr/>
           </a:p>
         </p:txBody>
@@ -2040,14 +1958,14 @@
       <p:sp>
         <p:nvSpPr>
           <p:cNvPr id="6" name="Slide Number Placeholder 5">
-            <a:extLst xmlns:a="http://schemas.openxmlformats.org/drawingml/2006/main">
+            <a:extLst>
               <a:ext uri="{FF2B5EF4-FFF2-40B4-BE49-F238E27FC236}">
                 <a16:creationId xmlns:a16="http://schemas.microsoft.com/office/drawing/2014/main" id="{4C6C79A1-FB41-4E5F-B987-49569A3DFCDC}"/>
               </a:ext>
             </a:extLst>
           </p:cNvPr>
           <p:cNvSpPr>
-            <a:spLocks xmlns:a="http://schemas.openxmlformats.org/drawingml/2006/main" noGrp="1"/>
+            <a:spLocks noGrp="1"/>
           </p:cNvSpPr>
           <p:nvPr>
             <p:ph type="sldNum" idx="12"/>
@@ -2055,9 +1973,9 @@
         </p:nvSpPr>
         <p:spPr/>
         <p:txBody>
-          <a:bodyPr xmlns:a="http://schemas.openxmlformats.org/drawingml/2006/main"/>
-          <a:lstStyle xmlns:a="http://schemas.openxmlformats.org/drawingml/2006/main"/>
-          <a:p xmlns:a="http://schemas.openxmlformats.org/drawingml/2006/main">
+          <a:bodyPr/>
+          <a:lstStyle/>
+          <a:p>
             <a:fld id="{C1FF6DA9-008F-8B48-92A6-B652298478BF}" type="slidenum">
               <a:t>‹#›</a:t>
             </a:fld>
@@ -2067,11 +1985,14 @@
       </p:sp>
     </p:spTree>
   </p:cSld>
+  <p:clrMapOvr>
+    <a:masterClrMapping/>
+  </p:clrMapOvr>
 </p:sldLayout>
 </file>
 
 <file path=ppt/slideLayouts/slideLayout3.xml><?xml version="1.0" encoding="utf-8"?>
-<p:sldLayout xmlns:p="http://schemas.openxmlformats.org/presentationml/2006/main" type="secHead" preserve="1">
+<p:sldLayout xmlns:a="http://schemas.openxmlformats.org/drawingml/2006/main" xmlns:r="http://schemas.openxmlformats.org/officeDocument/2006/relationships" xmlns:p="http://schemas.openxmlformats.org/presentationml/2006/main" type="secHead" preserve="1">
   <p:cSld name="Section Header">
     <p:spTree>
       <p:nvGrpSpPr>
@@ -2080,71 +2001,75 @@
         <p:nvPr/>
       </p:nvGrpSpPr>
       <p:grpSpPr>
-        <a:xfrm xmlns:a="http://schemas.openxmlformats.org/drawingml/2006/main"/>
+        <a:xfrm>
+          <a:off x="0" y="0"/>
+          <a:ext cx="0" cy="0"/>
+          <a:chOff x="0" y="0"/>
+          <a:chExt cx="0" cy="0"/>
+        </a:xfrm>
       </p:grpSpPr>
       <p:sp>
         <p:nvSpPr>
           <p:cNvPr id="2" name="Title 1">
-            <a:extLst xmlns:a="http://schemas.openxmlformats.org/drawingml/2006/main">
+            <a:extLst>
               <a:ext uri="{FF2B5EF4-FFF2-40B4-BE49-F238E27FC236}">
                 <a16:creationId xmlns:a16="http://schemas.microsoft.com/office/drawing/2014/main" id="{D2990448-909E-424F-A2C8-B3DBD0A35706}"/>
               </a:ext>
             </a:extLst>
           </p:cNvPr>
           <p:cNvSpPr>
-            <a:spLocks xmlns:a="http://schemas.openxmlformats.org/drawingml/2006/main" noGrp="1"/>
-          </p:cNvSpPr>
-          <p:nvPr>
-            <p:ph type="title" idx="0"/>
+            <a:spLocks noGrp="1"/>
+          </p:cNvSpPr>
+          <p:nvPr>
+            <p:ph type="title"/>
           </p:nvPr>
         </p:nvSpPr>
         <p:spPr>
-          <a:xfrm xmlns:a="http://schemas.openxmlformats.org/drawingml/2006/main">
+          <a:xfrm>
             <a:off x="722313" y="4406900"/>
             <a:ext cx="7772400" cy="1362075"/>
           </a:xfrm>
         </p:spPr>
         <p:txBody>
-          <a:bodyPr xmlns:a="http://schemas.openxmlformats.org/drawingml/2006/main" anchor="t"/>
-          <a:lstStyle xmlns:a="http://schemas.openxmlformats.org/drawingml/2006/main">
+          <a:bodyPr anchor="t"/>
+          <a:lstStyle>
             <a:lvl1pPr algn="l">
               <a:buNone/>
               <a:defRPr sz="4000" b="1" cap="all"/>
             </a:lvl1pPr>
           </a:lstStyle>
-          <a:p xmlns:a="http://schemas.openxmlformats.org/drawingml/2006/main">
+          <a:p>
             <a:r>
               <a:t>Click to edit Master title style</a:t>
             </a:r>
-            <a:endParaRPr/>
           </a:p>
         </p:txBody>
       </p:sp>
       <p:sp>
         <p:nvSpPr>
           <p:cNvPr id="3" name="Text Placeholder 2">
-            <a:extLst xmlns:a="http://schemas.openxmlformats.org/drawingml/2006/main">
+            <a:extLst>
               <a:ext uri="{FF2B5EF4-FFF2-40B4-BE49-F238E27FC236}">
                 <a16:creationId xmlns:a16="http://schemas.microsoft.com/office/drawing/2014/main" id="{02C810C5-A600-4F23-B502-49674D0C5320}"/>
               </a:ext>
             </a:extLst>
           </p:cNvPr>
           <p:cNvSpPr>
-            <a:spLocks xmlns:a="http://schemas.openxmlformats.org/drawingml/2006/main" noGrp="1"/>
+            <a:spLocks noGrp="1"/>
           </p:cNvSpPr>
           <p:nvPr>
             <p:ph type="body" idx="1"/>
           </p:nvPr>
         </p:nvSpPr>
         <p:spPr>
-          <a:xfrm xmlns:a="http://schemas.openxmlformats.org/drawingml/2006/main">
+          <a:xfrm>
             <a:off x="722313" y="2906713"/>
             <a:ext cx="7772400" cy="1500187"/>
           </a:xfrm>
         </p:spPr>
         <p:txBody>
-          <a:bodyPr xmlns:a="http://schemas.openxmlformats.org/drawingml/2006/main" anchor="b"/>
-          <a:lstStyle xmlns:a="http://schemas.openxmlformats.org/drawingml/2006/main">
+          <a:bodyPr anchor="b"/>
+          <a:lstStyle>
             <a:lvl1pPr marL="0" indent="0">
               <a:buNone/>
               <a:defRPr sz="2000">
@@ -2236,7 +2161,7 @@
               </a:defRPr>
             </a:lvl9pPr>
           </a:lstStyle>
-          <a:p xmlns:a="http://schemas.openxmlformats.org/drawingml/2006/main">
+          <a:p>
             <a:pPr lvl="0">
               <a:buNone/>
             </a:pPr>
@@ -2249,14 +2174,14 @@
       <p:sp>
         <p:nvSpPr>
           <p:cNvPr id="4" name="Date Placeholder 3">
-            <a:extLst xmlns:a="http://schemas.openxmlformats.org/drawingml/2006/main">
+            <a:extLst>
               <a:ext uri="{FF2B5EF4-FFF2-40B4-BE49-F238E27FC236}">
                 <a16:creationId xmlns:a16="http://schemas.microsoft.com/office/drawing/2014/main" id="{ED62B62E-82AB-47E4-A290-97736A546DC6}"/>
               </a:ext>
             </a:extLst>
           </p:cNvPr>
           <p:cNvSpPr>
-            <a:spLocks xmlns:a="http://schemas.openxmlformats.org/drawingml/2006/main" noGrp="1"/>
+            <a:spLocks noGrp="1"/>
           </p:cNvSpPr>
           <p:nvPr>
             <p:ph type="dt" idx="10"/>
@@ -2264,11 +2189,11 @@
         </p:nvSpPr>
         <p:spPr/>
         <p:txBody>
-          <a:bodyPr xmlns:a="http://schemas.openxmlformats.org/drawingml/2006/main"/>
-          <a:lstStyle xmlns:a="http://schemas.openxmlformats.org/drawingml/2006/main"/>
-          <a:p xmlns:a="http://schemas.openxmlformats.org/drawingml/2006/main">
+          <a:bodyPr/>
+          <a:lstStyle/>
+          <a:p>
             <a:fld id="{5BCAD085-E8A6-8845-BD4E-CB4CCA059FC4}" type="datetimeFigureOut">
-              <a:t>1/27/13</a:t>
+              <a:t>9/30/2026</a:t>
             </a:fld>
             <a:endParaRPr/>
           </a:p>
@@ -2277,14 +2202,14 @@
       <p:sp>
         <p:nvSpPr>
           <p:cNvPr id="5" name="Footer Placeholder 4">
-            <a:extLst xmlns:a="http://schemas.openxmlformats.org/drawingml/2006/main">
+            <a:extLst>
               <a:ext uri="{FF2B5EF4-FFF2-40B4-BE49-F238E27FC236}">
                 <a16:creationId xmlns:a16="http://schemas.microsoft.com/office/drawing/2014/main" id="{BAA0E975-8825-4B52-867C-98D5E9F13717}"/>
               </a:ext>
             </a:extLst>
           </p:cNvPr>
           <p:cNvSpPr>
-            <a:spLocks xmlns:a="http://schemas.openxmlformats.org/drawingml/2006/main" noGrp="1"/>
+            <a:spLocks noGrp="1"/>
           </p:cNvSpPr>
           <p:nvPr>
             <p:ph type="ftr" idx="11"/>
@@ -2292,9 +2217,9 @@
         </p:nvSpPr>
         <p:spPr/>
         <p:txBody>
-          <a:bodyPr xmlns:a="http://schemas.openxmlformats.org/drawingml/2006/main"/>
-          <a:lstStyle xmlns:a="http://schemas.openxmlformats.org/drawingml/2006/main"/>
-          <a:p xmlns:a="http://schemas.openxmlformats.org/drawingml/2006/main">
+          <a:bodyPr/>
+          <a:lstStyle/>
+          <a:p>
             <a:endParaRPr/>
           </a:p>
         </p:txBody>
@@ -2302,14 +2227,14 @@
       <p:sp>
         <p:nvSpPr>
           <p:cNvPr id="6" name="Slide Number Placeholder 5">
-            <a:extLst xmlns:a="http://schemas.openxmlformats.org/drawingml/2006/main">
+            <a:extLst>
               <a:ext uri="{FF2B5EF4-FFF2-40B4-BE49-F238E27FC236}">
                 <a16:creationId xmlns:a16="http://schemas.microsoft.com/office/drawing/2014/main" id="{D469E6E7-5C7A-4CD1-AFC2-EFE7E54BD51C}"/>
               </a:ext>
             </a:extLst>
           </p:cNvPr>
           <p:cNvSpPr>
-            <a:spLocks xmlns:a="http://schemas.openxmlformats.org/drawingml/2006/main" noGrp="1"/>
+            <a:spLocks noGrp="1"/>
           </p:cNvSpPr>
           <p:nvPr>
             <p:ph type="sldNum" idx="12"/>
@@ -2317,9 +2242,9 @@
         </p:nvSpPr>
         <p:spPr/>
         <p:txBody>
-          <a:bodyPr xmlns:a="http://schemas.openxmlformats.org/drawingml/2006/main"/>
-          <a:lstStyle xmlns:a="http://schemas.openxmlformats.org/drawingml/2006/main"/>
-          <a:p xmlns:a="http://schemas.openxmlformats.org/drawingml/2006/main">
+          <a:bodyPr/>
+          <a:lstStyle/>
+          <a:p>
             <a:fld id="{C1FF6DA9-008F-8B48-92A6-B652298478BF}" type="slidenum">
               <a:t>‹#›</a:t>
             </a:fld>
@@ -2329,11 +2254,14 @@
       </p:sp>
     </p:spTree>
   </p:cSld>
+  <p:clrMapOvr>
+    <a:masterClrMapping/>
+  </p:clrMapOvr>
 </p:sldLayout>
 </file>
 
 <file path=ppt/slideLayouts/slideLayout4.xml><?xml version="1.0" encoding="utf-8"?>
-<p:sldLayout xmlns:p="http://schemas.openxmlformats.org/presentationml/2006/main" type="twoObj" preserve="1">
+<p:sldLayout xmlns:a="http://schemas.openxmlformats.org/drawingml/2006/main" xmlns:r="http://schemas.openxmlformats.org/officeDocument/2006/relationships" xmlns:p="http://schemas.openxmlformats.org/presentationml/2006/main" type="twoObj" preserve="1">
   <p:cSld name="Two Content">
     <p:spTree>
       <p:nvGrpSpPr>
@@ -2342,61 +2270,65 @@
         <p:nvPr/>
       </p:nvGrpSpPr>
       <p:grpSpPr>
-        <a:xfrm xmlns:a="http://schemas.openxmlformats.org/drawingml/2006/main"/>
+        <a:xfrm>
+          <a:off x="0" y="0"/>
+          <a:ext cx="0" cy="0"/>
+          <a:chOff x="0" y="0"/>
+          <a:chExt cx="0" cy="0"/>
+        </a:xfrm>
       </p:grpSpPr>
       <p:sp>
         <p:nvSpPr>
           <p:cNvPr id="2" name="Title 1">
-            <a:extLst xmlns:a="http://schemas.openxmlformats.org/drawingml/2006/main">
+            <a:extLst>
               <a:ext uri="{FF2B5EF4-FFF2-40B4-BE49-F238E27FC236}">
                 <a16:creationId xmlns:a16="http://schemas.microsoft.com/office/drawing/2014/main" id="{23E4F3B5-3299-4C89-ABFF-7B2066C97DD9}"/>
               </a:ext>
             </a:extLst>
           </p:cNvPr>
           <p:cNvSpPr>
-            <a:spLocks xmlns:a="http://schemas.openxmlformats.org/drawingml/2006/main" noGrp="1"/>
-          </p:cNvSpPr>
-          <p:nvPr>
-            <p:ph type="title" idx="0"/>
+            <a:spLocks noGrp="1"/>
+          </p:cNvSpPr>
+          <p:nvPr>
+            <p:ph type="title"/>
           </p:nvPr>
         </p:nvSpPr>
         <p:spPr/>
         <p:txBody>
-          <a:bodyPr xmlns:a="http://schemas.openxmlformats.org/drawingml/2006/main"/>
-          <a:lstStyle xmlns:a="http://schemas.openxmlformats.org/drawingml/2006/main"/>
-          <a:p xmlns:a="http://schemas.openxmlformats.org/drawingml/2006/main">
+          <a:bodyPr/>
+          <a:lstStyle/>
+          <a:p>
             <a:r>
               <a:t>Click to edit Master title style</a:t>
             </a:r>
-            <a:endParaRPr/>
           </a:p>
         </p:txBody>
       </p:sp>
       <p:sp>
         <p:nvSpPr>
           <p:cNvPr id="3" name="Content Placeholder 2">
-            <a:extLst xmlns:a="http://schemas.openxmlformats.org/drawingml/2006/main">
+            <a:extLst>
               <a:ext uri="{FF2B5EF4-FFF2-40B4-BE49-F238E27FC236}">
                 <a16:creationId xmlns:a16="http://schemas.microsoft.com/office/drawing/2014/main" id="{B62B0995-3416-4235-993D-8B9D568CDD80}"/>
               </a:ext>
             </a:extLst>
           </p:cNvPr>
           <p:cNvSpPr>
-            <a:spLocks xmlns:a="http://schemas.openxmlformats.org/drawingml/2006/main" noGrp="1"/>
+            <a:spLocks noGrp="1"/>
           </p:cNvSpPr>
           <p:nvPr>
             <p:ph idx="1"/>
           </p:nvPr>
         </p:nvSpPr>
         <p:spPr>
-          <a:xfrm xmlns:a="http://schemas.openxmlformats.org/drawingml/2006/main">
+          <a:xfrm>
             <a:off x="457200" y="1600200"/>
             <a:ext cx="4038600" cy="4525963"/>
           </a:xfrm>
         </p:spPr>
         <p:txBody>
-          <a:bodyPr xmlns:a="http://schemas.openxmlformats.org/drawingml/2006/main"/>
-          <a:lstStyle xmlns:a="http://schemas.openxmlformats.org/drawingml/2006/main">
+          <a:bodyPr/>
+          <a:lstStyle>
             <a:lvl1pPr>
               <a:buNone/>
               <a:defRPr sz="2800"/>
@@ -2434,7 +2366,7 @@
               <a:defRPr sz="1800"/>
             </a:lvl9pPr>
           </a:lstStyle>
-          <a:p xmlns:a="http://schemas.openxmlformats.org/drawingml/2006/main">
+          <a:p>
             <a:pPr lvl="0">
               <a:buNone/>
             </a:pPr>
@@ -2442,7 +2374,7 @@
               <a:t>Click to edit Master text styles</a:t>
             </a:r>
           </a:p>
-          <a:p xmlns:a="http://schemas.openxmlformats.org/drawingml/2006/main">
+          <a:p>
             <a:pPr lvl="1">
               <a:buNone/>
             </a:pPr>
@@ -2450,7 +2382,7 @@
               <a:t>Second level</a:t>
             </a:r>
           </a:p>
-          <a:p xmlns:a="http://schemas.openxmlformats.org/drawingml/2006/main">
+          <a:p>
             <a:pPr lvl="2">
               <a:buNone/>
             </a:pPr>
@@ -2458,7 +2390,7 @@
               <a:t>Third level</a:t>
             </a:r>
           </a:p>
-          <a:p xmlns:a="http://schemas.openxmlformats.org/drawingml/2006/main">
+          <a:p>
             <a:pPr lvl="3">
               <a:buNone/>
             </a:pPr>
@@ -2466,42 +2398,41 @@
               <a:t>Fourth level</a:t>
             </a:r>
           </a:p>
-          <a:p xmlns:a="http://schemas.openxmlformats.org/drawingml/2006/main">
+          <a:p>
             <a:pPr lvl="4">
               <a:buNone/>
             </a:pPr>
             <a:r>
               <a:t>Fifth level</a:t>
             </a:r>
-            <a:endParaRPr/>
           </a:p>
         </p:txBody>
       </p:sp>
       <p:sp>
         <p:nvSpPr>
           <p:cNvPr id="4" name="Content Placeholder 3">
-            <a:extLst xmlns:a="http://schemas.openxmlformats.org/drawingml/2006/main">
+            <a:extLst>
               <a:ext uri="{FF2B5EF4-FFF2-40B4-BE49-F238E27FC236}">
                 <a16:creationId xmlns:a16="http://schemas.microsoft.com/office/drawing/2014/main" id="{29F35E69-9C11-4027-BBF4-1A40F7ECA810}"/>
               </a:ext>
             </a:extLst>
           </p:cNvPr>
           <p:cNvSpPr>
-            <a:spLocks xmlns:a="http://schemas.openxmlformats.org/drawingml/2006/main" noGrp="1"/>
+            <a:spLocks noGrp="1"/>
           </p:cNvSpPr>
           <p:nvPr>
             <p:ph idx="2"/>
           </p:nvPr>
         </p:nvSpPr>
         <p:spPr>
-          <a:xfrm xmlns:a="http://schemas.openxmlformats.org/drawingml/2006/main">
+          <a:xfrm>
             <a:off x="4648200" y="1600200"/>
             <a:ext cx="4038600" cy="4525963"/>
           </a:xfrm>
         </p:spPr>
         <p:txBody>
-          <a:bodyPr xmlns:a="http://schemas.openxmlformats.org/drawingml/2006/main"/>
-          <a:lstStyle xmlns:a="http://schemas.openxmlformats.org/drawingml/2006/main">
+          <a:bodyPr/>
+          <a:lstStyle>
             <a:lvl1pPr>
               <a:buNone/>
               <a:defRPr sz="2800"/>
@@ -2539,7 +2470,7 @@
               <a:defRPr sz="1800"/>
             </a:lvl9pPr>
           </a:lstStyle>
-          <a:p xmlns:a="http://schemas.openxmlformats.org/drawingml/2006/main">
+          <a:p>
             <a:pPr lvl="0">
               <a:buNone/>
             </a:pPr>
@@ -2547,7 +2478,7 @@
               <a:t>Click to edit Master text styles</a:t>
             </a:r>
           </a:p>
-          <a:p xmlns:a="http://schemas.openxmlformats.org/drawingml/2006/main">
+          <a:p>
             <a:pPr lvl="1">
               <a:buNone/>
             </a:pPr>
@@ -2555,7 +2486,7 @@
               <a:t>Second level</a:t>
             </a:r>
           </a:p>
-          <a:p xmlns:a="http://schemas.openxmlformats.org/drawingml/2006/main">
+          <a:p>
             <a:pPr lvl="2">
               <a:buNone/>
             </a:pPr>
@@ -2563,7 +2494,7 @@
               <a:t>Third level</a:t>
             </a:r>
           </a:p>
-          <a:p xmlns:a="http://schemas.openxmlformats.org/drawingml/2006/main">
+          <a:p>
             <a:pPr lvl="3">
               <a:buNone/>
             </a:pPr>
@@ -2571,28 +2502,27 @@
               <a:t>Fourth level</a:t>
             </a:r>
           </a:p>
-          <a:p xmlns:a="http://schemas.openxmlformats.org/drawingml/2006/main">
+          <a:p>
             <a:pPr lvl="4">
               <a:buNone/>
             </a:pPr>
             <a:r>
               <a:t>Fifth level</a:t>
             </a:r>
-            <a:endParaRPr/>
           </a:p>
         </p:txBody>
       </p:sp>
       <p:sp>
         <p:nvSpPr>
           <p:cNvPr id="5" name="Date Placeholder 4">
-            <a:extLst xmlns:a="http://schemas.openxmlformats.org/drawingml/2006/main">
+            <a:extLst>
               <a:ext uri="{FF2B5EF4-FFF2-40B4-BE49-F238E27FC236}">
                 <a16:creationId xmlns:a16="http://schemas.microsoft.com/office/drawing/2014/main" id="{83C5F928-3099-4FBA-817D-FE45E39076E9}"/>
               </a:ext>
             </a:extLst>
           </p:cNvPr>
           <p:cNvSpPr>
-            <a:spLocks xmlns:a="http://schemas.openxmlformats.org/drawingml/2006/main" noGrp="1"/>
+            <a:spLocks noGrp="1"/>
           </p:cNvSpPr>
           <p:nvPr>
             <p:ph type="dt" idx="10"/>
@@ -2600,11 +2530,11 @@
         </p:nvSpPr>
         <p:spPr/>
         <p:txBody>
-          <a:bodyPr xmlns:a="http://schemas.openxmlformats.org/drawingml/2006/main"/>
-          <a:lstStyle xmlns:a="http://schemas.openxmlformats.org/drawingml/2006/main"/>
-          <a:p xmlns:a="http://schemas.openxmlformats.org/drawingml/2006/main">
+          <a:bodyPr/>
+          <a:lstStyle/>
+          <a:p>
             <a:fld id="{5BCAD085-E8A6-8845-BD4E-CB4CCA059FC4}" type="datetimeFigureOut">
-              <a:t>1/27/13</a:t>
+              <a:t>9/30/2026</a:t>
             </a:fld>
             <a:endParaRPr/>
           </a:p>
@@ -2613,14 +2543,14 @@
       <p:sp>
         <p:nvSpPr>
           <p:cNvPr id="6" name="Footer Placeholder 5">
-            <a:extLst xmlns:a="http://schemas.openxmlformats.org/drawingml/2006/main">
+            <a:extLst>
               <a:ext uri="{FF2B5EF4-FFF2-40B4-BE49-F238E27FC236}">
                 <a16:creationId xmlns:a16="http://schemas.microsoft.com/office/drawing/2014/main" id="{3E3D8469-25E8-43CD-97BA-E09DD188948D}"/>
               </a:ext>
             </a:extLst>
           </p:cNvPr>
           <p:cNvSpPr>
-            <a:spLocks xmlns:a="http://schemas.openxmlformats.org/drawingml/2006/main" noGrp="1"/>
+            <a:spLocks noGrp="1"/>
           </p:cNvSpPr>
           <p:nvPr>
             <p:ph type="ftr" idx="11"/>
@@ -2628,9 +2558,9 @@
         </p:nvSpPr>
         <p:spPr/>
         <p:txBody>
-          <a:bodyPr xmlns:a="http://schemas.openxmlformats.org/drawingml/2006/main"/>
-          <a:lstStyle xmlns:a="http://schemas.openxmlformats.org/drawingml/2006/main"/>
-          <a:p xmlns:a="http://schemas.openxmlformats.org/drawingml/2006/main">
+          <a:bodyPr/>
+          <a:lstStyle/>
+          <a:p>
             <a:endParaRPr/>
           </a:p>
         </p:txBody>
@@ -2638,14 +2568,14 @@
       <p:sp>
         <p:nvSpPr>
           <p:cNvPr id="7" name="Slide Number Placeholder 6">
-            <a:extLst xmlns:a="http://schemas.openxmlformats.org/drawingml/2006/main">
+            <a:extLst>
               <a:ext uri="{FF2B5EF4-FFF2-40B4-BE49-F238E27FC236}">
                 <a16:creationId xmlns:a16="http://schemas.microsoft.com/office/drawing/2014/main" id="{4ADB9BF1-629D-4703-BBE5-AA77C6477C51}"/>
               </a:ext>
             </a:extLst>
           </p:cNvPr>
           <p:cNvSpPr>
-            <a:spLocks xmlns:a="http://schemas.openxmlformats.org/drawingml/2006/main" noGrp="1"/>
+            <a:spLocks noGrp="1"/>
           </p:cNvSpPr>
           <p:nvPr>
             <p:ph type="sldNum" idx="12"/>
@@ -2653,9 +2583,9 @@
         </p:nvSpPr>
         <p:spPr/>
         <p:txBody>
-          <a:bodyPr xmlns:a="http://schemas.openxmlformats.org/drawingml/2006/main"/>
-          <a:lstStyle xmlns:a="http://schemas.openxmlformats.org/drawingml/2006/main"/>
-          <a:p xmlns:a="http://schemas.openxmlformats.org/drawingml/2006/main">
+          <a:bodyPr/>
+          <a:lstStyle/>
+          <a:p>
             <a:fld id="{C1FF6DA9-008F-8B48-92A6-B652298478BF}" type="slidenum">
               <a:t>‹#›</a:t>
             </a:fld>
@@ -2665,11 +2595,14 @@
       </p:sp>
     </p:spTree>
   </p:cSld>
+  <p:clrMapOvr>
+    <a:masterClrMapping/>
+  </p:clrMapOvr>
 </p:sldLayout>
 </file>
 
 <file path=ppt/slideLayouts/slideLayout5.xml><?xml version="1.0" encoding="utf-8"?>
-<p:sldLayout xmlns:p="http://schemas.openxmlformats.org/presentationml/2006/main" type="twoTxTwoObj" preserve="1">
+<p:sldLayout xmlns:a="http://schemas.openxmlformats.org/drawingml/2006/main" xmlns:r="http://schemas.openxmlformats.org/officeDocument/2006/relationships" xmlns:p="http://schemas.openxmlformats.org/presentationml/2006/main" type="twoTxTwoObj" preserve="1">
   <p:cSld name="Comparison">
     <p:spTree>
       <p:nvGrpSpPr>
@@ -2678,66 +2611,70 @@
         <p:nvPr/>
       </p:nvGrpSpPr>
       <p:grpSpPr>
-        <a:xfrm xmlns:a="http://schemas.openxmlformats.org/drawingml/2006/main"/>
+        <a:xfrm>
+          <a:off x="0" y="0"/>
+          <a:ext cx="0" cy="0"/>
+          <a:chOff x="0" y="0"/>
+          <a:chExt cx="0" cy="0"/>
+        </a:xfrm>
       </p:grpSpPr>
       <p:sp>
         <p:nvSpPr>
           <p:cNvPr id="2" name="Title 1">
-            <a:extLst xmlns:a="http://schemas.openxmlformats.org/drawingml/2006/main">
+            <a:extLst>
               <a:ext uri="{FF2B5EF4-FFF2-40B4-BE49-F238E27FC236}">
                 <a16:creationId xmlns:a16="http://schemas.microsoft.com/office/drawing/2014/main" id="{38636766-2D3A-4A71-88B9-9758D7625EE8}"/>
               </a:ext>
             </a:extLst>
           </p:cNvPr>
           <p:cNvSpPr>
-            <a:spLocks xmlns:a="http://schemas.openxmlformats.org/drawingml/2006/main" noGrp="1"/>
-          </p:cNvSpPr>
-          <p:nvPr>
-            <p:ph type="title" idx="0"/>
+            <a:spLocks noGrp="1"/>
+          </p:cNvSpPr>
+          <p:nvPr>
+            <p:ph type="title"/>
           </p:nvPr>
         </p:nvSpPr>
         <p:spPr/>
         <p:txBody>
-          <a:bodyPr xmlns:a="http://schemas.openxmlformats.org/drawingml/2006/main"/>
-          <a:lstStyle xmlns:a="http://schemas.openxmlformats.org/drawingml/2006/main">
+          <a:bodyPr/>
+          <a:lstStyle>
             <a:lvl1pPr>
               <a:buNone/>
               <a:defRPr/>
             </a:lvl1pPr>
           </a:lstStyle>
-          <a:p xmlns:a="http://schemas.openxmlformats.org/drawingml/2006/main">
+          <a:p>
             <a:r>
               <a:t>Click to edit Master title style</a:t>
             </a:r>
-            <a:endParaRPr/>
           </a:p>
         </p:txBody>
       </p:sp>
       <p:sp>
         <p:nvSpPr>
           <p:cNvPr id="3" name="Text Placeholder 2">
-            <a:extLst xmlns:a="http://schemas.openxmlformats.org/drawingml/2006/main">
+            <a:extLst>
               <a:ext uri="{FF2B5EF4-FFF2-40B4-BE49-F238E27FC236}">
                 <a16:creationId xmlns:a16="http://schemas.microsoft.com/office/drawing/2014/main" id="{E43FC878-78C6-4B84-8601-02F65C912C01}"/>
               </a:ext>
             </a:extLst>
           </p:cNvPr>
           <p:cNvSpPr>
-            <a:spLocks xmlns:a="http://schemas.openxmlformats.org/drawingml/2006/main" noGrp="1"/>
+            <a:spLocks noGrp="1"/>
           </p:cNvSpPr>
           <p:nvPr>
             <p:ph type="body" idx="1"/>
           </p:nvPr>
         </p:nvSpPr>
         <p:spPr>
-          <a:xfrm xmlns:a="http://schemas.openxmlformats.org/drawingml/2006/main">
+          <a:xfrm>
             <a:off x="457200" y="1535113"/>
             <a:ext cx="4040188" cy="639762"/>
           </a:xfrm>
         </p:spPr>
         <p:txBody>
-          <a:bodyPr xmlns:a="http://schemas.openxmlformats.org/drawingml/2006/main" anchor="b"/>
-          <a:lstStyle xmlns:a="http://schemas.openxmlformats.org/drawingml/2006/main">
+          <a:bodyPr anchor="b"/>
+          <a:lstStyle>
             <a:lvl1pPr marL="0" indent="0">
               <a:buNone/>
               <a:defRPr sz="2400" b="1"/>
@@ -2775,7 +2712,7 @@
               <a:defRPr sz="1600" b="1"/>
             </a:lvl9pPr>
           </a:lstStyle>
-          <a:p xmlns:a="http://schemas.openxmlformats.org/drawingml/2006/main">
+          <a:p>
             <a:pPr lvl="0">
               <a:buNone/>
             </a:pPr>
@@ -2788,28 +2725,28 @@
       <p:sp>
         <p:nvSpPr>
           <p:cNvPr id="4" name="Content Placeholder 3">
-            <a:extLst xmlns:a="http://schemas.openxmlformats.org/drawingml/2006/main">
+            <a:extLst>
               <a:ext uri="{FF2B5EF4-FFF2-40B4-BE49-F238E27FC236}">
                 <a16:creationId xmlns:a16="http://schemas.microsoft.com/office/drawing/2014/main" id="{CEB2A183-58E9-4EDC-8CCF-12F9A956DB72}"/>
               </a:ext>
             </a:extLst>
           </p:cNvPr>
           <p:cNvSpPr>
-            <a:spLocks xmlns:a="http://schemas.openxmlformats.org/drawingml/2006/main" noGrp="1"/>
+            <a:spLocks noGrp="1"/>
           </p:cNvSpPr>
           <p:nvPr>
             <p:ph idx="2"/>
           </p:nvPr>
         </p:nvSpPr>
         <p:spPr>
-          <a:xfrm xmlns:a="http://schemas.openxmlformats.org/drawingml/2006/main">
+          <a:xfrm>
             <a:off x="457200" y="2174875"/>
             <a:ext cx="4040188" cy="3951288"/>
           </a:xfrm>
         </p:spPr>
         <p:txBody>
-          <a:bodyPr xmlns:a="http://schemas.openxmlformats.org/drawingml/2006/main"/>
-          <a:lstStyle xmlns:a="http://schemas.openxmlformats.org/drawingml/2006/main">
+          <a:bodyPr/>
+          <a:lstStyle>
             <a:lvl1pPr>
               <a:buNone/>
               <a:defRPr sz="2400"/>
@@ -2847,7 +2784,7 @@
               <a:defRPr sz="1600"/>
             </a:lvl9pPr>
           </a:lstStyle>
-          <a:p xmlns:a="http://schemas.openxmlformats.org/drawingml/2006/main">
+          <a:p>
             <a:pPr lvl="0">
               <a:buNone/>
             </a:pPr>
@@ -2855,7 +2792,7 @@
               <a:t>Click to edit Master text styles</a:t>
             </a:r>
           </a:p>
-          <a:p xmlns:a="http://schemas.openxmlformats.org/drawingml/2006/main">
+          <a:p>
             <a:pPr lvl="1">
               <a:buNone/>
             </a:pPr>
@@ -2863,7 +2800,7 @@
               <a:t>Second level</a:t>
             </a:r>
           </a:p>
-          <a:p xmlns:a="http://schemas.openxmlformats.org/drawingml/2006/main">
+          <a:p>
             <a:pPr lvl="2">
               <a:buNone/>
             </a:pPr>
@@ -2871,7 +2808,7 @@
               <a:t>Third level</a:t>
             </a:r>
           </a:p>
-          <a:p xmlns:a="http://schemas.openxmlformats.org/drawingml/2006/main">
+          <a:p>
             <a:pPr lvl="3">
               <a:buNone/>
             </a:pPr>
@@ -2879,42 +2816,41 @@
               <a:t>Fourth level</a:t>
             </a:r>
           </a:p>
-          <a:p xmlns:a="http://schemas.openxmlformats.org/drawingml/2006/main">
+          <a:p>
             <a:pPr lvl="4">
               <a:buNone/>
             </a:pPr>
             <a:r>
               <a:t>Fifth level</a:t>
             </a:r>
-            <a:endParaRPr/>
           </a:p>
         </p:txBody>
       </p:sp>
       <p:sp>
         <p:nvSpPr>
           <p:cNvPr id="5" name="Text Placeholder 4">
-            <a:extLst xmlns:a="http://schemas.openxmlformats.org/drawingml/2006/main">
+            <a:extLst>
               <a:ext uri="{FF2B5EF4-FFF2-40B4-BE49-F238E27FC236}">
                 <a16:creationId xmlns:a16="http://schemas.microsoft.com/office/drawing/2014/main" id="{31235DFE-1648-4EF8-886C-FBF9084AC9AD}"/>
               </a:ext>
             </a:extLst>
           </p:cNvPr>
           <p:cNvSpPr>
-            <a:spLocks xmlns:a="http://schemas.openxmlformats.org/drawingml/2006/main" noGrp="1"/>
+            <a:spLocks noGrp="1"/>
           </p:cNvSpPr>
           <p:nvPr>
             <p:ph type="body" idx="3"/>
           </p:nvPr>
         </p:nvSpPr>
         <p:spPr>
-          <a:xfrm xmlns:a="http://schemas.openxmlformats.org/drawingml/2006/main">
+          <a:xfrm>
             <a:off x="4645025" y="1535113"/>
             <a:ext cx="4041775" cy="639762"/>
           </a:xfrm>
         </p:spPr>
         <p:txBody>
-          <a:bodyPr xmlns:a="http://schemas.openxmlformats.org/drawingml/2006/main" anchor="b"/>
-          <a:lstStyle xmlns:a="http://schemas.openxmlformats.org/drawingml/2006/main">
+          <a:bodyPr anchor="b"/>
+          <a:lstStyle>
             <a:lvl1pPr marL="0" indent="0">
               <a:buNone/>
               <a:defRPr sz="2400" b="1"/>
@@ -2952,7 +2888,7 @@
               <a:defRPr sz="1600" b="1"/>
             </a:lvl9pPr>
           </a:lstStyle>
-          <a:p xmlns:a="http://schemas.openxmlformats.org/drawingml/2006/main">
+          <a:p>
             <a:pPr lvl="0">
               <a:buNone/>
             </a:pPr>
@@ -2965,28 +2901,28 @@
       <p:sp>
         <p:nvSpPr>
           <p:cNvPr id="6" name="Content Placeholder 5">
-            <a:extLst xmlns:a="http://schemas.openxmlformats.org/drawingml/2006/main">
+            <a:extLst>
               <a:ext uri="{FF2B5EF4-FFF2-40B4-BE49-F238E27FC236}">
                 <a16:creationId xmlns:a16="http://schemas.microsoft.com/office/drawing/2014/main" id="{2E32A127-1229-4FD7-A51E-E07B4DEBB8BA}"/>
               </a:ext>
             </a:extLst>
           </p:cNvPr>
           <p:cNvSpPr>
-            <a:spLocks xmlns:a="http://schemas.openxmlformats.org/drawingml/2006/main" noGrp="1"/>
+            <a:spLocks noGrp="1"/>
           </p:cNvSpPr>
           <p:nvPr>
             <p:ph idx="4"/>
           </p:nvPr>
         </p:nvSpPr>
         <p:spPr>
-          <a:xfrm xmlns:a="http://schemas.openxmlformats.org/drawingml/2006/main">
+          <a:xfrm>
             <a:off x="4645025" y="2174875"/>
             <a:ext cx="4041775" cy="3951288"/>
           </a:xfrm>
         </p:spPr>
         <p:txBody>
-          <a:bodyPr xmlns:a="http://schemas.openxmlformats.org/drawingml/2006/main"/>
-          <a:lstStyle xmlns:a="http://schemas.openxmlformats.org/drawingml/2006/main">
+          <a:bodyPr/>
+          <a:lstStyle>
             <a:lvl1pPr>
               <a:buNone/>
               <a:defRPr sz="2400"/>
@@ -3024,7 +2960,7 @@
               <a:defRPr sz="1600"/>
             </a:lvl9pPr>
           </a:lstStyle>
-          <a:p xmlns:a="http://schemas.openxmlformats.org/drawingml/2006/main">
+          <a:p>
             <a:pPr lvl="0">
               <a:buNone/>
             </a:pPr>
@@ -3032,7 +2968,7 @@
               <a:t>Click to edit Master text styles</a:t>
             </a:r>
           </a:p>
-          <a:p xmlns:a="http://schemas.openxmlformats.org/drawingml/2006/main">
+          <a:p>
             <a:pPr lvl="1">
               <a:buNone/>
             </a:pPr>
@@ -3040,7 +2976,7 @@
               <a:t>Second level</a:t>
             </a:r>
           </a:p>
-          <a:p xmlns:a="http://schemas.openxmlformats.org/drawingml/2006/main">
+          <a:p>
             <a:pPr lvl="2">
               <a:buNone/>
             </a:pPr>
@@ -3048,7 +2984,7 @@
               <a:t>Third level</a:t>
             </a:r>
           </a:p>
-          <a:p xmlns:a="http://schemas.openxmlformats.org/drawingml/2006/main">
+          <a:p>
             <a:pPr lvl="3">
               <a:buNone/>
             </a:pPr>
@@ -3056,28 +2992,27 @@
               <a:t>Fourth level</a:t>
             </a:r>
           </a:p>
-          <a:p xmlns:a="http://schemas.openxmlformats.org/drawingml/2006/main">
+          <a:p>
             <a:pPr lvl="4">
               <a:buNone/>
             </a:pPr>
             <a:r>
               <a:t>Fifth level</a:t>
             </a:r>
-            <a:endParaRPr/>
           </a:p>
         </p:txBody>
       </p:sp>
       <p:sp>
         <p:nvSpPr>
           <p:cNvPr id="7" name="Date Placeholder 6">
-            <a:extLst xmlns:a="http://schemas.openxmlformats.org/drawingml/2006/main">
+            <a:extLst>
               <a:ext uri="{FF2B5EF4-FFF2-40B4-BE49-F238E27FC236}">
                 <a16:creationId xmlns:a16="http://schemas.microsoft.com/office/drawing/2014/main" id="{C8E4ED59-2AB7-42E6-AE4D-34B46A4AFBD2}"/>
               </a:ext>
             </a:extLst>
           </p:cNvPr>
           <p:cNvSpPr>
-            <a:spLocks xmlns:a="http://schemas.openxmlformats.org/drawingml/2006/main" noGrp="1"/>
+            <a:spLocks noGrp="1"/>
           </p:cNvSpPr>
           <p:nvPr>
             <p:ph type="dt" idx="10"/>
@@ -3085,11 +3020,11 @@
         </p:nvSpPr>
         <p:spPr/>
         <p:txBody>
-          <a:bodyPr xmlns:a="http://schemas.openxmlformats.org/drawingml/2006/main"/>
-          <a:lstStyle xmlns:a="http://schemas.openxmlformats.org/drawingml/2006/main"/>
-          <a:p xmlns:a="http://schemas.openxmlformats.org/drawingml/2006/main">
+          <a:bodyPr/>
+          <a:lstStyle/>
+          <a:p>
             <a:fld id="{5BCAD085-E8A6-8845-BD4E-CB4CCA059FC4}" type="datetimeFigureOut">
-              <a:t>1/27/13</a:t>
+              <a:t>9/30/2026</a:t>
             </a:fld>
             <a:endParaRPr/>
           </a:p>
@@ -3098,14 +3033,14 @@
       <p:sp>
         <p:nvSpPr>
           <p:cNvPr id="8" name="Footer Placeholder 7">
-            <a:extLst xmlns:a="http://schemas.openxmlformats.org/drawingml/2006/main">
+            <a:extLst>
               <a:ext uri="{FF2B5EF4-FFF2-40B4-BE49-F238E27FC236}">
                 <a16:creationId xmlns:a16="http://schemas.microsoft.com/office/drawing/2014/main" id="{72929CE0-7D7C-4C1C-B940-C730940731A6}"/>
               </a:ext>
             </a:extLst>
           </p:cNvPr>
           <p:cNvSpPr>
-            <a:spLocks xmlns:a="http://schemas.openxmlformats.org/drawingml/2006/main" noGrp="1"/>
+            <a:spLocks noGrp="1"/>
           </p:cNvSpPr>
           <p:nvPr>
             <p:ph type="ftr" idx="11"/>
@@ -3113,9 +3048,9 @@
         </p:nvSpPr>
         <p:spPr/>
         <p:txBody>
-          <a:bodyPr xmlns:a="http://schemas.openxmlformats.org/drawingml/2006/main"/>
-          <a:lstStyle xmlns:a="http://schemas.openxmlformats.org/drawingml/2006/main"/>
-          <a:p xmlns:a="http://schemas.openxmlformats.org/drawingml/2006/main">
+          <a:bodyPr/>
+          <a:lstStyle/>
+          <a:p>
             <a:endParaRPr/>
           </a:p>
         </p:txBody>
@@ -3123,14 +3058,14 @@
       <p:sp>
         <p:nvSpPr>
           <p:cNvPr id="9" name="Slide Number Placeholder 8">
-            <a:extLst xmlns:a="http://schemas.openxmlformats.org/drawingml/2006/main">
+            <a:extLst>
               <a:ext uri="{FF2B5EF4-FFF2-40B4-BE49-F238E27FC236}">
                 <a16:creationId xmlns:a16="http://schemas.microsoft.com/office/drawing/2014/main" id="{76885DD3-28D8-4273-8950-0FB2EA3EDDFD}"/>
               </a:ext>
             </a:extLst>
           </p:cNvPr>
           <p:cNvSpPr>
-            <a:spLocks xmlns:a="http://schemas.openxmlformats.org/drawingml/2006/main" noGrp="1"/>
+            <a:spLocks noGrp="1"/>
           </p:cNvSpPr>
           <p:nvPr>
             <p:ph type="sldNum" idx="12"/>
@@ -3138,9 +3073,9 @@
         </p:nvSpPr>
         <p:spPr/>
         <p:txBody>
-          <a:bodyPr xmlns:a="http://schemas.openxmlformats.org/drawingml/2006/main"/>
-          <a:lstStyle xmlns:a="http://schemas.openxmlformats.org/drawingml/2006/main"/>
-          <a:p xmlns:a="http://schemas.openxmlformats.org/drawingml/2006/main">
+          <a:bodyPr/>
+          <a:lstStyle/>
+          <a:p>
             <a:fld id="{C1FF6DA9-008F-8B48-92A6-B652298478BF}" type="slidenum">
               <a:t>‹#›</a:t>
             </a:fld>
@@ -3150,11 +3085,14 @@
       </p:sp>
     </p:spTree>
   </p:cSld>
+  <p:clrMapOvr>
+    <a:masterClrMapping/>
+  </p:clrMapOvr>
 </p:sldLayout>
 </file>
 
 <file path=ppt/slideLayouts/slideLayout6.xml><?xml version="1.0" encoding="utf-8"?>
-<p:sldLayout xmlns:p="http://schemas.openxmlformats.org/presentationml/2006/main" type="titleOnly" preserve="1">
+<p:sldLayout xmlns:a="http://schemas.openxmlformats.org/drawingml/2006/main" xmlns:r="http://schemas.openxmlformats.org/officeDocument/2006/relationships" xmlns:p="http://schemas.openxmlformats.org/presentationml/2006/main" type="titleOnly" preserve="1">
   <p:cSld name="Title Only">
     <p:spTree>
       <p:nvGrpSpPr>
@@ -3163,47 +3101,51 @@
         <p:nvPr/>
       </p:nvGrpSpPr>
       <p:grpSpPr>
-        <a:xfrm xmlns:a="http://schemas.openxmlformats.org/drawingml/2006/main"/>
+        <a:xfrm>
+          <a:off x="0" y="0"/>
+          <a:ext cx="0" cy="0"/>
+          <a:chOff x="0" y="0"/>
+          <a:chExt cx="0" cy="0"/>
+        </a:xfrm>
       </p:grpSpPr>
       <p:sp>
         <p:nvSpPr>
           <p:cNvPr id="2" name="Title 1">
-            <a:extLst xmlns:a="http://schemas.openxmlformats.org/drawingml/2006/main">
+            <a:extLst>
               <a:ext uri="{FF2B5EF4-FFF2-40B4-BE49-F238E27FC236}">
                 <a16:creationId xmlns:a16="http://schemas.microsoft.com/office/drawing/2014/main" id="{C6EEE293-4225-4178-931F-6E1FFBF21BE4}"/>
               </a:ext>
             </a:extLst>
           </p:cNvPr>
           <p:cNvSpPr>
-            <a:spLocks xmlns:a="http://schemas.openxmlformats.org/drawingml/2006/main" noGrp="1"/>
-          </p:cNvSpPr>
-          <p:nvPr>
-            <p:ph type="title" idx="0"/>
+            <a:spLocks noGrp="1"/>
+          </p:cNvSpPr>
+          <p:nvPr>
+            <p:ph type="title"/>
           </p:nvPr>
         </p:nvSpPr>
         <p:spPr/>
         <p:txBody>
-          <a:bodyPr xmlns:a="http://schemas.openxmlformats.org/drawingml/2006/main"/>
-          <a:lstStyle xmlns:a="http://schemas.openxmlformats.org/drawingml/2006/main"/>
-          <a:p xmlns:a="http://schemas.openxmlformats.org/drawingml/2006/main">
+          <a:bodyPr/>
+          <a:lstStyle/>
+          <a:p>
             <a:r>
               <a:t>Click to edit Master title style</a:t>
             </a:r>
-            <a:endParaRPr/>
           </a:p>
         </p:txBody>
       </p:sp>
       <p:sp>
         <p:nvSpPr>
           <p:cNvPr id="3" name="Date Placeholder 2">
-            <a:extLst xmlns:a="http://schemas.openxmlformats.org/drawingml/2006/main">
+            <a:extLst>
               <a:ext uri="{FF2B5EF4-FFF2-40B4-BE49-F238E27FC236}">
                 <a16:creationId xmlns:a16="http://schemas.microsoft.com/office/drawing/2014/main" id="{D552FECB-3C5B-43DA-949E-C619B8A8A1AE}"/>
               </a:ext>
             </a:extLst>
           </p:cNvPr>
           <p:cNvSpPr>
-            <a:spLocks xmlns:a="http://schemas.openxmlformats.org/drawingml/2006/main" noGrp="1"/>
+            <a:spLocks noGrp="1"/>
           </p:cNvSpPr>
           <p:nvPr>
             <p:ph type="dt" idx="10"/>
@@ -3211,11 +3153,11 @@
         </p:nvSpPr>
         <p:spPr/>
         <p:txBody>
-          <a:bodyPr xmlns:a="http://schemas.openxmlformats.org/drawingml/2006/main"/>
-          <a:lstStyle xmlns:a="http://schemas.openxmlformats.org/drawingml/2006/main"/>
-          <a:p xmlns:a="http://schemas.openxmlformats.org/drawingml/2006/main">
+          <a:bodyPr/>
+          <a:lstStyle/>
+          <a:p>
             <a:fld id="{5BCAD085-E8A6-8845-BD4E-CB4CCA059FC4}" type="datetimeFigureOut">
-              <a:t>1/27/13</a:t>
+              <a:t>9/30/2026</a:t>
             </a:fld>
             <a:endParaRPr/>
           </a:p>
@@ -3224,14 +3166,14 @@
       <p:sp>
         <p:nvSpPr>
           <p:cNvPr id="4" name="Footer Placeholder 3">
-            <a:extLst xmlns:a="http://schemas.openxmlformats.org/drawingml/2006/main">
+            <a:extLst>
               <a:ext uri="{FF2B5EF4-FFF2-40B4-BE49-F238E27FC236}">
                 <a16:creationId xmlns:a16="http://schemas.microsoft.com/office/drawing/2014/main" id="{D4AD1AC3-372E-4D79-A8D5-D274C2DB7718}"/>
               </a:ext>
             </a:extLst>
           </p:cNvPr>
           <p:cNvSpPr>
-            <a:spLocks xmlns:a="http://schemas.openxmlformats.org/drawingml/2006/main" noGrp="1"/>
+            <a:spLocks noGrp="1"/>
           </p:cNvSpPr>
           <p:nvPr>
             <p:ph type="ftr" idx="11"/>
@@ -3239,9 +3181,9 @@
         </p:nvSpPr>
         <p:spPr/>
         <p:txBody>
-          <a:bodyPr xmlns:a="http://schemas.openxmlformats.org/drawingml/2006/main"/>
-          <a:lstStyle xmlns:a="http://schemas.openxmlformats.org/drawingml/2006/main"/>
-          <a:p xmlns:a="http://schemas.openxmlformats.org/drawingml/2006/main">
+          <a:bodyPr/>
+          <a:lstStyle/>
+          <a:p>
             <a:endParaRPr/>
           </a:p>
         </p:txBody>
@@ -3249,14 +3191,14 @@
       <p:sp>
         <p:nvSpPr>
           <p:cNvPr id="5" name="Slide Number Placeholder 4">
-            <a:extLst xmlns:a="http://schemas.openxmlformats.org/drawingml/2006/main">
+            <a:extLst>
               <a:ext uri="{FF2B5EF4-FFF2-40B4-BE49-F238E27FC236}">
                 <a16:creationId xmlns:a16="http://schemas.microsoft.com/office/drawing/2014/main" id="{336700AC-5571-476A-B21F-D6F503536566}"/>
               </a:ext>
             </a:extLst>
           </p:cNvPr>
           <p:cNvSpPr>
-            <a:spLocks xmlns:a="http://schemas.openxmlformats.org/drawingml/2006/main" noGrp="1"/>
+            <a:spLocks noGrp="1"/>
           </p:cNvSpPr>
           <p:nvPr>
             <p:ph type="sldNum" idx="12"/>
@@ -3264,9 +3206,9 @@
         </p:nvSpPr>
         <p:spPr/>
         <p:txBody>
-          <a:bodyPr xmlns:a="http://schemas.openxmlformats.org/drawingml/2006/main"/>
-          <a:lstStyle xmlns:a="http://schemas.openxmlformats.org/drawingml/2006/main"/>
-          <a:p xmlns:a="http://schemas.openxmlformats.org/drawingml/2006/main">
+          <a:bodyPr/>
+          <a:lstStyle/>
+          <a:p>
             <a:fld id="{C1FF6DA9-008F-8B48-92A6-B652298478BF}" type="slidenum">
               <a:t>‹#›</a:t>
             </a:fld>
@@ -3276,11 +3218,14 @@
       </p:sp>
     </p:spTree>
   </p:cSld>
+  <p:clrMapOvr>
+    <a:masterClrMapping/>
+  </p:clrMapOvr>
 </p:sldLayout>
 </file>
 
 <file path=ppt/slideLayouts/slideLayout7.xml><?xml version="1.0" encoding="utf-8"?>
-<p:sldLayout xmlns:p="http://schemas.openxmlformats.org/presentationml/2006/main" type="blank" preserve="1">
+<p:sldLayout xmlns:a="http://schemas.openxmlformats.org/drawingml/2006/main" xmlns:r="http://schemas.openxmlformats.org/officeDocument/2006/relationships" xmlns:p="http://schemas.openxmlformats.org/presentationml/2006/main" type="blank" preserve="1">
   <p:cSld name="Blank">
     <p:spTree>
       <p:nvGrpSpPr>
@@ -3289,19 +3234,24 @@
         <p:nvPr/>
       </p:nvGrpSpPr>
       <p:grpSpPr>
-        <a:xfrm xmlns:a="http://schemas.openxmlformats.org/drawingml/2006/main"/>
+        <a:xfrm>
+          <a:off x="0" y="0"/>
+          <a:ext cx="0" cy="0"/>
+          <a:chOff x="0" y="0"/>
+          <a:chExt cx="0" cy="0"/>
+        </a:xfrm>
       </p:grpSpPr>
       <p:sp>
         <p:nvSpPr>
           <p:cNvPr id="2" name="Date Placeholder 1">
-            <a:extLst xmlns:a="http://schemas.openxmlformats.org/drawingml/2006/main">
+            <a:extLst>
               <a:ext uri="{FF2B5EF4-FFF2-40B4-BE49-F238E27FC236}">
                 <a16:creationId xmlns:a16="http://schemas.microsoft.com/office/drawing/2014/main" id="{8BF1660F-1813-468C-8B07-9D71CCC0DC1A}"/>
               </a:ext>
             </a:extLst>
           </p:cNvPr>
           <p:cNvSpPr>
-            <a:spLocks xmlns:a="http://schemas.openxmlformats.org/drawingml/2006/main" noGrp="1"/>
+            <a:spLocks noGrp="1"/>
           </p:cNvSpPr>
           <p:nvPr>
             <p:ph type="dt" idx="10"/>
@@ -3309,11 +3259,11 @@
         </p:nvSpPr>
         <p:spPr/>
         <p:txBody>
-          <a:bodyPr xmlns:a="http://schemas.openxmlformats.org/drawingml/2006/main"/>
-          <a:lstStyle xmlns:a="http://schemas.openxmlformats.org/drawingml/2006/main"/>
-          <a:p xmlns:a="http://schemas.openxmlformats.org/drawingml/2006/main">
+          <a:bodyPr/>
+          <a:lstStyle/>
+          <a:p>
             <a:fld id="{5BCAD085-E8A6-8845-BD4E-CB4CCA059FC4}" type="datetimeFigureOut">
-              <a:t>1/27/13</a:t>
+              <a:t>9/30/2026</a:t>
             </a:fld>
             <a:endParaRPr/>
           </a:p>
@@ -3322,14 +3272,14 @@
       <p:sp>
         <p:nvSpPr>
           <p:cNvPr id="3" name="Footer Placeholder 2">
-            <a:extLst xmlns:a="http://schemas.openxmlformats.org/drawingml/2006/main">
+            <a:extLst>
               <a:ext uri="{FF2B5EF4-FFF2-40B4-BE49-F238E27FC236}">
                 <a16:creationId xmlns:a16="http://schemas.microsoft.com/office/drawing/2014/main" id="{EFC7DDD1-EB84-4D9F-9352-ED257779FEC6}"/>
               </a:ext>
             </a:extLst>
           </p:cNvPr>
           <p:cNvSpPr>
-            <a:spLocks xmlns:a="http://schemas.openxmlformats.org/drawingml/2006/main" noGrp="1"/>
+            <a:spLocks noGrp="1"/>
           </p:cNvSpPr>
           <p:nvPr>
             <p:ph type="ftr" idx="11"/>
@@ -3337,9 +3287,9 @@
         </p:nvSpPr>
         <p:spPr/>
         <p:txBody>
-          <a:bodyPr xmlns:a="http://schemas.openxmlformats.org/drawingml/2006/main"/>
-          <a:lstStyle xmlns:a="http://schemas.openxmlformats.org/drawingml/2006/main"/>
-          <a:p xmlns:a="http://schemas.openxmlformats.org/drawingml/2006/main">
+          <a:bodyPr/>
+          <a:lstStyle/>
+          <a:p>
             <a:endParaRPr/>
           </a:p>
         </p:txBody>
@@ -3347,14 +3297,14 @@
       <p:sp>
         <p:nvSpPr>
           <p:cNvPr id="4" name="Slide Number Placeholder 3">
-            <a:extLst xmlns:a="http://schemas.openxmlformats.org/drawingml/2006/main">
+            <a:extLst>
               <a:ext uri="{FF2B5EF4-FFF2-40B4-BE49-F238E27FC236}">
                 <a16:creationId xmlns:a16="http://schemas.microsoft.com/office/drawing/2014/main" id="{6FB273BD-842B-4D2B-B64C-BCFED37CAC08}"/>
               </a:ext>
             </a:extLst>
           </p:cNvPr>
           <p:cNvSpPr>
-            <a:spLocks xmlns:a="http://schemas.openxmlformats.org/drawingml/2006/main" noGrp="1"/>
+            <a:spLocks noGrp="1"/>
           </p:cNvSpPr>
           <p:nvPr>
             <p:ph type="sldNum" idx="12"/>
@@ -3362,9 +3312,9 @@
         </p:nvSpPr>
         <p:spPr/>
         <p:txBody>
-          <a:bodyPr xmlns:a="http://schemas.openxmlformats.org/drawingml/2006/main"/>
-          <a:lstStyle xmlns:a="http://schemas.openxmlformats.org/drawingml/2006/main"/>
-          <a:p xmlns:a="http://schemas.openxmlformats.org/drawingml/2006/main">
+          <a:bodyPr/>
+          <a:lstStyle/>
+          <a:p>
             <a:fld id="{C1FF6DA9-008F-8B48-92A6-B652298478BF}" type="slidenum">
               <a:t>‹#›</a:t>
             </a:fld>
@@ -3374,11 +3324,14 @@
       </p:sp>
     </p:spTree>
   </p:cSld>
+  <p:clrMapOvr>
+    <a:masterClrMapping/>
+  </p:clrMapOvr>
 </p:sldLayout>
 </file>
 
 <file path=ppt/slideLayouts/slideLayout8.xml><?xml version="1.0" encoding="utf-8"?>
-<p:sldLayout xmlns:p="http://schemas.openxmlformats.org/presentationml/2006/main" type="objTx" preserve="1">
+<p:sldLayout xmlns:a="http://schemas.openxmlformats.org/drawingml/2006/main" xmlns:r="http://schemas.openxmlformats.org/officeDocument/2006/relationships" xmlns:p="http://schemas.openxmlformats.org/presentationml/2006/main" type="objTx" preserve="1">
   <p:cSld name="Content with Caption">
     <p:spTree>
       <p:nvGrpSpPr>
@@ -3387,71 +3340,75 @@
         <p:nvPr/>
       </p:nvGrpSpPr>
       <p:grpSpPr>
-        <a:xfrm xmlns:a="http://schemas.openxmlformats.org/drawingml/2006/main"/>
+        <a:xfrm>
+          <a:off x="0" y="0"/>
+          <a:ext cx="0" cy="0"/>
+          <a:chOff x="0" y="0"/>
+          <a:chExt cx="0" cy="0"/>
+        </a:xfrm>
       </p:grpSpPr>
       <p:sp>
         <p:nvSpPr>
           <p:cNvPr id="2" name="Title 1">
-            <a:extLst xmlns:a="http://schemas.openxmlformats.org/drawingml/2006/main">
+            <a:extLst>
               <a:ext uri="{FF2B5EF4-FFF2-40B4-BE49-F238E27FC236}">
                 <a16:creationId xmlns:a16="http://schemas.microsoft.com/office/drawing/2014/main" id="{6B78F000-83C5-40E2-A814-3987D4E7A713}"/>
               </a:ext>
             </a:extLst>
           </p:cNvPr>
           <p:cNvSpPr>
-            <a:spLocks xmlns:a="http://schemas.openxmlformats.org/drawingml/2006/main" noGrp="1"/>
-          </p:cNvSpPr>
-          <p:nvPr>
-            <p:ph type="title" idx="0"/>
+            <a:spLocks noGrp="1"/>
+          </p:cNvSpPr>
+          <p:nvPr>
+            <p:ph type="title"/>
           </p:nvPr>
         </p:nvSpPr>
         <p:spPr>
-          <a:xfrm xmlns:a="http://schemas.openxmlformats.org/drawingml/2006/main">
+          <a:xfrm>
             <a:off x="457200" y="273050"/>
             <a:ext cx="3008313" cy="1162050"/>
           </a:xfrm>
         </p:spPr>
         <p:txBody>
-          <a:bodyPr xmlns:a="http://schemas.openxmlformats.org/drawingml/2006/main" anchor="b"/>
-          <a:lstStyle xmlns:a="http://schemas.openxmlformats.org/drawingml/2006/main">
+          <a:bodyPr anchor="b"/>
+          <a:lstStyle>
             <a:lvl1pPr algn="l">
               <a:buNone/>
               <a:defRPr sz="2000" b="1"/>
             </a:lvl1pPr>
           </a:lstStyle>
-          <a:p xmlns:a="http://schemas.openxmlformats.org/drawingml/2006/main">
+          <a:p>
             <a:r>
               <a:t>Click to edit Master title style</a:t>
             </a:r>
-            <a:endParaRPr/>
           </a:p>
         </p:txBody>
       </p:sp>
       <p:sp>
         <p:nvSpPr>
           <p:cNvPr id="3" name="Content Placeholder 2">
-            <a:extLst xmlns:a="http://schemas.openxmlformats.org/drawingml/2006/main">
+            <a:extLst>
               <a:ext uri="{FF2B5EF4-FFF2-40B4-BE49-F238E27FC236}">
                 <a16:creationId xmlns:a16="http://schemas.microsoft.com/office/drawing/2014/main" id="{2A582E7D-EA19-4B53-A456-11F9B7180803}"/>
               </a:ext>
             </a:extLst>
           </p:cNvPr>
           <p:cNvSpPr>
-            <a:spLocks xmlns:a="http://schemas.openxmlformats.org/drawingml/2006/main" noGrp="1"/>
+            <a:spLocks noGrp="1"/>
           </p:cNvSpPr>
           <p:nvPr>
             <p:ph idx="1"/>
           </p:nvPr>
         </p:nvSpPr>
         <p:spPr>
-          <a:xfrm xmlns:a="http://schemas.openxmlformats.org/drawingml/2006/main">
+          <a:xfrm>
             <a:off x="3575050" y="273050"/>
             <a:ext cx="5111750" cy="5853113"/>
           </a:xfrm>
         </p:spPr>
         <p:txBody>
-          <a:bodyPr xmlns:a="http://schemas.openxmlformats.org/drawingml/2006/main"/>
-          <a:lstStyle xmlns:a="http://schemas.openxmlformats.org/drawingml/2006/main">
+          <a:bodyPr/>
+          <a:lstStyle>
             <a:lvl1pPr>
               <a:buNone/>
               <a:defRPr sz="3200"/>
@@ -3489,7 +3446,7 @@
               <a:defRPr sz="2000"/>
             </a:lvl9pPr>
           </a:lstStyle>
-          <a:p xmlns:a="http://schemas.openxmlformats.org/drawingml/2006/main">
+          <a:p>
             <a:pPr lvl="0">
               <a:buNone/>
             </a:pPr>
@@ -3497,7 +3454,7 @@
               <a:t>Click to edit Master text styles</a:t>
             </a:r>
           </a:p>
-          <a:p xmlns:a="http://schemas.openxmlformats.org/drawingml/2006/main">
+          <a:p>
             <a:pPr lvl="1">
               <a:buNone/>
             </a:pPr>
@@ -3505,7 +3462,7 @@
               <a:t>Second level</a:t>
             </a:r>
           </a:p>
-          <a:p xmlns:a="http://schemas.openxmlformats.org/drawingml/2006/main">
+          <a:p>
             <a:pPr lvl="2">
               <a:buNone/>
             </a:pPr>
@@ -3513,7 +3470,7 @@
               <a:t>Third level</a:t>
             </a:r>
           </a:p>
-          <a:p xmlns:a="http://schemas.openxmlformats.org/drawingml/2006/main">
+          <a:p>
             <a:pPr lvl="3">
               <a:buNone/>
             </a:pPr>
@@ -3521,42 +3478,41 @@
               <a:t>Fourth level</a:t>
             </a:r>
           </a:p>
-          <a:p xmlns:a="http://schemas.openxmlformats.org/drawingml/2006/main">
+          <a:p>
             <a:pPr lvl="4">
               <a:buNone/>
             </a:pPr>
             <a:r>
               <a:t>Fifth level</a:t>
             </a:r>
-            <a:endParaRPr/>
           </a:p>
         </p:txBody>
       </p:sp>
       <p:sp>
         <p:nvSpPr>
           <p:cNvPr id="4" name="Text Placeholder 3">
-            <a:extLst xmlns:a="http://schemas.openxmlformats.org/drawingml/2006/main">
+            <a:extLst>
               <a:ext uri="{FF2B5EF4-FFF2-40B4-BE49-F238E27FC236}">
                 <a16:creationId xmlns:a16="http://schemas.microsoft.com/office/drawing/2014/main" id="{1C3AAA05-9A49-46E4-BBA3-B1382B80BB25}"/>
               </a:ext>
             </a:extLst>
           </p:cNvPr>
           <p:cNvSpPr>
-            <a:spLocks xmlns:a="http://schemas.openxmlformats.org/drawingml/2006/main" noGrp="1"/>
+            <a:spLocks noGrp="1"/>
           </p:cNvSpPr>
           <p:nvPr>
             <p:ph type="body" idx="2"/>
           </p:nvPr>
         </p:nvSpPr>
         <p:spPr>
-          <a:xfrm xmlns:a="http://schemas.openxmlformats.org/drawingml/2006/main">
+          <a:xfrm>
             <a:off x="457200" y="1435100"/>
             <a:ext cx="3008313" cy="4691063"/>
           </a:xfrm>
         </p:spPr>
         <p:txBody>
-          <a:bodyPr xmlns:a="http://schemas.openxmlformats.org/drawingml/2006/main"/>
-          <a:lstStyle xmlns:a="http://schemas.openxmlformats.org/drawingml/2006/main">
+          <a:bodyPr/>
+          <a:lstStyle>
             <a:lvl1pPr marL="0" indent="0">
               <a:buNone/>
               <a:defRPr sz="1400"/>
@@ -3594,7 +3550,7 @@
               <a:defRPr sz="900"/>
             </a:lvl9pPr>
           </a:lstStyle>
-          <a:p xmlns:a="http://schemas.openxmlformats.org/drawingml/2006/main">
+          <a:p>
             <a:pPr lvl="0">
               <a:buNone/>
             </a:pPr>
@@ -3607,14 +3563,14 @@
       <p:sp>
         <p:nvSpPr>
           <p:cNvPr id="5" name="Date Placeholder 4">
-            <a:extLst xmlns:a="http://schemas.openxmlformats.org/drawingml/2006/main">
+            <a:extLst>
               <a:ext uri="{FF2B5EF4-FFF2-40B4-BE49-F238E27FC236}">
                 <a16:creationId xmlns:a16="http://schemas.microsoft.com/office/drawing/2014/main" id="{BEDEC884-B733-411A-AD44-0A7A6BEB7D2C}"/>
               </a:ext>
             </a:extLst>
           </p:cNvPr>
           <p:cNvSpPr>
-            <a:spLocks xmlns:a="http://schemas.openxmlformats.org/drawingml/2006/main" noGrp="1"/>
+            <a:spLocks noGrp="1"/>
           </p:cNvSpPr>
           <p:nvPr>
             <p:ph type="dt" idx="10"/>
@@ -3622,11 +3578,11 @@
         </p:nvSpPr>
         <p:spPr/>
         <p:txBody>
-          <a:bodyPr xmlns:a="http://schemas.openxmlformats.org/drawingml/2006/main"/>
-          <a:lstStyle xmlns:a="http://schemas.openxmlformats.org/drawingml/2006/main"/>
-          <a:p xmlns:a="http://schemas.openxmlformats.org/drawingml/2006/main">
+          <a:bodyPr/>
+          <a:lstStyle/>
+          <a:p>
             <a:fld id="{5BCAD085-E8A6-8845-BD4E-CB4CCA059FC4}" type="datetimeFigureOut">
-              <a:t>1/27/13</a:t>
+              <a:t>9/30/2026</a:t>
             </a:fld>
             <a:endParaRPr/>
           </a:p>
@@ -3635,14 +3591,14 @@
       <p:sp>
         <p:nvSpPr>
           <p:cNvPr id="6" name="Footer Placeholder 5">
-            <a:extLst xmlns:a="http://schemas.openxmlformats.org/drawingml/2006/main">
+            <a:extLst>
               <a:ext uri="{FF2B5EF4-FFF2-40B4-BE49-F238E27FC236}">
                 <a16:creationId xmlns:a16="http://schemas.microsoft.com/office/drawing/2014/main" id="{5FF64685-D7FB-4969-B5D3-ADAAB41DC82D}"/>
               </a:ext>
             </a:extLst>
           </p:cNvPr>
           <p:cNvSpPr>
-            <a:spLocks xmlns:a="http://schemas.openxmlformats.org/drawingml/2006/main" noGrp="1"/>
+            <a:spLocks noGrp="1"/>
           </p:cNvSpPr>
           <p:nvPr>
             <p:ph type="ftr" idx="11"/>
@@ -3650,9 +3606,9 @@
         </p:nvSpPr>
         <p:spPr/>
         <p:txBody>
-          <a:bodyPr xmlns:a="http://schemas.openxmlformats.org/drawingml/2006/main"/>
-          <a:lstStyle xmlns:a="http://schemas.openxmlformats.org/drawingml/2006/main"/>
-          <a:p xmlns:a="http://schemas.openxmlformats.org/drawingml/2006/main">
+          <a:bodyPr/>
+          <a:lstStyle/>
+          <a:p>
             <a:endParaRPr/>
           </a:p>
         </p:txBody>
@@ -3660,14 +3616,14 @@
       <p:sp>
         <p:nvSpPr>
           <p:cNvPr id="7" name="Slide Number Placeholder 6">
-            <a:extLst xmlns:a="http://schemas.openxmlformats.org/drawingml/2006/main">
+            <a:extLst>
               <a:ext uri="{FF2B5EF4-FFF2-40B4-BE49-F238E27FC236}">
                 <a16:creationId xmlns:a16="http://schemas.microsoft.com/office/drawing/2014/main" id="{F9BC6B70-B9FD-4D31-B0FF-1703F84CBCFF}"/>
               </a:ext>
             </a:extLst>
           </p:cNvPr>
           <p:cNvSpPr>
-            <a:spLocks xmlns:a="http://schemas.openxmlformats.org/drawingml/2006/main" noGrp="1"/>
+            <a:spLocks noGrp="1"/>
           </p:cNvSpPr>
           <p:nvPr>
             <p:ph type="sldNum" idx="12"/>
@@ -3675,9 +3631,9 @@
         </p:nvSpPr>
         <p:spPr/>
         <p:txBody>
-          <a:bodyPr xmlns:a="http://schemas.openxmlformats.org/drawingml/2006/main"/>
-          <a:lstStyle xmlns:a="http://schemas.openxmlformats.org/drawingml/2006/main"/>
-          <a:p xmlns:a="http://schemas.openxmlformats.org/drawingml/2006/main">
+          <a:bodyPr/>
+          <a:lstStyle/>
+          <a:p>
             <a:fld id="{C1FF6DA9-008F-8B48-92A6-B652298478BF}" type="slidenum">
               <a:t>‹#›</a:t>
             </a:fld>
@@ -3687,11 +3643,14 @@
       </p:sp>
     </p:spTree>
   </p:cSld>
+  <p:clrMapOvr>
+    <a:masterClrMapping/>
+  </p:clrMapOvr>
 </p:sldLayout>
 </file>
 
 <file path=ppt/slideLayouts/slideLayout9.xml><?xml version="1.0" encoding="utf-8"?>
-<p:sldLayout xmlns:p="http://schemas.openxmlformats.org/presentationml/2006/main" type="picTx" preserve="1">
+<p:sldLayout xmlns:a="http://schemas.openxmlformats.org/drawingml/2006/main" xmlns:r="http://schemas.openxmlformats.org/officeDocument/2006/relationships" xmlns:p="http://schemas.openxmlformats.org/presentationml/2006/main" type="picTx" preserve="1">
   <p:cSld name="Picture with Caption">
     <p:spTree>
       <p:nvGrpSpPr>
@@ -3700,71 +3659,75 @@
         <p:nvPr/>
       </p:nvGrpSpPr>
       <p:grpSpPr>
-        <a:xfrm xmlns:a="http://schemas.openxmlformats.org/drawingml/2006/main"/>
+        <a:xfrm>
+          <a:off x="0" y="0"/>
+          <a:ext cx="0" cy="0"/>
+          <a:chOff x="0" y="0"/>
+          <a:chExt cx="0" cy="0"/>
+        </a:xfrm>
       </p:grpSpPr>
       <p:sp>
         <p:nvSpPr>
           <p:cNvPr id="2" name="Title 1">
-            <a:extLst xmlns:a="http://schemas.openxmlformats.org/drawingml/2006/main">
+            <a:extLst>
               <a:ext uri="{FF2B5EF4-FFF2-40B4-BE49-F238E27FC236}">
                 <a16:creationId xmlns:a16="http://schemas.microsoft.com/office/drawing/2014/main" id="{1B06A51F-DEDB-479A-943D-5ECF68B84C99}"/>
               </a:ext>
             </a:extLst>
           </p:cNvPr>
           <p:cNvSpPr>
-            <a:spLocks xmlns:a="http://schemas.openxmlformats.org/drawingml/2006/main" noGrp="1"/>
-          </p:cNvSpPr>
-          <p:nvPr>
-            <p:ph type="title" idx="0"/>
+            <a:spLocks noGrp="1"/>
+          </p:cNvSpPr>
+          <p:nvPr>
+            <p:ph type="title"/>
           </p:nvPr>
         </p:nvSpPr>
         <p:spPr>
-          <a:xfrm xmlns:a="http://schemas.openxmlformats.org/drawingml/2006/main">
+          <a:xfrm>
             <a:off x="1792288" y="4800600"/>
             <a:ext cx="5486400" cy="566738"/>
           </a:xfrm>
         </p:spPr>
         <p:txBody>
-          <a:bodyPr xmlns:a="http://schemas.openxmlformats.org/drawingml/2006/main" anchor="b"/>
-          <a:lstStyle xmlns:a="http://schemas.openxmlformats.org/drawingml/2006/main">
+          <a:bodyPr anchor="b"/>
+          <a:lstStyle>
             <a:lvl1pPr algn="l">
               <a:buNone/>
               <a:defRPr sz="2000" b="1"/>
             </a:lvl1pPr>
           </a:lstStyle>
-          <a:p xmlns:a="http://schemas.openxmlformats.org/drawingml/2006/main">
+          <a:p>
             <a:r>
               <a:t>Click to edit Master title style</a:t>
             </a:r>
-            <a:endParaRPr/>
           </a:p>
         </p:txBody>
       </p:sp>
       <p:sp>
         <p:nvSpPr>
           <p:cNvPr id="3" name="Picture Placeholder 2">
-            <a:extLst xmlns:a="http://schemas.openxmlformats.org/drawingml/2006/main">
+            <a:extLst>
               <a:ext uri="{FF2B5EF4-FFF2-40B4-BE49-F238E27FC236}">
                 <a16:creationId xmlns:a16="http://schemas.microsoft.com/office/drawing/2014/main" id="{7C6769FF-E3BA-419A-B9F7-9CF8BE72F68B}"/>
               </a:ext>
             </a:extLst>
           </p:cNvPr>
           <p:cNvSpPr>
-            <a:spLocks xmlns:a="http://schemas.openxmlformats.org/drawingml/2006/main" noGrp="1"/>
+            <a:spLocks noGrp="1"/>
           </p:cNvSpPr>
           <p:nvPr>
             <p:ph type="pic" idx="1"/>
           </p:nvPr>
         </p:nvSpPr>
         <p:spPr>
-          <a:xfrm xmlns:a="http://schemas.openxmlformats.org/drawingml/2006/main">
+          <a:xfrm>
             <a:off x="1792288" y="612775"/>
             <a:ext cx="5486400" cy="4114800"/>
           </a:xfrm>
         </p:spPr>
         <p:txBody>
-          <a:bodyPr xmlns:a="http://schemas.openxmlformats.org/drawingml/2006/main"/>
-          <a:lstStyle xmlns:a="http://schemas.openxmlformats.org/drawingml/2006/main">
+          <a:bodyPr/>
+          <a:lstStyle>
             <a:lvl1pPr marL="0" indent="0">
               <a:buNone/>
               <a:defRPr sz="3200"/>
@@ -3802,7 +3765,7 @@
               <a:defRPr sz="2000"/>
             </a:lvl9pPr>
           </a:lstStyle>
-          <a:p xmlns:a="http://schemas.openxmlformats.org/drawingml/2006/main">
+          <a:p>
             <a:endParaRPr/>
           </a:p>
         </p:txBody>
@@ -3810,28 +3773,28 @@
       <p:sp>
         <p:nvSpPr>
           <p:cNvPr id="4" name="Text Placeholder 3">
-            <a:extLst xmlns:a="http://schemas.openxmlformats.org/drawingml/2006/main">
+            <a:extLst>
               <a:ext uri="{FF2B5EF4-FFF2-40B4-BE49-F238E27FC236}">
                 <a16:creationId xmlns:a16="http://schemas.microsoft.com/office/drawing/2014/main" id="{94D589E5-4B50-4876-805C-91AD38906CFB}"/>
               </a:ext>
             </a:extLst>
           </p:cNvPr>
           <p:cNvSpPr>
-            <a:spLocks xmlns:a="http://schemas.openxmlformats.org/drawingml/2006/main" noGrp="1"/>
+            <a:spLocks noGrp="1"/>
           </p:cNvSpPr>
           <p:nvPr>
             <p:ph type="body" idx="2"/>
           </p:nvPr>
         </p:nvSpPr>
         <p:spPr>
-          <a:xfrm xmlns:a="http://schemas.openxmlformats.org/drawingml/2006/main">
+          <a:xfrm>
             <a:off x="1792288" y="5367338"/>
             <a:ext cx="5486400" cy="804862"/>
           </a:xfrm>
         </p:spPr>
         <p:txBody>
-          <a:bodyPr xmlns:a="http://schemas.openxmlformats.org/drawingml/2006/main"/>
-          <a:lstStyle xmlns:a="http://schemas.openxmlformats.org/drawingml/2006/main">
+          <a:bodyPr/>
+          <a:lstStyle>
             <a:lvl1pPr marL="0" indent="0">
               <a:buNone/>
               <a:defRPr sz="1400"/>
@@ -3869,7 +3832,7 @@
               <a:defRPr sz="900"/>
             </a:lvl9pPr>
           </a:lstStyle>
-          <a:p xmlns:a="http://schemas.openxmlformats.org/drawingml/2006/main">
+          <a:p>
             <a:pPr lvl="0">
               <a:buNone/>
             </a:pPr>
@@ -3882,14 +3845,14 @@
       <p:sp>
         <p:nvSpPr>
           <p:cNvPr id="5" name="Date Placeholder 4">
-            <a:extLst xmlns:a="http://schemas.openxmlformats.org/drawingml/2006/main">
+            <a:extLst>
               <a:ext uri="{FF2B5EF4-FFF2-40B4-BE49-F238E27FC236}">
                 <a16:creationId xmlns:a16="http://schemas.microsoft.com/office/drawing/2014/main" id="{3EAB2EF5-5FA1-46B5-A028-8E52F2A70AC3}"/>
               </a:ext>
             </a:extLst>
           </p:cNvPr>
           <p:cNvSpPr>
-            <a:spLocks xmlns:a="http://schemas.openxmlformats.org/drawingml/2006/main" noGrp="1"/>
+            <a:spLocks noGrp="1"/>
           </p:cNvSpPr>
           <p:nvPr>
             <p:ph type="dt" idx="10"/>
@@ -3897,11 +3860,11 @@
         </p:nvSpPr>
         <p:spPr/>
         <p:txBody>
-          <a:bodyPr xmlns:a="http://schemas.openxmlformats.org/drawingml/2006/main"/>
-          <a:lstStyle xmlns:a="http://schemas.openxmlformats.org/drawingml/2006/main"/>
-          <a:p xmlns:a="http://schemas.openxmlformats.org/drawingml/2006/main">
+          <a:bodyPr/>
+          <a:lstStyle/>
+          <a:p>
             <a:fld id="{5BCAD085-E8A6-8845-BD4E-CB4CCA059FC4}" type="datetimeFigureOut">
-              <a:t>1/27/13</a:t>
+              <a:t>9/30/2026</a:t>
             </a:fld>
             <a:endParaRPr/>
           </a:p>
@@ -3910,14 +3873,14 @@
       <p:sp>
         <p:nvSpPr>
           <p:cNvPr id="6" name="Footer Placeholder 5">
-            <a:extLst xmlns:a="http://schemas.openxmlformats.org/drawingml/2006/main">
+            <a:extLst>
               <a:ext uri="{FF2B5EF4-FFF2-40B4-BE49-F238E27FC236}">
                 <a16:creationId xmlns:a16="http://schemas.microsoft.com/office/drawing/2014/main" id="{553BB96A-03B5-4E50-9F1C-E87BFBCEACD4}"/>
               </a:ext>
             </a:extLst>
           </p:cNvPr>
           <p:cNvSpPr>
-            <a:spLocks xmlns:a="http://schemas.openxmlformats.org/drawingml/2006/main" noGrp="1"/>
+            <a:spLocks noGrp="1"/>
           </p:cNvSpPr>
           <p:nvPr>
             <p:ph type="ftr" idx="11"/>
@@ -3925,9 +3888,9 @@
         </p:nvSpPr>
         <p:spPr/>
         <p:txBody>
-          <a:bodyPr xmlns:a="http://schemas.openxmlformats.org/drawingml/2006/main"/>
-          <a:lstStyle xmlns:a="http://schemas.openxmlformats.org/drawingml/2006/main"/>
-          <a:p xmlns:a="http://schemas.openxmlformats.org/drawingml/2006/main">
+          <a:bodyPr/>
+          <a:lstStyle/>
+          <a:p>
             <a:endParaRPr/>
           </a:p>
         </p:txBody>
@@ -3935,14 +3898,14 @@
       <p:sp>
         <p:nvSpPr>
           <p:cNvPr id="7" name="Slide Number Placeholder 6">
-            <a:extLst xmlns:a="http://schemas.openxmlformats.org/drawingml/2006/main">
+            <a:extLst>
               <a:ext uri="{FF2B5EF4-FFF2-40B4-BE49-F238E27FC236}">
                 <a16:creationId xmlns:a16="http://schemas.microsoft.com/office/drawing/2014/main" id="{C8F1C658-5728-4E7D-8932-B98C92184AAD}"/>
               </a:ext>
             </a:extLst>
           </p:cNvPr>
           <p:cNvSpPr>
-            <a:spLocks xmlns:a="http://schemas.openxmlformats.org/drawingml/2006/main" noGrp="1"/>
+            <a:spLocks noGrp="1"/>
           </p:cNvSpPr>
           <p:nvPr>
             <p:ph type="sldNum" idx="12"/>
@@ -3950,9 +3913,9 @@
         </p:nvSpPr>
         <p:spPr/>
         <p:txBody>
-          <a:bodyPr xmlns:a="http://schemas.openxmlformats.org/drawingml/2006/main"/>
-          <a:lstStyle xmlns:a="http://schemas.openxmlformats.org/drawingml/2006/main"/>
-          <a:p xmlns:a="http://schemas.openxmlformats.org/drawingml/2006/main">
+          <a:bodyPr/>
+          <a:lstStyle/>
+          <a:p>
             <a:fld id="{C1FF6DA9-008F-8B48-92A6-B652298478BF}" type="slidenum">
               <a:t>‹#›</a:t>
             </a:fld>
@@ -3962,15 +3925,18 @@
       </p:sp>
     </p:spTree>
   </p:cSld>
+  <p:clrMapOvr>
+    <a:masterClrMapping/>
+  </p:clrMapOvr>
 </p:sldLayout>
 </file>
 
 <file path=ppt/slideMasters/slideMaster1.xml><?xml version="1.0" encoding="utf-8"?>
-<p:sldMaster xmlns:p="http://schemas.openxmlformats.org/presentationml/2006/main">
+<p:sldMaster xmlns:a="http://schemas.openxmlformats.org/drawingml/2006/main" xmlns:r="http://schemas.openxmlformats.org/officeDocument/2006/relationships" xmlns:p="http://schemas.openxmlformats.org/presentationml/2006/main">
   <p:cSld>
     <p:bg>
       <p:bgRef idx="1001">
-        <a:schemeClr xmlns:a="http://schemas.openxmlformats.org/drawingml/2006/main" val="bg1"/>
+        <a:schemeClr val="bg1"/>
       </p:bgRef>
     </p:bg>
     <p:spTree>
@@ -3980,77 +3946,81 @@
         <p:nvPr/>
       </p:nvGrpSpPr>
       <p:grpSpPr>
-        <a:xfrm xmlns:a="http://schemas.openxmlformats.org/drawingml/2006/main"/>
+        <a:xfrm>
+          <a:off x="0" y="0"/>
+          <a:ext cx="0" cy="0"/>
+          <a:chOff x="0" y="0"/>
+          <a:chExt cx="0" cy="0"/>
+        </a:xfrm>
       </p:grpSpPr>
       <p:sp>
         <p:nvSpPr>
           <p:cNvPr id="2" name="Title Placeholder 1">
-            <a:extLst xmlns:a="http://schemas.openxmlformats.org/drawingml/2006/main">
+            <a:extLst>
               <a:ext uri="{FF2B5EF4-FFF2-40B4-BE49-F238E27FC236}">
                 <a16:creationId xmlns:a16="http://schemas.microsoft.com/office/drawing/2014/main" id="{A155D003-A95C-4D33-A261-7D90712750D7}"/>
               </a:ext>
             </a:extLst>
           </p:cNvPr>
           <p:cNvSpPr>
-            <a:spLocks xmlns:a="http://schemas.openxmlformats.org/drawingml/2006/main" noGrp="1"/>
-          </p:cNvSpPr>
-          <p:nvPr>
-            <p:ph type="title" idx="0"/>
+            <a:spLocks noGrp="1"/>
+          </p:cNvSpPr>
+          <p:nvPr>
+            <p:ph type="title"/>
           </p:nvPr>
         </p:nvSpPr>
         <p:spPr>
-          <a:xfrm xmlns:a="http://schemas.openxmlformats.org/drawingml/2006/main">
+          <a:xfrm>
             <a:off x="457200" y="274638"/>
             <a:ext cx="8229600" cy="1143000"/>
           </a:xfrm>
-          <a:prstGeom xmlns:a="http://schemas.openxmlformats.org/drawingml/2006/main" prst="rect">
+          <a:prstGeom prst="rect">
             <a:avLst/>
           </a:prstGeom>
         </p:spPr>
         <p:txBody>
-          <a:bodyPr xmlns:a="http://schemas.openxmlformats.org/drawingml/2006/main" vert="horz" lIns="91440" tIns="45720" rIns="91440" bIns="45720" anchor="ctr">
+          <a:bodyPr vert="horz" lIns="91440" tIns="45720" rIns="91440" bIns="45720" anchor="ctr">
             <a:normAutofit/>
           </a:bodyPr>
-          <a:lstStyle xmlns:a="http://schemas.openxmlformats.org/drawingml/2006/main"/>
-          <a:p xmlns:a="http://schemas.openxmlformats.org/drawingml/2006/main">
+          <a:lstStyle/>
+          <a:p>
             <a:r>
               <a:t>Click to edit Master title style</a:t>
             </a:r>
-            <a:endParaRPr/>
           </a:p>
         </p:txBody>
       </p:sp>
       <p:sp>
         <p:nvSpPr>
           <p:cNvPr id="3" name="Text Placeholder 2">
-            <a:extLst xmlns:a="http://schemas.openxmlformats.org/drawingml/2006/main">
+            <a:extLst>
               <a:ext uri="{FF2B5EF4-FFF2-40B4-BE49-F238E27FC236}">
                 <a16:creationId xmlns:a16="http://schemas.microsoft.com/office/drawing/2014/main" id="{71E15105-C352-41B9-8B3B-89019C4809FF}"/>
               </a:ext>
             </a:extLst>
           </p:cNvPr>
           <p:cNvSpPr>
-            <a:spLocks xmlns:a="http://schemas.openxmlformats.org/drawingml/2006/main" noGrp="1"/>
+            <a:spLocks noGrp="1"/>
           </p:cNvSpPr>
           <p:nvPr>
             <p:ph type="body" idx="1"/>
           </p:nvPr>
         </p:nvSpPr>
         <p:spPr>
-          <a:xfrm xmlns:a="http://schemas.openxmlformats.org/drawingml/2006/main">
+          <a:xfrm>
             <a:off x="457200" y="1600200"/>
             <a:ext cx="8229600" cy="4525963"/>
           </a:xfrm>
-          <a:prstGeom xmlns:a="http://schemas.openxmlformats.org/drawingml/2006/main" prst="rect">
+          <a:prstGeom prst="rect">
             <a:avLst/>
           </a:prstGeom>
         </p:spPr>
         <p:txBody>
-          <a:bodyPr xmlns:a="http://schemas.openxmlformats.org/drawingml/2006/main" vert="horz" lIns="91440" tIns="45720" rIns="91440" bIns="45720">
+          <a:bodyPr vert="horz" lIns="91440" tIns="45720" rIns="91440" bIns="45720">
             <a:normAutofit/>
           </a:bodyPr>
-          <a:lstStyle xmlns:a="http://schemas.openxmlformats.org/drawingml/2006/main"/>
-          <a:p xmlns:a="http://schemas.openxmlformats.org/drawingml/2006/main">
+          <a:lstStyle/>
+          <a:p>
             <a:pPr lvl="0">
               <a:buNone/>
             </a:pPr>
@@ -4058,7 +4028,7 @@
               <a:t>Click to edit Master text styles</a:t>
             </a:r>
           </a:p>
-          <a:p xmlns:a="http://schemas.openxmlformats.org/drawingml/2006/main">
+          <a:p>
             <a:pPr lvl="1">
               <a:buNone/>
             </a:pPr>
@@ -4066,7 +4036,7 @@
               <a:t>Second level</a:t>
             </a:r>
           </a:p>
-          <a:p xmlns:a="http://schemas.openxmlformats.org/drawingml/2006/main">
+          <a:p>
             <a:pPr lvl="2">
               <a:buNone/>
             </a:pPr>
@@ -4074,7 +4044,7 @@
               <a:t>Third level</a:t>
             </a:r>
           </a:p>
-          <a:p xmlns:a="http://schemas.openxmlformats.org/drawingml/2006/main">
+          <a:p>
             <a:pPr lvl="3">
               <a:buNone/>
             </a:pPr>
@@ -4082,45 +4052,44 @@
               <a:t>Fourth level</a:t>
             </a:r>
           </a:p>
-          <a:p xmlns:a="http://schemas.openxmlformats.org/drawingml/2006/main">
+          <a:p>
             <a:pPr lvl="4">
               <a:buNone/>
             </a:pPr>
             <a:r>
               <a:t>Fifth level</a:t>
             </a:r>
-            <a:endParaRPr/>
           </a:p>
         </p:txBody>
       </p:sp>
       <p:sp>
         <p:nvSpPr>
           <p:cNvPr id="4" name="Date Placeholder 3">
-            <a:extLst xmlns:a="http://schemas.openxmlformats.org/drawingml/2006/main">
+            <a:extLst>
               <a:ext uri="{FF2B5EF4-FFF2-40B4-BE49-F238E27FC236}">
                 <a16:creationId xmlns:a16="http://schemas.microsoft.com/office/drawing/2014/main" id="{2BF2E271-2C14-47A8-900C-F982F61FD235}"/>
               </a:ext>
             </a:extLst>
           </p:cNvPr>
           <p:cNvSpPr>
-            <a:spLocks xmlns:a="http://schemas.openxmlformats.org/drawingml/2006/main" noGrp="1"/>
+            <a:spLocks noGrp="1"/>
           </p:cNvSpPr>
           <p:nvPr>
             <p:ph type="dt" idx="2"/>
           </p:nvPr>
         </p:nvSpPr>
         <p:spPr>
-          <a:xfrm xmlns:a="http://schemas.openxmlformats.org/drawingml/2006/main">
+          <a:xfrm>
             <a:off x="457200" y="6356350"/>
             <a:ext cx="2133600" cy="365125"/>
           </a:xfrm>
-          <a:prstGeom xmlns:a="http://schemas.openxmlformats.org/drawingml/2006/main" prst="rect">
+          <a:prstGeom prst="rect">
             <a:avLst/>
           </a:prstGeom>
         </p:spPr>
         <p:txBody>
-          <a:bodyPr xmlns:a="http://schemas.openxmlformats.org/drawingml/2006/main" vert="horz" lIns="91440" tIns="45720" rIns="91440" bIns="45720" anchor="ctr"/>
-          <a:lstStyle xmlns:a="http://schemas.openxmlformats.org/drawingml/2006/main">
+          <a:bodyPr vert="horz" lIns="91440" tIns="45720" rIns="91440" bIns="45720" anchor="ctr"/>
+          <a:lstStyle>
             <a:lvl1pPr algn="l">
               <a:buNone/>
               <a:defRPr sz="1200">
@@ -4132,9 +4101,9 @@
               </a:defRPr>
             </a:lvl1pPr>
           </a:lstStyle>
-          <a:p xmlns:a="http://schemas.openxmlformats.org/drawingml/2006/main">
+          <a:p>
             <a:fld id="{5BCAD085-E8A6-8845-BD4E-CB4CCA059FC4}" type="datetimeFigureOut">
-              <a:t>1/27/13</a:t>
+              <a:t>9/30/2026</a:t>
             </a:fld>
             <a:endParaRPr/>
           </a:p>
@@ -4143,31 +4112,31 @@
       <p:sp>
         <p:nvSpPr>
           <p:cNvPr id="5" name="Footer Placeholder 4">
-            <a:extLst xmlns:a="http://schemas.openxmlformats.org/drawingml/2006/main">
+            <a:extLst>
               <a:ext uri="{FF2B5EF4-FFF2-40B4-BE49-F238E27FC236}">
                 <a16:creationId xmlns:a16="http://schemas.microsoft.com/office/drawing/2014/main" id="{54154EE6-15E7-44D9-823D-B595FD98D639}"/>
               </a:ext>
             </a:extLst>
           </p:cNvPr>
           <p:cNvSpPr>
-            <a:spLocks xmlns:a="http://schemas.openxmlformats.org/drawingml/2006/main" noGrp="1"/>
+            <a:spLocks noGrp="1"/>
           </p:cNvSpPr>
           <p:nvPr>
             <p:ph type="ftr" idx="3"/>
           </p:nvPr>
         </p:nvSpPr>
         <p:spPr>
-          <a:xfrm xmlns:a="http://schemas.openxmlformats.org/drawingml/2006/main">
+          <a:xfrm>
             <a:off x="3124200" y="6356350"/>
             <a:ext cx="2895600" cy="365125"/>
           </a:xfrm>
-          <a:prstGeom xmlns:a="http://schemas.openxmlformats.org/drawingml/2006/main" prst="rect">
+          <a:prstGeom prst="rect">
             <a:avLst/>
           </a:prstGeom>
         </p:spPr>
         <p:txBody>
-          <a:bodyPr xmlns:a="http://schemas.openxmlformats.org/drawingml/2006/main" vert="horz" lIns="91440" tIns="45720" rIns="91440" bIns="45720" anchor="ctr"/>
-          <a:lstStyle xmlns:a="http://schemas.openxmlformats.org/drawingml/2006/main">
+          <a:bodyPr vert="horz" lIns="91440" tIns="45720" rIns="91440" bIns="45720" anchor="ctr"/>
+          <a:lstStyle>
             <a:lvl1pPr algn="ctr">
               <a:buNone/>
               <a:defRPr sz="1200">
@@ -4179,7 +4148,7 @@
               </a:defRPr>
             </a:lvl1pPr>
           </a:lstStyle>
-          <a:p xmlns:a="http://schemas.openxmlformats.org/drawingml/2006/main">
+          <a:p>
             <a:endParaRPr/>
           </a:p>
         </p:txBody>
@@ -4187,31 +4156,31 @@
       <p:sp>
         <p:nvSpPr>
           <p:cNvPr id="6" name="Slide Number Placeholder 5">
-            <a:extLst xmlns:a="http://schemas.openxmlformats.org/drawingml/2006/main">
+            <a:extLst>
               <a:ext uri="{FF2B5EF4-FFF2-40B4-BE49-F238E27FC236}">
                 <a16:creationId xmlns:a16="http://schemas.microsoft.com/office/drawing/2014/main" id="{33855827-D5FC-4D31-B9D3-5C71EE14A46A}"/>
               </a:ext>
             </a:extLst>
           </p:cNvPr>
           <p:cNvSpPr>
-            <a:spLocks xmlns:a="http://schemas.openxmlformats.org/drawingml/2006/main" noGrp="1"/>
+            <a:spLocks noGrp="1"/>
           </p:cNvSpPr>
           <p:nvPr>
             <p:ph type="sldNum" idx="4"/>
           </p:nvPr>
         </p:nvSpPr>
         <p:spPr>
-          <a:xfrm xmlns:a="http://schemas.openxmlformats.org/drawingml/2006/main">
+          <a:xfrm>
             <a:off x="6553200" y="6356350"/>
             <a:ext cx="2133600" cy="365125"/>
           </a:xfrm>
-          <a:prstGeom xmlns:a="http://schemas.openxmlformats.org/drawingml/2006/main" prst="rect">
+          <a:prstGeom prst="rect">
             <a:avLst/>
           </a:prstGeom>
         </p:spPr>
         <p:txBody>
-          <a:bodyPr xmlns:a="http://schemas.openxmlformats.org/drawingml/2006/main" vert="horz" lIns="91440" tIns="45720" rIns="91440" bIns="45720" anchor="ctr"/>
-          <a:lstStyle xmlns:a="http://schemas.openxmlformats.org/drawingml/2006/main">
+          <a:bodyPr vert="horz" lIns="91440" tIns="45720" rIns="91440" bIns="45720" anchor="ctr"/>
+          <a:lstStyle>
             <a:lvl1pPr algn="r">
               <a:buNone/>
               <a:defRPr sz="1200">
@@ -4223,7 +4192,7 @@
               </a:defRPr>
             </a:lvl1pPr>
           </a:lstStyle>
-          <a:p xmlns:a="http://schemas.openxmlformats.org/drawingml/2006/main">
+          <a:p>
             <a:fld id="{C1FF6DA9-008F-8B48-92A6-B652298478BF}" type="slidenum">
               <a:t>‹#›</a:t>
             </a:fld>
@@ -4235,21 +4204,21 @@
   </p:cSld>
   <p:clrMap bg1="lt1" tx1="dk1" bg2="lt2" tx2="dk2" accent1="accent1" accent2="accent2" accent3="accent3" accent4="accent4" accent5="accent5" accent6="accent6" hlink="hlink" folHlink="folHlink"/>
   <p:sldLayoutIdLst>
-    <p:sldLayoutId xmlns:r="http://schemas.openxmlformats.org/officeDocument/2006/relationships" id="2147483649" r:id="R8df947cd0e2146c1"/>
-    <p:sldLayoutId xmlns:r="http://schemas.openxmlformats.org/officeDocument/2006/relationships" id="2147483650" r:id="R2a6884b505a042db"/>
-    <p:sldLayoutId xmlns:r="http://schemas.openxmlformats.org/officeDocument/2006/relationships" id="2147483651" r:id="Re3c4608ba1f6414b"/>
-    <p:sldLayoutId xmlns:r="http://schemas.openxmlformats.org/officeDocument/2006/relationships" id="2147483652" r:id="R7fac2a0618124e67"/>
-    <p:sldLayoutId xmlns:r="http://schemas.openxmlformats.org/officeDocument/2006/relationships" id="2147483653" r:id="Rde787f9c57984820"/>
-    <p:sldLayoutId xmlns:r="http://schemas.openxmlformats.org/officeDocument/2006/relationships" id="2147483654" r:id="R7daa72ecc4744631"/>
-    <p:sldLayoutId xmlns:r="http://schemas.openxmlformats.org/officeDocument/2006/relationships" id="2147483655" r:id="Ra415c747f0564192"/>
-    <p:sldLayoutId xmlns:r="http://schemas.openxmlformats.org/officeDocument/2006/relationships" id="2147483656" r:id="Rcd53ec0158d74470"/>
-    <p:sldLayoutId xmlns:r="http://schemas.openxmlformats.org/officeDocument/2006/relationships" id="2147483657" r:id="Rb00524d705e8473c"/>
-    <p:sldLayoutId xmlns:r="http://schemas.openxmlformats.org/officeDocument/2006/relationships" id="2147483658" r:id="Rf08677a6bdc4480f"/>
-    <p:sldLayoutId xmlns:r="http://schemas.openxmlformats.org/officeDocument/2006/relationships" id="2147483659" r:id="R455dfc1294c848f4"/>
+    <p:sldLayoutId id="2147483649" r:id="rId1"/>
+    <p:sldLayoutId id="2147483650" r:id="rId2"/>
+    <p:sldLayoutId id="2147483651" r:id="rId3"/>
+    <p:sldLayoutId id="2147483652" r:id="rId4"/>
+    <p:sldLayoutId id="2147483653" r:id="rId5"/>
+    <p:sldLayoutId id="2147483654" r:id="rId6"/>
+    <p:sldLayoutId id="2147483655" r:id="rId7"/>
+    <p:sldLayoutId id="2147483656" r:id="rId8"/>
+    <p:sldLayoutId id="2147483657" r:id="rId9"/>
+    <p:sldLayoutId id="2147483658" r:id="rId10"/>
+    <p:sldLayoutId id="2147483659" r:id="rId11"/>
   </p:sldLayoutIdLst>
   <p:txStyles>
     <p:titleStyle>
-      <a:lvl1pPr xmlns:a="http://schemas.openxmlformats.org/drawingml/2006/main" algn="ctr" defTabSz="457200">
+      <a:lvl1pPr algn="ctr" defTabSz="457200">
         <a:spcBef>
           <a:spcPct val="0"/>
         </a:spcBef>
@@ -4265,7 +4234,7 @@
       </a:lvl1pPr>
     </p:titleStyle>
     <p:bodyStyle>
-      <a:lvl1pPr xmlns:a="http://schemas.openxmlformats.org/drawingml/2006/main" marL="342900" indent="-342900" algn="l" defTabSz="457200">
+      <a:lvl1pPr marL="342900" indent="-342900" algn="l" defTabSz="457200">
         <a:spcBef>
           <a:spcPct val="20000"/>
         </a:spcBef>
@@ -4280,7 +4249,7 @@
           <a:cs typeface="+mn-lt"/>
         </a:defRPr>
       </a:lvl1pPr>
-      <a:lvl2pPr xmlns:a="http://schemas.openxmlformats.org/drawingml/2006/main" marL="742950" indent="-285750" algn="l" defTabSz="457200">
+      <a:lvl2pPr marL="742950" indent="-285750" algn="l" defTabSz="457200">
         <a:spcBef>
           <a:spcPct val="20000"/>
         </a:spcBef>
@@ -4295,7 +4264,7 @@
           <a:cs typeface="+mn-lt"/>
         </a:defRPr>
       </a:lvl2pPr>
-      <a:lvl3pPr xmlns:a="http://schemas.openxmlformats.org/drawingml/2006/main" marL="1143000" indent="-228600" algn="l" defTabSz="457200">
+      <a:lvl3pPr marL="1143000" indent="-228600" algn="l" defTabSz="457200">
         <a:spcBef>
           <a:spcPct val="20000"/>
         </a:spcBef>
@@ -4310,7 +4279,7 @@
           <a:cs typeface="+mn-lt"/>
         </a:defRPr>
       </a:lvl3pPr>
-      <a:lvl4pPr xmlns:a="http://schemas.openxmlformats.org/drawingml/2006/main" marL="1600200" indent="-228600" algn="l" defTabSz="457200">
+      <a:lvl4pPr marL="1600200" indent="-228600" algn="l" defTabSz="457200">
         <a:spcBef>
           <a:spcPct val="20000"/>
         </a:spcBef>
@@ -4325,7 +4294,7 @@
           <a:cs typeface="+mn-lt"/>
         </a:defRPr>
       </a:lvl4pPr>
-      <a:lvl5pPr xmlns:a="http://schemas.openxmlformats.org/drawingml/2006/main" marL="2057400" indent="-228600" algn="l" defTabSz="457200">
+      <a:lvl5pPr marL="2057400" indent="-228600" algn="l" defTabSz="457200">
         <a:spcBef>
           <a:spcPct val="20000"/>
         </a:spcBef>
@@ -4340,7 +4309,7 @@
           <a:cs typeface="+mn-lt"/>
         </a:defRPr>
       </a:lvl5pPr>
-      <a:lvl6pPr xmlns:a="http://schemas.openxmlformats.org/drawingml/2006/main" marL="2514600" indent="-228600" algn="l" defTabSz="457200">
+      <a:lvl6pPr marL="2514600" indent="-228600" algn="l" defTabSz="457200">
         <a:spcBef>
           <a:spcPct val="20000"/>
         </a:spcBef>
@@ -4355,7 +4324,7 @@
           <a:cs typeface="+mn-lt"/>
         </a:defRPr>
       </a:lvl6pPr>
-      <a:lvl7pPr xmlns:a="http://schemas.openxmlformats.org/drawingml/2006/main" marL="2971800" indent="-228600" algn="l" defTabSz="457200">
+      <a:lvl7pPr marL="2971800" indent="-228600" algn="l" defTabSz="457200">
         <a:spcBef>
           <a:spcPct val="20000"/>
         </a:spcBef>
@@ -4370,7 +4339,7 @@
           <a:cs typeface="+mn-lt"/>
         </a:defRPr>
       </a:lvl7pPr>
-      <a:lvl8pPr xmlns:a="http://schemas.openxmlformats.org/drawingml/2006/main" marL="3429000" indent="-228600" algn="l" defTabSz="457200">
+      <a:lvl8pPr marL="3429000" indent="-228600" algn="l" defTabSz="457200">
         <a:spcBef>
           <a:spcPct val="20000"/>
         </a:spcBef>
@@ -4385,7 +4354,7 @@
           <a:cs typeface="+mn-lt"/>
         </a:defRPr>
       </a:lvl8pPr>
-      <a:lvl9pPr xmlns:a="http://schemas.openxmlformats.org/drawingml/2006/main" marL="3886200" indent="-228600" algn="l" defTabSz="457200">
+      <a:lvl9pPr marL="3886200" indent="-228600" algn="l" defTabSz="457200">
         <a:spcBef>
           <a:spcPct val="20000"/>
         </a:spcBef>
@@ -4402,7 +4371,7 @@
       </a:lvl9pPr>
     </p:bodyStyle>
     <p:otherStyle>
-      <a:lvl1pPr xmlns:a="http://schemas.openxmlformats.org/drawingml/2006/main" marL="0" algn="l" defTabSz="457200">
+      <a:lvl1pPr marL="0" algn="l" defTabSz="457200">
         <a:buNone/>
         <a:defRPr sz="1800" kern="1200">
           <a:solidFill>
@@ -4413,7 +4382,7 @@
           <a:cs typeface="+mn-lt"/>
         </a:defRPr>
       </a:lvl1pPr>
-      <a:lvl2pPr xmlns:a="http://schemas.openxmlformats.org/drawingml/2006/main" marL="457200" algn="l" defTabSz="457200">
+      <a:lvl2pPr marL="457200" algn="l" defTabSz="457200">
         <a:buNone/>
         <a:defRPr sz="1800" kern="1200">
           <a:solidFill>
@@ -4424,7 +4393,7 @@
           <a:cs typeface="+mn-lt"/>
         </a:defRPr>
       </a:lvl2pPr>
-      <a:lvl3pPr xmlns:a="http://schemas.openxmlformats.org/drawingml/2006/main" marL="914400" algn="l" defTabSz="457200">
+      <a:lvl3pPr marL="914400" algn="l" defTabSz="457200">
         <a:buNone/>
         <a:defRPr sz="1800" kern="1200">
           <a:solidFill>
@@ -4435,7 +4404,7 @@
           <a:cs typeface="+mn-lt"/>
         </a:defRPr>
       </a:lvl3pPr>
-      <a:lvl4pPr xmlns:a="http://schemas.openxmlformats.org/drawingml/2006/main" marL="1371600" algn="l" defTabSz="457200">
+      <a:lvl4pPr marL="1371600" algn="l" defTabSz="457200">
         <a:buNone/>
         <a:defRPr sz="1800" kern="1200">
           <a:solidFill>
@@ -4446,7 +4415,7 @@
           <a:cs typeface="+mn-lt"/>
         </a:defRPr>
       </a:lvl4pPr>
-      <a:lvl5pPr xmlns:a="http://schemas.openxmlformats.org/drawingml/2006/main" marL="1828800" algn="l" defTabSz="457200">
+      <a:lvl5pPr marL="1828800" algn="l" defTabSz="457200">
         <a:buNone/>
         <a:defRPr sz="1800" kern="1200">
           <a:solidFill>
@@ -4457,7 +4426,7 @@
           <a:cs typeface="+mn-lt"/>
         </a:defRPr>
       </a:lvl5pPr>
-      <a:lvl6pPr xmlns:a="http://schemas.openxmlformats.org/drawingml/2006/main" marL="2286000" algn="l" defTabSz="457200">
+      <a:lvl6pPr marL="2286000" algn="l" defTabSz="457200">
         <a:buNone/>
         <a:defRPr sz="1800" kern="1200">
           <a:solidFill>
@@ -4468,7 +4437,7 @@
           <a:cs typeface="+mn-lt"/>
         </a:defRPr>
       </a:lvl6pPr>
-      <a:lvl7pPr xmlns:a="http://schemas.openxmlformats.org/drawingml/2006/main" marL="2743200" algn="l" defTabSz="457200">
+      <a:lvl7pPr marL="2743200" algn="l" defTabSz="457200">
         <a:buNone/>
         <a:defRPr sz="1800" kern="1200">
           <a:solidFill>
@@ -4479,7 +4448,7 @@
           <a:cs typeface="+mn-lt"/>
         </a:defRPr>
       </a:lvl7pPr>
-      <a:lvl8pPr xmlns:a="http://schemas.openxmlformats.org/drawingml/2006/main" marL="3200400" algn="l" defTabSz="457200">
+      <a:lvl8pPr marL="3200400" algn="l" defTabSz="457200">
         <a:buNone/>
         <a:defRPr sz="1800" kern="1200">
           <a:solidFill>
@@ -4490,7 +4459,7 @@
           <a:cs typeface="+mn-lt"/>
         </a:defRPr>
       </a:lvl8pPr>
-      <a:lvl9pPr xmlns:a="http://schemas.openxmlformats.org/drawingml/2006/main" marL="3657600" algn="l" defTabSz="457200">
+      <a:lvl9pPr marL="3657600" algn="l" defTabSz="457200">
         <a:buNone/>
         <a:defRPr sz="1800" kern="1200">
           <a:solidFill>
@@ -4506,282 +4475,15 @@
 </p:sldMaster>
 </file>
 
-<file path=ppt/slideMasters/theme/theme2.xml><?xml version="1.0" encoding="utf-8"?>
-<a:theme xmlns:a="http://schemas.openxmlformats.org/drawingml/2006/main" name="Office Theme">
-  <a:themeElements>
-    <a:clrScheme name="Office">
-      <a:dk1>
-        <a:sysClr val="windowText" lastClr="000000"/>
-      </a:dk1>
-      <a:lt1>
-        <a:sysClr val="window" lastClr="FFFFFF"/>
-      </a:lt1>
-      <a:dk2>
-        <a:srgbClr val="1F497D"/>
-      </a:dk2>
-      <a:lt2>
-        <a:srgbClr val="EEECE1"/>
-      </a:lt2>
-      <a:accent1>
-        <a:srgbClr val="4F81BD"/>
-      </a:accent1>
-      <a:accent2>
-        <a:srgbClr val="C0504D"/>
-      </a:accent2>
-      <a:accent3>
-        <a:srgbClr val="9BBB59"/>
-      </a:accent3>
-      <a:accent4>
-        <a:srgbClr val="8064A2"/>
-      </a:accent4>
-      <a:accent5>
-        <a:srgbClr val="4BACC6"/>
-      </a:accent5>
-      <a:accent6>
-        <a:srgbClr val="F79646"/>
-      </a:accent6>
-      <a:hlink>
-        <a:srgbClr val="0000FF"/>
-      </a:hlink>
-      <a:folHlink>
-        <a:srgbClr val="800080"/>
-      </a:folHlink>
-    </a:clrScheme>
-    <a:fontScheme name="Office">
-      <a:majorFont>
-        <a:latin typeface="Calibri"/>
-        <a:ea typeface=""/>
-        <a:cs typeface=""/>
-        <a:font script="Jpan" typeface="ＭＳ Ｐゴシック"/>
-        <a:font script="Hang" typeface="맑은 고딕"/>
-        <a:font script="Hans" typeface="宋体"/>
-        <a:font script="Hant" typeface="新細明體"/>
-        <a:font script="Arab" typeface="Times New Roman"/>
-        <a:font script="Hebr" typeface="Times New Roman"/>
-        <a:font script="Thai" typeface="Angsana New"/>
-        <a:font script="Ethi" typeface="Nyala"/>
-        <a:font script="Beng" typeface="Vrinda"/>
-        <a:font script="Gujr" typeface="Shruti"/>
-        <a:font script="Khmr" typeface="MoolBoran"/>
-        <a:font script="Knda" typeface="Tunga"/>
-        <a:font script="Guru" typeface="Raavi"/>
-        <a:font script="Cans" typeface="Euphemia"/>
-        <a:font script="Cher" typeface="Plantagenet Cherokee"/>
-        <a:font script="Yiii" typeface="Microsoft Yi Baiti"/>
-        <a:font script="Tibt" typeface="Microsoft Himalaya"/>
-        <a:font script="Thaa" typeface="MV Boli"/>
-        <a:font script="Deva" typeface="Mangal"/>
-        <a:font script="Telu" typeface="Gautami"/>
-        <a:font script="Taml" typeface="Latha"/>
-        <a:font script="Syrc" typeface="Estrangelo Edessa"/>
-        <a:font script="Orya" typeface="Kalinga"/>
-        <a:font script="Mlym" typeface="Kartika"/>
-        <a:font script="Laoo" typeface="DokChampa"/>
-        <a:font script="Sinh" typeface="Iskoola Pota"/>
-        <a:font script="Mong" typeface="Mongolian Baiti"/>
-        <a:font script="Viet" typeface="Times New Roman"/>
-        <a:font script="Uigh" typeface="Microsoft Uighur"/>
-        <a:font script="Geor" typeface="Sylfaen"/>
-      </a:majorFont>
-      <a:minorFont>
-        <a:latin typeface="Calibri"/>
-        <a:ea typeface=""/>
-        <a:cs typeface=""/>
-        <a:font script="Jpan" typeface="ＭＳ Ｐゴシック"/>
-        <a:font script="Hang" typeface="맑은 고딕"/>
-        <a:font script="Hans" typeface="宋体"/>
-        <a:font script="Hant" typeface="新細明體"/>
-        <a:font script="Arab" typeface="Arial"/>
-        <a:font script="Hebr" typeface="Arial"/>
-        <a:font script="Thai" typeface="Cordia New"/>
-        <a:font script="Ethi" typeface="Nyala"/>
-        <a:font script="Beng" typeface="Vrinda"/>
-        <a:font script="Gujr" typeface="Shruti"/>
-        <a:font script="Khmr" typeface="DaunPenh"/>
-        <a:font script="Knda" typeface="Tunga"/>
-        <a:font script="Guru" typeface="Raavi"/>
-        <a:font script="Cans" typeface="Euphemia"/>
-        <a:font script="Cher" typeface="Plantagenet Cherokee"/>
-        <a:font script="Yiii" typeface="Microsoft Yi Baiti"/>
-        <a:font script="Tibt" typeface="Microsoft Himalaya"/>
-        <a:font script="Thaa" typeface="MV Boli"/>
-        <a:font script="Deva" typeface="Mangal"/>
-        <a:font script="Telu" typeface="Gautami"/>
-        <a:font script="Taml" typeface="Latha"/>
-        <a:font script="Syrc" typeface="Estrangelo Edessa"/>
-        <a:font script="Orya" typeface="Kalinga"/>
-        <a:font script="Mlym" typeface="Kartika"/>
-        <a:font script="Laoo" typeface="DokChampa"/>
-        <a:font script="Sinh" typeface="Iskoola Pota"/>
-        <a:font script="Mong" typeface="Mongolian Baiti"/>
-        <a:font script="Viet" typeface="Arial"/>
-        <a:font script="Uigh" typeface="Microsoft Uighur"/>
-        <a:font script="Geor" typeface="Sylfaen"/>
-      </a:minorFont>
-    </a:fontScheme>
-    <a:fmtScheme name="Office">
-      <a:fillStyleLst>
-        <a:solidFill>
-          <a:schemeClr val="phClr"/>
-        </a:solidFill>
-        <a:gradFill rotWithShape="1">
-          <a:gsLst>
-            <a:gs pos="0">
-              <a:schemeClr val="phClr">
-                <a:tint val="50000"/>
-                <a:satMod val="300000"/>
-              </a:schemeClr>
-            </a:gs>
-            <a:gs pos="35000">
-              <a:schemeClr val="phClr">
-                <a:tint val="37000"/>
-                <a:satMod val="300000"/>
-              </a:schemeClr>
-            </a:gs>
-            <a:gs pos="100000">
-              <a:schemeClr val="phClr">
-                <a:tint val="15000"/>
-                <a:satMod val="350000"/>
-              </a:schemeClr>
-            </a:gs>
-          </a:gsLst>
-          <a:lin ang="16200000" scaled="1"/>
-        </a:gradFill>
-        <a:gradFill rotWithShape="1">
-          <a:gsLst>
-            <a:gs pos="0">
-              <a:schemeClr val="phClr">
-                <a:tint val="100000"/>
-                <a:shade val="100000"/>
-                <a:satMod val="130000"/>
-              </a:schemeClr>
-            </a:gs>
-            <a:gs pos="100000">
-              <a:schemeClr val="phClr">
-                <a:tint val="50000"/>
-                <a:shade val="100000"/>
-                <a:satMod val="350000"/>
-              </a:schemeClr>
-            </a:gs>
-          </a:gsLst>
-          <a:lin ang="16200000" scaled="0"/>
-        </a:gradFill>
-      </a:fillStyleLst>
-      <a:lnStyleLst>
-        <a:ln w="9525">
-          <a:solidFill>
-            <a:schemeClr val="phClr">
-              <a:shade val="95000"/>
-              <a:satMod val="105000"/>
-            </a:schemeClr>
-          </a:solidFill>
-          <a:prstDash val="solid"/>
-        </a:ln>
-        <a:ln w="25400">
-          <a:solidFill>
-            <a:schemeClr val="phClr"/>
-          </a:solidFill>
-          <a:prstDash val="solid"/>
-        </a:ln>
-        <a:ln w="38100">
-          <a:solidFill>
-            <a:schemeClr val="phClr"/>
-          </a:solidFill>
-          <a:prstDash val="solid"/>
-        </a:ln>
-      </a:lnStyleLst>
-      <a:effectStyleLst>
-        <a:effectStyle>
-          <a:effectLst>
-            <a:outerShdw blurRad="40000" dist="20000" dir="5400000" rotWithShape="0">
-              <a:srgbClr val="000000">
-                <a:alpha val="38000"/>
-              </a:srgbClr>
-            </a:outerShdw>
-          </a:effectLst>
-        </a:effectStyle>
-        <a:effectStyle>
-          <a:effectLst>
-            <a:outerShdw blurRad="40000" dist="23000" dir="5400000" rotWithShape="0">
-              <a:srgbClr val="000000">
-                <a:alpha val="35000"/>
-              </a:srgbClr>
-            </a:outerShdw>
-          </a:effectLst>
-        </a:effectStyle>
-        <a:effectStyle>
-          <a:effectLst>
-            <a:outerShdw blurRad="40000" dist="23000" dir="5400000" rotWithShape="0">
-              <a:srgbClr val="000000">
-                <a:alpha val="35000"/>
-              </a:srgbClr>
-            </a:outerShdw>
-          </a:effectLst>
-        </a:effectStyle>
-      </a:effectStyleLst>
-      <a:bgFillStyleLst>
-        <a:solidFill>
-          <a:schemeClr val="phClr"/>
-        </a:solidFill>
-        <a:gradFill rotWithShape="1">
-          <a:gsLst>
-            <a:gs pos="0">
-              <a:schemeClr val="phClr">
-                <a:tint val="40000"/>
-                <a:satMod val="350000"/>
-              </a:schemeClr>
-            </a:gs>
-            <a:gs pos="40000">
-              <a:schemeClr val="phClr">
-                <a:tint val="45000"/>
-                <a:shade val="99000"/>
-                <a:satMod val="350000"/>
-              </a:schemeClr>
-            </a:gs>
-            <a:gs pos="100000">
-              <a:schemeClr val="phClr">
-                <a:shade val="20000"/>
-                <a:satMod val="255000"/>
-              </a:schemeClr>
-            </a:gs>
-          </a:gsLst>
-          <a:path path="circle">
-            <a:fillToRect l="50000" t="-80000" r="50000" b="180000"/>
-          </a:path>
-        </a:gradFill>
-        <a:gradFill rotWithShape="1">
-          <a:gsLst>
-            <a:gs pos="0">
-              <a:schemeClr val="phClr">
-                <a:tint val="80000"/>
-                <a:satMod val="300000"/>
-              </a:schemeClr>
-            </a:gs>
-            <a:gs pos="100000">
-              <a:schemeClr val="phClr">
-                <a:shade val="30000"/>
-                <a:satMod val="200000"/>
-              </a:schemeClr>
-            </a:gs>
-          </a:gsLst>
-          <a:path path="circle">
-            <a:fillToRect l="50000" t="50000" r="50000" b="50000"/>
-          </a:path>
-        </a:gradFill>
-      </a:bgFillStyleLst>
-    </a:fmtScheme>
-  </a:themeElements>
-</a:theme>
-</file>
-
 <file path=ppt/slides/slide1.xml><?xml version="1.0" encoding="utf-8"?>
-<p:sld xmlns:p="http://schemas.openxmlformats.org/presentationml/2006/main">
+<p:sld xmlns:a="http://schemas.openxmlformats.org/drawingml/2006/main" xmlns:r="http://schemas.openxmlformats.org/officeDocument/2006/relationships" xmlns:p="http://schemas.openxmlformats.org/presentationml/2006/main">
   <p:cSld>
     <p:bg>
       <p:bgPr>
-        <a:solidFill xmlns:a="http://schemas.openxmlformats.org/drawingml/2006/main">
+        <a:solidFill>
           <a:srgbClr val="EEECE1"/>
         </a:solidFill>
+        <a:effectLst/>
       </p:bgPr>
     </p:bg>
     <p:spTree>
@@ -4791,38 +4493,43 @@
         <p:nvPr/>
       </p:nvGrpSpPr>
       <p:grpSpPr>
-        <a:xfrm xmlns:a="http://schemas.openxmlformats.org/drawingml/2006/main"/>
+        <a:xfrm>
+          <a:off x="0" y="0"/>
+          <a:ext cx="0" cy="0"/>
+          <a:chOff x="0" y="0"/>
+          <a:chExt cx="0" cy="0"/>
+        </a:xfrm>
       </p:grpSpPr>
       <p:sp>
         <p:nvSpPr>
           <p:cNvPr id="2" name="TextBox 1">
-            <a:extLst xmlns:a="http://schemas.openxmlformats.org/drawingml/2006/main">
+            <a:extLst>
               <a:ext uri="{FF2B5EF4-FFF2-40B4-BE49-F238E27FC236}">
                 <a16:creationId xmlns:a16="http://schemas.microsoft.com/office/drawing/2014/main" id="{4F2D5FEB-45AF-443D-8F5B-EA524BD641F1}"/>
               </a:ext>
             </a:extLst>
           </p:cNvPr>
           <p:cNvSpPr>
-            <a:spLocks xmlns:a="http://schemas.openxmlformats.org/drawingml/2006/main" noGrp="1"/>
+            <a:spLocks noGrp="1"/>
           </p:cNvSpPr>
           <p:nvPr/>
         </p:nvSpPr>
         <p:spPr>
-          <a:xfrm xmlns:a="http://schemas.openxmlformats.org/drawingml/2006/main">
+          <a:xfrm>
             <a:off x="640080" y="2103120"/>
             <a:ext cx="10607040" cy="2076450"/>
           </a:xfrm>
-          <a:prstGeom xmlns:a="http://schemas.openxmlformats.org/drawingml/2006/main" prst="rect">
+          <a:prstGeom prst="rect">
             <a:avLst/>
           </a:prstGeom>
-          <a:noFill xmlns:a="http://schemas.openxmlformats.org/drawingml/2006/main"/>
+          <a:noFill/>
         </p:spPr>
         <p:txBody>
-          <a:bodyPr xmlns:a="http://schemas.openxmlformats.org/drawingml/2006/main" wrap="square" lIns="0" tIns="0" rIns="0" bIns="0">
+          <a:bodyPr wrap="square" lIns="0" tIns="0" rIns="0" bIns="0">
             <a:spAutoFit/>
           </a:bodyPr>
-          <a:lstStyle xmlns:a="http://schemas.openxmlformats.org/drawingml/2006/main"/>
-          <a:p xmlns:a="http://schemas.openxmlformats.org/drawingml/2006/main">
+          <a:lstStyle/>
+          <a:p>
             <a:r>
               <a:rPr sz="1500" b="1" i="0">
                 <a:solidFill>
@@ -4835,7 +4542,7 @@
               <a:t>GUERRILLA AI FOR EXCEL. A LIVE SERIES, DAY 3 OF 5</a:t>
             </a:r>
           </a:p>
-          <a:p xmlns:a="http://schemas.openxmlformats.org/drawingml/2006/main">
+          <a:p>
             <a:pPr>
               <a:spcBef>
                 <a:spcPts val="1000"/>
@@ -4854,7 +4561,7 @@
               <a:t>Clean data so AI doesn't lie to you</a:t>
             </a:r>
           </a:p>
-          <a:p xmlns:a="http://schemas.openxmlformats.org/drawingml/2006/main">
+          <a:p>
             <a:pPr>
               <a:spcBef>
                 <a:spcPts val="1400"/>
@@ -4878,33 +4585,33 @@
       <p:sp>
         <p:nvSpPr>
           <p:cNvPr id="3" name="TextBox 2">
-            <a:extLst xmlns:a="http://schemas.openxmlformats.org/drawingml/2006/main">
+            <a:extLst>
               <a:ext uri="{FF2B5EF4-FFF2-40B4-BE49-F238E27FC236}">
                 <a16:creationId xmlns:a16="http://schemas.microsoft.com/office/drawing/2014/main" id="{8033E7C4-54EA-4B59-A1DC-928A7D9D6D5E}"/>
               </a:ext>
             </a:extLst>
           </p:cNvPr>
           <p:cNvSpPr>
-            <a:spLocks xmlns:a="http://schemas.openxmlformats.org/drawingml/2006/main" noGrp="1"/>
+            <a:spLocks noGrp="1"/>
           </p:cNvSpPr>
           <p:nvPr/>
         </p:nvSpPr>
         <p:spPr>
-          <a:xfrm xmlns:a="http://schemas.openxmlformats.org/drawingml/2006/main">
+          <a:xfrm>
             <a:off x="640080" y="6080760"/>
             <a:ext cx="10972800" cy="457200"/>
           </a:xfrm>
-          <a:prstGeom xmlns:a="http://schemas.openxmlformats.org/drawingml/2006/main" prst="rect">
+          <a:prstGeom prst="rect">
             <a:avLst/>
           </a:prstGeom>
-          <a:noFill xmlns:a="http://schemas.openxmlformats.org/drawingml/2006/main"/>
+          <a:noFill/>
         </p:spPr>
         <p:txBody>
-          <a:bodyPr xmlns:a="http://schemas.openxmlformats.org/drawingml/2006/main" wrap="square" lIns="0" tIns="0" rIns="0" bIns="0">
+          <a:bodyPr wrap="square" lIns="0" tIns="0" rIns="0" bIns="0">
             <a:spAutoFit/>
           </a:bodyPr>
-          <a:lstStyle xmlns:a="http://schemas.openxmlformats.org/drawingml/2006/main"/>
-          <a:p xmlns:a="http://schemas.openxmlformats.org/drawingml/2006/main">
+          <a:lstStyle/>
+          <a:p>
             <a:r>
               <a:rPr sz="1300" b="0" i="1">
                 <a:solidFill>
@@ -4922,33 +4629,33 @@
       <p:sp>
         <p:nvSpPr>
           <p:cNvPr id="4" name="TextBox 3">
-            <a:extLst xmlns:a="http://schemas.openxmlformats.org/drawingml/2006/main">
+            <a:extLst>
               <a:ext uri="{FF2B5EF4-FFF2-40B4-BE49-F238E27FC236}">
                 <a16:creationId xmlns:a16="http://schemas.microsoft.com/office/drawing/2014/main" id="{35654EE9-EDC1-45DE-9FE3-4075243C387C}"/>
               </a:ext>
             </a:extLst>
           </p:cNvPr>
           <p:cNvSpPr>
-            <a:spLocks xmlns:a="http://schemas.openxmlformats.org/drawingml/2006/main" noGrp="1"/>
+            <a:spLocks noGrp="1"/>
           </p:cNvSpPr>
           <p:nvPr/>
         </p:nvSpPr>
         <p:spPr>
-          <a:xfrm xmlns:a="http://schemas.openxmlformats.org/drawingml/2006/main">
+          <a:xfrm>
             <a:off x="457200" y="384048"/>
             <a:ext cx="4114800" cy="365760"/>
           </a:xfrm>
-          <a:prstGeom xmlns:a="http://schemas.openxmlformats.org/drawingml/2006/main" prst="rect">
+          <a:prstGeom prst="rect">
             <a:avLst/>
           </a:prstGeom>
-          <a:noFill xmlns:a="http://schemas.openxmlformats.org/drawingml/2006/main"/>
+          <a:noFill/>
         </p:spPr>
         <p:txBody>
-          <a:bodyPr xmlns:a="http://schemas.openxmlformats.org/drawingml/2006/main" wrap="square" lIns="0" tIns="0" rIns="0" bIns="0">
+          <a:bodyPr wrap="square" lIns="0" tIns="0" rIns="0" bIns="0">
             <a:spAutoFit/>
           </a:bodyPr>
-          <a:lstStyle xmlns:a="http://schemas.openxmlformats.org/drawingml/2006/main"/>
-          <a:p xmlns:a="http://schemas.openxmlformats.org/drawingml/2006/main">
+          <a:lstStyle/>
+          <a:p>
             <a:r>
               <a:rPr sz="1300" b="1" i="0">
                 <a:solidFill>
@@ -4965,192 +4672,37 @@
       </p:sp>
       <p:sp>
         <p:nvSpPr>
-          <p:cNvPr id="5" name="Chat prompt panel">
-            <a:extLst xmlns:a="http://schemas.openxmlformats.org/drawingml/2006/main">
-              <a:ext uri="{FF2B5EF4-FFF2-40B4-BE49-F238E27FC236}">
-                <a16:creationId xmlns:a16="http://schemas.microsoft.com/office/drawing/2014/main" id="{A60FD832-86C0-409F-8C31-E7032EEE7A29}"/>
-              </a:ext>
-            </a:extLst>
-          </p:cNvPr>
-          <p:cNvSpPr>
-            <a:spLocks xmlns:a="http://schemas.openxmlformats.org/drawingml/2006/main" noGrp="1"/>
+          <p:cNvPr id="8" name="Chat instruction">
+            <a:extLst>
+              <a:ext uri="{FF2B5EF4-FFF2-40B4-BE49-F238E27FC236}">
+                <a16:creationId xmlns:a16="http://schemas.microsoft.com/office/drawing/2014/main" id="{57BFD59A-83FF-4EE3-AEBA-04020DC0822F}"/>
+              </a:ext>
+            </a:extLst>
+          </p:cNvPr>
+          <p:cNvSpPr>
+            <a:spLocks noGrp="1"/>
           </p:cNvSpPr>
           <p:nvPr/>
         </p:nvSpPr>
         <p:spPr>
-          <a:xfrm xmlns:a="http://schemas.openxmlformats.org/drawingml/2006/main">
-            <a:off x="638175" y="4352925"/>
-            <a:ext cx="10896600" cy="1352550"/>
+          <a:xfrm>
+            <a:off x="8143875" y="5095875"/>
+            <a:ext cx="3048000" cy="400050"/>
           </a:xfrm>
-          <a:prstGeom xmlns:a="http://schemas.openxmlformats.org/drawingml/2006/main" prst="rect">
+          <a:prstGeom prst="rect">
             <a:avLst/>
           </a:prstGeom>
-          <a:solidFill xmlns:a="http://schemas.openxmlformats.org/drawingml/2006/main">
-            <a:srgbClr val="1F2120"/>
-          </a:solidFill>
-          <a:ln xmlns:a="http://schemas.openxmlformats.org/drawingml/2006/main" w="0">
+          <a:noFill/>
+          <a:ln w="0">
             <a:noFill/>
           </a:ln>
         </p:spPr>
         <p:txBody>
-          <a:bodyPr xmlns:a="http://schemas.openxmlformats.org/drawingml/2006/main" wrap="square" lIns="0" tIns="0" rIns="0" bIns="0">
+          <a:bodyPr wrap="square" lIns="0" tIns="0" rIns="0" bIns="0">
             <a:noAutofit/>
           </a:bodyPr>
-          <a:lstStyle xmlns:a="http://schemas.openxmlformats.org/drawingml/2006/main"/>
-          <a:p xmlns:a="http://schemas.openxmlformats.org/drawingml/2006/main">
-            <a:r>
-              <a:t/>
-            </a:r>
-          </a:p>
-        </p:txBody>
-      </p:sp>
-      <p:sp>
-        <p:nvSpPr>
-          <p:cNvPr id="6" name="Chat question">
-            <a:extLst xmlns:a="http://schemas.openxmlformats.org/drawingml/2006/main">
-              <a:ext uri="{FF2B5EF4-FFF2-40B4-BE49-F238E27FC236}">
-                <a16:creationId xmlns:a16="http://schemas.microsoft.com/office/drawing/2014/main" id="{AC0051AF-5A23-43F4-BC82-2E47E7634EB6}"/>
-              </a:ext>
-            </a:extLst>
-          </p:cNvPr>
-          <p:cNvSpPr>
-            <a:spLocks xmlns:a="http://schemas.openxmlformats.org/drawingml/2006/main" noGrp="1"/>
-          </p:cNvSpPr>
-          <p:nvPr/>
-        </p:nvSpPr>
-        <p:spPr>
-          <a:xfrm xmlns:a="http://schemas.openxmlformats.org/drawingml/2006/main">
-            <a:off x="857250" y="4495800"/>
-            <a:ext cx="10429875" cy="381000"/>
-          </a:xfrm>
-          <a:prstGeom xmlns:a="http://schemas.openxmlformats.org/drawingml/2006/main" prst="rect">
-            <a:avLst/>
-          </a:prstGeom>
-          <a:noFill xmlns:a="http://schemas.openxmlformats.org/drawingml/2006/main"/>
-          <a:ln xmlns:a="http://schemas.openxmlformats.org/drawingml/2006/main" w="0">
-            <a:noFill/>
-          </a:ln>
-        </p:spPr>
-        <p:txBody>
-          <a:bodyPr xmlns:a="http://schemas.openxmlformats.org/drawingml/2006/main" wrap="square" lIns="0" tIns="0" rIns="0" bIns="0">
-            <a:noAutofit/>
-          </a:bodyPr>
-          <a:lstStyle xmlns:a="http://schemas.openxmlformats.org/drawingml/2006/main"/>
-          <a:p xmlns:a="http://schemas.openxmlformats.org/drawingml/2006/main">
-            <a:pPr>
-              <a:defRPr sz="2100" b="1">
-                <a:solidFill>
-                  <a:srgbClr val="FFFFFF"/>
-                </a:solidFill>
-                <a:latin typeface="Arial"/>
-                <a:ea typeface="Arial"/>
-                <a:cs typeface="Arial"/>
-              </a:defRPr>
-            </a:pPr>
-            <a:r>
-              <a:rPr sz="2100" b="1">
-                <a:solidFill>
-                  <a:srgbClr val="FFFFFF"/>
-                </a:solidFill>
-                <a:latin typeface="Arial"/>
-                <a:ea typeface="Arial"/>
-                <a:cs typeface="Arial"/>
-              </a:rPr>
-              <a:t>Do you repeat the same cleanup?</a:t>
-            </a:r>
-          </a:p>
-        </p:txBody>
-      </p:sp>
-      <p:sp>
-        <p:nvSpPr>
-          <p:cNvPr id="7" name="Chat choices">
-            <a:extLst xmlns:a="http://schemas.openxmlformats.org/drawingml/2006/main">
-              <a:ext uri="{FF2B5EF4-FFF2-40B4-BE49-F238E27FC236}">
-                <a16:creationId xmlns:a16="http://schemas.microsoft.com/office/drawing/2014/main" id="{B55418D3-97CD-4FB6-AF33-299B51F7152E}"/>
-              </a:ext>
-            </a:extLst>
-          </p:cNvPr>
-          <p:cNvSpPr>
-            <a:spLocks xmlns:a="http://schemas.openxmlformats.org/drawingml/2006/main" noGrp="1"/>
-          </p:cNvSpPr>
-          <p:nvPr/>
-        </p:nvSpPr>
-        <p:spPr>
-          <a:xfrm xmlns:a="http://schemas.openxmlformats.org/drawingml/2006/main">
-            <a:off x="857250" y="4962525"/>
-            <a:ext cx="6858000" cy="419100"/>
-          </a:xfrm>
-          <a:prstGeom xmlns:a="http://schemas.openxmlformats.org/drawingml/2006/main" prst="rect">
-            <a:avLst/>
-          </a:prstGeom>
-          <a:noFill xmlns:a="http://schemas.openxmlformats.org/drawingml/2006/main"/>
-          <a:ln xmlns:a="http://schemas.openxmlformats.org/drawingml/2006/main" w="0">
-            <a:noFill/>
-          </a:ln>
-        </p:spPr>
-        <p:txBody>
-          <a:bodyPr xmlns:a="http://schemas.openxmlformats.org/drawingml/2006/main" wrap="square" lIns="0" tIns="0" rIns="0" bIns="0">
-            <a:noAutofit/>
-          </a:bodyPr>
-          <a:lstStyle xmlns:a="http://schemas.openxmlformats.org/drawingml/2006/main"/>
-          <a:p xmlns:a="http://schemas.openxmlformats.org/drawingml/2006/main">
-            <a:pPr>
-              <a:defRPr sz="2400" b="1">
-                <a:solidFill>
-                  <a:srgbClr val="FFFFFF"/>
-                </a:solidFill>
-                <a:latin typeface="Arial"/>
-                <a:ea typeface="Arial"/>
-                <a:cs typeface="Arial"/>
-              </a:defRPr>
-            </a:pPr>
-            <a:r>
-              <a:rPr sz="2400" b="1">
-                <a:solidFill>
-                  <a:srgbClr val="FFFFFF"/>
-                </a:solidFill>
-                <a:latin typeface="Arial"/>
-                <a:ea typeface="Arial"/>
-                <a:cs typeface="Arial"/>
-              </a:rPr>
-              <a:t>YES / NO</a:t>
-            </a:r>
-          </a:p>
-        </p:txBody>
-      </p:sp>
-      <p:sp>
-        <p:nvSpPr>
-          <p:cNvPr id="8" name="Chat instruction">
-            <a:extLst xmlns:a="http://schemas.openxmlformats.org/drawingml/2006/main">
-              <a:ext uri="{FF2B5EF4-FFF2-40B4-BE49-F238E27FC236}">
-                <a16:creationId xmlns:a16="http://schemas.microsoft.com/office/drawing/2014/main" id="{57BFD59A-83FF-4EE3-AEBA-04020DC0822F}"/>
-              </a:ext>
-            </a:extLst>
-          </p:cNvPr>
-          <p:cNvSpPr>
-            <a:spLocks xmlns:a="http://schemas.openxmlformats.org/drawingml/2006/main" noGrp="1"/>
-          </p:cNvSpPr>
-          <p:nvPr/>
-        </p:nvSpPr>
-        <p:spPr>
-          <a:xfrm xmlns:a="http://schemas.openxmlformats.org/drawingml/2006/main">
-            <a:off x="8143875" y="5095875"/>
-            <a:ext cx="3048000" cy="400050"/>
-          </a:xfrm>
-          <a:prstGeom xmlns:a="http://schemas.openxmlformats.org/drawingml/2006/main" prst="rect">
-            <a:avLst/>
-          </a:prstGeom>
-          <a:noFill xmlns:a="http://schemas.openxmlformats.org/drawingml/2006/main"/>
-          <a:ln xmlns:a="http://schemas.openxmlformats.org/drawingml/2006/main" w="0">
-            <a:noFill/>
-          </a:ln>
-        </p:spPr>
-        <p:txBody>
-          <a:bodyPr xmlns:a="http://schemas.openxmlformats.org/drawingml/2006/main" wrap="square" lIns="0" tIns="0" rIns="0" bIns="0">
-            <a:noAutofit/>
-          </a:bodyPr>
-          <a:lstStyle xmlns:a="http://schemas.openxmlformats.org/drawingml/2006/main"/>
-          <a:p xmlns:a="http://schemas.openxmlformats.org/drawingml/2006/main">
+          <a:lstStyle/>
+          <a:p>
             <a:pPr>
               <a:defRPr sz="1425" b="0">
                 <a:solidFill>
@@ -5182,17 +4734,21 @@
       </p:ext>
     </p:extLst>
   </p:cSld>
+  <p:clrMapOvr>
+    <a:masterClrMapping/>
+  </p:clrMapOvr>
 </p:sld>
 </file>
 
 <file path=ppt/slides/slide2.xml><?xml version="1.0" encoding="utf-8"?>
-<p:sld xmlns:p="http://schemas.openxmlformats.org/presentationml/2006/main">
+<p:sld xmlns:a="http://schemas.openxmlformats.org/drawingml/2006/main" xmlns:r="http://schemas.openxmlformats.org/officeDocument/2006/relationships" xmlns:p="http://schemas.openxmlformats.org/presentationml/2006/main">
   <p:cSld>
     <p:bg>
       <p:bgPr>
-        <a:solidFill xmlns:a="http://schemas.openxmlformats.org/drawingml/2006/main">
+        <a:solidFill>
           <a:srgbClr val="EEECE1"/>
         </a:solidFill>
+        <a:effectLst/>
       </p:bgPr>
     </p:bg>
     <p:spTree>
@@ -5202,38 +4758,43 @@
         <p:nvPr/>
       </p:nvGrpSpPr>
       <p:grpSpPr>
-        <a:xfrm xmlns:a="http://schemas.openxmlformats.org/drawingml/2006/main"/>
+        <a:xfrm>
+          <a:off x="0" y="0"/>
+          <a:ext cx="0" cy="0"/>
+          <a:chOff x="0" y="0"/>
+          <a:chExt cx="0" cy="0"/>
+        </a:xfrm>
       </p:grpSpPr>
       <p:sp>
         <p:nvSpPr>
           <p:cNvPr id="2" name="TextBox 1">
-            <a:extLst xmlns:a="http://schemas.openxmlformats.org/drawingml/2006/main">
+            <a:extLst>
               <a:ext uri="{FF2B5EF4-FFF2-40B4-BE49-F238E27FC236}">
                 <a16:creationId xmlns:a16="http://schemas.microsoft.com/office/drawing/2014/main" id="{6C8FC54A-0D7B-4D9B-8274-CE0792D40BA0}"/>
               </a:ext>
             </a:extLst>
           </p:cNvPr>
           <p:cNvSpPr>
-            <a:spLocks xmlns:a="http://schemas.openxmlformats.org/drawingml/2006/main" noGrp="1"/>
+            <a:spLocks noGrp="1"/>
           </p:cNvSpPr>
           <p:nvPr/>
         </p:nvSpPr>
         <p:spPr>
-          <a:xfrm xmlns:a="http://schemas.openxmlformats.org/drawingml/2006/main">
+          <a:xfrm>
             <a:off x="640080" y="457200"/>
             <a:ext cx="10881360" cy="1188720"/>
           </a:xfrm>
-          <a:prstGeom xmlns:a="http://schemas.openxmlformats.org/drawingml/2006/main" prst="rect">
+          <a:prstGeom prst="rect">
             <a:avLst/>
           </a:prstGeom>
-          <a:noFill xmlns:a="http://schemas.openxmlformats.org/drawingml/2006/main"/>
+          <a:noFill/>
         </p:spPr>
         <p:txBody>
-          <a:bodyPr xmlns:a="http://schemas.openxmlformats.org/drawingml/2006/main" wrap="square" lIns="0" tIns="0" rIns="0" bIns="0">
+          <a:bodyPr wrap="square" lIns="0" tIns="0" rIns="0" bIns="0">
             <a:spAutoFit/>
           </a:bodyPr>
-          <a:lstStyle xmlns:a="http://schemas.openxmlformats.org/drawingml/2006/main"/>
-          <a:p xmlns:a="http://schemas.openxmlformats.org/drawingml/2006/main">
+          <a:lstStyle/>
+          <a:p>
             <a:r>
               <a:rPr sz="3000" b="1" i="0">
                 <a:solidFill>
@@ -5246,7 +4807,7 @@
               <a:t>Yesterday in 30 seconds</a:t>
             </a:r>
           </a:p>
-          <a:p xmlns:a="http://schemas.openxmlformats.org/drawingml/2006/main">
+          <a:p>
             <a:pPr>
               <a:spcBef>
                 <a:spcPts val="400"/>
@@ -5270,33 +4831,33 @@
       <p:sp>
         <p:nvSpPr>
           <p:cNvPr id="3" name="TextBox 2">
-            <a:extLst xmlns:a="http://schemas.openxmlformats.org/drawingml/2006/main">
+            <a:extLst>
               <a:ext uri="{FF2B5EF4-FFF2-40B4-BE49-F238E27FC236}">
                 <a16:creationId xmlns:a16="http://schemas.microsoft.com/office/drawing/2014/main" id="{913AD083-3B26-4091-81A8-C4B56F5813C0}"/>
               </a:ext>
             </a:extLst>
           </p:cNvPr>
           <p:cNvSpPr>
-            <a:spLocks xmlns:a="http://schemas.openxmlformats.org/drawingml/2006/main" noGrp="1"/>
+            <a:spLocks noGrp="1"/>
           </p:cNvSpPr>
           <p:nvPr/>
         </p:nvSpPr>
         <p:spPr>
-          <a:xfrm xmlns:a="http://schemas.openxmlformats.org/drawingml/2006/main">
+          <a:xfrm>
             <a:off x="640080" y="1783080"/>
             <a:ext cx="10881360" cy="4846320"/>
           </a:xfrm>
-          <a:prstGeom xmlns:a="http://schemas.openxmlformats.org/drawingml/2006/main" prst="rect">
+          <a:prstGeom prst="rect">
             <a:avLst/>
           </a:prstGeom>
-          <a:noFill xmlns:a="http://schemas.openxmlformats.org/drawingml/2006/main"/>
+          <a:noFill/>
         </p:spPr>
         <p:txBody>
-          <a:bodyPr xmlns:a="http://schemas.openxmlformats.org/drawingml/2006/main" wrap="square" lIns="0" tIns="0" rIns="0" bIns="0">
+          <a:bodyPr wrap="square" lIns="0" tIns="0" rIns="0" bIns="0">
             <a:spAutoFit/>
           </a:bodyPr>
-          <a:lstStyle xmlns:a="http://schemas.openxmlformats.org/drawingml/2006/main"/>
-          <a:p xmlns:a="http://schemas.openxmlformats.org/drawingml/2006/main">
+          <a:lstStyle/>
+          <a:p>
             <a:pPr>
               <a:spcAft>
                 <a:spcPts val="700"/>
@@ -5326,7 +4887,7 @@
               <a:t>Day 2 was Make your data AI-readable.</a:t>
             </a:r>
           </a:p>
-          <a:p xmlns:a="http://schemas.openxmlformats.org/drawingml/2006/main">
+          <a:p>
             <a:pPr>
               <a:spcAft>
                 <a:spcPts val="700"/>
@@ -5356,7 +4917,7 @@
               <a:t>The AI-ready workbook is a craft skill, not a purchase.</a:t>
             </a:r>
           </a:p>
-          <a:p xmlns:a="http://schemas.openxmlformats.org/drawingml/2006/main">
+          <a:p>
             <a:pPr>
               <a:spcAft>
                 <a:spcPts val="700"/>
@@ -5395,17 +4956,21 @@
       </p:ext>
     </p:extLst>
   </p:cSld>
+  <p:clrMapOvr>
+    <a:masterClrMapping/>
+  </p:clrMapOvr>
 </p:sld>
 </file>
 
 <file path=ppt/slides/slide3.xml><?xml version="1.0" encoding="utf-8"?>
-<p:sld xmlns:p="http://schemas.openxmlformats.org/presentationml/2006/main">
+<p:sld xmlns:a="http://schemas.openxmlformats.org/drawingml/2006/main" xmlns:r="http://schemas.openxmlformats.org/officeDocument/2006/relationships" xmlns:p="http://schemas.openxmlformats.org/presentationml/2006/main">
   <p:cSld>
     <p:bg>
       <p:bgPr>
-        <a:solidFill xmlns:a="http://schemas.openxmlformats.org/drawingml/2006/main">
+        <a:solidFill>
           <a:srgbClr val="EEECE1"/>
         </a:solidFill>
+        <a:effectLst/>
       </p:bgPr>
     </p:bg>
     <p:spTree>
@@ -5415,109 +4980,400 @@
         <p:nvPr/>
       </p:nvGrpSpPr>
       <p:grpSpPr>
-        <a:xfrm xmlns:a="http://schemas.openxmlformats.org/drawingml/2006/main"/>
+        <a:xfrm>
+          <a:off x="0" y="0"/>
+          <a:ext cx="0" cy="0"/>
+          <a:chOff x="0" y="0"/>
+          <a:chExt cx="0" cy="0"/>
+        </a:xfrm>
       </p:grpSpPr>
       <p:sp>
         <p:nvSpPr>
-          <p:cNvPr id="2" name="TextBox 1">
-            <a:extLst xmlns:a="http://schemas.openxmlformats.org/drawingml/2006/main">
-              <a:ext uri="{FF2B5EF4-FFF2-40B4-BE49-F238E27FC236}">
-                <a16:creationId xmlns:a16="http://schemas.microsoft.com/office/drawing/2014/main" id="{557E7DE8-0C85-4F6F-8C9E-C097752DFD15}"/>
-              </a:ext>
-            </a:extLst>
-          </p:cNvPr>
-          <p:cNvSpPr>
-            <a:spLocks xmlns:a="http://schemas.openxmlformats.org/drawingml/2006/main" noGrp="1"/>
+          <p:cNvPr id="2" name="Rectangle 1">
+            <a:extLst>
+              <a:ext uri="{FF2B5EF4-FFF2-40B4-BE49-F238E27FC236}">
+                <a16:creationId xmlns:a16="http://schemas.microsoft.com/office/drawing/2014/main" id="{908ED261-F2D0-4DB5-A80D-26D6EED69CCB}"/>
+              </a:ext>
+            </a:extLst>
+          </p:cNvPr>
+          <p:cNvSpPr>
+            <a:spLocks noGrp="1"/>
           </p:cNvSpPr>
           <p:nvPr/>
         </p:nvSpPr>
         <p:spPr>
-          <a:xfrm xmlns:a="http://schemas.openxmlformats.org/drawingml/2006/main">
-            <a:off x="640080" y="457200"/>
-            <a:ext cx="10881360" cy="1188720"/>
+          <a:xfrm>
+            <a:off x="9082735" y="0"/>
+            <a:ext cx="3108960" cy="6858000"/>
           </a:xfrm>
-          <a:prstGeom xmlns:a="http://schemas.openxmlformats.org/drawingml/2006/main" prst="rect">
+          <a:prstGeom prst="rect">
             <a:avLst/>
           </a:prstGeom>
-          <a:noFill xmlns:a="http://schemas.openxmlformats.org/drawingml/2006/main"/>
+          <a:solidFill>
+            <a:srgbClr val="CF3338"/>
+          </a:solidFill>
+          <a:ln>
+            <a:noFill/>
+          </a:ln>
         </p:spPr>
-        <p:txBody>
-          <a:bodyPr xmlns:a="http://schemas.openxmlformats.org/drawingml/2006/main" wrap="square" lIns="0" tIns="0" rIns="0" bIns="0">
+        <p:style>
+          <a:lnRef idx="1">
+            <a:schemeClr val="accent1"/>
+          </a:lnRef>
+          <a:fillRef idx="3">
+            <a:schemeClr val="accent1"/>
+          </a:fillRef>
+          <a:effectRef idx="2">
+            <a:schemeClr val="accent1"/>
+          </a:effectRef>
+          <a:fontRef idx="minor">
+            <a:schemeClr val="lt1"/>
+          </a:fontRef>
+        </p:style>
+        <p:txBody>
+          <a:bodyPr anchor="ctr"/>
+          <a:lstStyle/>
+          <a:p>
+            <a:pPr algn="ctr">
+              <a:buNone/>
+            </a:pPr>
+            <a:endParaRPr/>
+          </a:p>
+        </p:txBody>
+      </p:sp>
+      <p:sp>
+        <p:nvSpPr>
+          <p:cNvPr id="3" name="TextBox 2">
+            <a:extLst>
+              <a:ext uri="{FF2B5EF4-FFF2-40B4-BE49-F238E27FC236}">
+                <a16:creationId xmlns:a16="http://schemas.microsoft.com/office/drawing/2014/main" id="{ECECD1E0-BBC4-4E38-A06C-E24D7A769881}"/>
+              </a:ext>
+            </a:extLst>
+          </p:cNvPr>
+          <p:cNvSpPr>
+            <a:spLocks noGrp="1"/>
+          </p:cNvSpPr>
+          <p:nvPr/>
+        </p:nvSpPr>
+        <p:spPr>
+          <a:xfrm>
+            <a:off x="9311335" y="640080"/>
+            <a:ext cx="2468880" cy="1828800"/>
+          </a:xfrm>
+          <a:prstGeom prst="rect">
+            <a:avLst/>
+          </a:prstGeom>
+          <a:noFill/>
+        </p:spPr>
+        <p:txBody>
+          <a:bodyPr wrap="square" lIns="0" tIns="0" rIns="0" bIns="0">
             <a:spAutoFit/>
           </a:bodyPr>
-          <a:lstStyle xmlns:a="http://schemas.openxmlformats.org/drawingml/2006/main"/>
-          <a:p xmlns:a="http://schemas.openxmlformats.org/drawingml/2006/main">
-            <a:r>
-              <a:rPr sz="3000" b="1" i="0">
-                <a:solidFill>
-                  <a:srgbClr val="1F2120"/>
+          <a:lstStyle/>
+          <a:p>
+            <a:r>
+              <a:rPr sz="2600" b="1" i="0">
+                <a:solidFill>
+                  <a:srgbClr val="FFFFFF"/>
                 </a:solidFill>
                 <a:latin typeface="Arial Black"/>
                 <a:ea typeface="Arial Black"/>
                 <a:cs typeface="Arial Black"/>
               </a:rPr>
-              <a:t>Why this counts as AI</a:t>
-            </a:r>
-          </a:p>
-          <a:p xmlns:a="http://schemas.openxmlformats.org/drawingml/2006/main">
+              <a:t>LIVE</a:t>
+            </a:r>
+          </a:p>
+          <a:p>
+            <a:r>
+              <a:rPr sz="2600" b="1" i="0">
+                <a:solidFill>
+                  <a:srgbClr val="FFFFFF"/>
+                </a:solidFill>
+                <a:latin typeface="Arial Black"/>
+                <a:ea typeface="Arial Black"/>
+                <a:cs typeface="Arial Black"/>
+              </a:rPr>
+              <a:t>DEMO</a:t>
+            </a:r>
+          </a:p>
+        </p:txBody>
+      </p:sp>
+      <p:sp>
+        <p:nvSpPr>
+          <p:cNvPr id="4" name="TextBox 3">
+            <a:extLst>
+              <a:ext uri="{FF2B5EF4-FFF2-40B4-BE49-F238E27FC236}">
+                <a16:creationId xmlns:a16="http://schemas.microsoft.com/office/drawing/2014/main" id="{4FE08B17-35D4-4BB3-922B-143C19C6AB94}"/>
+              </a:ext>
+            </a:extLst>
+          </p:cNvPr>
+          <p:cNvSpPr>
+            <a:spLocks noGrp="1"/>
+          </p:cNvSpPr>
+          <p:nvPr/>
+        </p:nvSpPr>
+        <p:spPr>
+          <a:xfrm>
+            <a:off x="548640" y="411480"/>
+            <a:ext cx="8229600" cy="1097280"/>
+          </a:xfrm>
+          <a:prstGeom prst="rect">
+            <a:avLst/>
+          </a:prstGeom>
+          <a:noFill/>
+        </p:spPr>
+        <p:txBody>
+          <a:bodyPr wrap="square" lIns="0" tIns="0" rIns="0" bIns="0">
+            <a:spAutoFit/>
+          </a:bodyPr>
+          <a:lstStyle/>
+          <a:p>
+            <a:r>
+              <a:rPr sz="2500" b="1" i="0">
+                <a:solidFill>
+                  <a:srgbClr val="CF3338"/>
+                </a:solidFill>
+                <a:latin typeface="Arial Black"/>
+                <a:ea typeface="Arial Black"/>
+                <a:cs typeface="Arial Black"/>
+              </a:rPr>
+              <a:t>Live demo: record the cleanup once</a:t>
+            </a:r>
+          </a:p>
+          <a:p>
             <a:pPr>
               <a:spcBef>
-                <a:spcPts val="400"/>
+                <a:spcPts val="300"/>
               </a:spcBef>
               <a:buNone/>
             </a:pPr>
             <a:r>
-              <a:rPr sz="1500" b="0" i="1">
-                <a:solidFill>
-                  <a:srgbClr val="CF3338"/>
+              <a:rPr sz="1450" b="0" i="1">
+                <a:solidFill>
+                  <a:srgbClr val="707070"/>
                 </a:solidFill>
                 <a:latin typeface="Arial"/>
                 <a:ea typeface="Arial"/>
                 <a:cs typeface="Arial"/>
               </a:rPr>
-              <a:t>The guerrilla hook, day 3</a:t>
-            </a:r>
-          </a:p>
-        </p:txBody>
-      </p:sp>
-      <p:sp>
-        <p:nvSpPr>
-          <p:cNvPr id="3" name="TextBox 2">
-            <a:extLst xmlns:a="http://schemas.openxmlformats.org/drawingml/2006/main">
-              <a:ext uri="{FF2B5EF4-FFF2-40B4-BE49-F238E27FC236}">
-                <a16:creationId xmlns:a16="http://schemas.microsoft.com/office/drawing/2014/main" id="{9F6DF208-B834-42EF-A6C3-D32A49612685}"/>
-              </a:ext>
-            </a:extLst>
-          </p:cNvPr>
-          <p:cNvSpPr>
-            <a:spLocks xmlns:a="http://schemas.openxmlformats.org/drawingml/2006/main" noGrp="1"/>
+              <a:t>Six recorded steps. Every flaw from Monday, fixed in order.</a:t>
+            </a:r>
+          </a:p>
+        </p:txBody>
+      </p:sp>
+      <p:sp>
+        <p:nvSpPr>
+          <p:cNvPr id="5" name="Rounded Rectangle 4">
+            <a:extLst>
+              <a:ext uri="{FF2B5EF4-FFF2-40B4-BE49-F238E27FC236}">
+                <a16:creationId xmlns:a16="http://schemas.microsoft.com/office/drawing/2014/main" id="{1E087B50-5C8E-4860-ACBA-C7FC73C4CAF6}"/>
+              </a:ext>
+            </a:extLst>
+          </p:cNvPr>
+          <p:cNvSpPr>
+            <a:spLocks noGrp="1"/>
           </p:cNvSpPr>
           <p:nvPr/>
         </p:nvSpPr>
         <p:spPr>
-          <a:xfrm xmlns:a="http://schemas.openxmlformats.org/drawingml/2006/main">
-            <a:off x="640080" y="1783080"/>
-            <a:ext cx="10881360" cy="4846320"/>
+          <a:xfrm>
+            <a:off x="548640" y="1600200"/>
+            <a:ext cx="8229600" cy="4023360"/>
           </a:xfrm>
-          <a:prstGeom xmlns:a="http://schemas.openxmlformats.org/drawingml/2006/main" prst="rect">
+          <a:prstGeom prst="roundRect">
             <a:avLst/>
           </a:prstGeom>
-          <a:noFill xmlns:a="http://schemas.openxmlformats.org/drawingml/2006/main"/>
+          <a:solidFill>
+            <a:srgbClr val="2B2B2B"/>
+          </a:solidFill>
+          <a:ln>
+            <a:noFill/>
+          </a:ln>
         </p:spPr>
-        <p:txBody>
-          <a:bodyPr xmlns:a="http://schemas.openxmlformats.org/drawingml/2006/main" wrap="square" lIns="0" tIns="0" rIns="0" bIns="0">
+        <p:style>
+          <a:lnRef idx="1">
+            <a:schemeClr val="accent1"/>
+          </a:lnRef>
+          <a:fillRef idx="3">
+            <a:schemeClr val="accent1"/>
+          </a:fillRef>
+          <a:effectRef idx="2">
+            <a:schemeClr val="accent1"/>
+          </a:effectRef>
+          <a:fontRef idx="minor">
+            <a:schemeClr val="lt1"/>
+          </a:fontRef>
+        </p:style>
+        <p:txBody>
+          <a:bodyPr wrap="square" lIns="256032" tIns="182880" rIns="182880" bIns="109728" anchor="t"/>
+          <a:lstStyle/>
+          <a:p>
+            <a:pPr algn="l">
+              <a:spcAft>
+                <a:spcPts val="100"/>
+              </a:spcAft>
+              <a:buNone/>
+            </a:pPr>
+            <a:r>
+              <a:rPr sz="1300" b="0" i="0">
+                <a:solidFill>
+                  <a:srgbClr val="9EC57A"/>
+                </a:solidFill>
+                <a:latin typeface="Consolas"/>
+                <a:ea typeface="Consolas"/>
+                <a:cs typeface="Consolas"/>
+              </a:rPr>
+              <a:t># Record the cleanup once</a:t>
+            </a:r>
+          </a:p>
+          <a:p>
+            <a:pPr algn="l">
+              <a:spcAft>
+                <a:spcPts val="100"/>
+              </a:spcAft>
+              <a:buNone/>
+            </a:pPr>
+            <a:r>
+              <a:rPr sz="1300" b="0" i="0">
+                <a:solidFill>
+                  <a:srgbClr val="F5F5F5"/>
+                </a:solidFill>
+                <a:latin typeface="Consolas"/>
+                <a:ea typeface="Consolas"/>
+                <a:cs typeface="Consolas"/>
+              </a:rPr>
+              <a:t>1. Click in RawExport, then Data &gt; From Table/Range</a:t>
+            </a:r>
+          </a:p>
+          <a:p>
+            <a:pPr algn="l">
+              <a:spcAft>
+                <a:spcPts val="100"/>
+              </a:spcAft>
+              <a:buNone/>
+            </a:pPr>
+            <a:r>
+              <a:rPr sz="1300" b="0" i="0">
+                <a:solidFill>
+                  <a:srgbClr val="F5F5F5"/>
+                </a:solidFill>
+                <a:latin typeface="Consolas"/>
+                <a:ea typeface="Consolas"/>
+                <a:cs typeface="Consolas"/>
+              </a:rPr>
+              <a:t>2. Filter Order ID: uncheck blanks and TOTAL rows</a:t>
+            </a:r>
+          </a:p>
+          <a:p>
+            <a:pPr algn="l">
+              <a:spcAft>
+                <a:spcPts val="100"/>
+              </a:spcAft>
+              <a:buNone/>
+            </a:pPr>
+            <a:r>
+              <a:rPr sz="1300" b="0" i="0">
+                <a:solidFill>
+                  <a:srgbClr val="F5F5F5"/>
+                </a:solidFill>
+                <a:latin typeface="Consolas"/>
+                <a:ea typeface="Consolas"/>
+                <a:cs typeface="Consolas"/>
+              </a:rPr>
+              <a:t>3. Split 'Product - Category' by delimiter ' - '</a:t>
+            </a:r>
+          </a:p>
+          <a:p>
+            <a:pPr algn="l">
+              <a:spcAft>
+                <a:spcPts val="100"/>
+              </a:spcAft>
+              <a:buNone/>
+            </a:pPr>
+            <a:r>
+              <a:rPr sz="1300" b="0" i="0">
+                <a:solidFill>
+                  <a:srgbClr val="F5F5F5"/>
+                </a:solidFill>
+                <a:latin typeface="Consolas"/>
+                <a:ea typeface="Consolas"/>
+                <a:cs typeface="Consolas"/>
+              </a:rPr>
+              <a:t>4. Region: Transform &gt; Format &gt; Trim, then Capitalize</a:t>
+            </a:r>
+          </a:p>
+          <a:p>
+            <a:pPr algn="l">
+              <a:spcAft>
+                <a:spcPts val="100"/>
+              </a:spcAft>
+              <a:buNone/>
+            </a:pPr>
+            <a:r>
+              <a:rPr sz="1300" b="0" i="0">
+                <a:solidFill>
+                  <a:srgbClr val="F5F5F5"/>
+                </a:solidFill>
+                <a:latin typeface="Consolas"/>
+                <a:ea typeface="Consolas"/>
+                <a:cs typeface="Consolas"/>
+              </a:rPr>
+              <a:t>5. Set types: Date, Whole Number, Currency</a:t>
+            </a:r>
+          </a:p>
+          <a:p>
+            <a:pPr algn="l">
+              <a:spcAft>
+                <a:spcPts val="100"/>
+              </a:spcAft>
+              <a:buNone/>
+            </a:pPr>
+            <a:r>
+              <a:rPr sz="1300" b="0" i="0">
+                <a:solidFill>
+                  <a:srgbClr val="F5F5F5"/>
+                </a:solidFill>
+                <a:latin typeface="Consolas"/>
+                <a:ea typeface="Consolas"/>
+                <a:cs typeface="Consolas"/>
+              </a:rPr>
+              <a:t>6. Home &gt; Close &amp; Load To... a table named SalesClean</a:t>
+            </a:r>
+          </a:p>
+        </p:txBody>
+      </p:sp>
+      <p:sp>
+        <p:nvSpPr>
+          <p:cNvPr id="6" name="TextBox 5">
+            <a:extLst>
+              <a:ext uri="{FF2B5EF4-FFF2-40B4-BE49-F238E27FC236}">
+                <a16:creationId xmlns:a16="http://schemas.microsoft.com/office/drawing/2014/main" id="{83B28F3B-F658-43C9-8B2C-E0148DC70978}"/>
+              </a:ext>
+            </a:extLst>
+          </p:cNvPr>
+          <p:cNvSpPr>
+            <a:spLocks noGrp="1"/>
+          </p:cNvSpPr>
+          <p:nvPr/>
+        </p:nvSpPr>
+        <p:spPr>
+          <a:xfrm>
+            <a:off x="548640" y="5806440"/>
+            <a:ext cx="8229600" cy="777240"/>
+          </a:xfrm>
+          <a:prstGeom prst="rect">
+            <a:avLst/>
+          </a:prstGeom>
+          <a:noFill/>
+        </p:spPr>
+        <p:txBody>
+          <a:bodyPr wrap="square" lIns="0" tIns="0" rIns="0" bIns="0">
             <a:spAutoFit/>
           </a:bodyPr>
-          <a:lstStyle xmlns:a="http://schemas.openxmlformats.org/drawingml/2006/main"/>
-          <a:p xmlns:a="http://schemas.openxmlformats.org/drawingml/2006/main">
-            <a:pPr>
-              <a:spcAft>
-                <a:spcPts val="700"/>
-              </a:spcAft>
-              <a:buNone/>
-            </a:pPr>
-            <a:r>
-              <a:rPr sz="1200" b="1" i="0">
+          <a:lstStyle/>
+          <a:p>
+            <a:r>
+              <a:rPr sz="1300" b="1" i="0">
                 <a:solidFill>
                   <a:srgbClr val="CF3338"/>
                 </a:solidFill>
@@ -5525,138 +5381,247 @@
                 <a:ea typeface="Arial"/>
                 <a:cs typeface="Arial"/>
               </a:rPr>
-              <a:t>• </a:t>
-            </a:r>
-            <a:r>
-              <a:rPr sz="1600" b="0" i="0">
-                <a:solidFill>
-                  <a:srgbClr val="1F2120"/>
+              <a:t>• You just wrote a program by clicking</a:t>
+            </a:r>
+          </a:p>
+        </p:txBody>
+      </p:sp>
+      <p:sp>
+        <p:nvSpPr>
+          <p:cNvPr id="7" name="Chat question">
+            <a:extLst>
+              <a:ext uri="{FF2B5EF4-FFF2-40B4-BE49-F238E27FC236}">
+                <a16:creationId xmlns:a16="http://schemas.microsoft.com/office/drawing/2014/main" id="{67B14DF5-13CA-4F43-B2DC-D124E388617D}"/>
+              </a:ext>
+            </a:extLst>
+          </p:cNvPr>
+          <p:cNvSpPr>
+            <a:spLocks noGrp="1"/>
+          </p:cNvSpPr>
+          <p:nvPr/>
+        </p:nvSpPr>
+        <p:spPr>
+          <a:xfrm>
+            <a:off x="9353550" y="2790825"/>
+            <a:ext cx="2428875" cy="1362075"/>
+          </a:xfrm>
+          <a:prstGeom prst="rect">
+            <a:avLst/>
+          </a:prstGeom>
+          <a:noFill/>
+          <a:ln w="0">
+            <a:noFill/>
+          </a:ln>
+        </p:spPr>
+        <p:txBody>
+          <a:bodyPr wrap="square" lIns="0" tIns="0" rIns="0" bIns="0">
+            <a:noAutofit/>
+          </a:bodyPr>
+          <a:lstStyle/>
+          <a:p>
+            <a:pPr>
+              <a:defRPr sz="2175" b="1">
+                <a:solidFill>
+                  <a:srgbClr val="FFFFFF"/>
+                </a:solidFill>
+                <a:latin typeface="Arial"/>
+                <a:ea typeface="Arial"/>
+                <a:cs typeface="Arial"/>
+              </a:defRPr>
+            </a:pPr>
+            <a:r>
+              <a:rPr sz="2175" b="1">
+                <a:solidFill>
+                  <a:srgbClr val="FFFFFF"/>
                 </a:solidFill>
                 <a:latin typeface="Arial"/>
                 <a:ea typeface="Arial"/>
                 <a:cs typeface="Arial"/>
               </a:rPr>
-              <a:t>Punch one: Power Query delivers what people think they need AI for. Automated, repeatable, refreshable prep, zero AI inside.</a:t>
-            </a:r>
-          </a:p>
-          <a:p xmlns:a="http://schemas.openxmlformats.org/drawingml/2006/main">
+              <a:t>Which removes</a:t>
+            </a:r>
+          </a:p>
+          <a:p>
             <a:pPr>
-              <a:spcAft>
-                <a:spcPts val="700"/>
-              </a:spcAft>
-              <a:buNone/>
-            </a:pPr>
-            <a:r>
-              <a:rPr sz="1200" b="1" i="0">
-                <a:solidFill>
-                  <a:srgbClr val="CF3338"/>
+              <a:defRPr sz="2175" b="1">
+                <a:solidFill>
+                  <a:srgbClr val="FFFFFF"/>
+                </a:solidFill>
+                <a:latin typeface="Arial"/>
+                <a:ea typeface="Arial"/>
+                <a:cs typeface="Arial"/>
+              </a:defRPr>
+            </a:pPr>
+            <a:r>
+              <a:rPr sz="2175" b="1">
+                <a:solidFill>
+                  <a:srgbClr val="FFFFFF"/>
                 </a:solidFill>
                 <a:latin typeface="Arial"/>
                 <a:ea typeface="Arial"/>
                 <a:cs typeface="Arial"/>
               </a:rPr>
-              <a:t>• </a:t>
-            </a:r>
-            <a:r>
-              <a:rPr sz="1600" b="0" i="0">
-                <a:solidFill>
-                  <a:srgbClr val="1F2120"/>
+              <a:t>extra spaces?</a:t>
+            </a:r>
+          </a:p>
+        </p:txBody>
+      </p:sp>
+      <p:sp>
+        <p:nvSpPr>
+          <p:cNvPr id="8" name="Chat choices">
+            <a:extLst>
+              <a:ext uri="{FF2B5EF4-FFF2-40B4-BE49-F238E27FC236}">
+                <a16:creationId xmlns:a16="http://schemas.microsoft.com/office/drawing/2014/main" id="{750A5F44-3EF7-4810-8173-5CA0A241C08C}"/>
+              </a:ext>
+            </a:extLst>
+          </p:cNvPr>
+          <p:cNvSpPr>
+            <a:spLocks noGrp="1"/>
+          </p:cNvSpPr>
+          <p:nvPr/>
+        </p:nvSpPr>
+        <p:spPr>
+          <a:xfrm>
+            <a:off x="9353550" y="4362450"/>
+            <a:ext cx="2428875" cy="1009650"/>
+          </a:xfrm>
+          <a:prstGeom prst="rect">
+            <a:avLst/>
+          </a:prstGeom>
+          <a:noFill/>
+          <a:ln w="0">
+            <a:noFill/>
+          </a:ln>
+        </p:spPr>
+        <p:txBody>
+          <a:bodyPr wrap="square" lIns="0" tIns="0" rIns="0" bIns="0">
+            <a:noAutofit/>
+          </a:bodyPr>
+          <a:lstStyle/>
+          <a:p>
+            <a:pPr>
+              <a:defRPr sz="1950" b="1">
+                <a:solidFill>
+                  <a:srgbClr val="FFFFFF"/>
+                </a:solidFill>
+                <a:latin typeface="Arial"/>
+                <a:ea typeface="Arial"/>
+                <a:cs typeface="Arial"/>
+              </a:defRPr>
+            </a:pPr>
+            <a:r>
+              <a:rPr sz="1950" b="1">
+                <a:solidFill>
+                  <a:srgbClr val="FFFFFF"/>
                 </a:solidFill>
                 <a:latin typeface="Arial"/>
                 <a:ea typeface="Arial"/>
                 <a:cs typeface="Arial"/>
               </a:rPr>
-              <a:t>Recorded steps are automation without programming.</a:t>
-            </a:r>
-          </a:p>
-          <a:p xmlns:a="http://schemas.openxmlformats.org/drawingml/2006/main">
+              <a:t>A = Trim</a:t>
+            </a:r>
+          </a:p>
+          <a:p>
             <a:pPr>
-              <a:spcAft>
-                <a:spcPts val="700"/>
-              </a:spcAft>
-              <a:buNone/>
-            </a:pPr>
-            <a:r>
-              <a:rPr sz="1200" b="1" i="0">
-                <a:solidFill>
-                  <a:srgbClr val="CF3338"/>
+              <a:defRPr sz="1950" b="1">
+                <a:solidFill>
+                  <a:srgbClr val="FFFFFF"/>
+                </a:solidFill>
+                <a:latin typeface="Arial"/>
+                <a:ea typeface="Arial"/>
+                <a:cs typeface="Arial"/>
+              </a:defRPr>
+            </a:pPr>
+            <a:r>
+              <a:rPr sz="1950" b="1">
+                <a:solidFill>
+                  <a:srgbClr val="FFFFFF"/>
                 </a:solidFill>
                 <a:latin typeface="Arial"/>
                 <a:ea typeface="Arial"/>
                 <a:cs typeface="Arial"/>
               </a:rPr>
-              <a:t>• </a:t>
-            </a:r>
-            <a:r>
-              <a:rPr sz="1600" b="0" i="0">
-                <a:solidFill>
-                  <a:srgbClr val="1F2120"/>
+              <a:t>B = Split</a:t>
+            </a:r>
+          </a:p>
+        </p:txBody>
+      </p:sp>
+      <p:sp>
+        <p:nvSpPr>
+          <p:cNvPr id="9" name="Chat instruction">
+            <a:extLst>
+              <a:ext uri="{FF2B5EF4-FFF2-40B4-BE49-F238E27FC236}">
+                <a16:creationId xmlns:a16="http://schemas.microsoft.com/office/drawing/2014/main" id="{4945D67C-3449-494B-BA24-FE1B3A7E4664}"/>
+              </a:ext>
+            </a:extLst>
+          </p:cNvPr>
+          <p:cNvSpPr>
+            <a:spLocks noGrp="1"/>
+          </p:cNvSpPr>
+          <p:nvPr/>
+        </p:nvSpPr>
+        <p:spPr>
+          <a:xfrm>
+            <a:off x="9353550" y="5715000"/>
+            <a:ext cx="2428875" cy="609600"/>
+          </a:xfrm>
+          <a:prstGeom prst="rect">
+            <a:avLst/>
+          </a:prstGeom>
+          <a:noFill/>
+          <a:ln w="0">
+            <a:noFill/>
+          </a:ln>
+        </p:spPr>
+        <p:txBody>
+          <a:bodyPr wrap="square" lIns="0" tIns="0" rIns="0" bIns="0">
+            <a:noAutofit/>
+          </a:bodyPr>
+          <a:lstStyle/>
+          <a:p>
+            <a:pPr>
+              <a:defRPr sz="1500" b="0">
+                <a:solidFill>
+                  <a:srgbClr val="FFFFFF"/>
+                </a:solidFill>
+                <a:latin typeface="Arial"/>
+                <a:ea typeface="Arial"/>
+                <a:cs typeface="Arial"/>
+              </a:defRPr>
+            </a:pPr>
+            <a:r>
+              <a:rPr sz="1500" b="0">
+                <a:solidFill>
+                  <a:srgbClr val="FFFFFF"/>
                 </a:solidFill>
                 <a:latin typeface="Arial"/>
                 <a:ea typeface="Arial"/>
                 <a:cs typeface="Arial"/>
               </a:rPr>
-              <a:t>Clean inputs remove avoidable errors. AI output still needs checking.</a:t>
-            </a:r>
-          </a:p>
-          <a:p xmlns:a="http://schemas.openxmlformats.org/drawingml/2006/main">
+              <a:t>Type one word</a:t>
+            </a:r>
+          </a:p>
+          <a:p>
             <a:pPr>
-              <a:spcAft>
-                <a:spcPts val="700"/>
-              </a:spcAft>
-              <a:buNone/>
-            </a:pPr>
-            <a:r>
-              <a:rPr sz="1200" b="1" i="0">
-                <a:solidFill>
-                  <a:srgbClr val="CF3338"/>
+              <a:defRPr sz="1500" b="0">
+                <a:solidFill>
+                  <a:srgbClr val="FFFFFF"/>
+                </a:solidFill>
+                <a:latin typeface="Arial"/>
+                <a:ea typeface="Arial"/>
+                <a:cs typeface="Arial"/>
+              </a:defRPr>
+            </a:pPr>
+            <a:r>
+              <a:rPr sz="1500" b="0">
+                <a:solidFill>
+                  <a:srgbClr val="FFFFFF"/>
                 </a:solidFill>
                 <a:latin typeface="Arial"/>
                 <a:ea typeface="Arial"/>
                 <a:cs typeface="Arial"/>
               </a:rPr>
-              <a:t>• </a:t>
-            </a:r>
-            <a:r>
-              <a:rPr sz="1600" b="0" i="0">
-                <a:solidFill>
-                  <a:srgbClr val="1F2120"/>
-                </a:solidFill>
-                <a:latin typeface="Arial"/>
-                <a:ea typeface="Arial"/>
-                <a:cs typeface="Arial"/>
-              </a:rPr>
-              <a:t>Garbage in, confident-sounding garbage out.</a:t>
-            </a:r>
-          </a:p>
-          <a:p xmlns:a="http://schemas.openxmlformats.org/drawingml/2006/main">
-            <a:pPr>
-              <a:spcAft>
-                <a:spcPts val="700"/>
-              </a:spcAft>
-              <a:buNone/>
-            </a:pPr>
-            <a:r>
-              <a:rPr sz="1200" b="1" i="0">
-                <a:solidFill>
-                  <a:srgbClr val="CF3338"/>
-                </a:solidFill>
-                <a:latin typeface="Arial"/>
-                <a:ea typeface="Arial"/>
-                <a:cs typeface="Arial"/>
-              </a:rPr>
-              <a:t>• </a:t>
-            </a:r>
-            <a:r>
-              <a:rPr sz="1600" b="0" i="0">
-                <a:solidFill>
-                  <a:srgbClr val="1F2120"/>
-                </a:solidFill>
-                <a:latin typeface="Arial"/>
-                <a:ea typeface="Arial"/>
-                <a:cs typeface="Arial"/>
-              </a:rPr>
-              <a:t>Bonus move: free chatbots write M code, and Power Query is where you paste it.</a:t>
+              <a:t>or a letter in chat.</a:t>
             </a:r>
           </a:p>
         </p:txBody>
@@ -5664,21 +5629,25 @@
     </p:spTree>
     <p:extLst>
       <p:ext uri="{BB962C8B-B14F-4D97-AF65-F5344CB8AC3E}">
-        <p14:creationId xmlns:p14="http://schemas.microsoft.com/office/powerpoint/2010/main" val="1405853529"/>
+        <p14:creationId xmlns:p14="http://schemas.microsoft.com/office/powerpoint/2010/main" val="212274704"/>
       </p:ext>
     </p:extLst>
   </p:cSld>
+  <p:clrMapOvr>
+    <a:masterClrMapping/>
+  </p:clrMapOvr>
 </p:sld>
 </file>
 
 <file path=ppt/slides/slide4.xml><?xml version="1.0" encoding="utf-8"?>
-<p:sld xmlns:p="http://schemas.openxmlformats.org/presentationml/2006/main">
+<p:sld xmlns:a="http://schemas.openxmlformats.org/drawingml/2006/main" xmlns:r="http://schemas.openxmlformats.org/officeDocument/2006/relationships" xmlns:p="http://schemas.openxmlformats.org/presentationml/2006/main">
   <p:cSld>
     <p:bg>
       <p:bgPr>
-        <a:solidFill xmlns:a="http://schemas.openxmlformats.org/drawingml/2006/main">
+        <a:solidFill>
           <a:srgbClr val="EEECE1"/>
         </a:solidFill>
+        <a:effectLst/>
       </p:bgPr>
     </p:bg>
     <p:spTree>
@@ -5688,91 +5657,97 @@
         <p:nvPr/>
       </p:nvGrpSpPr>
       <p:grpSpPr>
-        <a:xfrm xmlns:a="http://schemas.openxmlformats.org/drawingml/2006/main"/>
+        <a:xfrm>
+          <a:off x="0" y="0"/>
+          <a:ext cx="0" cy="0"/>
+          <a:chOff x="0" y="0"/>
+          <a:chExt cx="0" cy="0"/>
+        </a:xfrm>
       </p:grpSpPr>
       <p:sp>
         <p:nvSpPr>
           <p:cNvPr id="2" name="Rectangle 1">
-            <a:extLst xmlns:a="http://schemas.openxmlformats.org/drawingml/2006/main">
-              <a:ext uri="{FF2B5EF4-FFF2-40B4-BE49-F238E27FC236}">
-                <a16:creationId xmlns:a16="http://schemas.microsoft.com/office/drawing/2014/main" id="{908ED261-F2D0-4DB5-A80D-26D6EED69CCB}"/>
-              </a:ext>
-            </a:extLst>
-          </p:cNvPr>
-          <p:cNvSpPr>
-            <a:spLocks xmlns:a="http://schemas.openxmlformats.org/drawingml/2006/main" noGrp="1"/>
+            <a:extLst>
+              <a:ext uri="{FF2B5EF4-FFF2-40B4-BE49-F238E27FC236}">
+                <a16:creationId xmlns:a16="http://schemas.microsoft.com/office/drawing/2014/main" id="{791A8C1B-12B8-42C6-A7AD-B0167019C0D4}"/>
+              </a:ext>
+            </a:extLst>
+          </p:cNvPr>
+          <p:cNvSpPr>
+            <a:spLocks noGrp="1"/>
           </p:cNvSpPr>
           <p:nvPr/>
         </p:nvSpPr>
         <p:spPr>
-          <a:xfrm xmlns:a="http://schemas.openxmlformats.org/drawingml/2006/main">
+          <a:xfrm>
             <a:off x="9082735" y="0"/>
             <a:ext cx="3108960" cy="6858000"/>
           </a:xfrm>
-          <a:prstGeom xmlns:a="http://schemas.openxmlformats.org/drawingml/2006/main" prst="rect">
+          <a:prstGeom prst="rect">
             <a:avLst/>
           </a:prstGeom>
-          <a:solidFill xmlns:a="http://schemas.openxmlformats.org/drawingml/2006/main">
+          <a:solidFill>
             <a:srgbClr val="CF3338"/>
           </a:solidFill>
-          <a:ln xmlns:a="http://schemas.openxmlformats.org/drawingml/2006/main">
+          <a:ln>
             <a:noFill/>
           </a:ln>
         </p:spPr>
         <p:style>
-          <a:lnRef xmlns:a="http://schemas.openxmlformats.org/drawingml/2006/main" idx="1">
+          <a:lnRef idx="1">
             <a:schemeClr val="accent1"/>
           </a:lnRef>
-          <a:fillRef xmlns:a="http://schemas.openxmlformats.org/drawingml/2006/main" idx="3">
+          <a:fillRef idx="3">
             <a:schemeClr val="accent1"/>
           </a:fillRef>
-          <a:effectRef xmlns:a="http://schemas.openxmlformats.org/drawingml/2006/main" idx="2">
+          <a:effectRef idx="2">
             <a:schemeClr val="accent1"/>
           </a:effectRef>
-          <a:fontRef xmlns:a="http://schemas.openxmlformats.org/drawingml/2006/main" idx="minor">
+          <a:fontRef idx="minor">
             <a:schemeClr val="lt1"/>
           </a:fontRef>
         </p:style>
         <p:txBody>
-          <a:bodyPr xmlns:a="http://schemas.openxmlformats.org/drawingml/2006/main" anchor="ctr"/>
-          <a:lstStyle xmlns:a="http://schemas.openxmlformats.org/drawingml/2006/main"/>
-          <a:p xmlns:a="http://schemas.openxmlformats.org/drawingml/2006/main">
+          <a:bodyPr anchor="ctr"/>
+          <a:lstStyle/>
+          <a:p>
             <a:pPr algn="ctr">
               <a:buNone/>
             </a:pPr>
+            <a:endParaRPr/>
           </a:p>
         </p:txBody>
       </p:sp>
       <p:sp>
         <p:nvSpPr>
           <p:cNvPr id="3" name="TextBox 2">
-            <a:extLst xmlns:a="http://schemas.openxmlformats.org/drawingml/2006/main">
-              <a:ext uri="{FF2B5EF4-FFF2-40B4-BE49-F238E27FC236}">
-                <a16:creationId xmlns:a16="http://schemas.microsoft.com/office/drawing/2014/main" id="{ECECD1E0-BBC4-4E38-A06C-E24D7A769881}"/>
-              </a:ext>
-            </a:extLst>
-          </p:cNvPr>
-          <p:cNvSpPr>
-            <a:spLocks xmlns:a="http://schemas.openxmlformats.org/drawingml/2006/main" noGrp="1"/>
+            <a:extLst>
+              <a:ext uri="{FF2B5EF4-FFF2-40B4-BE49-F238E27FC236}">
+                <a16:creationId xmlns:a16="http://schemas.microsoft.com/office/drawing/2014/main" id="{04DA7E28-30E2-4E15-9AB8-561E9C1E2578}"/>
+              </a:ext>
+            </a:extLst>
+          </p:cNvPr>
+          <p:cNvSpPr>
+            <a:spLocks noGrp="1"/>
           </p:cNvSpPr>
           <p:nvPr/>
         </p:nvSpPr>
         <p:spPr>
-          <a:xfrm xmlns:a="http://schemas.openxmlformats.org/drawingml/2006/main">
+          <a:xfrm>
             <a:off x="9311335" y="640080"/>
             <a:ext cx="2468880" cy="1828800"/>
           </a:xfrm>
-          <a:prstGeom xmlns:a="http://schemas.openxmlformats.org/drawingml/2006/main" prst="rect">
+          <a:prstGeom prst="rect">
             <a:avLst/>
           </a:prstGeom>
-          <a:noFill xmlns:a="http://schemas.openxmlformats.org/drawingml/2006/main"/>
+          <a:noFill/>
         </p:spPr>
         <p:txBody>
-          <a:bodyPr xmlns:a="http://schemas.openxmlformats.org/drawingml/2006/main" wrap="square" lIns="0" tIns="0" rIns="0" bIns="0">
+          <a:bodyPr wrap="square" lIns="0" tIns="0" rIns="0" bIns="0">
             <a:spAutoFit/>
           </a:bodyPr>
-          <a:lstStyle xmlns:a="http://schemas.openxmlformats.org/drawingml/2006/main"/>
-          <a:p xmlns:a="http://schemas.openxmlformats.org/drawingml/2006/main">
+          <a:lstStyle/>
+          <a:p>
             <a:r>
               <a:rPr sz="2600" b="1" i="0">
                 <a:solidFill>
@@ -5785,7 +5760,7 @@
               <a:t>LIVE</a:t>
             </a:r>
           </a:p>
-          <a:p xmlns:a="http://schemas.openxmlformats.org/drawingml/2006/main">
+          <a:p>
             <a:r>
               <a:rPr sz="2600" b="1" i="0">
                 <a:solidFill>
@@ -5803,33 +5778,33 @@
       <p:sp>
         <p:nvSpPr>
           <p:cNvPr id="4" name="TextBox 3">
-            <a:extLst xmlns:a="http://schemas.openxmlformats.org/drawingml/2006/main">
-              <a:ext uri="{FF2B5EF4-FFF2-40B4-BE49-F238E27FC236}">
-                <a16:creationId xmlns:a16="http://schemas.microsoft.com/office/drawing/2014/main" id="{4FE08B17-35D4-4BB3-922B-143C19C6AB94}"/>
-              </a:ext>
-            </a:extLst>
-          </p:cNvPr>
-          <p:cNvSpPr>
-            <a:spLocks xmlns:a="http://schemas.openxmlformats.org/drawingml/2006/main" noGrp="1"/>
+            <a:extLst>
+              <a:ext uri="{FF2B5EF4-FFF2-40B4-BE49-F238E27FC236}">
+                <a16:creationId xmlns:a16="http://schemas.microsoft.com/office/drawing/2014/main" id="{7D830E3A-10ED-49B5-8DC8-F27548CF4BC6}"/>
+              </a:ext>
+            </a:extLst>
+          </p:cNvPr>
+          <p:cNvSpPr>
+            <a:spLocks noGrp="1"/>
           </p:cNvSpPr>
           <p:nvPr/>
         </p:nvSpPr>
         <p:spPr>
-          <a:xfrm xmlns:a="http://schemas.openxmlformats.org/drawingml/2006/main">
+          <a:xfrm>
             <a:off x="548640" y="411480"/>
             <a:ext cx="8229600" cy="1097280"/>
           </a:xfrm>
-          <a:prstGeom xmlns:a="http://schemas.openxmlformats.org/drawingml/2006/main" prst="rect">
+          <a:prstGeom prst="rect">
             <a:avLst/>
           </a:prstGeom>
-          <a:noFill xmlns:a="http://schemas.openxmlformats.org/drawingml/2006/main"/>
+          <a:noFill/>
         </p:spPr>
         <p:txBody>
-          <a:bodyPr xmlns:a="http://schemas.openxmlformats.org/drawingml/2006/main" wrap="square" lIns="0" tIns="0" rIns="0" bIns="0">
+          <a:bodyPr wrap="square" lIns="0" tIns="0" rIns="0" bIns="0">
             <a:spAutoFit/>
           </a:bodyPr>
-          <a:lstStyle xmlns:a="http://schemas.openxmlformats.org/drawingml/2006/main"/>
-          <a:p xmlns:a="http://schemas.openxmlformats.org/drawingml/2006/main">
+          <a:lstStyle/>
+          <a:p>
             <a:r>
               <a:rPr sz="2500" b="1" i="0">
                 <a:solidFill>
@@ -5839,10 +5814,10 @@
                 <a:ea typeface="Arial Black"/>
                 <a:cs typeface="Arial Black"/>
               </a:rPr>
-              <a:t>Live demo: record the cleanup once</a:t>
-            </a:r>
-          </a:p>
-          <a:p xmlns:a="http://schemas.openxmlformats.org/drawingml/2006/main">
+              <a:t>Live demo: the Refresh moment</a:t>
+            </a:r>
+          </a:p>
+          <a:p>
             <a:pPr>
               <a:spcBef>
                 <a:spcPts val="300"/>
@@ -5858,7 +5833,7 @@
                 <a:ea typeface="Arial"/>
                 <a:cs typeface="Arial"/>
               </a:rPr>
-              <a:t>Six recorded steps. Every flaw from Monday, fixed in order.</a:t>
+              <a:t>June just arrived. Watch what does not happen next.</a:t>
             </a:r>
           </a:p>
         </p:txBody>
@@ -5866,50 +5841,50 @@
       <p:sp>
         <p:nvSpPr>
           <p:cNvPr id="5" name="Rounded Rectangle 4">
-            <a:extLst xmlns:a="http://schemas.openxmlformats.org/drawingml/2006/main">
-              <a:ext uri="{FF2B5EF4-FFF2-40B4-BE49-F238E27FC236}">
-                <a16:creationId xmlns:a16="http://schemas.microsoft.com/office/drawing/2014/main" id="{1E087B50-5C8E-4860-ACBA-C7FC73C4CAF6}"/>
-              </a:ext>
-            </a:extLst>
-          </p:cNvPr>
-          <p:cNvSpPr>
-            <a:spLocks xmlns:a="http://schemas.openxmlformats.org/drawingml/2006/main" noGrp="1"/>
+            <a:extLst>
+              <a:ext uri="{FF2B5EF4-FFF2-40B4-BE49-F238E27FC236}">
+                <a16:creationId xmlns:a16="http://schemas.microsoft.com/office/drawing/2014/main" id="{197DD207-BECD-4D65-840E-F94446854D7C}"/>
+              </a:ext>
+            </a:extLst>
+          </p:cNvPr>
+          <p:cNvSpPr>
+            <a:spLocks noGrp="1"/>
           </p:cNvSpPr>
           <p:nvPr/>
         </p:nvSpPr>
         <p:spPr>
-          <a:xfrm xmlns:a="http://schemas.openxmlformats.org/drawingml/2006/main">
+          <a:xfrm>
             <a:off x="548640" y="1600200"/>
             <a:ext cx="8229600" cy="4023360"/>
           </a:xfrm>
-          <a:prstGeom xmlns:a="http://schemas.openxmlformats.org/drawingml/2006/main" prst="roundRect">
+          <a:prstGeom prst="roundRect">
             <a:avLst/>
           </a:prstGeom>
-          <a:solidFill xmlns:a="http://schemas.openxmlformats.org/drawingml/2006/main">
+          <a:solidFill>
             <a:srgbClr val="2B2B2B"/>
           </a:solidFill>
-          <a:ln xmlns:a="http://schemas.openxmlformats.org/drawingml/2006/main">
+          <a:ln>
             <a:noFill/>
           </a:ln>
         </p:spPr>
         <p:style>
-          <a:lnRef xmlns:a="http://schemas.openxmlformats.org/drawingml/2006/main" idx="1">
+          <a:lnRef idx="1">
             <a:schemeClr val="accent1"/>
           </a:lnRef>
-          <a:fillRef xmlns:a="http://schemas.openxmlformats.org/drawingml/2006/main" idx="3">
+          <a:fillRef idx="3">
             <a:schemeClr val="accent1"/>
           </a:fillRef>
-          <a:effectRef xmlns:a="http://schemas.openxmlformats.org/drawingml/2006/main" idx="2">
+          <a:effectRef idx="2">
             <a:schemeClr val="accent1"/>
           </a:effectRef>
-          <a:fontRef xmlns:a="http://schemas.openxmlformats.org/drawingml/2006/main" idx="minor">
+          <a:fontRef idx="minor">
             <a:schemeClr val="lt1"/>
           </a:fontRef>
         </p:style>
         <p:txBody>
-          <a:bodyPr xmlns:a="http://schemas.openxmlformats.org/drawingml/2006/main" wrap="square" lIns="256032" tIns="182880" rIns="182880" bIns="109728" anchor="t"/>
-          <a:lstStyle xmlns:a="http://schemas.openxmlformats.org/drawingml/2006/main"/>
-          <a:p xmlns:a="http://schemas.openxmlformats.org/drawingml/2006/main">
+          <a:bodyPr wrap="square" lIns="256032" tIns="182880" rIns="182880" bIns="109728" anchor="t"/>
+          <a:lstStyle/>
+          <a:p>
             <a:pPr algn="l">
               <a:spcAft>
                 <a:spcPts val="100"/>
@@ -5925,10 +5900,10 @@
                 <a:ea typeface="Consolas"/>
                 <a:cs typeface="Consolas"/>
               </a:rPr>
-              <a:t># Record the cleanup once</a:t>
-            </a:r>
-          </a:p>
-          <a:p xmlns:a="http://schemas.openxmlformats.org/drawingml/2006/main">
+              <a:t># Replay the saved cleanup</a:t>
+            </a:r>
+          </a:p>
+          <a:p>
             <a:pPr algn="l">
               <a:spcAft>
                 <a:spcPts val="100"/>
@@ -5944,10 +5919,10 @@
                 <a:ea typeface="Consolas"/>
                 <a:cs typeface="Consolas"/>
               </a:rPr>
-              <a:t>1. Click in RawExport, then Data &gt; From Table/Range</a:t>
-            </a:r>
-          </a:p>
-          <a:p xmlns:a="http://schemas.openxmlformats.org/drawingml/2006/main">
+              <a:t>1. Copy the June rows from the june-rows sheet</a:t>
+            </a:r>
+          </a:p>
+          <a:p>
             <a:pPr algn="l">
               <a:spcAft>
                 <a:spcPts val="100"/>
@@ -5963,10 +5938,10 @@
                 <a:ea typeface="Consolas"/>
                 <a:cs typeface="Consolas"/>
               </a:rPr>
-              <a:t>2. Filter Order ID: uncheck blanks and TOTAL rows</a:t>
-            </a:r>
-          </a:p>
-          <a:p xmlns:a="http://schemas.openxmlformats.org/drawingml/2006/main">
+              <a:t>2. Paste them at the bottom of RawExport</a:t>
+            </a:r>
+          </a:p>
+          <a:p>
             <a:pPr algn="l">
               <a:spcAft>
                 <a:spcPts val="100"/>
@@ -5982,10 +5957,10 @@
                 <a:ea typeface="Consolas"/>
                 <a:cs typeface="Consolas"/>
               </a:rPr>
-              <a:t>3. Split 'Product - Category' by delimiter ' - '</a:t>
-            </a:r>
-          </a:p>
-          <a:p xmlns:a="http://schemas.openxmlformats.org/drawingml/2006/main">
+              <a:t>3. Right-click the SalesClean table &gt; Refresh</a:t>
+            </a:r>
+          </a:p>
+          <a:p>
             <a:pPr algn="l">
               <a:spcAft>
                 <a:spcPts val="100"/>
@@ -6001,10 +5976,10 @@
                 <a:ea typeface="Consolas"/>
                 <a:cs typeface="Consolas"/>
               </a:rPr>
-              <a:t>4. Region: Transform &gt; Format &gt; Trim, then Capitalize</a:t>
-            </a:r>
-          </a:p>
-          <a:p xmlns:a="http://schemas.openxmlformats.org/drawingml/2006/main">
+              <a:t>4. Every recorded step replays on the new data</a:t>
+            </a:r>
+          </a:p>
+          <a:p>
             <a:pPr algn="l">
               <a:spcAft>
                 <a:spcPts val="100"/>
@@ -6020,26 +5995,7 @@
                 <a:ea typeface="Consolas"/>
                 <a:cs typeface="Consolas"/>
               </a:rPr>
-              <a:t>5. Set types: Date, Whole Number, Currency</a:t>
-            </a:r>
-          </a:p>
-          <a:p xmlns:a="http://schemas.openxmlformats.org/drawingml/2006/main">
-            <a:pPr algn="l">
-              <a:spcAft>
-                <a:spcPts val="100"/>
-              </a:spcAft>
-              <a:buNone/>
-            </a:pPr>
-            <a:r>
-              <a:rPr sz="1300" b="0" i="0">
-                <a:solidFill>
-                  <a:srgbClr val="F5F5F5"/>
-                </a:solidFill>
-                <a:latin typeface="Consolas"/>
-                <a:ea typeface="Consolas"/>
-                <a:cs typeface="Consolas"/>
-              </a:rPr>
-              <a:t>6. Home &gt; Close &amp; Load To... a table named SalesClean</a:t>
+              <a:t>5. That recurring cleanup chore is now one click</a:t>
             </a:r>
           </a:p>
         </p:txBody>
@@ -6047,33 +6003,33 @@
       <p:sp>
         <p:nvSpPr>
           <p:cNvPr id="6" name="TextBox 5">
-            <a:extLst xmlns:a="http://schemas.openxmlformats.org/drawingml/2006/main">
-              <a:ext uri="{FF2B5EF4-FFF2-40B4-BE49-F238E27FC236}">
-                <a16:creationId xmlns:a16="http://schemas.microsoft.com/office/drawing/2014/main" id="{83B28F3B-F658-43C9-8B2C-E0148DC70978}"/>
-              </a:ext>
-            </a:extLst>
-          </p:cNvPr>
-          <p:cNvSpPr>
-            <a:spLocks xmlns:a="http://schemas.openxmlformats.org/drawingml/2006/main" noGrp="1"/>
+            <a:extLst>
+              <a:ext uri="{FF2B5EF4-FFF2-40B4-BE49-F238E27FC236}">
+                <a16:creationId xmlns:a16="http://schemas.microsoft.com/office/drawing/2014/main" id="{DA06A93C-CF98-4E10-BCE1-4DF799414F8A}"/>
+              </a:ext>
+            </a:extLst>
+          </p:cNvPr>
+          <p:cNvSpPr>
+            <a:spLocks noGrp="1"/>
           </p:cNvSpPr>
           <p:nvPr/>
         </p:nvSpPr>
         <p:spPr>
-          <a:xfrm xmlns:a="http://schemas.openxmlformats.org/drawingml/2006/main">
+          <a:xfrm>
             <a:off x="548640" y="5806440"/>
             <a:ext cx="8229600" cy="777240"/>
           </a:xfrm>
-          <a:prstGeom xmlns:a="http://schemas.openxmlformats.org/drawingml/2006/main" prst="rect">
+          <a:prstGeom prst="rect">
             <a:avLst/>
           </a:prstGeom>
-          <a:noFill xmlns:a="http://schemas.openxmlformats.org/drawingml/2006/main"/>
+          <a:noFill/>
         </p:spPr>
         <p:txBody>
-          <a:bodyPr xmlns:a="http://schemas.openxmlformats.org/drawingml/2006/main" wrap="square" lIns="0" tIns="0" rIns="0" bIns="0">
+          <a:bodyPr wrap="square" lIns="0" tIns="0" rIns="0" bIns="0">
             <a:spAutoFit/>
           </a:bodyPr>
-          <a:lstStyle xmlns:a="http://schemas.openxmlformats.org/drawingml/2006/main"/>
-          <a:p xmlns:a="http://schemas.openxmlformats.org/drawingml/2006/main">
+          <a:lstStyle/>
+          <a:p>
             <a:r>
               <a:rPr sz="1300" b="1" i="0">
                 <a:solidFill>
@@ -6083,55 +6039,67 @@
                 <a:ea typeface="Arial"/>
                 <a:cs typeface="Arial"/>
               </a:rPr>
-              <a:t>• </a:t>
-            </a:r>
-            <a:r>
-              <a:rPr sz="1300" b="1" i="0">
-                <a:solidFill>
-                  <a:srgbClr val="CF3338"/>
+              <a:t>• One hour of Power Query replaces a recurring chore forever</a:t>
+            </a:r>
+          </a:p>
+        </p:txBody>
+      </p:sp>
+      <p:sp>
+        <p:nvSpPr>
+          <p:cNvPr id="7" name="Chat question">
+            <a:extLst>
+              <a:ext uri="{FF2B5EF4-FFF2-40B4-BE49-F238E27FC236}">
+                <a16:creationId xmlns:a16="http://schemas.microsoft.com/office/drawing/2014/main" id="{BDD5C390-B66D-460C-911B-9F7C4A6D1D06}"/>
+              </a:ext>
+            </a:extLst>
+          </p:cNvPr>
+          <p:cNvSpPr>
+            <a:spLocks noGrp="1"/>
+          </p:cNvSpPr>
+          <p:nvPr/>
+        </p:nvSpPr>
+        <p:spPr>
+          <a:xfrm>
+            <a:off x="9353550" y="2790825"/>
+            <a:ext cx="2428875" cy="1362075"/>
+          </a:xfrm>
+          <a:prstGeom prst="rect">
+            <a:avLst/>
+          </a:prstGeom>
+          <a:noFill/>
+          <a:ln w="0">
+            <a:noFill/>
+          </a:ln>
+        </p:spPr>
+        <p:txBody>
+          <a:bodyPr wrap="square" lIns="0" tIns="0" rIns="0" bIns="0">
+            <a:noAutofit/>
+          </a:bodyPr>
+          <a:lstStyle/>
+          <a:p>
+            <a:pPr>
+              <a:defRPr sz="2175" b="1">
+                <a:solidFill>
+                  <a:srgbClr val="FFFFFF"/>
+                </a:solidFill>
+                <a:latin typeface="Arial"/>
+                <a:ea typeface="Arial"/>
+                <a:cs typeface="Arial"/>
+              </a:defRPr>
+            </a:pPr>
+            <a:r>
+              <a:rPr sz="2175" b="1">
+                <a:solidFill>
+                  <a:srgbClr val="FFFFFF"/>
                 </a:solidFill>
                 <a:latin typeface="Arial"/>
                 <a:ea typeface="Arial"/>
                 <a:cs typeface="Arial"/>
               </a:rPr>
-              <a:t>You just wrote a program by clicking</a:t>
-            </a:r>
-          </a:p>
-        </p:txBody>
-      </p:sp>
-      <p:sp>
-        <p:nvSpPr>
-          <p:cNvPr id="7" name="Chat question">
-            <a:extLst xmlns:a="http://schemas.openxmlformats.org/drawingml/2006/main">
-              <a:ext uri="{FF2B5EF4-FFF2-40B4-BE49-F238E27FC236}">
-                <a16:creationId xmlns:a16="http://schemas.microsoft.com/office/drawing/2014/main" id="{67B14DF5-13CA-4F43-B2DC-D124E388617D}"/>
-              </a:ext>
-            </a:extLst>
-          </p:cNvPr>
-          <p:cNvSpPr>
-            <a:spLocks xmlns:a="http://schemas.openxmlformats.org/drawingml/2006/main" noGrp="1"/>
-          </p:cNvSpPr>
-          <p:nvPr/>
-        </p:nvSpPr>
-        <p:spPr>
-          <a:xfrm xmlns:a="http://schemas.openxmlformats.org/drawingml/2006/main">
-            <a:off x="9353550" y="2790825"/>
-            <a:ext cx="2428875" cy="1362075"/>
-          </a:xfrm>
-          <a:prstGeom xmlns:a="http://schemas.openxmlformats.org/drawingml/2006/main" prst="rect">
-            <a:avLst/>
-          </a:prstGeom>
-          <a:noFill xmlns:a="http://schemas.openxmlformats.org/drawingml/2006/main"/>
-          <a:ln xmlns:a="http://schemas.openxmlformats.org/drawingml/2006/main" w="0">
-            <a:noFill/>
-          </a:ln>
-        </p:spPr>
-        <p:txBody>
-          <a:bodyPr xmlns:a="http://schemas.openxmlformats.org/drawingml/2006/main" wrap="square" lIns="0" tIns="0" rIns="0" bIns="0">
-            <a:noAutofit/>
-          </a:bodyPr>
-          <a:lstStyle xmlns:a="http://schemas.openxmlformats.org/drawingml/2006/main"/>
-          <a:p xmlns:a="http://schemas.openxmlformats.org/drawingml/2006/main">
+              <a:t>The next month arrives.</a:t>
+            </a:r>
+          </a:p>
+          <a:p>
             <a:pPr>
               <a:defRPr sz="2175" b="1">
                 <a:solidFill>
@@ -6151,12 +6119,46 @@
                 <a:ea typeface="Arial"/>
                 <a:cs typeface="Arial"/>
               </a:rPr>
-              <a:t>Which removes</a:t>
-            </a:r>
-          </a:p>
-          <a:p xmlns:a="http://schemas.openxmlformats.org/drawingml/2006/main">
+              <a:t>What do we do?</a:t>
+            </a:r>
+          </a:p>
+        </p:txBody>
+      </p:sp>
+      <p:sp>
+        <p:nvSpPr>
+          <p:cNvPr id="8" name="Chat choices">
+            <a:extLst>
+              <a:ext uri="{FF2B5EF4-FFF2-40B4-BE49-F238E27FC236}">
+                <a16:creationId xmlns:a16="http://schemas.microsoft.com/office/drawing/2014/main" id="{6671A507-9523-4081-A866-1E5589A9088C}"/>
+              </a:ext>
+            </a:extLst>
+          </p:cNvPr>
+          <p:cNvSpPr>
+            <a:spLocks noGrp="1"/>
+          </p:cNvSpPr>
+          <p:nvPr/>
+        </p:nvSpPr>
+        <p:spPr>
+          <a:xfrm>
+            <a:off x="9353550" y="4362450"/>
+            <a:ext cx="2428875" cy="1009650"/>
+          </a:xfrm>
+          <a:prstGeom prst="rect">
+            <a:avLst/>
+          </a:prstGeom>
+          <a:noFill/>
+          <a:ln w="0">
+            <a:noFill/>
+          </a:ln>
+        </p:spPr>
+        <p:txBody>
+          <a:bodyPr wrap="square" lIns="0" tIns="0" rIns="0" bIns="0">
+            <a:noAutofit/>
+          </a:bodyPr>
+          <a:lstStyle/>
+          <a:p>
             <a:pPr>
-              <a:defRPr sz="2175" b="1">
+              <a:defRPr sz="1950" b="1">
                 <a:solidFill>
                   <a:srgbClr val="FFFFFF"/>
                 </a:solidFill>
@@ -6166,7 +6168,7 @@
               </a:defRPr>
             </a:pPr>
             <a:r>
-              <a:rPr sz="2175" b="1">
+              <a:rPr sz="1950" b="1">
                 <a:solidFill>
                   <a:srgbClr val="FFFFFF"/>
                 </a:solidFill>
@@ -6174,124 +6176,44 @@
                 <a:ea typeface="Arial"/>
                 <a:cs typeface="Arial"/>
               </a:rPr>
-              <a:t>extra spaces?</a:t>
-            </a:r>
-          </a:p>
-        </p:txBody>
-      </p:sp>
-      <p:sp>
-        <p:nvSpPr>
-          <p:cNvPr id="8" name="Chat choices">
-            <a:extLst xmlns:a="http://schemas.openxmlformats.org/drawingml/2006/main">
-              <a:ext uri="{FF2B5EF4-FFF2-40B4-BE49-F238E27FC236}">
-                <a16:creationId xmlns:a16="http://schemas.microsoft.com/office/drawing/2014/main" id="{750A5F44-3EF7-4810-8173-5CA0A241C08C}"/>
-              </a:ext>
-            </a:extLst>
-          </p:cNvPr>
-          <p:cNvSpPr>
-            <a:spLocks xmlns:a="http://schemas.openxmlformats.org/drawingml/2006/main" noGrp="1"/>
+              <a:t>REDO / REFRESH</a:t>
+            </a:r>
+          </a:p>
+        </p:txBody>
+      </p:sp>
+      <p:sp>
+        <p:nvSpPr>
+          <p:cNvPr id="9" name="Chat instruction">
+            <a:extLst>
+              <a:ext uri="{FF2B5EF4-FFF2-40B4-BE49-F238E27FC236}">
+                <a16:creationId xmlns:a16="http://schemas.microsoft.com/office/drawing/2014/main" id="{8F895E34-FF85-4313-B00E-86C34AD70CCE}"/>
+              </a:ext>
+            </a:extLst>
+          </p:cNvPr>
+          <p:cNvSpPr>
+            <a:spLocks noGrp="1"/>
           </p:cNvSpPr>
           <p:nvPr/>
         </p:nvSpPr>
         <p:spPr>
-          <a:xfrm xmlns:a="http://schemas.openxmlformats.org/drawingml/2006/main">
-            <a:off x="9353550" y="4362450"/>
-            <a:ext cx="2428875" cy="1009650"/>
+          <a:xfrm>
+            <a:off x="9353550" y="5715000"/>
+            <a:ext cx="2428875" cy="609600"/>
           </a:xfrm>
-          <a:prstGeom xmlns:a="http://schemas.openxmlformats.org/drawingml/2006/main" prst="rect">
+          <a:prstGeom prst="rect">
             <a:avLst/>
           </a:prstGeom>
-          <a:noFill xmlns:a="http://schemas.openxmlformats.org/drawingml/2006/main"/>
-          <a:ln xmlns:a="http://schemas.openxmlformats.org/drawingml/2006/main" w="0">
+          <a:noFill/>
+          <a:ln w="0">
             <a:noFill/>
           </a:ln>
         </p:spPr>
         <p:txBody>
-          <a:bodyPr xmlns:a="http://schemas.openxmlformats.org/drawingml/2006/main" wrap="square" lIns="0" tIns="0" rIns="0" bIns="0">
+          <a:bodyPr wrap="square" lIns="0" tIns="0" rIns="0" bIns="0">
             <a:noAutofit/>
           </a:bodyPr>
-          <a:lstStyle xmlns:a="http://schemas.openxmlformats.org/drawingml/2006/main"/>
-          <a:p xmlns:a="http://schemas.openxmlformats.org/drawingml/2006/main">
-            <a:pPr>
-              <a:defRPr sz="1950" b="1">
-                <a:solidFill>
-                  <a:srgbClr val="FFFFFF"/>
-                </a:solidFill>
-                <a:latin typeface="Arial"/>
-                <a:ea typeface="Arial"/>
-                <a:cs typeface="Arial"/>
-              </a:defRPr>
-            </a:pPr>
-            <a:r>
-              <a:rPr sz="1950" b="1">
-                <a:solidFill>
-                  <a:srgbClr val="FFFFFF"/>
-                </a:solidFill>
-                <a:latin typeface="Arial"/>
-                <a:ea typeface="Arial"/>
-                <a:cs typeface="Arial"/>
-              </a:rPr>
-              <a:t>A = Trim</a:t>
-            </a:r>
-          </a:p>
-          <a:p xmlns:a="http://schemas.openxmlformats.org/drawingml/2006/main">
-            <a:pPr>
-              <a:defRPr sz="1950" b="1">
-                <a:solidFill>
-                  <a:srgbClr val="FFFFFF"/>
-                </a:solidFill>
-                <a:latin typeface="Arial"/>
-                <a:ea typeface="Arial"/>
-                <a:cs typeface="Arial"/>
-              </a:defRPr>
-            </a:pPr>
-            <a:r>
-              <a:rPr sz="1950" b="1">
-                <a:solidFill>
-                  <a:srgbClr val="FFFFFF"/>
-                </a:solidFill>
-                <a:latin typeface="Arial"/>
-                <a:ea typeface="Arial"/>
-                <a:cs typeface="Arial"/>
-              </a:rPr>
-              <a:t>B = Split</a:t>
-            </a:r>
-          </a:p>
-        </p:txBody>
-      </p:sp>
-      <p:sp>
-        <p:nvSpPr>
-          <p:cNvPr id="9" name="Chat instruction">
-            <a:extLst xmlns:a="http://schemas.openxmlformats.org/drawingml/2006/main">
-              <a:ext uri="{FF2B5EF4-FFF2-40B4-BE49-F238E27FC236}">
-                <a16:creationId xmlns:a16="http://schemas.microsoft.com/office/drawing/2014/main" id="{4945D67C-3449-494B-BA24-FE1B3A7E4664}"/>
-              </a:ext>
-            </a:extLst>
-          </p:cNvPr>
-          <p:cNvSpPr>
-            <a:spLocks xmlns:a="http://schemas.openxmlformats.org/drawingml/2006/main" noGrp="1"/>
-          </p:cNvSpPr>
-          <p:nvPr/>
-        </p:nvSpPr>
-        <p:spPr>
-          <a:xfrm xmlns:a="http://schemas.openxmlformats.org/drawingml/2006/main">
-            <a:off x="9353550" y="5715000"/>
-            <a:ext cx="2428875" cy="609600"/>
-          </a:xfrm>
-          <a:prstGeom xmlns:a="http://schemas.openxmlformats.org/drawingml/2006/main" prst="rect">
-            <a:avLst/>
-          </a:prstGeom>
-          <a:noFill xmlns:a="http://schemas.openxmlformats.org/drawingml/2006/main"/>
-          <a:ln xmlns:a="http://schemas.openxmlformats.org/drawingml/2006/main" w="0">
-            <a:noFill/>
-          </a:ln>
-        </p:spPr>
-        <p:txBody>
-          <a:bodyPr xmlns:a="http://schemas.openxmlformats.org/drawingml/2006/main" wrap="square" lIns="0" tIns="0" rIns="0" bIns="0">
-            <a:noAutofit/>
-          </a:bodyPr>
-          <a:lstStyle xmlns:a="http://schemas.openxmlformats.org/drawingml/2006/main"/>
-          <a:p xmlns:a="http://schemas.openxmlformats.org/drawingml/2006/main">
+          <a:lstStyle/>
+          <a:p>
             <a:pPr>
               <a:defRPr sz="1500" b="0">
                 <a:solidFill>
@@ -6314,7 +6236,7 @@
               <a:t>Type one word</a:t>
             </a:r>
           </a:p>
-          <a:p xmlns:a="http://schemas.openxmlformats.org/drawingml/2006/main">
+          <a:p>
             <a:pPr>
               <a:defRPr sz="1500" b="0">
                 <a:solidFill>
@@ -6342,21 +6264,25 @@
     </p:spTree>
     <p:extLst>
       <p:ext uri="{BB962C8B-B14F-4D97-AF65-F5344CB8AC3E}">
-        <p14:creationId xmlns:p14="http://schemas.microsoft.com/office/powerpoint/2010/main" val="212274704"/>
+        <p14:creationId xmlns:p14="http://schemas.microsoft.com/office/powerpoint/2010/main" val="1991565650"/>
       </p:ext>
     </p:extLst>
   </p:cSld>
+  <p:clrMapOvr>
+    <a:masterClrMapping/>
+  </p:clrMapOvr>
 </p:sld>
 </file>
 
 <file path=ppt/slides/slide5.xml><?xml version="1.0" encoding="utf-8"?>
-<p:sld xmlns:p="http://schemas.openxmlformats.org/presentationml/2006/main">
+<p:sld xmlns:a="http://schemas.openxmlformats.org/drawingml/2006/main" xmlns:r="http://schemas.openxmlformats.org/officeDocument/2006/relationships" xmlns:p="http://schemas.openxmlformats.org/presentationml/2006/main">
   <p:cSld>
     <p:bg>
       <p:bgPr>
-        <a:solidFill xmlns:a="http://schemas.openxmlformats.org/drawingml/2006/main">
+        <a:solidFill>
           <a:srgbClr val="EEECE1"/>
         </a:solidFill>
+        <a:effectLst/>
       </p:bgPr>
     </p:bg>
     <p:spTree>
@@ -6366,375 +6292,114 @@
         <p:nvPr/>
       </p:nvGrpSpPr>
       <p:grpSpPr>
-        <a:xfrm xmlns:a="http://schemas.openxmlformats.org/drawingml/2006/main"/>
+        <a:xfrm>
+          <a:off x="0" y="0"/>
+          <a:ext cx="0" cy="0"/>
+          <a:chOff x="0" y="0"/>
+          <a:chExt cx="0" cy="0"/>
+        </a:xfrm>
       </p:grpSpPr>
       <p:sp>
         <p:nvSpPr>
-          <p:cNvPr id="2" name="Rectangle 1">
-            <a:extLst xmlns:a="http://schemas.openxmlformats.org/drawingml/2006/main">
-              <a:ext uri="{FF2B5EF4-FFF2-40B4-BE49-F238E27FC236}">
-                <a16:creationId xmlns:a16="http://schemas.microsoft.com/office/drawing/2014/main" id="{791A8C1B-12B8-42C6-A7AD-B0167019C0D4}"/>
-              </a:ext>
-            </a:extLst>
-          </p:cNvPr>
-          <p:cNvSpPr>
-            <a:spLocks xmlns:a="http://schemas.openxmlformats.org/drawingml/2006/main" noGrp="1"/>
+          <p:cNvPr id="2" name="TextBox 1">
+            <a:extLst>
+              <a:ext uri="{FF2B5EF4-FFF2-40B4-BE49-F238E27FC236}">
+                <a16:creationId xmlns:a16="http://schemas.microsoft.com/office/drawing/2014/main" id="{557E7DE8-0C85-4F6F-8C9E-C097752DFD15}"/>
+              </a:ext>
+            </a:extLst>
+          </p:cNvPr>
+          <p:cNvSpPr>
+            <a:spLocks noGrp="1"/>
           </p:cNvSpPr>
           <p:nvPr/>
         </p:nvSpPr>
         <p:spPr>
-          <a:xfrm xmlns:a="http://schemas.openxmlformats.org/drawingml/2006/main">
-            <a:off x="9082735" y="0"/>
-            <a:ext cx="3108960" cy="6858000"/>
+          <a:xfrm>
+            <a:off x="640080" y="457200"/>
+            <a:ext cx="10881360" cy="1188720"/>
           </a:xfrm>
-          <a:prstGeom xmlns:a="http://schemas.openxmlformats.org/drawingml/2006/main" prst="rect">
+          <a:prstGeom prst="rect">
             <a:avLst/>
           </a:prstGeom>
-          <a:solidFill xmlns:a="http://schemas.openxmlformats.org/drawingml/2006/main">
-            <a:srgbClr val="CF3338"/>
-          </a:solidFill>
-          <a:ln xmlns:a="http://schemas.openxmlformats.org/drawingml/2006/main">
-            <a:noFill/>
-          </a:ln>
+          <a:noFill/>
         </p:spPr>
-        <p:style>
-          <a:lnRef xmlns:a="http://schemas.openxmlformats.org/drawingml/2006/main" idx="1">
-            <a:schemeClr val="accent1"/>
-          </a:lnRef>
-          <a:fillRef xmlns:a="http://schemas.openxmlformats.org/drawingml/2006/main" idx="3">
-            <a:schemeClr val="accent1"/>
-          </a:fillRef>
-          <a:effectRef xmlns:a="http://schemas.openxmlformats.org/drawingml/2006/main" idx="2">
-            <a:schemeClr val="accent1"/>
-          </a:effectRef>
-          <a:fontRef xmlns:a="http://schemas.openxmlformats.org/drawingml/2006/main" idx="minor">
-            <a:schemeClr val="lt1"/>
-          </a:fontRef>
-        </p:style>
-        <p:txBody>
-          <a:bodyPr xmlns:a="http://schemas.openxmlformats.org/drawingml/2006/main" anchor="ctr"/>
-          <a:lstStyle xmlns:a="http://schemas.openxmlformats.org/drawingml/2006/main"/>
-          <a:p xmlns:a="http://schemas.openxmlformats.org/drawingml/2006/main">
-            <a:pPr algn="ctr">
-              <a:buNone/>
-            </a:pPr>
-          </a:p>
-        </p:txBody>
-      </p:sp>
-      <p:sp>
-        <p:nvSpPr>
-          <p:cNvPr id="3" name="TextBox 2">
-            <a:extLst xmlns:a="http://schemas.openxmlformats.org/drawingml/2006/main">
-              <a:ext uri="{FF2B5EF4-FFF2-40B4-BE49-F238E27FC236}">
-                <a16:creationId xmlns:a16="http://schemas.microsoft.com/office/drawing/2014/main" id="{04DA7E28-30E2-4E15-9AB8-561E9C1E2578}"/>
-              </a:ext>
-            </a:extLst>
-          </p:cNvPr>
-          <p:cNvSpPr>
-            <a:spLocks xmlns:a="http://schemas.openxmlformats.org/drawingml/2006/main" noGrp="1"/>
-          </p:cNvSpPr>
-          <p:nvPr/>
-        </p:nvSpPr>
-        <p:spPr>
-          <a:xfrm xmlns:a="http://schemas.openxmlformats.org/drawingml/2006/main">
-            <a:off x="9311335" y="640080"/>
-            <a:ext cx="2468880" cy="1828800"/>
-          </a:xfrm>
-          <a:prstGeom xmlns:a="http://schemas.openxmlformats.org/drawingml/2006/main" prst="rect">
-            <a:avLst/>
-          </a:prstGeom>
-          <a:noFill xmlns:a="http://schemas.openxmlformats.org/drawingml/2006/main"/>
-        </p:spPr>
-        <p:txBody>
-          <a:bodyPr xmlns:a="http://schemas.openxmlformats.org/drawingml/2006/main" wrap="square" lIns="0" tIns="0" rIns="0" bIns="0">
+        <p:txBody>
+          <a:bodyPr wrap="square" lIns="0" tIns="0" rIns="0" bIns="0">
             <a:spAutoFit/>
           </a:bodyPr>
-          <a:lstStyle xmlns:a="http://schemas.openxmlformats.org/drawingml/2006/main"/>
-          <a:p xmlns:a="http://schemas.openxmlformats.org/drawingml/2006/main">
-            <a:r>
-              <a:rPr sz="2600" b="1" i="0">
-                <a:solidFill>
-                  <a:srgbClr val="FFFFFF"/>
+          <a:lstStyle/>
+          <a:p>
+            <a:r>
+              <a:rPr sz="3000" b="1" i="0">
+                <a:solidFill>
+                  <a:srgbClr val="1F2120"/>
                 </a:solidFill>
                 <a:latin typeface="Arial Black"/>
                 <a:ea typeface="Arial Black"/>
                 <a:cs typeface="Arial Black"/>
               </a:rPr>
-              <a:t>LIVE</a:t>
-            </a:r>
-          </a:p>
-          <a:p xmlns:a="http://schemas.openxmlformats.org/drawingml/2006/main">
-            <a:r>
-              <a:rPr sz="2600" b="1" i="0">
-                <a:solidFill>
-                  <a:srgbClr val="FFFFFF"/>
-                </a:solidFill>
-                <a:latin typeface="Arial Black"/>
-                <a:ea typeface="Arial Black"/>
-                <a:cs typeface="Arial Black"/>
-              </a:rPr>
-              <a:t>DEMO</a:t>
-            </a:r>
-          </a:p>
-        </p:txBody>
-      </p:sp>
-      <p:sp>
-        <p:nvSpPr>
-          <p:cNvPr id="4" name="TextBox 3">
-            <a:extLst xmlns:a="http://schemas.openxmlformats.org/drawingml/2006/main">
-              <a:ext uri="{FF2B5EF4-FFF2-40B4-BE49-F238E27FC236}">
-                <a16:creationId xmlns:a16="http://schemas.microsoft.com/office/drawing/2014/main" id="{7D830E3A-10ED-49B5-8DC8-F27548CF4BC6}"/>
-              </a:ext>
-            </a:extLst>
-          </p:cNvPr>
-          <p:cNvSpPr>
-            <a:spLocks xmlns:a="http://schemas.openxmlformats.org/drawingml/2006/main" noGrp="1"/>
-          </p:cNvSpPr>
-          <p:nvPr/>
-        </p:nvSpPr>
-        <p:spPr>
-          <a:xfrm xmlns:a="http://schemas.openxmlformats.org/drawingml/2006/main">
-            <a:off x="548640" y="411480"/>
-            <a:ext cx="8229600" cy="1097280"/>
-          </a:xfrm>
-          <a:prstGeom xmlns:a="http://schemas.openxmlformats.org/drawingml/2006/main" prst="rect">
-            <a:avLst/>
-          </a:prstGeom>
-          <a:noFill xmlns:a="http://schemas.openxmlformats.org/drawingml/2006/main"/>
-        </p:spPr>
-        <p:txBody>
-          <a:bodyPr xmlns:a="http://schemas.openxmlformats.org/drawingml/2006/main" wrap="square" lIns="0" tIns="0" rIns="0" bIns="0">
-            <a:spAutoFit/>
-          </a:bodyPr>
-          <a:lstStyle xmlns:a="http://schemas.openxmlformats.org/drawingml/2006/main"/>
-          <a:p xmlns:a="http://schemas.openxmlformats.org/drawingml/2006/main">
-            <a:r>
-              <a:rPr sz="2500" b="1" i="0">
-                <a:solidFill>
-                  <a:srgbClr val="CF3338"/>
-                </a:solidFill>
-                <a:latin typeface="Arial Black"/>
-                <a:ea typeface="Arial Black"/>
-                <a:cs typeface="Arial Black"/>
-              </a:rPr>
-              <a:t>Live demo: the Refresh moment</a:t>
-            </a:r>
-          </a:p>
-          <a:p xmlns:a="http://schemas.openxmlformats.org/drawingml/2006/main">
+              <a:t>Why this counts as AI</a:t>
+            </a:r>
+          </a:p>
+          <a:p>
             <a:pPr>
               <a:spcBef>
-                <a:spcPts val="300"/>
+                <a:spcPts val="400"/>
               </a:spcBef>
               <a:buNone/>
             </a:pPr>
             <a:r>
-              <a:rPr sz="1450" b="0" i="1">
-                <a:solidFill>
-                  <a:srgbClr val="707070"/>
+              <a:rPr sz="1500" b="0" i="1">
+                <a:solidFill>
+                  <a:srgbClr val="CF3338"/>
                 </a:solidFill>
                 <a:latin typeface="Arial"/>
                 <a:ea typeface="Arial"/>
                 <a:cs typeface="Arial"/>
               </a:rPr>
-              <a:t>June just arrived. Watch what does not happen next.</a:t>
-            </a:r>
-          </a:p>
-        </p:txBody>
-      </p:sp>
-      <p:sp>
-        <p:nvSpPr>
-          <p:cNvPr id="5" name="Rounded Rectangle 4">
-            <a:extLst xmlns:a="http://schemas.openxmlformats.org/drawingml/2006/main">
-              <a:ext uri="{FF2B5EF4-FFF2-40B4-BE49-F238E27FC236}">
-                <a16:creationId xmlns:a16="http://schemas.microsoft.com/office/drawing/2014/main" id="{197DD207-BECD-4D65-840E-F94446854D7C}"/>
-              </a:ext>
-            </a:extLst>
-          </p:cNvPr>
-          <p:cNvSpPr>
-            <a:spLocks xmlns:a="http://schemas.openxmlformats.org/drawingml/2006/main" noGrp="1"/>
+              <a:t>The guerrilla hook, day 3</a:t>
+            </a:r>
+          </a:p>
+        </p:txBody>
+      </p:sp>
+      <p:sp>
+        <p:nvSpPr>
+          <p:cNvPr id="3" name="TextBox 2">
+            <a:extLst>
+              <a:ext uri="{FF2B5EF4-FFF2-40B4-BE49-F238E27FC236}">
+                <a16:creationId xmlns:a16="http://schemas.microsoft.com/office/drawing/2014/main" id="{9F6DF208-B834-42EF-A6C3-D32A49612685}"/>
+              </a:ext>
+            </a:extLst>
+          </p:cNvPr>
+          <p:cNvSpPr>
+            <a:spLocks noGrp="1"/>
           </p:cNvSpPr>
           <p:nvPr/>
         </p:nvSpPr>
         <p:spPr>
-          <a:xfrm xmlns:a="http://schemas.openxmlformats.org/drawingml/2006/main">
-            <a:off x="548640" y="1600200"/>
-            <a:ext cx="8229600" cy="4023360"/>
+          <a:xfrm>
+            <a:off x="640080" y="1783080"/>
+            <a:ext cx="10881360" cy="1590179"/>
           </a:xfrm>
-          <a:prstGeom xmlns:a="http://schemas.openxmlformats.org/drawingml/2006/main" prst="roundRect">
+          <a:prstGeom prst="rect">
             <a:avLst/>
           </a:prstGeom>
-          <a:solidFill xmlns:a="http://schemas.openxmlformats.org/drawingml/2006/main">
-            <a:srgbClr val="2B2B2B"/>
-          </a:solidFill>
-          <a:ln xmlns:a="http://schemas.openxmlformats.org/drawingml/2006/main">
-            <a:noFill/>
-          </a:ln>
+          <a:noFill/>
         </p:spPr>
-        <p:style>
-          <a:lnRef xmlns:a="http://schemas.openxmlformats.org/drawingml/2006/main" idx="1">
-            <a:schemeClr val="accent1"/>
-          </a:lnRef>
-          <a:fillRef xmlns:a="http://schemas.openxmlformats.org/drawingml/2006/main" idx="3">
-            <a:schemeClr val="accent1"/>
-          </a:fillRef>
-          <a:effectRef xmlns:a="http://schemas.openxmlformats.org/drawingml/2006/main" idx="2">
-            <a:schemeClr val="accent1"/>
-          </a:effectRef>
-          <a:fontRef xmlns:a="http://schemas.openxmlformats.org/drawingml/2006/main" idx="minor">
-            <a:schemeClr val="lt1"/>
-          </a:fontRef>
-        </p:style>
-        <p:txBody>
-          <a:bodyPr xmlns:a="http://schemas.openxmlformats.org/drawingml/2006/main" wrap="square" lIns="256032" tIns="182880" rIns="182880" bIns="109728" anchor="t"/>
-          <a:lstStyle xmlns:a="http://schemas.openxmlformats.org/drawingml/2006/main"/>
-          <a:p xmlns:a="http://schemas.openxmlformats.org/drawingml/2006/main">
-            <a:pPr algn="l">
-              <a:spcAft>
-                <a:spcPts val="100"/>
-              </a:spcAft>
-              <a:buNone/>
-            </a:pPr>
-            <a:r>
-              <a:rPr sz="1300" b="0" i="0">
-                <a:solidFill>
-                  <a:srgbClr val="9EC57A"/>
-                </a:solidFill>
-                <a:latin typeface="Consolas"/>
-                <a:ea typeface="Consolas"/>
-                <a:cs typeface="Consolas"/>
-              </a:rPr>
-              <a:t># Replay the saved cleanup</a:t>
-            </a:r>
-          </a:p>
-          <a:p xmlns:a="http://schemas.openxmlformats.org/drawingml/2006/main">
-            <a:pPr algn="l">
-              <a:spcAft>
-                <a:spcPts val="100"/>
-              </a:spcAft>
-              <a:buNone/>
-            </a:pPr>
-            <a:r>
-              <a:rPr sz="1300" b="0" i="0">
-                <a:solidFill>
-                  <a:srgbClr val="F5F5F5"/>
-                </a:solidFill>
-                <a:latin typeface="Consolas"/>
-                <a:ea typeface="Consolas"/>
-                <a:cs typeface="Consolas"/>
-              </a:rPr>
-              <a:t>1. Copy the June rows from the june-rows sheet</a:t>
-            </a:r>
-          </a:p>
-          <a:p xmlns:a="http://schemas.openxmlformats.org/drawingml/2006/main">
-            <a:pPr algn="l">
-              <a:spcAft>
-                <a:spcPts val="100"/>
-              </a:spcAft>
-              <a:buNone/>
-            </a:pPr>
-            <a:r>
-              <a:rPr sz="1300" b="0" i="0">
-                <a:solidFill>
-                  <a:srgbClr val="F5F5F5"/>
-                </a:solidFill>
-                <a:latin typeface="Consolas"/>
-                <a:ea typeface="Consolas"/>
-                <a:cs typeface="Consolas"/>
-              </a:rPr>
-              <a:t>2. Paste them at the bottom of RawExport</a:t>
-            </a:r>
-          </a:p>
-          <a:p xmlns:a="http://schemas.openxmlformats.org/drawingml/2006/main">
-            <a:pPr algn="l">
-              <a:spcAft>
-                <a:spcPts val="100"/>
-              </a:spcAft>
-              <a:buNone/>
-            </a:pPr>
-            <a:r>
-              <a:rPr sz="1300" b="0" i="0">
-                <a:solidFill>
-                  <a:srgbClr val="F5F5F5"/>
-                </a:solidFill>
-                <a:latin typeface="Consolas"/>
-                <a:ea typeface="Consolas"/>
-                <a:cs typeface="Consolas"/>
-              </a:rPr>
-              <a:t>3. Right-click the SalesClean table &gt; Refresh</a:t>
-            </a:r>
-          </a:p>
-          <a:p xmlns:a="http://schemas.openxmlformats.org/drawingml/2006/main">
-            <a:pPr algn="l">
-              <a:spcAft>
-                <a:spcPts val="100"/>
-              </a:spcAft>
-              <a:buNone/>
-            </a:pPr>
-            <a:r>
-              <a:rPr sz="1300" b="0" i="0">
-                <a:solidFill>
-                  <a:srgbClr val="F5F5F5"/>
-                </a:solidFill>
-                <a:latin typeface="Consolas"/>
-                <a:ea typeface="Consolas"/>
-                <a:cs typeface="Consolas"/>
-              </a:rPr>
-              <a:t>4. Every recorded step replays on the new data</a:t>
-            </a:r>
-          </a:p>
-          <a:p xmlns:a="http://schemas.openxmlformats.org/drawingml/2006/main">
-            <a:pPr algn="l">
-              <a:spcAft>
-                <a:spcPts val="100"/>
-              </a:spcAft>
-              <a:buNone/>
-            </a:pPr>
-            <a:r>
-              <a:rPr sz="1300" b="0" i="0">
-                <a:solidFill>
-                  <a:srgbClr val="F5F5F5"/>
-                </a:solidFill>
-                <a:latin typeface="Consolas"/>
-                <a:ea typeface="Consolas"/>
-                <a:cs typeface="Consolas"/>
-              </a:rPr>
-              <a:t>5. That recurring cleanup chore is now one click</a:t>
-            </a:r>
-          </a:p>
-        </p:txBody>
-      </p:sp>
-      <p:sp>
-        <p:nvSpPr>
-          <p:cNvPr id="6" name="TextBox 5">
-            <a:extLst xmlns:a="http://schemas.openxmlformats.org/drawingml/2006/main">
-              <a:ext uri="{FF2B5EF4-FFF2-40B4-BE49-F238E27FC236}">
-                <a16:creationId xmlns:a16="http://schemas.microsoft.com/office/drawing/2014/main" id="{DA06A93C-CF98-4E10-BCE1-4DF799414F8A}"/>
-              </a:ext>
-            </a:extLst>
-          </p:cNvPr>
-          <p:cNvSpPr>
-            <a:spLocks xmlns:a="http://schemas.openxmlformats.org/drawingml/2006/main" noGrp="1"/>
-          </p:cNvSpPr>
-          <p:nvPr/>
-        </p:nvSpPr>
-        <p:spPr>
-          <a:xfrm xmlns:a="http://schemas.openxmlformats.org/drawingml/2006/main">
-            <a:off x="548640" y="5806440"/>
-            <a:ext cx="8229600" cy="777240"/>
-          </a:xfrm>
-          <a:prstGeom xmlns:a="http://schemas.openxmlformats.org/drawingml/2006/main" prst="rect">
-            <a:avLst/>
-          </a:prstGeom>
-          <a:noFill xmlns:a="http://schemas.openxmlformats.org/drawingml/2006/main"/>
-        </p:spPr>
-        <p:txBody>
-          <a:bodyPr xmlns:a="http://schemas.openxmlformats.org/drawingml/2006/main" wrap="square" lIns="0" tIns="0" rIns="0" bIns="0">
+        <p:txBody>
+          <a:bodyPr wrap="square" lIns="0" tIns="0" rIns="0" bIns="0">
             <a:spAutoFit/>
           </a:bodyPr>
-          <a:lstStyle xmlns:a="http://schemas.openxmlformats.org/drawingml/2006/main"/>
-          <a:p xmlns:a="http://schemas.openxmlformats.org/drawingml/2006/main">
-            <a:r>
-              <a:rPr sz="1300" b="1" i="0">
+          <a:lstStyle/>
+          <a:p>
+            <a:pPr>
+              <a:spcAft>
+                <a:spcPts val="700"/>
+              </a:spcAft>
+              <a:buNone/>
+            </a:pPr>
+            <a:r>
+              <a:rPr sz="1200" b="1" i="0" dirty="0">
                 <a:solidFill>
                   <a:srgbClr val="CF3338"/>
                 </a:solidFill>
@@ -6745,232 +6410,135 @@
               <a:t>• </a:t>
             </a:r>
             <a:r>
-              <a:rPr sz="1300" b="1" i="0">
-                <a:solidFill>
-                  <a:srgbClr val="CF3338"/>
+              <a:rPr sz="1600" b="0" i="0" dirty="0">
+                <a:solidFill>
+                  <a:srgbClr val="1F2120"/>
                 </a:solidFill>
                 <a:latin typeface="Arial"/>
                 <a:ea typeface="Arial"/>
                 <a:cs typeface="Arial"/>
               </a:rPr>
-              <a:t>One hour of Power Query replaces a recurring chore forever</a:t>
-            </a:r>
-          </a:p>
-        </p:txBody>
-      </p:sp>
-      <p:sp>
-        <p:nvSpPr>
-          <p:cNvPr id="7" name="Chat question">
-            <a:extLst xmlns:a="http://schemas.openxmlformats.org/drawingml/2006/main">
-              <a:ext uri="{FF2B5EF4-FFF2-40B4-BE49-F238E27FC236}">
-                <a16:creationId xmlns:a16="http://schemas.microsoft.com/office/drawing/2014/main" id="{BDD5C390-B66D-460C-911B-9F7C4A6D1D06}"/>
-              </a:ext>
-            </a:extLst>
-          </p:cNvPr>
-          <p:cNvSpPr>
-            <a:spLocks xmlns:a="http://schemas.openxmlformats.org/drawingml/2006/main" noGrp="1"/>
-          </p:cNvSpPr>
-          <p:nvPr/>
-        </p:nvSpPr>
-        <p:spPr>
-          <a:xfrm xmlns:a="http://schemas.openxmlformats.org/drawingml/2006/main">
-            <a:off x="9353550" y="2790825"/>
-            <a:ext cx="2428875" cy="1362075"/>
-          </a:xfrm>
-          <a:prstGeom xmlns:a="http://schemas.openxmlformats.org/drawingml/2006/main" prst="rect">
-            <a:avLst/>
-          </a:prstGeom>
-          <a:noFill xmlns:a="http://schemas.openxmlformats.org/drawingml/2006/main"/>
-          <a:ln xmlns:a="http://schemas.openxmlformats.org/drawingml/2006/main" w="0">
-            <a:noFill/>
-          </a:ln>
-        </p:spPr>
-        <p:txBody>
-          <a:bodyPr xmlns:a="http://schemas.openxmlformats.org/drawingml/2006/main" wrap="square" lIns="0" tIns="0" rIns="0" bIns="0">
-            <a:noAutofit/>
-          </a:bodyPr>
-          <a:lstStyle xmlns:a="http://schemas.openxmlformats.org/drawingml/2006/main"/>
-          <a:p xmlns:a="http://schemas.openxmlformats.org/drawingml/2006/main">
+              <a:t>Power Query delivers what people think they need AI for. Automated, repeatable, refreshable prep, zero AI inside.</a:t>
+            </a:r>
+          </a:p>
+          <a:p>
             <a:pPr>
-              <a:defRPr sz="2175" b="1">
-                <a:solidFill>
-                  <a:srgbClr val="FFFFFF"/>
-                </a:solidFill>
-                <a:latin typeface="Arial"/>
-                <a:ea typeface="Arial"/>
-                <a:cs typeface="Arial"/>
-              </a:defRPr>
-            </a:pPr>
-            <a:r>
-              <a:rPr sz="2175" b="1">
-                <a:solidFill>
-                  <a:srgbClr val="FFFFFF"/>
+              <a:spcAft>
+                <a:spcPts val="700"/>
+              </a:spcAft>
+              <a:buNone/>
+            </a:pPr>
+            <a:r>
+              <a:rPr sz="1200" b="1" i="0" dirty="0">
+                <a:solidFill>
+                  <a:srgbClr val="CF3338"/>
                 </a:solidFill>
                 <a:latin typeface="Arial"/>
                 <a:ea typeface="Arial"/>
                 <a:cs typeface="Arial"/>
               </a:rPr>
-              <a:t>The next month arrives.</a:t>
-            </a:r>
-          </a:p>
-          <a:p xmlns:a="http://schemas.openxmlformats.org/drawingml/2006/main">
-            <a:pPr>
-              <a:defRPr sz="2175" b="1">
-                <a:solidFill>
-                  <a:srgbClr val="FFFFFF"/>
-                </a:solidFill>
-                <a:latin typeface="Arial"/>
-                <a:ea typeface="Arial"/>
-                <a:cs typeface="Arial"/>
-              </a:defRPr>
-            </a:pPr>
-            <a:r>
-              <a:rPr sz="2175" b="1">
-                <a:solidFill>
-                  <a:srgbClr val="FFFFFF"/>
+              <a:t>• </a:t>
+            </a:r>
+            <a:r>
+              <a:rPr sz="1600" b="0" i="0" dirty="0">
+                <a:solidFill>
+                  <a:srgbClr val="1F2120"/>
                 </a:solidFill>
                 <a:latin typeface="Arial"/>
                 <a:ea typeface="Arial"/>
                 <a:cs typeface="Arial"/>
               </a:rPr>
-              <a:t>What do we do?</a:t>
-            </a:r>
-          </a:p>
-        </p:txBody>
-      </p:sp>
-      <p:sp>
-        <p:nvSpPr>
-          <p:cNvPr id="8" name="Chat choices">
-            <a:extLst xmlns:a="http://schemas.openxmlformats.org/drawingml/2006/main">
-              <a:ext uri="{FF2B5EF4-FFF2-40B4-BE49-F238E27FC236}">
-                <a16:creationId xmlns:a16="http://schemas.microsoft.com/office/drawing/2014/main" id="{6671A507-9523-4081-A866-1E5589A9088C}"/>
-              </a:ext>
-            </a:extLst>
-          </p:cNvPr>
-          <p:cNvSpPr>
-            <a:spLocks xmlns:a="http://schemas.openxmlformats.org/drawingml/2006/main" noGrp="1"/>
-          </p:cNvSpPr>
-          <p:nvPr/>
-        </p:nvSpPr>
-        <p:spPr>
-          <a:xfrm xmlns:a="http://schemas.openxmlformats.org/drawingml/2006/main">
-            <a:off x="9353550" y="4362450"/>
-            <a:ext cx="2428875" cy="1009650"/>
-          </a:xfrm>
-          <a:prstGeom xmlns:a="http://schemas.openxmlformats.org/drawingml/2006/main" prst="rect">
-            <a:avLst/>
-          </a:prstGeom>
-          <a:noFill xmlns:a="http://schemas.openxmlformats.org/drawingml/2006/main"/>
-          <a:ln xmlns:a="http://schemas.openxmlformats.org/drawingml/2006/main" w="0">
-            <a:noFill/>
-          </a:ln>
-        </p:spPr>
-        <p:txBody>
-          <a:bodyPr xmlns:a="http://schemas.openxmlformats.org/drawingml/2006/main" wrap="square" lIns="0" tIns="0" rIns="0" bIns="0">
-            <a:noAutofit/>
-          </a:bodyPr>
-          <a:lstStyle xmlns:a="http://schemas.openxmlformats.org/drawingml/2006/main"/>
-          <a:p xmlns:a="http://schemas.openxmlformats.org/drawingml/2006/main">
+              <a:t>Recorded steps are automation without programming.</a:t>
+            </a:r>
+          </a:p>
+          <a:p>
             <a:pPr>
-              <a:defRPr sz="1950" b="1">
-                <a:solidFill>
-                  <a:srgbClr val="FFFFFF"/>
-                </a:solidFill>
-                <a:latin typeface="Arial"/>
-                <a:ea typeface="Arial"/>
-                <a:cs typeface="Arial"/>
-              </a:defRPr>
-            </a:pPr>
-            <a:r>
-              <a:rPr sz="1950" b="1">
-                <a:solidFill>
-                  <a:srgbClr val="FFFFFF"/>
+              <a:spcAft>
+                <a:spcPts val="700"/>
+              </a:spcAft>
+              <a:buNone/>
+            </a:pPr>
+            <a:r>
+              <a:rPr sz="1200" b="1" i="0" dirty="0">
+                <a:solidFill>
+                  <a:srgbClr val="CF3338"/>
                 </a:solidFill>
                 <a:latin typeface="Arial"/>
                 <a:ea typeface="Arial"/>
                 <a:cs typeface="Arial"/>
               </a:rPr>
-              <a:t>REDO / REFRESH</a:t>
-            </a:r>
-          </a:p>
-        </p:txBody>
-      </p:sp>
-      <p:sp>
-        <p:nvSpPr>
-          <p:cNvPr id="9" name="Chat instruction">
-            <a:extLst xmlns:a="http://schemas.openxmlformats.org/drawingml/2006/main">
-              <a:ext uri="{FF2B5EF4-FFF2-40B4-BE49-F238E27FC236}">
-                <a16:creationId xmlns:a16="http://schemas.microsoft.com/office/drawing/2014/main" id="{8F895E34-FF85-4313-B00E-86C34AD70CCE}"/>
-              </a:ext>
-            </a:extLst>
-          </p:cNvPr>
-          <p:cNvSpPr>
-            <a:spLocks xmlns:a="http://schemas.openxmlformats.org/drawingml/2006/main" noGrp="1"/>
-          </p:cNvSpPr>
-          <p:nvPr/>
-        </p:nvSpPr>
-        <p:spPr>
-          <a:xfrm xmlns:a="http://schemas.openxmlformats.org/drawingml/2006/main">
-            <a:off x="9353550" y="5715000"/>
-            <a:ext cx="2428875" cy="609600"/>
-          </a:xfrm>
-          <a:prstGeom xmlns:a="http://schemas.openxmlformats.org/drawingml/2006/main" prst="rect">
-            <a:avLst/>
-          </a:prstGeom>
-          <a:noFill xmlns:a="http://schemas.openxmlformats.org/drawingml/2006/main"/>
-          <a:ln xmlns:a="http://schemas.openxmlformats.org/drawingml/2006/main" w="0">
-            <a:noFill/>
-          </a:ln>
-        </p:spPr>
-        <p:txBody>
-          <a:bodyPr xmlns:a="http://schemas.openxmlformats.org/drawingml/2006/main" wrap="square" lIns="0" tIns="0" rIns="0" bIns="0">
-            <a:noAutofit/>
-          </a:bodyPr>
-          <a:lstStyle xmlns:a="http://schemas.openxmlformats.org/drawingml/2006/main"/>
-          <a:p xmlns:a="http://schemas.openxmlformats.org/drawingml/2006/main">
-            <a:pPr>
-              <a:defRPr sz="1500" b="0">
-                <a:solidFill>
-                  <a:srgbClr val="FFFFFF"/>
-                </a:solidFill>
-                <a:latin typeface="Arial"/>
-                <a:ea typeface="Arial"/>
-                <a:cs typeface="Arial"/>
-              </a:defRPr>
-            </a:pPr>
-            <a:r>
-              <a:rPr sz="1500" b="0">
-                <a:solidFill>
-                  <a:srgbClr val="FFFFFF"/>
+              <a:t>• </a:t>
+            </a:r>
+            <a:r>
+              <a:rPr sz="1600" b="0" i="0" dirty="0">
+                <a:solidFill>
+                  <a:srgbClr val="1F2120"/>
                 </a:solidFill>
                 <a:latin typeface="Arial"/>
                 <a:ea typeface="Arial"/>
                 <a:cs typeface="Arial"/>
               </a:rPr>
-              <a:t>Type one word</a:t>
-            </a:r>
-          </a:p>
-          <a:p xmlns:a="http://schemas.openxmlformats.org/drawingml/2006/main">
+              <a:t>Clean inputs remove avoidable errors. AI output still needs checking.</a:t>
+            </a:r>
+          </a:p>
+          <a:p>
             <a:pPr>
-              <a:defRPr sz="1500" b="0">
-                <a:solidFill>
-                  <a:srgbClr val="FFFFFF"/>
-                </a:solidFill>
-                <a:latin typeface="Arial"/>
-                <a:ea typeface="Arial"/>
-                <a:cs typeface="Arial"/>
-              </a:defRPr>
-            </a:pPr>
-            <a:r>
-              <a:rPr sz="1500" b="0">
-                <a:solidFill>
-                  <a:srgbClr val="FFFFFF"/>
+              <a:spcAft>
+                <a:spcPts val="700"/>
+              </a:spcAft>
+              <a:buNone/>
+            </a:pPr>
+            <a:r>
+              <a:rPr sz="1200" b="1" i="0" dirty="0">
+                <a:solidFill>
+                  <a:srgbClr val="CF3338"/>
                 </a:solidFill>
                 <a:latin typeface="Arial"/>
                 <a:ea typeface="Arial"/>
                 <a:cs typeface="Arial"/>
               </a:rPr>
-              <a:t>or a letter in chat.</a:t>
+              <a:t>• </a:t>
+            </a:r>
+            <a:r>
+              <a:rPr sz="1600" b="0" i="0" dirty="0">
+                <a:solidFill>
+                  <a:srgbClr val="1F2120"/>
+                </a:solidFill>
+                <a:latin typeface="Arial"/>
+                <a:ea typeface="Arial"/>
+                <a:cs typeface="Arial"/>
+              </a:rPr>
+              <a:t>Garbage in, confident-sounding garbage out.</a:t>
+            </a:r>
+          </a:p>
+          <a:p>
+            <a:pPr>
+              <a:spcAft>
+                <a:spcPts val="700"/>
+              </a:spcAft>
+              <a:buNone/>
+            </a:pPr>
+            <a:r>
+              <a:rPr sz="1200" b="1" i="0" dirty="0">
+                <a:solidFill>
+                  <a:srgbClr val="CF3338"/>
+                </a:solidFill>
+                <a:latin typeface="Arial"/>
+                <a:ea typeface="Arial"/>
+                <a:cs typeface="Arial"/>
+              </a:rPr>
+              <a:t>• </a:t>
+            </a:r>
+            <a:r>
+              <a:rPr sz="1600" b="0" i="0" dirty="0">
+                <a:solidFill>
+                  <a:srgbClr val="1F2120"/>
+                </a:solidFill>
+                <a:latin typeface="Arial"/>
+                <a:ea typeface="Arial"/>
+                <a:cs typeface="Arial"/>
+              </a:rPr>
+              <a:t>Bonus move: free chatbots write M code, and Power Query is where you paste it.</a:t>
             </a:r>
           </a:p>
         </p:txBody>
@@ -6978,21 +6546,25 @@
     </p:spTree>
     <p:extLst>
       <p:ext uri="{BB962C8B-B14F-4D97-AF65-F5344CB8AC3E}">
-        <p14:creationId xmlns:p14="http://schemas.microsoft.com/office/powerpoint/2010/main" val="1991565650"/>
+        <p14:creationId xmlns:p14="http://schemas.microsoft.com/office/powerpoint/2010/main" val="1405853529"/>
       </p:ext>
     </p:extLst>
   </p:cSld>
+  <p:clrMapOvr>
+    <a:masterClrMapping/>
+  </p:clrMapOvr>
 </p:sld>
 </file>
 
 <file path=ppt/slides/slide6.xml><?xml version="1.0" encoding="utf-8"?>
-<p:sld xmlns:p="http://schemas.openxmlformats.org/presentationml/2006/main">
+<p:sld xmlns:a="http://schemas.openxmlformats.org/drawingml/2006/main" xmlns:r="http://schemas.openxmlformats.org/officeDocument/2006/relationships" xmlns:p="http://schemas.openxmlformats.org/presentationml/2006/main">
   <p:cSld>
     <p:bg>
       <p:bgPr>
-        <a:solidFill xmlns:a="http://schemas.openxmlformats.org/drawingml/2006/main">
+        <a:solidFill>
           <a:srgbClr val="EEECE1"/>
         </a:solidFill>
+        <a:effectLst/>
       </p:bgPr>
     </p:bg>
     <p:spTree>
@@ -7002,38 +6574,43 @@
         <p:nvPr/>
       </p:nvGrpSpPr>
       <p:grpSpPr>
-        <a:xfrm xmlns:a="http://schemas.openxmlformats.org/drawingml/2006/main"/>
+        <a:xfrm>
+          <a:off x="0" y="0"/>
+          <a:ext cx="0" cy="0"/>
+          <a:chOff x="0" y="0"/>
+          <a:chExt cx="0" cy="0"/>
+        </a:xfrm>
       </p:grpSpPr>
       <p:sp>
         <p:nvSpPr>
           <p:cNvPr id="2" name="TextBox 1">
-            <a:extLst xmlns:a="http://schemas.openxmlformats.org/drawingml/2006/main">
+            <a:extLst>
               <a:ext uri="{FF2B5EF4-FFF2-40B4-BE49-F238E27FC236}">
                 <a16:creationId xmlns:a16="http://schemas.microsoft.com/office/drawing/2014/main" id="{07CE82E6-82C3-4B76-9491-08B8D1BD23FD}"/>
               </a:ext>
             </a:extLst>
           </p:cNvPr>
           <p:cNvSpPr>
-            <a:spLocks xmlns:a="http://schemas.openxmlformats.org/drawingml/2006/main" noGrp="1"/>
+            <a:spLocks noGrp="1"/>
           </p:cNvSpPr>
           <p:nvPr/>
         </p:nvSpPr>
         <p:spPr>
-          <a:xfrm xmlns:a="http://schemas.openxmlformats.org/drawingml/2006/main">
+          <a:xfrm>
             <a:off x="640080" y="457200"/>
             <a:ext cx="10881360" cy="1188720"/>
           </a:xfrm>
-          <a:prstGeom xmlns:a="http://schemas.openxmlformats.org/drawingml/2006/main" prst="rect">
+          <a:prstGeom prst="rect">
             <a:avLst/>
           </a:prstGeom>
-          <a:noFill xmlns:a="http://schemas.openxmlformats.org/drawingml/2006/main"/>
+          <a:noFill/>
         </p:spPr>
         <p:txBody>
-          <a:bodyPr xmlns:a="http://schemas.openxmlformats.org/drawingml/2006/main" wrap="square" lIns="0" tIns="0" rIns="0" bIns="0">
+          <a:bodyPr wrap="square" lIns="0" tIns="0" rIns="0" bIns="0">
             <a:spAutoFit/>
           </a:bodyPr>
-          <a:lstStyle xmlns:a="http://schemas.openxmlformats.org/drawingml/2006/main"/>
-          <a:p xmlns:a="http://schemas.openxmlformats.org/drawingml/2006/main">
+          <a:lstStyle/>
+          <a:p>
             <a:r>
               <a:rPr sz="3000" b="1" i="0">
                 <a:solidFill>
@@ -7046,7 +6623,7 @@
               <a:t>Do this at your desk today</a:t>
             </a:r>
           </a:p>
-          <a:p xmlns:a="http://schemas.openxmlformats.org/drawingml/2006/main">
+          <a:p>
             <a:pPr>
               <a:spcBef>
                 <a:spcPts val="400"/>
@@ -7070,33 +6647,33 @@
       <p:sp>
         <p:nvSpPr>
           <p:cNvPr id="3" name="TextBox 2">
-            <a:extLst xmlns:a="http://schemas.openxmlformats.org/drawingml/2006/main">
+            <a:extLst>
               <a:ext uri="{FF2B5EF4-FFF2-40B4-BE49-F238E27FC236}">
                 <a16:creationId xmlns:a16="http://schemas.microsoft.com/office/drawing/2014/main" id="{2317FF43-F7F2-4ECD-AAF7-A45012D2E2A5}"/>
               </a:ext>
             </a:extLst>
           </p:cNvPr>
           <p:cNvSpPr>
-            <a:spLocks xmlns:a="http://schemas.openxmlformats.org/drawingml/2006/main" noGrp="1"/>
+            <a:spLocks noGrp="1"/>
           </p:cNvSpPr>
           <p:nvPr/>
         </p:nvSpPr>
         <p:spPr>
-          <a:xfrm xmlns:a="http://schemas.openxmlformats.org/drawingml/2006/main">
+          <a:xfrm>
             <a:off x="640080" y="1783080"/>
             <a:ext cx="10881360" cy="2409825"/>
           </a:xfrm>
-          <a:prstGeom xmlns:a="http://schemas.openxmlformats.org/drawingml/2006/main" prst="rect">
+          <a:prstGeom prst="rect">
             <a:avLst/>
           </a:prstGeom>
-          <a:noFill xmlns:a="http://schemas.openxmlformats.org/drawingml/2006/main"/>
+          <a:noFill/>
         </p:spPr>
         <p:txBody>
-          <a:bodyPr xmlns:a="http://schemas.openxmlformats.org/drawingml/2006/main" wrap="square" lIns="0" tIns="0" rIns="0" bIns="0">
+          <a:bodyPr wrap="square" lIns="0" tIns="0" rIns="0" bIns="0">
             <a:spAutoFit/>
           </a:bodyPr>
-          <a:lstStyle xmlns:a="http://schemas.openxmlformats.org/drawingml/2006/main"/>
-          <a:p xmlns:a="http://schemas.openxmlformats.org/drawingml/2006/main">
+          <a:lstStyle/>
+          <a:p>
             <a:pPr>
               <a:spcAft>
                 <a:spcPts val="700"/>
@@ -7126,7 +6703,7 @@
               <a:t>Pick one recurring export and one cleanup step.</a:t>
             </a:r>
           </a:p>
-          <a:p xmlns:a="http://schemas.openxmlformats.org/drawingml/2006/main">
+          <a:p>
             <a:pPr>
               <a:spcAft>
                 <a:spcPts val="700"/>
@@ -7156,7 +6733,7 @@
               <a:t>Record that step in Power Query, then load the result.</a:t>
             </a:r>
           </a:p>
-          <a:p xmlns:a="http://schemas.openxmlformats.org/drawingml/2006/main">
+          <a:p>
             <a:pPr>
               <a:spcAft>
                 <a:spcPts val="700"/>
@@ -7184,218 +6761,6 @@
                 <a:cs typeface="Arial"/>
               </a:rPr>
               <a:t>Next time, refresh it and check that the new rows appear.</a:t>
-            </a:r>
-          </a:p>
-        </p:txBody>
-      </p:sp>
-      <p:sp>
-        <p:nvSpPr>
-          <p:cNvPr id="4" name="Chat prompt panel">
-            <a:extLst xmlns:a="http://schemas.openxmlformats.org/drawingml/2006/main">
-              <a:ext uri="{FF2B5EF4-FFF2-40B4-BE49-F238E27FC236}">
-                <a16:creationId xmlns:a16="http://schemas.microsoft.com/office/drawing/2014/main" id="{24BE6774-C3A2-4C9A-A15E-C3BBCAF5E6CF}"/>
-              </a:ext>
-            </a:extLst>
-          </p:cNvPr>
-          <p:cNvSpPr>
-            <a:spLocks xmlns:a="http://schemas.openxmlformats.org/drawingml/2006/main" noGrp="1"/>
-          </p:cNvSpPr>
-          <p:nvPr/>
-        </p:nvSpPr>
-        <p:spPr>
-          <a:xfrm xmlns:a="http://schemas.openxmlformats.org/drawingml/2006/main">
-            <a:off x="638175" y="4476750"/>
-            <a:ext cx="10896600" cy="1352550"/>
-          </a:xfrm>
-          <a:prstGeom xmlns:a="http://schemas.openxmlformats.org/drawingml/2006/main" prst="rect">
-            <a:avLst/>
-          </a:prstGeom>
-          <a:solidFill xmlns:a="http://schemas.openxmlformats.org/drawingml/2006/main">
-            <a:srgbClr val="1F2120"/>
-          </a:solidFill>
-          <a:ln xmlns:a="http://schemas.openxmlformats.org/drawingml/2006/main" w="0">
-            <a:noFill/>
-          </a:ln>
-        </p:spPr>
-        <p:txBody>
-          <a:bodyPr xmlns:a="http://schemas.openxmlformats.org/drawingml/2006/main" wrap="square" lIns="0" tIns="0" rIns="0" bIns="0">
-            <a:noAutofit/>
-          </a:bodyPr>
-          <a:lstStyle xmlns:a="http://schemas.openxmlformats.org/drawingml/2006/main"/>
-          <a:p xmlns:a="http://schemas.openxmlformats.org/drawingml/2006/main">
-            <a:r>
-              <a:t/>
-            </a:r>
-          </a:p>
-        </p:txBody>
-      </p:sp>
-      <p:sp>
-        <p:nvSpPr>
-          <p:cNvPr id="5" name="Chat question">
-            <a:extLst xmlns:a="http://schemas.openxmlformats.org/drawingml/2006/main">
-              <a:ext uri="{FF2B5EF4-FFF2-40B4-BE49-F238E27FC236}">
-                <a16:creationId xmlns:a16="http://schemas.microsoft.com/office/drawing/2014/main" id="{A2C9AAD7-6D1C-486B-9FDC-94AAB9CED44D}"/>
-              </a:ext>
-            </a:extLst>
-          </p:cNvPr>
-          <p:cNvSpPr>
-            <a:spLocks xmlns:a="http://schemas.openxmlformats.org/drawingml/2006/main" noGrp="1"/>
-          </p:cNvSpPr>
-          <p:nvPr/>
-        </p:nvSpPr>
-        <p:spPr>
-          <a:xfrm xmlns:a="http://schemas.openxmlformats.org/drawingml/2006/main">
-            <a:off x="857250" y="4619625"/>
-            <a:ext cx="10429875" cy="381000"/>
-          </a:xfrm>
-          <a:prstGeom xmlns:a="http://schemas.openxmlformats.org/drawingml/2006/main" prst="rect">
-            <a:avLst/>
-          </a:prstGeom>
-          <a:noFill xmlns:a="http://schemas.openxmlformats.org/drawingml/2006/main"/>
-          <a:ln xmlns:a="http://schemas.openxmlformats.org/drawingml/2006/main" w="0">
-            <a:noFill/>
-          </a:ln>
-        </p:spPr>
-        <p:txBody>
-          <a:bodyPr xmlns:a="http://schemas.openxmlformats.org/drawingml/2006/main" wrap="square" lIns="0" tIns="0" rIns="0" bIns="0">
-            <a:noAutofit/>
-          </a:bodyPr>
-          <a:lstStyle xmlns:a="http://schemas.openxmlformats.org/drawingml/2006/main"/>
-          <a:p xmlns:a="http://schemas.openxmlformats.org/drawingml/2006/main">
-            <a:pPr>
-              <a:defRPr sz="2100" b="1">
-                <a:solidFill>
-                  <a:srgbClr val="FFFFFF"/>
-                </a:solidFill>
-                <a:latin typeface="Arial"/>
-                <a:ea typeface="Arial"/>
-                <a:cs typeface="Arial"/>
-              </a:defRPr>
-            </a:pPr>
-            <a:r>
-              <a:rPr sz="2100" b="1">
-                <a:solidFill>
-                  <a:srgbClr val="FFFFFF"/>
-                </a:solidFill>
-                <a:latin typeface="Arial"/>
-                <a:ea typeface="Arial"/>
-                <a:cs typeface="Arial"/>
-              </a:rPr>
-              <a:t>Which cleanup would you save?</a:t>
-            </a:r>
-          </a:p>
-        </p:txBody>
-      </p:sp>
-      <p:sp>
-        <p:nvSpPr>
-          <p:cNvPr id="6" name="Chat choices">
-            <a:extLst xmlns:a="http://schemas.openxmlformats.org/drawingml/2006/main">
-              <a:ext uri="{FF2B5EF4-FFF2-40B4-BE49-F238E27FC236}">
-                <a16:creationId xmlns:a16="http://schemas.microsoft.com/office/drawing/2014/main" id="{80AE7265-88AC-458D-A16C-02C90160E53F}"/>
-              </a:ext>
-            </a:extLst>
-          </p:cNvPr>
-          <p:cNvSpPr>
-            <a:spLocks xmlns:a="http://schemas.openxmlformats.org/drawingml/2006/main" noGrp="1"/>
-          </p:cNvSpPr>
-          <p:nvPr/>
-        </p:nvSpPr>
-        <p:spPr>
-          <a:xfrm xmlns:a="http://schemas.openxmlformats.org/drawingml/2006/main">
-            <a:off x="857250" y="5086350"/>
-            <a:ext cx="6858000" cy="419100"/>
-          </a:xfrm>
-          <a:prstGeom xmlns:a="http://schemas.openxmlformats.org/drawingml/2006/main" prst="rect">
-            <a:avLst/>
-          </a:prstGeom>
-          <a:noFill xmlns:a="http://schemas.openxmlformats.org/drawingml/2006/main"/>
-          <a:ln xmlns:a="http://schemas.openxmlformats.org/drawingml/2006/main" w="0">
-            <a:noFill/>
-          </a:ln>
-        </p:spPr>
-        <p:txBody>
-          <a:bodyPr xmlns:a="http://schemas.openxmlformats.org/drawingml/2006/main" wrap="square" lIns="0" tIns="0" rIns="0" bIns="0">
-            <a:noAutofit/>
-          </a:bodyPr>
-          <a:lstStyle xmlns:a="http://schemas.openxmlformats.org/drawingml/2006/main"/>
-          <a:p xmlns:a="http://schemas.openxmlformats.org/drawingml/2006/main">
-            <a:pPr>
-              <a:defRPr sz="2400" b="1">
-                <a:solidFill>
-                  <a:srgbClr val="FFFFFF"/>
-                </a:solidFill>
-                <a:latin typeface="Arial"/>
-                <a:ea typeface="Arial"/>
-                <a:cs typeface="Arial"/>
-              </a:defRPr>
-            </a:pPr>
-            <a:r>
-              <a:rPr sz="2400" b="1">
-                <a:solidFill>
-                  <a:srgbClr val="FFFFFF"/>
-                </a:solidFill>
-                <a:latin typeface="Arial"/>
-                <a:ea typeface="Arial"/>
-                <a:cs typeface="Arial"/>
-              </a:rPr>
-              <a:t>SPACES / SPLIT / TYPES</a:t>
-            </a:r>
-          </a:p>
-        </p:txBody>
-      </p:sp>
-      <p:sp>
-        <p:nvSpPr>
-          <p:cNvPr id="7" name="Chat instruction">
-            <a:extLst xmlns:a="http://schemas.openxmlformats.org/drawingml/2006/main">
-              <a:ext uri="{FF2B5EF4-FFF2-40B4-BE49-F238E27FC236}">
-                <a16:creationId xmlns:a16="http://schemas.microsoft.com/office/drawing/2014/main" id="{5C957893-6DD6-4DB8-8A81-BF9B3F58EE19}"/>
-              </a:ext>
-            </a:extLst>
-          </p:cNvPr>
-          <p:cNvSpPr>
-            <a:spLocks xmlns:a="http://schemas.openxmlformats.org/drawingml/2006/main" noGrp="1"/>
-          </p:cNvSpPr>
-          <p:nvPr/>
-        </p:nvSpPr>
-        <p:spPr>
-          <a:xfrm xmlns:a="http://schemas.openxmlformats.org/drawingml/2006/main">
-            <a:off x="8143875" y="5219700"/>
-            <a:ext cx="3048000" cy="400050"/>
-          </a:xfrm>
-          <a:prstGeom xmlns:a="http://schemas.openxmlformats.org/drawingml/2006/main" prst="rect">
-            <a:avLst/>
-          </a:prstGeom>
-          <a:noFill xmlns:a="http://schemas.openxmlformats.org/drawingml/2006/main"/>
-          <a:ln xmlns:a="http://schemas.openxmlformats.org/drawingml/2006/main" w="0">
-            <a:noFill/>
-          </a:ln>
-        </p:spPr>
-        <p:txBody>
-          <a:bodyPr xmlns:a="http://schemas.openxmlformats.org/drawingml/2006/main" wrap="square" lIns="0" tIns="0" rIns="0" bIns="0">
-            <a:noAutofit/>
-          </a:bodyPr>
-          <a:lstStyle xmlns:a="http://schemas.openxmlformats.org/drawingml/2006/main"/>
-          <a:p xmlns:a="http://schemas.openxmlformats.org/drawingml/2006/main">
-            <a:pPr>
-              <a:defRPr sz="1425" b="0">
-                <a:solidFill>
-                  <a:srgbClr val="FFFFFF"/>
-                </a:solidFill>
-                <a:latin typeface="Arial"/>
-                <a:ea typeface="Arial"/>
-                <a:cs typeface="Arial"/>
-              </a:defRPr>
-            </a:pPr>
-            <a:r>
-              <a:rPr sz="1425" b="0">
-                <a:solidFill>
-                  <a:srgbClr val="FFFFFF"/>
-                </a:solidFill>
-                <a:latin typeface="Arial"/>
-                <a:ea typeface="Arial"/>
-                <a:cs typeface="Arial"/>
-              </a:rPr>
-              <a:t>Type one word in chat.</a:t>
             </a:r>
           </a:p>
         </p:txBody>
@@ -7407,17 +6772,21 @@
       </p:ext>
     </p:extLst>
   </p:cSld>
+  <p:clrMapOvr>
+    <a:masterClrMapping/>
+  </p:clrMapOvr>
 </p:sld>
 </file>
 
 <file path=ppt/slides/slide7.xml><?xml version="1.0" encoding="utf-8"?>
-<p:sld xmlns:p="http://schemas.openxmlformats.org/presentationml/2006/main">
+<p:sld xmlns:a="http://schemas.openxmlformats.org/drawingml/2006/main" xmlns:r="http://schemas.openxmlformats.org/officeDocument/2006/relationships" xmlns:p="http://schemas.openxmlformats.org/presentationml/2006/main">
   <p:cSld>
     <p:bg>
       <p:bgPr>
-        <a:solidFill xmlns:a="http://schemas.openxmlformats.org/drawingml/2006/main">
+        <a:solidFill>
           <a:srgbClr val="C00000"/>
         </a:solidFill>
+        <a:effectLst/>
       </p:bgPr>
     </p:bg>
     <p:spTree>
@@ -7427,38 +6796,43 @@
         <p:nvPr/>
       </p:nvGrpSpPr>
       <p:grpSpPr>
-        <a:xfrm xmlns:a="http://schemas.openxmlformats.org/drawingml/2006/main"/>
+        <a:xfrm>
+          <a:off x="0" y="0"/>
+          <a:ext cx="0" cy="0"/>
+          <a:chOff x="0" y="0"/>
+          <a:chExt cx="0" cy="0"/>
+        </a:xfrm>
       </p:grpSpPr>
       <p:sp>
         <p:nvSpPr>
           <p:cNvPr id="2" name="TextBox 1">
-            <a:extLst xmlns:a="http://schemas.openxmlformats.org/drawingml/2006/main">
+            <a:extLst>
               <a:ext uri="{FF2B5EF4-FFF2-40B4-BE49-F238E27FC236}">
                 <a16:creationId xmlns:a16="http://schemas.microsoft.com/office/drawing/2014/main" id="{77EBEC6B-2E00-4D59-BCFE-14CAFEF4885B}"/>
               </a:ext>
             </a:extLst>
           </p:cNvPr>
           <p:cNvSpPr>
-            <a:spLocks xmlns:a="http://schemas.openxmlformats.org/drawingml/2006/main" noGrp="1"/>
+            <a:spLocks noGrp="1"/>
           </p:cNvSpPr>
           <p:nvPr/>
         </p:nvSpPr>
         <p:spPr>
-          <a:xfrm xmlns:a="http://schemas.openxmlformats.org/drawingml/2006/main">
+          <a:xfrm>
             <a:off x="822960" y="2286000"/>
             <a:ext cx="10332720" cy="2743200"/>
           </a:xfrm>
-          <a:prstGeom xmlns:a="http://schemas.openxmlformats.org/drawingml/2006/main" prst="rect">
+          <a:prstGeom prst="rect">
             <a:avLst/>
           </a:prstGeom>
-          <a:noFill xmlns:a="http://schemas.openxmlformats.org/drawingml/2006/main"/>
+          <a:noFill/>
         </p:spPr>
         <p:txBody>
-          <a:bodyPr xmlns:a="http://schemas.openxmlformats.org/drawingml/2006/main" wrap="square" lIns="0" tIns="0" rIns="0" bIns="0">
+          <a:bodyPr wrap="square" lIns="0" tIns="0" rIns="0" bIns="0">
             <a:spAutoFit/>
           </a:bodyPr>
-          <a:lstStyle xmlns:a="http://schemas.openxmlformats.org/drawingml/2006/main"/>
-          <a:p xmlns:a="http://schemas.openxmlformats.org/drawingml/2006/main">
+          <a:lstStyle/>
+          <a:p>
             <a:r>
               <a:rPr sz="1600" b="1" i="0">
                 <a:solidFill>
@@ -7471,7 +6845,7 @@
               <a:t>TOMORROW</a:t>
             </a:r>
           </a:p>
-          <a:p xmlns:a="http://schemas.openxmlformats.org/drawingml/2006/main">
+          <a:p>
             <a:pPr>
               <a:spcBef>
                 <a:spcPts val="800"/>
@@ -7490,7 +6864,7 @@
               <a:t>A data science lab behind =PY()</a:t>
             </a:r>
           </a:p>
-          <a:p xmlns:a="http://schemas.openxmlformats.org/drawingml/2006/main">
+          <a:p>
             <a:pPr>
               <a:spcBef>
                 <a:spcPts val="1400"/>
@@ -7518,17 +6892,21 @@
       </p:ext>
     </p:extLst>
   </p:cSld>
+  <p:clrMapOvr>
+    <a:masterClrMapping/>
+  </p:clrMapOvr>
 </p:sld>
 </file>
 
 <file path=ppt/slides/slide8.xml><?xml version="1.0" encoding="utf-8"?>
-<p:sld xmlns:p="http://schemas.openxmlformats.org/presentationml/2006/main">
+<p:sld xmlns:a="http://schemas.openxmlformats.org/drawingml/2006/main" xmlns:r="http://schemas.openxmlformats.org/officeDocument/2006/relationships" xmlns:p="http://schemas.openxmlformats.org/presentationml/2006/main">
   <p:cSld>
     <p:bg>
       <p:bgPr>
-        <a:solidFill xmlns:a="http://schemas.openxmlformats.org/drawingml/2006/main">
+        <a:solidFill>
           <a:srgbClr val="C00000"/>
         </a:solidFill>
+        <a:effectLst/>
       </p:bgPr>
     </p:bg>
     <p:spTree>
@@ -7538,38 +6916,43 @@
         <p:nvPr/>
       </p:nvGrpSpPr>
       <p:grpSpPr>
-        <a:xfrm xmlns:a="http://schemas.openxmlformats.org/drawingml/2006/main"/>
+        <a:xfrm>
+          <a:off x="0" y="0"/>
+          <a:ext cx="0" cy="0"/>
+          <a:chOff x="0" y="0"/>
+          <a:chExt cx="0" cy="0"/>
+        </a:xfrm>
       </p:grpSpPr>
       <p:sp>
         <p:nvSpPr>
           <p:cNvPr id="2" name="TextBox 1">
-            <a:extLst xmlns:a="http://schemas.openxmlformats.org/drawingml/2006/main">
+            <a:extLst>
               <a:ext uri="{FF2B5EF4-FFF2-40B4-BE49-F238E27FC236}">
                 <a16:creationId xmlns:a16="http://schemas.microsoft.com/office/drawing/2014/main" id="{440FF6DB-B73D-47E8-AC48-FB1DC2608779}"/>
               </a:ext>
             </a:extLst>
           </p:cNvPr>
           <p:cNvSpPr>
-            <a:spLocks xmlns:a="http://schemas.openxmlformats.org/drawingml/2006/main" noGrp="1"/>
+            <a:spLocks noGrp="1"/>
           </p:cNvSpPr>
           <p:nvPr/>
         </p:nvSpPr>
         <p:spPr>
-          <a:xfrm xmlns:a="http://schemas.openxmlformats.org/drawingml/2006/main">
+          <a:xfrm>
             <a:off x="822960" y="2103120"/>
             <a:ext cx="10515600" cy="2114550"/>
           </a:xfrm>
-          <a:prstGeom xmlns:a="http://schemas.openxmlformats.org/drawingml/2006/main" prst="rect">
+          <a:prstGeom prst="rect">
             <a:avLst/>
           </a:prstGeom>
-          <a:noFill xmlns:a="http://schemas.openxmlformats.org/drawingml/2006/main"/>
+          <a:noFill/>
         </p:spPr>
         <p:txBody>
-          <a:bodyPr xmlns:a="http://schemas.openxmlformats.org/drawingml/2006/main" wrap="square" lIns="0" tIns="0" rIns="0" bIns="0">
+          <a:bodyPr wrap="square" lIns="0" tIns="0" rIns="0" bIns="0">
             <a:spAutoFit/>
           </a:bodyPr>
-          <a:lstStyle xmlns:a="http://schemas.openxmlformats.org/drawingml/2006/main"/>
-          <a:p xmlns:a="http://schemas.openxmlformats.org/drawingml/2006/main">
+          <a:lstStyle/>
+          <a:p>
             <a:r>
               <a:rPr sz="1600" b="1" i="0">
                 <a:solidFill>
@@ -7582,7 +6965,7 @@
               <a:t>THANK YOU</a:t>
             </a:r>
           </a:p>
-          <a:p xmlns:a="http://schemas.openxmlformats.org/drawingml/2006/main">
+          <a:p>
             <a:pPr>
               <a:spcBef>
                 <a:spcPts val="800"/>
@@ -7601,7 +6984,7 @@
               <a:t>See you tomorrow at noon Eastern</a:t>
             </a:r>
           </a:p>
-          <a:p xmlns:a="http://schemas.openxmlformats.org/drawingml/2006/main">
+          <a:p>
             <a:pPr>
               <a:spcBef>
                 <a:spcPts val="1400"/>
@@ -7618,218 +7001,6 @@
                 <a:cs typeface="Arial"/>
               </a:rPr>
               <a:t>Replays live in the Stringfest membership vault.</a:t>
-            </a:r>
-          </a:p>
-        </p:txBody>
-      </p:sp>
-      <p:sp>
-        <p:nvSpPr>
-          <p:cNvPr id="3" name="Chat prompt panel">
-            <a:extLst xmlns:a="http://schemas.openxmlformats.org/drawingml/2006/main">
-              <a:ext uri="{FF2B5EF4-FFF2-40B4-BE49-F238E27FC236}">
-                <a16:creationId xmlns:a16="http://schemas.microsoft.com/office/drawing/2014/main" id="{1DEBA0B8-2DA8-408A-92B7-3AC3829FF732}"/>
-              </a:ext>
-            </a:extLst>
-          </p:cNvPr>
-          <p:cNvSpPr>
-            <a:spLocks xmlns:a="http://schemas.openxmlformats.org/drawingml/2006/main" noGrp="1"/>
-          </p:cNvSpPr>
-          <p:nvPr/>
-        </p:nvSpPr>
-        <p:spPr>
-          <a:xfrm xmlns:a="http://schemas.openxmlformats.org/drawingml/2006/main">
-            <a:off x="638175" y="4476750"/>
-            <a:ext cx="10896600" cy="1352550"/>
-          </a:xfrm>
-          <a:prstGeom xmlns:a="http://schemas.openxmlformats.org/drawingml/2006/main" prst="rect">
-            <a:avLst/>
-          </a:prstGeom>
-          <a:solidFill xmlns:a="http://schemas.openxmlformats.org/drawingml/2006/main">
-            <a:srgbClr val="1F2120"/>
-          </a:solidFill>
-          <a:ln xmlns:a="http://schemas.openxmlformats.org/drawingml/2006/main" w="0">
-            <a:noFill/>
-          </a:ln>
-        </p:spPr>
-        <p:txBody>
-          <a:bodyPr xmlns:a="http://schemas.openxmlformats.org/drawingml/2006/main" wrap="square" lIns="0" tIns="0" rIns="0" bIns="0">
-            <a:noAutofit/>
-          </a:bodyPr>
-          <a:lstStyle xmlns:a="http://schemas.openxmlformats.org/drawingml/2006/main"/>
-          <a:p xmlns:a="http://schemas.openxmlformats.org/drawingml/2006/main">
-            <a:r>
-              <a:t/>
-            </a:r>
-          </a:p>
-        </p:txBody>
-      </p:sp>
-      <p:sp>
-        <p:nvSpPr>
-          <p:cNvPr id="4" name="Chat question">
-            <a:extLst xmlns:a="http://schemas.openxmlformats.org/drawingml/2006/main">
-              <a:ext uri="{FF2B5EF4-FFF2-40B4-BE49-F238E27FC236}">
-                <a16:creationId xmlns:a16="http://schemas.microsoft.com/office/drawing/2014/main" id="{F7A51FFE-1AC0-421C-8700-3D18518088C7}"/>
-              </a:ext>
-            </a:extLst>
-          </p:cNvPr>
-          <p:cNvSpPr>
-            <a:spLocks xmlns:a="http://schemas.openxmlformats.org/drawingml/2006/main" noGrp="1"/>
-          </p:cNvSpPr>
-          <p:nvPr/>
-        </p:nvSpPr>
-        <p:spPr>
-          <a:xfrm xmlns:a="http://schemas.openxmlformats.org/drawingml/2006/main">
-            <a:off x="857250" y="4619625"/>
-            <a:ext cx="10429875" cy="381000"/>
-          </a:xfrm>
-          <a:prstGeom xmlns:a="http://schemas.openxmlformats.org/drawingml/2006/main" prst="rect">
-            <a:avLst/>
-          </a:prstGeom>
-          <a:noFill xmlns:a="http://schemas.openxmlformats.org/drawingml/2006/main"/>
-          <a:ln xmlns:a="http://schemas.openxmlformats.org/drawingml/2006/main" w="0">
-            <a:noFill/>
-          </a:ln>
-        </p:spPr>
-        <p:txBody>
-          <a:bodyPr xmlns:a="http://schemas.openxmlformats.org/drawingml/2006/main" wrap="square" lIns="0" tIns="0" rIns="0" bIns="0">
-            <a:noAutofit/>
-          </a:bodyPr>
-          <a:lstStyle xmlns:a="http://schemas.openxmlformats.org/drawingml/2006/main"/>
-          <a:p xmlns:a="http://schemas.openxmlformats.org/drawingml/2006/main">
-            <a:pPr>
-              <a:defRPr sz="2100" b="1">
-                <a:solidFill>
-                  <a:srgbClr val="FFFFFF"/>
-                </a:solidFill>
-                <a:latin typeface="Arial"/>
-                <a:ea typeface="Arial"/>
-                <a:cs typeface="Arial"/>
-              </a:defRPr>
-            </a:pPr>
-            <a:r>
-              <a:rPr sz="2100" b="1">
-                <a:solidFill>
-                  <a:srgbClr val="FFFFFF"/>
-                </a:solidFill>
-                <a:latin typeface="Arial"/>
-                <a:ea typeface="Arial"/>
-                <a:cs typeface="Arial"/>
-              </a:rPr>
-              <a:t>Which part should I revisit?</a:t>
-            </a:r>
-          </a:p>
-        </p:txBody>
-      </p:sp>
-      <p:sp>
-        <p:nvSpPr>
-          <p:cNvPr id="5" name="Chat choices">
-            <a:extLst xmlns:a="http://schemas.openxmlformats.org/drawingml/2006/main">
-              <a:ext uri="{FF2B5EF4-FFF2-40B4-BE49-F238E27FC236}">
-                <a16:creationId xmlns:a16="http://schemas.microsoft.com/office/drawing/2014/main" id="{1C33934E-E1BD-4E0A-B208-09E4050EF3C4}"/>
-              </a:ext>
-            </a:extLst>
-          </p:cNvPr>
-          <p:cNvSpPr>
-            <a:spLocks xmlns:a="http://schemas.openxmlformats.org/drawingml/2006/main" noGrp="1"/>
-          </p:cNvSpPr>
-          <p:nvPr/>
-        </p:nvSpPr>
-        <p:spPr>
-          <a:xfrm xmlns:a="http://schemas.openxmlformats.org/drawingml/2006/main">
-            <a:off x="857250" y="5086350"/>
-            <a:ext cx="6858000" cy="419100"/>
-          </a:xfrm>
-          <a:prstGeom xmlns:a="http://schemas.openxmlformats.org/drawingml/2006/main" prst="rect">
-            <a:avLst/>
-          </a:prstGeom>
-          <a:noFill xmlns:a="http://schemas.openxmlformats.org/drawingml/2006/main"/>
-          <a:ln xmlns:a="http://schemas.openxmlformats.org/drawingml/2006/main" w="0">
-            <a:noFill/>
-          </a:ln>
-        </p:spPr>
-        <p:txBody>
-          <a:bodyPr xmlns:a="http://schemas.openxmlformats.org/drawingml/2006/main" wrap="square" lIns="0" tIns="0" rIns="0" bIns="0">
-            <a:noAutofit/>
-          </a:bodyPr>
-          <a:lstStyle xmlns:a="http://schemas.openxmlformats.org/drawingml/2006/main"/>
-          <a:p xmlns:a="http://schemas.openxmlformats.org/drawingml/2006/main">
-            <a:pPr>
-              <a:defRPr sz="2400" b="1">
-                <a:solidFill>
-                  <a:srgbClr val="FFFFFF"/>
-                </a:solidFill>
-                <a:latin typeface="Arial"/>
-                <a:ea typeface="Arial"/>
-                <a:cs typeface="Arial"/>
-              </a:defRPr>
-            </a:pPr>
-            <a:r>
-              <a:rPr sz="2400" b="1">
-                <a:solidFill>
-                  <a:srgbClr val="FFFFFF"/>
-                </a:solidFill>
-                <a:latin typeface="Arial"/>
-                <a:ea typeface="Arial"/>
-                <a:cs typeface="Arial"/>
-              </a:rPr>
-              <a:t>FILTER / SPLIT / REFRESH</a:t>
-            </a:r>
-          </a:p>
-        </p:txBody>
-      </p:sp>
-      <p:sp>
-        <p:nvSpPr>
-          <p:cNvPr id="6" name="Chat instruction">
-            <a:extLst xmlns:a="http://schemas.openxmlformats.org/drawingml/2006/main">
-              <a:ext uri="{FF2B5EF4-FFF2-40B4-BE49-F238E27FC236}">
-                <a16:creationId xmlns:a16="http://schemas.microsoft.com/office/drawing/2014/main" id="{AEF55D81-BB4B-49FE-8505-83DC04762532}"/>
-              </a:ext>
-            </a:extLst>
-          </p:cNvPr>
-          <p:cNvSpPr>
-            <a:spLocks xmlns:a="http://schemas.openxmlformats.org/drawingml/2006/main" noGrp="1"/>
-          </p:cNvSpPr>
-          <p:nvPr/>
-        </p:nvSpPr>
-        <p:spPr>
-          <a:xfrm xmlns:a="http://schemas.openxmlformats.org/drawingml/2006/main">
-            <a:off x="8143875" y="5219700"/>
-            <a:ext cx="3048000" cy="400050"/>
-          </a:xfrm>
-          <a:prstGeom xmlns:a="http://schemas.openxmlformats.org/drawingml/2006/main" prst="rect">
-            <a:avLst/>
-          </a:prstGeom>
-          <a:noFill xmlns:a="http://schemas.openxmlformats.org/drawingml/2006/main"/>
-          <a:ln xmlns:a="http://schemas.openxmlformats.org/drawingml/2006/main" w="0">
-            <a:noFill/>
-          </a:ln>
-        </p:spPr>
-        <p:txBody>
-          <a:bodyPr xmlns:a="http://schemas.openxmlformats.org/drawingml/2006/main" wrap="square" lIns="0" tIns="0" rIns="0" bIns="0">
-            <a:noAutofit/>
-          </a:bodyPr>
-          <a:lstStyle xmlns:a="http://schemas.openxmlformats.org/drawingml/2006/main"/>
-          <a:p xmlns:a="http://schemas.openxmlformats.org/drawingml/2006/main">
-            <a:pPr>
-              <a:defRPr sz="1425" b="0">
-                <a:solidFill>
-                  <a:srgbClr val="FFFFFF"/>
-                </a:solidFill>
-                <a:latin typeface="Arial"/>
-                <a:ea typeface="Arial"/>
-                <a:cs typeface="Arial"/>
-              </a:defRPr>
-            </a:pPr>
-            <a:r>
-              <a:rPr sz="1425" b="0">
-                <a:solidFill>
-                  <a:srgbClr val="FFFFFF"/>
-                </a:solidFill>
-                <a:latin typeface="Arial"/>
-                <a:ea typeface="Arial"/>
-                <a:cs typeface="Arial"/>
-              </a:rPr>
-              <a:t>A full question is welcome too.</a:t>
             </a:r>
           </a:p>
         </p:txBody>
@@ -7841,6 +7012,9 @@
       </p:ext>
     </p:extLst>
   </p:cSld>
+  <p:clrMapOvr>
+    <a:masterClrMapping/>
+  </p:clrMapOvr>
 </p:sld>
 </file>
 
@@ -8109,5 +7283,277 @@
       </a:bgFillStyleLst>
     </a:fmtScheme>
   </a:themeElements>
+  <a:objectDefaults/>
+  <a:extraClrSchemeLst/>
+</a:theme>
+</file>
+
+<file path=ppt/theme/theme2.xml><?xml version="1.0" encoding="utf-8"?>
+<a:theme xmlns:a="http://schemas.openxmlformats.org/drawingml/2006/main" name="Office Theme">
+  <a:themeElements>
+    <a:clrScheme name="Office">
+      <a:dk1>
+        <a:sysClr val="windowText" lastClr="000000"/>
+      </a:dk1>
+      <a:lt1>
+        <a:sysClr val="window" lastClr="FFFFFF"/>
+      </a:lt1>
+      <a:dk2>
+        <a:srgbClr val="1F497D"/>
+      </a:dk2>
+      <a:lt2>
+        <a:srgbClr val="EEECE1"/>
+      </a:lt2>
+      <a:accent1>
+        <a:srgbClr val="4F81BD"/>
+      </a:accent1>
+      <a:accent2>
+        <a:srgbClr val="C0504D"/>
+      </a:accent2>
+      <a:accent3>
+        <a:srgbClr val="9BBB59"/>
+      </a:accent3>
+      <a:accent4>
+        <a:srgbClr val="8064A2"/>
+      </a:accent4>
+      <a:accent5>
+        <a:srgbClr val="4BACC6"/>
+      </a:accent5>
+      <a:accent6>
+        <a:srgbClr val="F79646"/>
+      </a:accent6>
+      <a:hlink>
+        <a:srgbClr val="0000FF"/>
+      </a:hlink>
+      <a:folHlink>
+        <a:srgbClr val="800080"/>
+      </a:folHlink>
+    </a:clrScheme>
+    <a:fontScheme name="Office">
+      <a:majorFont>
+        <a:latin typeface="Calibri"/>
+        <a:ea typeface=""/>
+        <a:cs typeface=""/>
+        <a:font script="Jpan" typeface="ＭＳ Ｐゴシック"/>
+        <a:font script="Hang" typeface="맑은 고딕"/>
+        <a:font script="Hans" typeface="宋体"/>
+        <a:font script="Hant" typeface="新細明體"/>
+        <a:font script="Arab" typeface="Times New Roman"/>
+        <a:font script="Hebr" typeface="Times New Roman"/>
+        <a:font script="Thai" typeface="Angsana New"/>
+        <a:font script="Ethi" typeface="Nyala"/>
+        <a:font script="Beng" typeface="Vrinda"/>
+        <a:font script="Gujr" typeface="Shruti"/>
+        <a:font script="Khmr" typeface="MoolBoran"/>
+        <a:font script="Knda" typeface="Tunga"/>
+        <a:font script="Guru" typeface="Raavi"/>
+        <a:font script="Cans" typeface="Euphemia"/>
+        <a:font script="Cher" typeface="Plantagenet Cherokee"/>
+        <a:font script="Yiii" typeface="Microsoft Yi Baiti"/>
+        <a:font script="Tibt" typeface="Microsoft Himalaya"/>
+        <a:font script="Thaa" typeface="MV Boli"/>
+        <a:font script="Deva" typeface="Mangal"/>
+        <a:font script="Telu" typeface="Gautami"/>
+        <a:font script="Taml" typeface="Latha"/>
+        <a:font script="Syrc" typeface="Estrangelo Edessa"/>
+        <a:font script="Orya" typeface="Kalinga"/>
+        <a:font script="Mlym" typeface="Kartika"/>
+        <a:font script="Laoo" typeface="DokChampa"/>
+        <a:font script="Sinh" typeface="Iskoola Pota"/>
+        <a:font script="Mong" typeface="Mongolian Baiti"/>
+        <a:font script="Viet" typeface="Times New Roman"/>
+        <a:font script="Uigh" typeface="Microsoft Uighur"/>
+        <a:font script="Geor" typeface="Sylfaen"/>
+      </a:majorFont>
+      <a:minorFont>
+        <a:latin typeface="Calibri"/>
+        <a:ea typeface=""/>
+        <a:cs typeface=""/>
+        <a:font script="Jpan" typeface="ＭＳ Ｐゴシック"/>
+        <a:font script="Hang" typeface="맑은 고딕"/>
+        <a:font script="Hans" typeface="宋体"/>
+        <a:font script="Hant" typeface="新細明體"/>
+        <a:font script="Arab" typeface="Arial"/>
+        <a:font script="Hebr" typeface="Arial"/>
+        <a:font script="Thai" typeface="Cordia New"/>
+        <a:font script="Ethi" typeface="Nyala"/>
+        <a:font script="Beng" typeface="Vrinda"/>
+        <a:font script="Gujr" typeface="Shruti"/>
+        <a:font script="Khmr" typeface="DaunPenh"/>
+        <a:font script="Knda" typeface="Tunga"/>
+        <a:font script="Guru" typeface="Raavi"/>
+        <a:font script="Cans" typeface="Euphemia"/>
+        <a:font script="Cher" typeface="Plantagenet Cherokee"/>
+        <a:font script="Yiii" typeface="Microsoft Yi Baiti"/>
+        <a:font script="Tibt" typeface="Microsoft Himalaya"/>
+        <a:font script="Thaa" typeface="MV Boli"/>
+        <a:font script="Deva" typeface="Mangal"/>
+        <a:font script="Telu" typeface="Gautami"/>
+        <a:font script="Taml" typeface="Latha"/>
+        <a:font script="Syrc" typeface="Estrangelo Edessa"/>
+        <a:font script="Orya" typeface="Kalinga"/>
+        <a:font script="Mlym" typeface="Kartika"/>
+        <a:font script="Laoo" typeface="DokChampa"/>
+        <a:font script="Sinh" typeface="Iskoola Pota"/>
+        <a:font script="Mong" typeface="Mongolian Baiti"/>
+        <a:font script="Viet" typeface="Arial"/>
+        <a:font script="Uigh" typeface="Microsoft Uighur"/>
+        <a:font script="Geor" typeface="Sylfaen"/>
+      </a:minorFont>
+    </a:fontScheme>
+    <a:fmtScheme name="Office">
+      <a:fillStyleLst>
+        <a:solidFill>
+          <a:schemeClr val="phClr"/>
+        </a:solidFill>
+        <a:gradFill rotWithShape="1">
+          <a:gsLst>
+            <a:gs pos="0">
+              <a:schemeClr val="phClr">
+                <a:tint val="50000"/>
+                <a:satMod val="300000"/>
+              </a:schemeClr>
+            </a:gs>
+            <a:gs pos="35000">
+              <a:schemeClr val="phClr">
+                <a:tint val="37000"/>
+                <a:satMod val="300000"/>
+              </a:schemeClr>
+            </a:gs>
+            <a:gs pos="100000">
+              <a:schemeClr val="phClr">
+                <a:tint val="15000"/>
+                <a:satMod val="350000"/>
+              </a:schemeClr>
+            </a:gs>
+          </a:gsLst>
+          <a:lin ang="16200000" scaled="1"/>
+        </a:gradFill>
+        <a:gradFill rotWithShape="1">
+          <a:gsLst>
+            <a:gs pos="0">
+              <a:schemeClr val="phClr">
+                <a:tint val="100000"/>
+                <a:shade val="100000"/>
+                <a:satMod val="130000"/>
+              </a:schemeClr>
+            </a:gs>
+            <a:gs pos="100000">
+              <a:schemeClr val="phClr">
+                <a:tint val="50000"/>
+                <a:shade val="100000"/>
+                <a:satMod val="350000"/>
+              </a:schemeClr>
+            </a:gs>
+          </a:gsLst>
+          <a:lin ang="16200000" scaled="0"/>
+        </a:gradFill>
+      </a:fillStyleLst>
+      <a:lnStyleLst>
+        <a:ln w="9525">
+          <a:solidFill>
+            <a:schemeClr val="phClr">
+              <a:shade val="95000"/>
+              <a:satMod val="105000"/>
+            </a:schemeClr>
+          </a:solidFill>
+          <a:prstDash val="solid"/>
+        </a:ln>
+        <a:ln w="25400">
+          <a:solidFill>
+            <a:schemeClr val="phClr"/>
+          </a:solidFill>
+          <a:prstDash val="solid"/>
+        </a:ln>
+        <a:ln w="38100">
+          <a:solidFill>
+            <a:schemeClr val="phClr"/>
+          </a:solidFill>
+          <a:prstDash val="solid"/>
+        </a:ln>
+      </a:lnStyleLst>
+      <a:effectStyleLst>
+        <a:effectStyle>
+          <a:effectLst>
+            <a:outerShdw blurRad="40000" dist="20000" dir="5400000" rotWithShape="0">
+              <a:srgbClr val="000000">
+                <a:alpha val="38000"/>
+              </a:srgbClr>
+            </a:outerShdw>
+          </a:effectLst>
+        </a:effectStyle>
+        <a:effectStyle>
+          <a:effectLst>
+            <a:outerShdw blurRad="40000" dist="23000" dir="5400000" rotWithShape="0">
+              <a:srgbClr val="000000">
+                <a:alpha val="35000"/>
+              </a:srgbClr>
+            </a:outerShdw>
+          </a:effectLst>
+        </a:effectStyle>
+        <a:effectStyle>
+          <a:effectLst>
+            <a:outerShdw blurRad="40000" dist="23000" dir="5400000" rotWithShape="0">
+              <a:srgbClr val="000000">
+                <a:alpha val="35000"/>
+              </a:srgbClr>
+            </a:outerShdw>
+          </a:effectLst>
+        </a:effectStyle>
+      </a:effectStyleLst>
+      <a:bgFillStyleLst>
+        <a:solidFill>
+          <a:schemeClr val="phClr"/>
+        </a:solidFill>
+        <a:gradFill rotWithShape="1">
+          <a:gsLst>
+            <a:gs pos="0">
+              <a:schemeClr val="phClr">
+                <a:tint val="40000"/>
+                <a:satMod val="350000"/>
+              </a:schemeClr>
+            </a:gs>
+            <a:gs pos="40000">
+              <a:schemeClr val="phClr">
+                <a:tint val="45000"/>
+                <a:shade val="99000"/>
+                <a:satMod val="350000"/>
+              </a:schemeClr>
+            </a:gs>
+            <a:gs pos="100000">
+              <a:schemeClr val="phClr">
+                <a:shade val="20000"/>
+                <a:satMod val="255000"/>
+              </a:schemeClr>
+            </a:gs>
+          </a:gsLst>
+          <a:path path="circle">
+            <a:fillToRect l="50000" t="-80000" r="50000" b="180000"/>
+          </a:path>
+        </a:gradFill>
+        <a:gradFill rotWithShape="1">
+          <a:gsLst>
+            <a:gs pos="0">
+              <a:schemeClr val="phClr">
+                <a:tint val="80000"/>
+                <a:satMod val="300000"/>
+              </a:schemeClr>
+            </a:gs>
+            <a:gs pos="100000">
+              <a:schemeClr val="phClr">
+                <a:shade val="30000"/>
+                <a:satMod val="200000"/>
+              </a:schemeClr>
+            </a:gs>
+          </a:gsLst>
+          <a:path path="circle">
+            <a:fillToRect l="50000" t="50000" r="50000" b="50000"/>
+          </a:path>
+        </a:gradFill>
+      </a:bgFillStyleLst>
+    </a:fmtScheme>
+  </a:themeElements>
+  <a:objectDefaults/>
+  <a:extraClrSchemeLst/>
 </a:theme>
 </file>